--- a/downloads/presentations/modules/lesson-36-workforce-strategy-and-ai-role-design.pptx
+++ b/downloads/presentations/modules/lesson-36-workforce-strategy-and-ai-role-design.pptx
@@ -23,9 +23,11 @@
     <p:sldId id="271" r:id="rId17"/>
     <p:sldId id="272" r:id="rId18"/>
     <p:sldId id="273" r:id="rId19"/>
+    <p:sldId id="274" r:id="rId20"/>
+    <p:sldId id="275" r:id="rId21"/>
   </p:sldIdLst>
   <p:notesMasterIdLst>
-    <p:notesMasterId r:id="rId20"/>
+    <p:notesMasterId r:id="rId22"/>
   </p:notesMasterIdLst>
   <p:sldSz cx="12192000" cy="6858000"/>
   <p:notesSz cx="6858000" cy="12192000"/>
@@ -608,10 +610,9 @@
           <a:p>
             <a:r>
               <a:rPr lang="en-US" dirty="0"/>
-              <a:t>Reflection Questions
-Which current or proposed AI use case in your agency raises this leadership or governance issue most clearly?
-Who currently has authority to make decisions about this issue, and is that authority documented?
-What evidence would governance or leadership need before approving the use case?</a:t>
+              <a:t>Risks, Failure Modes, and Guardrails
+One risk is assuming that AI reduces workforce needs. In practice, responsible AI often requires new review, training, documentation, and monitoring work. A guardrail is to include workforce impact in every business case and implementation plan.
+Another risk is uneven access to AI skills. Staff in better-resourced programs may receive training first, while others fall behind. A guardrail is to create a role-based training plan that includes all relevant staff groups and supports equitable participation.</a:t>
             </a:r>
             <a:endParaRPr lang="en-US" dirty="0"/>
           </a:p>
@@ -699,9 +700,8 @@
           <a:p>
             <a:r>
               <a:rPr lang="en-US" dirty="0"/>
-              <a:t>Reflection Questions
-Which staff, partners, or communities would be affected if this issue were handled poorly?
-What policy, process, or artifact should be created or updated after this module?</a:t>
+              <a:t>Application to AI-Supported Workflows
+Generative AI requires staff who can review outputs and manage source accuracy. Predictive analytics requires staff who can interpret performance and understand limitations. Agentic workflows require staff who can oversee permissions, actions, escalation, and rollback. Workforce strategy should connect each AI type to the roles needed to use it safely.</a:t>
             </a:r>
             <a:endParaRPr lang="en-US" dirty="0"/>
           </a:p>
@@ -789,8 +789,10 @@
           <a:p>
             <a:r>
               <a:rPr lang="en-US" dirty="0"/>
-              <a:t>Practical Exercise
-Create a role-based AI workforce readiness plan. Include role groups, competencies, required training, responsibilities, decision authority, and support needs.</a:t>
+              <a:t>Reflection Questions
+Which current or proposed AI use case in your agency raises this leadership or governance issue most clearly?
+Who currently has authority to make decisions about this issue, and is that authority documented?
+What evidence would governance or leadership need before approving the use case?</a:t>
             </a:r>
             <a:endParaRPr lang="en-US" dirty="0"/>
           </a:p>
@@ -878,8 +880,9 @@
           <a:p>
             <a:r>
               <a:rPr lang="en-US" dirty="0"/>
-              <a:t>Before You Begin
-Choose a real or realistic public health AI use case. Document assumptions, unresolved questions, and which agency roles would need to review the artifact before it is adopted. The exercise should produce a work product that could support governance review, leadership discussion, implementation planning, or policy development.</a:t>
+              <a:t>Reflection Questions
+Which staff, partners, or communities would be affected if this issue were handled poorly?
+What policy, process, or artifact should be created or updated after this module?</a:t>
             </a:r>
             <a:endParaRPr lang="en-US" dirty="0"/>
           </a:p>
@@ -967,8 +970,8 @@
           <a:p>
             <a:r>
               <a:rPr lang="en-US" dirty="0"/>
-              <a:t>Expected Artifact or Evidence
-Workforce readiness plan; role-based competency matrix; training assignment matrix; AI bridge role description.</a:t>
+              <a:t>Practical Exercise
+Create a role-based AI workforce readiness plan. Include role groups, competencies, required training, responsibilities, decision authority, and support needs.</a:t>
             </a:r>
             <a:endParaRPr lang="en-US" dirty="0"/>
           </a:p>
@@ -1056,8 +1059,8 @@
           <a:p>
             <a:r>
               <a:rPr lang="en-US" dirty="0"/>
-              <a:t>Expected Assignment
-Workforce readiness plan; role-based competency matrix; training assignment matrix; AI bridge role description.</a:t>
+              <a:t>Before You Begin
+Choose a real or realistic public health AI use case. Document assumptions, unresolved questions, and which agency roles would need to review the artifact before it is adopted. The exercise should produce a work product that could support governance review, leadership discussion, implementation planning, or policy development.</a:t>
             </a:r>
             <a:endParaRPr lang="en-US" dirty="0"/>
           </a:p>
@@ -1145,12 +1148,8 @@
           <a:p>
             <a:r>
               <a:rPr lang="en-US" dirty="0"/>
-              <a:t>Knowledge Check
-1. What is the strongest reason this module topic belongs in AI leadership and governance training?
-2. Which practice best supports accountable public health AI governance?
-3. When should an AI use case be escalated for leadership or governance review?
-4. What is weak evidence of completion for a leadership and governance module?
-5. What should leaders do when an AI use case has meaningful benefits but unresolved risks?</a:t>
+              <a:t>Expected Artifact or Evidence
+Workforce readiness plan; role-based competency matrix; training assignment matrix; AI bridge role description.</a:t>
             </a:r>
             <a:endParaRPr lang="en-US" dirty="0"/>
           </a:p>
@@ -1238,12 +1237,8 @@
           <a:p>
             <a:r>
               <a:rPr lang="en-US" dirty="0"/>
-              <a:t>References and Resources
-NIST Artificial Intelligence Risk Management Framework (AI RMF 1.0): https://www.nist.gov/itl/ai-risk-management-framework
-NIST Generative AI Profile: https://www.nist.gov/publications/artificial-intelligence-risk-management-framework-generative-artificial-intelligence
-NIST Privacy Framework
-CDC Public Health Data Strategy and Data Modernization resources: https://www.cdc.gov/public-health-data-strategy/php/about/index.html
-WHO Ethics and Governance of Artificial Intelligence for Health: https://www.who.int/publications/i/item/9789240029200</a:t>
+              <a:t>Expected Assignment
+Workforce readiness plan; role-based competency matrix; training assignment matrix; AI bridge role description.</a:t>
             </a:r>
             <a:endParaRPr lang="en-US" dirty="0"/>
           </a:p>
@@ -1331,9 +1326,12 @@
           <a:p>
             <a:r>
               <a:rPr lang="en-US" dirty="0"/>
-              <a:t>References and Resources
-OMB Memorandum M-24-10 on federal AI governance, risk management, and innovation, where relevant to public-sector governance models
-Agency strategic plans, procurement policies, privacy policies, cybersecurity policies, records policies, and equity plans</a:t>
+              <a:t>Knowledge Check
+1. What is the strongest reason this module topic belongs in AI leadership and governance training?
+2. Which practice best supports accountable public health AI governance?
+3. When should an AI use case be escalated for leadership or governance review?
+4. What is weak evidence of completion for a leadership and governance module?
+5. What should leaders do when an AI use case has meaningful benefits but unresolved risks?</a:t>
             </a:r>
             <a:endParaRPr lang="en-US" dirty="0"/>
           </a:p>
@@ -1357,6 +1355,99 @@
             <a:fld id="{F7021451-1387-4CA6-816F-3879F97B5CBC}" type="slidenum">
               <a:rPr lang="en-US"/>
               <a:t>18</a:t>
+            </a:fld>
+            <a:endParaRPr lang="en-US"/>
+          </a:p>
+        </p:txBody>
+      </p:sp>
+    </p:spTree>
+    <p:extLst>
+      <p:ext uri="{BB962C8B-B14F-4D97-AF65-F5344CB8AC3E}">
+        <p14:creationId xmlns:p14="http://schemas.microsoft.com/office/powerpoint/2010/main" val="1024086991"/>
+      </p:ext>
+    </p:extLst>
+  </p:cSld>
+  <p:clrMapOvr>
+    <a:masterClrMapping/>
+  </p:clrMapOvr>
+</p:notes>
+</file>
+
+<file path=ppt/notesSlides/notesSlide19.xml><?xml version="1.0" encoding="utf-8"?>
+<p:notes xmlns:a="http://schemas.openxmlformats.org/drawingml/2006/main" xmlns:r="http://schemas.openxmlformats.org/officeDocument/2006/relationships" xmlns:p="http://schemas.openxmlformats.org/presentationml/2006/main">
+  <p:cSld>
+    <p:spTree>
+      <p:nvGrpSpPr>
+        <p:cNvPr id="1" name=""/>
+        <p:cNvGrpSpPr/>
+        <p:nvPr/>
+      </p:nvGrpSpPr>
+      <p:grpSpPr>
+        <a:xfrm>
+          <a:off x="0" y="0"/>
+          <a:ext cx="0" cy="0"/>
+          <a:chOff x="0" y="0"/>
+          <a:chExt cx="0" cy="0"/>
+        </a:xfrm>
+      </p:grpSpPr>
+      <p:sp>
+        <p:nvSpPr>
+          <p:cNvPr id="2" name="Slide Image Placeholder 1"/>
+          <p:cNvSpPr>
+            <a:spLocks noGrp="1" noRot="1" noChangeAspect="1"/>
+          </p:cNvSpPr>
+          <p:nvPr>
+            <p:ph type="sldImg"/>
+          </p:nvPr>
+        </p:nvSpPr>
+        <p:spPr/>
+      </p:sp>
+      <p:sp>
+        <p:nvSpPr>
+          <p:cNvPr id="3" name="Notes Placeholder 2"/>
+          <p:cNvSpPr>
+            <a:spLocks noGrp="1"/>
+          </p:cNvSpPr>
+          <p:nvPr>
+            <p:ph type="body" idx="1"/>
+          </p:nvPr>
+        </p:nvSpPr>
+        <p:spPr/>
+        <p:txBody>
+          <a:bodyPr/>
+          <a:lstStyle/>
+          <a:p>
+            <a:r>
+              <a:rPr lang="en-US" dirty="0"/>
+              <a:t>References and Resources
+NIST Artificial Intelligence Risk Management Framework (AI RMF 1.0): https://www.nist.gov/itl/ai-risk-management-framework
+NIST Generative AI Profile: https://www.nist.gov/publications/artificial-intelligence-risk-management-framework-generative-artificial-intelligence
+NIST Privacy Framework
+CDC Public Health Data Strategy and Data Modernization resources: https://www.cdc.gov/public-health-data-strategy/php/about/index.html
+WHO Ethics and Governance of Artificial Intelligence for Health: https://www.who.int/publications/i/item/9789240029200</a:t>
+            </a:r>
+            <a:endParaRPr lang="en-US" dirty="0"/>
+          </a:p>
+        </p:txBody>
+      </p:sp>
+      <p:sp>
+        <p:nvSpPr>
+          <p:cNvPr id="4" name="Slide Number Placeholder 3"/>
+          <p:cNvSpPr>
+            <a:spLocks noGrp="1"/>
+          </p:cNvSpPr>
+          <p:nvPr>
+            <p:ph type="sldNum" sz="quarter" idx="10"/>
+          </p:nvPr>
+        </p:nvSpPr>
+        <p:spPr/>
+        <p:txBody>
+          <a:bodyPr/>
+          <a:lstStyle/>
+          <a:p>
+            <a:fld id="{F7021451-1387-4CA6-816F-3879F97B5CBC}" type="slidenum">
+              <a:rPr lang="en-US"/>
+              <a:t>19</a:t>
             </a:fld>
             <a:endParaRPr lang="en-US"/>
           </a:p>
@@ -1467,6 +1558,96 @@
 </p:notes>
 </file>
 
+<file path=ppt/notesSlides/notesSlide20.xml><?xml version="1.0" encoding="utf-8"?>
+<p:notes xmlns:a="http://schemas.openxmlformats.org/drawingml/2006/main" xmlns:r="http://schemas.openxmlformats.org/officeDocument/2006/relationships" xmlns:p="http://schemas.openxmlformats.org/presentationml/2006/main">
+  <p:cSld>
+    <p:spTree>
+      <p:nvGrpSpPr>
+        <p:cNvPr id="1" name=""/>
+        <p:cNvGrpSpPr/>
+        <p:nvPr/>
+      </p:nvGrpSpPr>
+      <p:grpSpPr>
+        <a:xfrm>
+          <a:off x="0" y="0"/>
+          <a:ext cx="0" cy="0"/>
+          <a:chOff x="0" y="0"/>
+          <a:chExt cx="0" cy="0"/>
+        </a:xfrm>
+      </p:grpSpPr>
+      <p:sp>
+        <p:nvSpPr>
+          <p:cNvPr id="2" name="Slide Image Placeholder 1"/>
+          <p:cNvSpPr>
+            <a:spLocks noGrp="1" noRot="1" noChangeAspect="1"/>
+          </p:cNvSpPr>
+          <p:nvPr>
+            <p:ph type="sldImg"/>
+          </p:nvPr>
+        </p:nvSpPr>
+        <p:spPr/>
+      </p:sp>
+      <p:sp>
+        <p:nvSpPr>
+          <p:cNvPr id="3" name="Notes Placeholder 2"/>
+          <p:cNvSpPr>
+            <a:spLocks noGrp="1"/>
+          </p:cNvSpPr>
+          <p:nvPr>
+            <p:ph type="body" idx="1"/>
+          </p:nvPr>
+        </p:nvSpPr>
+        <p:spPr/>
+        <p:txBody>
+          <a:bodyPr/>
+          <a:lstStyle/>
+          <a:p>
+            <a:r>
+              <a:rPr lang="en-US" dirty="0"/>
+              <a:t>References and Resources
+OMB Memorandum M-24-10 on federal AI governance, risk management, and innovation, where relevant to public-sector governance models
+Agency strategic plans, procurement policies, privacy policies, cybersecurity policies, records policies, and equity plans</a:t>
+            </a:r>
+            <a:endParaRPr lang="en-US" dirty="0"/>
+          </a:p>
+        </p:txBody>
+      </p:sp>
+      <p:sp>
+        <p:nvSpPr>
+          <p:cNvPr id="4" name="Slide Number Placeholder 3"/>
+          <p:cNvSpPr>
+            <a:spLocks noGrp="1"/>
+          </p:cNvSpPr>
+          <p:nvPr>
+            <p:ph type="sldNum" sz="quarter" idx="10"/>
+          </p:nvPr>
+        </p:nvSpPr>
+        <p:spPr/>
+        <p:txBody>
+          <a:bodyPr/>
+          <a:lstStyle/>
+          <a:p>
+            <a:fld id="{F7021451-1387-4CA6-816F-3879F97B5CBC}" type="slidenum">
+              <a:rPr lang="en-US"/>
+              <a:t>20</a:t>
+            </a:fld>
+            <a:endParaRPr lang="en-US"/>
+          </a:p>
+        </p:txBody>
+      </p:sp>
+    </p:spTree>
+    <p:extLst>
+      <p:ext uri="{BB962C8B-B14F-4D97-AF65-F5344CB8AC3E}">
+        <p14:creationId xmlns:p14="http://schemas.microsoft.com/office/powerpoint/2010/main" val="1024086991"/>
+      </p:ext>
+    </p:extLst>
+  </p:cSld>
+  <p:clrMapOvr>
+    <a:masterClrMapping/>
+  </p:clrMapOvr>
+</p:notes>
+</file>
+
 <file path=ppt/notesSlides/notesSlide3.xml><?xml version="1.0" encoding="utf-8"?>
 <p:notes xmlns:a="http://schemas.openxmlformats.org/drawingml/2006/main" xmlns:r="http://schemas.openxmlformats.org/officeDocument/2006/relationships" xmlns:p="http://schemas.openxmlformats.org/presentationml/2006/main">
   <p:cSld>
@@ -1513,12 +1694,11 @@
           <a:p>
             <a:r>
               <a:rPr lang="en-US" dirty="0"/>
-              <a:t>Learning Objectives
-Identify workforce roles needed for responsible AI adoption in public health.
-Distinguish between AI users, reviewers, implementers, governance participants, and accountability owners.
-Develop role-based competency expectations for AI-supported work.
-Recognize workforce risks such as deskilling, uneven access to training, and unclear role boundaries.
-Produce a workforce readiness and role design plan.</a:t>
+              <a:t>Related Playbook Plays
+Play 11: Build and Deploy AI Solutions - This lesson informs Play 11 by helping learners connect the lesson topic to build and deploy ai solutions work in the AI Playbook.
+Play 2: Readiness Assessment - This lesson informs Play 2 by helping learners connect the lesson topic to readiness assessment work in the AI Playbook sequence.
+Play 3: Establish AI Governance - This lesson informs Play 3 by helping learners connect the lesson topic to establish ai governance work in the AI Playbook sequence.
+Play 1: Vision &amp; Guardrails - This lesson informs Play 1 by helping learners connect the lesson topic to vision &amp; guardrails work in the AI Playbook sequence.</a:t>
             </a:r>
             <a:endParaRPr lang="en-US" dirty="0"/>
           </a:p>
@@ -1606,9 +1786,13 @@
           <a:p>
             <a:r>
               <a:rPr lang="en-US" dirty="0"/>
-              <a:t>Module Overview
-AI changes the skills, roles, and collaboration patterns needed in public health agencies. It does not eliminate the need for public health expertise. Instead, it increases the need for staff who can translate across program, data, technology, privacy, legal, equity, procurement, and community perspectives. Leaders need a workforce strategy that prepares staff to use, review, govern, and improve AI-supported workflows.
-This module helps leaders identify AI-related roles and competencies. It emphasizes the need for role-based training, AI bridge professionals, governance participants, technical reviewers, program owners, data stewards, and frontline users. The module also addresses workload, job redesign, deskilling risk, upskilling, and equitable access to training.</a:t>
+              <a:t>Related Toolkit Resources
+Tool 4: AI Policy Landscape Scan (Worksheet) - Use AI Policy Landscape Scan to translate this lesson into a documented public health AI planning, governance, implementation,.
+Tool 5: AI Environmental and Resource Impact Review (Checklist) - Use AI Environmental and Resource Impact Review to translate this lesson into a documented public health AI planning,.
+Tool 6: Human-Centered AI Decision Rule Checklist (Checklist) - Use Human-Centered AI Decision Rule Checklist to translate this lesson into a documented public health AI planning, governance,.
+Tool 8: AI Project Charter (Planning) - Use AI Project Charter to translate this lesson into a documented public health AI planning, governance, implementation, or.
+Tool 9: Data Quality Assessment Checklist (Checklist) - Use this tool to complete or strengthen the practical exercise for the module using fictional, de-identified, or generalized.
+Tool 10: Tiered Data Classification for AI Use (Worksheet) - Use Tiered Data Classification for AI Use to translate this lesson into a documented public health AI planning, governance,.</a:t>
             </a:r>
             <a:endParaRPr lang="en-US" dirty="0"/>
           </a:p>
@@ -1696,9 +1880,12 @@
           <a:p>
             <a:r>
               <a:rPr lang="en-US" dirty="0"/>
-              <a:t>Why This Topic Matters for Public Health AI
-Public health AI depends on people who understand both technology and context. A model may generate a summary, but an epidemiologist must judge whether the summary is meaningful. A vendor may describe a product, but an informatician must assess interoperability and data flow. A leader may approve a use case, but governance participants must ensure that privacy, equity, security, and legal concerns have been addressed.
-Workforce strategy helps agencies move beyond ad hoc training. It defines which staff need baseline literacy, which staff need deeper technical skills, which staff need governance training, and which roles require ongoing competency development. It also helps agencies avoid concentrating AI knowledge in a small group while leaving most staff dependent on informal guidance.</a:t>
+              <a:t>Learning Objectives
+Identify workforce roles needed for responsible AI adoption in public health.
+Distinguish between AI users, reviewers, implementers, governance participants, and accountability owners.
+Develop role-based competency expectations for AI-supported work.
+Recognize workforce risks such as deskilling, uneven access to training, and unclear role boundaries.
+Produce a workforce readiness and role design plan.</a:t>
             </a:r>
             <a:endParaRPr lang="en-US" dirty="0"/>
           </a:p>
@@ -1786,9 +1973,9 @@
           <a:p>
             <a:r>
               <a:rPr lang="en-US" dirty="0"/>
-              <a:t>Public Health Example
-A public health agency implements several AI tools: a document assistant, a case summarization tool, a data quality monitor, and a predictive model for resource planning. Staff quickly discover that no single role owns all the knowledge needed. Program staff understand workflow, IT understands integration, privacy understands data restrictions, and analysts understand validation. However, there is no role that connects these perspectives consistently.
-The agency creates an AI bridge role to support use case development, governance preparation, workflow mapping, vendor questioning, training, and implementation review. The role does not replace technical specialists or program leaders. It helps them work together more effectively.</a:t>
+              <a:t>Module Overview
+AI changes the skills, roles, and collaboration patterns needed in public health agencies. It does not eliminate the need for public health expertise. Instead, it increases the need for staff who can translate across program, data, technology, privacy, legal, equity, procurement, and community perspectives. Leaders need a workforce strategy that prepares staff to use, review, govern, and improve AI-supported workflows.
+This module helps leaders identify AI-related roles and competencies. It emphasizes the need for role-based training, AI bridge professionals, governance participants, technical reviewers, program owners, data stewards, and frontline users. The module also addresses workload, job redesign, deskilling risk, upskilling, and equitable access to training.</a:t>
             </a:r>
             <a:endParaRPr lang="en-US" dirty="0"/>
           </a:p>
@@ -1876,10 +2063,9 @@
           <a:p>
             <a:r>
               <a:rPr lang="en-US" dirty="0"/>
-              <a:t>Technical and Governance Deep Dive
-An AI workforce strategy should define role groups. General staff may need baseline AI literacy, approved-use guidance, and prompt safety. Frontline users need workflow-specific training and escalation expectations. Supervisors need to support review, feedback, and documentation. Program owners need to understand accountability and performance monitoring. Technical staff need deeper knowledge of data, architecture, validation, and security. Governance members need enough shared language to review proposals consistently.
-Competency expectations should be practical. Staff do not all need to become data scientists. However, many need to recognize when AI output is unsupported, when sensitive data should not be entered, when a use case exceeds approved boundaries, and when to escalate. Technical and informatics staff may need competencies in data quality, interoperability, model evaluation, RAG, security, and lifecycle monitoring.
-Role design should also address workload and equity. AI review and governance work require time. If these responsibilities are added informally to already overloaded staff, governance may become superficial. Leaders should identify protected time, training resources, role descriptions, and career pathways for staff who support responsible AI.</a:t>
+              <a:t>Why This Topic Matters for Public Health AI
+Public health AI depends on people who understand both technology and context. A model may generate a summary, but an epidemiologist must judge whether the summary is meaningful. A vendor may describe a product, but an informatician must assess interoperability and data flow. A leader may approve a use case, but governance participants must ensure that privacy, equity, security, and legal concerns have been addressed.
+Workforce strategy helps agencies move beyond ad hoc training. It defines which staff need baseline literacy, which staff need deeper technical skills, which staff need governance training, and which roles require ongoing competency development. It also helps agencies avoid concentrating AI knowledge in a small group while leaving most staff dependent on informal guidance.</a:t>
             </a:r>
             <a:endParaRPr lang="en-US" dirty="0"/>
           </a:p>
@@ -1967,9 +2153,9 @@
           <a:p>
             <a:r>
               <a:rPr lang="en-US" dirty="0"/>
-              <a:t>Risks, Failure Modes, and Guardrails
-One risk is assuming that AI reduces workforce needs. In practice, responsible AI often requires new review, training, documentation, and monitoring work. A guardrail is to include workforce impact in every business case and implementation plan.
-Another risk is uneven access to AI skills. Staff in better-resourced programs may receive training first, while others fall behind. A guardrail is to create a role-based training plan that includes all relevant staff groups and supports equitable participation.</a:t>
+              <a:t>Public Health Example
+A public health agency implements several AI tools: a document assistant, a case summarization tool, a data quality monitor, and a predictive model for resource planning. Staff quickly discover that no single role owns all the knowledge needed. Program staff understand workflow, IT understands integration, privacy understands data restrictions, and analysts understand validation. However, there is no role that connects these perspectives consistently.
+The agency creates an AI bridge role to support use case development, governance preparation, workflow mapping, vendor questioning, training, and implementation review. The role does not replace technical specialists or program leaders. It helps them work together more effectively.</a:t>
             </a:r>
             <a:endParaRPr lang="en-US" dirty="0"/>
           </a:p>
@@ -2057,8 +2243,10 @@
           <a:p>
             <a:r>
               <a:rPr lang="en-US" dirty="0"/>
-              <a:t>Application to AI-Supported Workflows
-Generative AI requires staff who can review outputs and manage source accuracy. Predictive analytics requires staff who can interpret performance and understand limitations. Agentic workflows require staff who can oversee permissions, actions, escalation, and rollback. Workforce strategy should connect each AI type to the roles needed to use it safely.</a:t>
+              <a:t>Technical and Governance Deep Dive
+An AI workforce strategy should define role groups. General staff may need baseline AI literacy, approved-use guidance, and prompt safety. Frontline users need workflow-specific training and escalation expectations. Supervisors need to support review, feedback, and documentation. Program owners need to understand accountability and performance monitoring. Technical staff need deeper knowledge of data, architecture, validation, and security. Governance members need enough shared language to review proposals consistently.
+Competency expectations should be practical. Staff do not all need to become data scientists. However, many need to recognize when AI output is unsupported, when sensitive data should not be entered, when a use case exceeds approved boundaries, and when to escalate. Technical and informatics staff may need competencies in data quality, interoperability, model evaluation, RAG, security, and lifecycle monitoring.
+Role design should also address workload and equity. AI review and governance work require time. If these responsibilities are added informally to already overloaded staff, governance may become superficial. Leaders should identify protected time, training resources, role descriptions, and career pathways for staff who support responsible AI.</a:t>
             </a:r>
             <a:endParaRPr lang="en-US" dirty="0"/>
           </a:p>
@@ -2681,7 +2869,32 @@
       </p:sp>
       <p:sp>
         <p:nvSpPr>
-          <p:cNvPr id="3" name="Text 1"/>
+          <p:cNvPr id="3" name="Shape 1"/>
+          <p:cNvSpPr/>
+          <p:nvPr/>
+        </p:nvSpPr>
+        <p:spPr>
+          <a:xfrm>
+            <a:off x="0" y="164592"/>
+            <a:ext cx="146304" cy="6693408"/>
+          </a:xfrm>
+          <a:prstGeom prst="rect">
+            <a:avLst/>
+          </a:prstGeom>
+          <a:solidFill>
+            <a:srgbClr val="2F8A28"/>
+          </a:solidFill>
+          <a:ln w="12700">
+            <a:solidFill>
+              <a:srgbClr val="2F8A28"/>
+            </a:solidFill>
+            <a:prstDash val="solid"/>
+          </a:ln>
+        </p:spPr>
+      </p:sp>
+      <p:sp>
+        <p:nvSpPr>
+          <p:cNvPr id="4" name="Text 2"/>
           <p:cNvSpPr/>
           <p:nvPr/>
         </p:nvSpPr>
@@ -2720,7 +2933,7 @@
       </p:sp>
       <p:sp>
         <p:nvSpPr>
-          <p:cNvPr id="4" name="Text 2"/>
+          <p:cNvPr id="5" name="Text 3"/>
           <p:cNvSpPr/>
           <p:nvPr/>
         </p:nvSpPr>
@@ -2759,7 +2972,7 @@
       </p:sp>
       <p:sp>
         <p:nvSpPr>
-          <p:cNvPr id="5" name="Text 3"/>
+          <p:cNvPr id="6" name="Text 4"/>
           <p:cNvSpPr/>
           <p:nvPr/>
         </p:nvSpPr>
@@ -2798,13 +3011,77 @@
       </p:sp>
       <p:sp>
         <p:nvSpPr>
-          <p:cNvPr id="6" name="Text 4"/>
+          <p:cNvPr id="7" name="Shape 5"/>
           <p:cNvSpPr/>
           <p:nvPr/>
         </p:nvSpPr>
         <p:spPr>
           <a:xfrm>
             <a:off x="640080" y="658368"/>
+            <a:ext cx="420624" cy="420624"/>
+          </a:xfrm>
+          <a:prstGeom prst="ellipse">
+            <a:avLst/>
+          </a:prstGeom>
+          <a:solidFill>
+            <a:srgbClr val="0068B7"/>
+          </a:solidFill>
+          <a:ln w="12700">
+            <a:solidFill>
+              <a:srgbClr val="0068B7"/>
+            </a:solidFill>
+            <a:prstDash val="solid"/>
+          </a:ln>
+        </p:spPr>
+      </p:sp>
+      <p:sp>
+        <p:nvSpPr>
+          <p:cNvPr id="8" name="Text 6"/>
+          <p:cNvSpPr/>
+          <p:nvPr/>
+        </p:nvSpPr>
+        <p:spPr>
+          <a:xfrm>
+            <a:off x="640080" y="731520"/>
+            <a:ext cx="420624" cy="164592"/>
+          </a:xfrm>
+          <a:prstGeom prst="rect">
+            <a:avLst/>
+          </a:prstGeom>
+          <a:noFill/>
+          <a:ln/>
+        </p:spPr>
+        <p:txBody>
+          <a:bodyPr wrap="square" lIns="0" tIns="0" rIns="0" bIns="0" rtlCol="0" anchor="ctr"/>
+          <a:lstStyle/>
+          <a:p>
+            <a:pPr algn="ctr" indent="0" marL="0">
+              <a:buNone/>
+            </a:pPr>
+            <a:r>
+              <a:rPr lang="en-US" sz="1100" b="1" dirty="0">
+                <a:solidFill>
+                  <a:srgbClr val="FFFFFF"/>
+                </a:solidFill>
+                <a:latin typeface="Aptos" pitchFamily="34" charset="0"/>
+                <a:ea typeface="Aptos" pitchFamily="34" charset="-122"/>
+                <a:cs typeface="Aptos" pitchFamily="34" charset="-120"/>
+              </a:rPr>
+              <a:t>6</a:t>
+            </a:r>
+            <a:endParaRPr lang="en-US" sz="1100" dirty="0"/>
+          </a:p>
+        </p:txBody>
+      </p:sp>
+      <p:sp>
+        <p:nvSpPr>
+          <p:cNvPr id="9" name="Text 7"/>
+          <p:cNvSpPr/>
+          <p:nvPr/>
+        </p:nvSpPr>
+        <p:spPr>
+          <a:xfrm>
+            <a:off x="640080" y="621792"/>
             <a:ext cx="10881360" cy="566928"/>
           </a:xfrm>
           <a:prstGeom prst="rect">
@@ -2831,7 +3108,7 @@
                 <a:ea typeface="Aptos Display" pitchFamily="34" charset="-122"/>
                 <a:cs typeface="Aptos Display" pitchFamily="34" charset="-120"/>
               </a:rPr>
-              <a:t>Reflection Questions</a:t>
+              <a:t>Risks, Failure Modes, and Guardrails</a:t>
             </a:r>
             <a:endParaRPr lang="en-US" sz="2700" dirty="0"/>
           </a:p>
@@ -2839,32 +3116,178 @@
       </p:sp>
       <p:sp>
         <p:nvSpPr>
-          <p:cNvPr id="7" name="Text 5"/>
-          <p:cNvSpPr/>
-          <p:nvPr/>
-        </p:nvSpPr>
-        <p:spPr>
-          <a:xfrm>
-            <a:off x="822960" y="1325880"/>
-            <a:ext cx="10378440" cy="4800600"/>
-          </a:xfrm>
-          <a:prstGeom prst="rect">
-            <a:avLst/>
-          </a:prstGeom>
-          <a:noFill/>
-          <a:ln/>
-        </p:spPr>
-        <p:txBody>
-          <a:bodyPr wrap="square" lIns="1016" tIns="1016" rIns="1016" bIns="1016" rtlCol="0" anchor="t">
+          <p:cNvPr id="10" name="Text 8"/>
+          <p:cNvSpPr/>
+          <p:nvPr/>
+        </p:nvSpPr>
+        <p:spPr>
+          <a:xfrm>
+            <a:off x="868680" y="1417320"/>
+            <a:ext cx="6675120" cy="4434840"/>
+          </a:xfrm>
+          <a:prstGeom prst="rect">
+            <a:avLst/>
+          </a:prstGeom>
+          <a:noFill/>
+          <a:ln/>
+        </p:spPr>
+        <p:txBody>
+          <a:bodyPr wrap="square" lIns="635" tIns="635" rIns="635" bIns="635" rtlCol="0" anchor="t">
             <a:normAutofit/>
           </a:bodyPr>
           <a:lstStyle/>
           <a:p>
+            <a:r>
+              <a:rPr lang="en-US" sz="1700" dirty="0">
+                <a:solidFill>
+                  <a:srgbClr val="17364A"/>
+                </a:solidFill>
+                <a:latin typeface="Aptos" pitchFamily="34" charset="0"/>
+                <a:ea typeface="Aptos" pitchFamily="34" charset="-122"/>
+                <a:cs typeface="Aptos" pitchFamily="34" charset="-120"/>
+              </a:rPr>
+              <a:t>One risk is assuming that AI reduces workforce needs.</a:t>
+            </a:r>
+            <a:endParaRPr lang="en-US" sz="1700" dirty="0"/>
+          </a:p>
+          <a:p>
+            <a:r>
+              <a:rPr lang="en-US" sz="1700" dirty="0">
+                <a:solidFill>
+                  <a:srgbClr val="17364A"/>
+                </a:solidFill>
+                <a:latin typeface="Aptos" pitchFamily="34" charset="0"/>
+                <a:ea typeface="Aptos" pitchFamily="34" charset="-122"/>
+                <a:cs typeface="Aptos" pitchFamily="34" charset="-120"/>
+              </a:rPr>
+              <a:t>In practice, responsible AI often requires new review, training, documentation, and monitoring work.</a:t>
+            </a:r>
+            <a:endParaRPr lang="en-US" sz="1700" dirty="0"/>
+          </a:p>
+          <a:p>
+            <a:r>
+              <a:rPr lang="en-US" sz="1700" dirty="0">
+                <a:solidFill>
+                  <a:srgbClr val="17364A"/>
+                </a:solidFill>
+                <a:latin typeface="Aptos" pitchFamily="34" charset="0"/>
+                <a:ea typeface="Aptos" pitchFamily="34" charset="-122"/>
+                <a:cs typeface="Aptos" pitchFamily="34" charset="-120"/>
+              </a:rPr>
+              <a:t>A guardrail is to include workforce impact in every business case and implementation plan.</a:t>
+            </a:r>
+            <a:endParaRPr lang="en-US" sz="1700" dirty="0"/>
+          </a:p>
+          <a:p>
+            <a:r>
+              <a:rPr lang="en-US" sz="1700" dirty="0">
+                <a:solidFill>
+                  <a:srgbClr val="17364A"/>
+                </a:solidFill>
+                <a:latin typeface="Aptos" pitchFamily="34" charset="0"/>
+                <a:ea typeface="Aptos" pitchFamily="34" charset="-122"/>
+                <a:cs typeface="Aptos" pitchFamily="34" charset="-120"/>
+              </a:rPr>
+              <a:t>Another risk is uneven access to AI skills.</a:t>
+            </a:r>
+            <a:endParaRPr lang="en-US" sz="1700" dirty="0"/>
+          </a:p>
+        </p:txBody>
+      </p:sp>
+      <p:sp>
+        <p:nvSpPr>
+          <p:cNvPr id="11" name="Shape 9"/>
+          <p:cNvSpPr/>
+          <p:nvPr/>
+        </p:nvSpPr>
+        <p:spPr>
+          <a:xfrm>
+            <a:off x="7909560" y="1417320"/>
+            <a:ext cx="3154680" cy="1828800"/>
+          </a:xfrm>
+          <a:prstGeom prst="roundRect">
+            <a:avLst>
+              <a:gd name="adj" fmla="val 6000"/>
+            </a:avLst>
+          </a:prstGeom>
+          <a:solidFill>
+            <a:srgbClr val="EEF8ED"/>
+          </a:solidFill>
+          <a:ln w="12700">
+            <a:solidFill>
+              <a:srgbClr val="B9D7E6"/>
+            </a:solidFill>
+            <a:prstDash val="solid"/>
+          </a:ln>
+        </p:spPr>
+      </p:sp>
+      <p:sp>
+        <p:nvSpPr>
+          <p:cNvPr id="12" name="Text 10"/>
+          <p:cNvSpPr/>
+          <p:nvPr/>
+        </p:nvSpPr>
+        <p:spPr>
+          <a:xfrm>
+            <a:off x="8074152" y="1563624"/>
+            <a:ext cx="2825496" cy="201168"/>
+          </a:xfrm>
+          <a:prstGeom prst="rect">
+            <a:avLst/>
+          </a:prstGeom>
+          <a:noFill/>
+          <a:ln/>
+        </p:spPr>
+        <p:txBody>
+          <a:bodyPr wrap="square" lIns="0" tIns="0" rIns="0" bIns="0" rtlCol="0" anchor="ctr"/>
+          <a:lstStyle/>
+          <a:p>
             <a:pPr indent="0" marL="0">
               <a:buNone/>
             </a:pPr>
             <a:r>
-              <a:rPr lang="en-US" sz="1420" dirty="0">
+              <a:rPr lang="en-US" sz="950" b="1" dirty="0">
+                <a:solidFill>
+                  <a:srgbClr val="0068B7"/>
+                </a:solidFill>
+                <a:latin typeface="Aptos" pitchFamily="34" charset="0"/>
+                <a:ea typeface="Aptos" pitchFamily="34" charset="-122"/>
+                <a:cs typeface="Aptos" pitchFamily="34" charset="-120"/>
+              </a:rPr>
+              <a:t>Key idea</a:t>
+            </a:r>
+            <a:endParaRPr lang="en-US" sz="950" dirty="0"/>
+          </a:p>
+        </p:txBody>
+      </p:sp>
+      <p:sp>
+        <p:nvSpPr>
+          <p:cNvPr id="13" name="Text 11"/>
+          <p:cNvSpPr/>
+          <p:nvPr/>
+        </p:nvSpPr>
+        <p:spPr>
+          <a:xfrm>
+            <a:off x="8074152" y="1856232"/>
+            <a:ext cx="2825496" cy="1261872"/>
+          </a:xfrm>
+          <a:prstGeom prst="rect">
+            <a:avLst/>
+          </a:prstGeom>
+          <a:noFill/>
+          <a:ln/>
+        </p:spPr>
+        <p:txBody>
+          <a:bodyPr wrap="square" lIns="0" tIns="0" rIns="0" bIns="0" rtlCol="0" anchor="t">
+            <a:normAutofit/>
+          </a:bodyPr>
+          <a:lstStyle/>
+          <a:p>
+            <a:pPr indent="0" marL="0">
+              <a:buNone/>
+            </a:pPr>
+            <a:r>
+              <a:rPr lang="en-US" sz="1250" dirty="0">
                 <a:solidFill>
                   <a:srgbClr val="17364A"/>
                 </a:solidFill>
@@ -2872,9 +3295,116 @@
                 <a:ea typeface="Aptos" pitchFamily="34" charset="-122"/>
                 <a:cs typeface="Aptos" pitchFamily="34" charset="-120"/>
               </a:rPr>
-              <a:t>Which current or proposed AI use case in your agency raises this leadership or governance issue most clearly? Who currently has authority to make decisions about this issue, and is that authority documented? What evidence would governance or leadership need before approving the use case?</a:t>
-            </a:r>
-            <a:endParaRPr lang="en-US" sz="1420" dirty="0"/>
+              <a:t>One risk is assuming that AI reduces workforce needs.</a:t>
+            </a:r>
+            <a:endParaRPr lang="en-US" sz="1250" dirty="0"/>
+          </a:p>
+        </p:txBody>
+      </p:sp>
+      <p:sp>
+        <p:nvSpPr>
+          <p:cNvPr id="14" name="Shape 12"/>
+          <p:cNvSpPr/>
+          <p:nvPr/>
+        </p:nvSpPr>
+        <p:spPr>
+          <a:xfrm>
+            <a:off x="7909560" y="3520440"/>
+            <a:ext cx="3154680" cy="1737360"/>
+          </a:xfrm>
+          <a:prstGeom prst="roundRect">
+            <a:avLst>
+              <a:gd name="adj" fmla="val 6316"/>
+            </a:avLst>
+          </a:prstGeom>
+          <a:solidFill>
+            <a:srgbClr val="EAF6F8"/>
+          </a:solidFill>
+          <a:ln w="12700">
+            <a:solidFill>
+              <a:srgbClr val="B9D7E6"/>
+            </a:solidFill>
+            <a:prstDash val="solid"/>
+          </a:ln>
+        </p:spPr>
+      </p:sp>
+      <p:sp>
+        <p:nvSpPr>
+          <p:cNvPr id="15" name="Text 13"/>
+          <p:cNvSpPr/>
+          <p:nvPr/>
+        </p:nvSpPr>
+        <p:spPr>
+          <a:xfrm>
+            <a:off x="8074152" y="3666744"/>
+            <a:ext cx="2825496" cy="201168"/>
+          </a:xfrm>
+          <a:prstGeom prst="rect">
+            <a:avLst/>
+          </a:prstGeom>
+          <a:noFill/>
+          <a:ln/>
+        </p:spPr>
+        <p:txBody>
+          <a:bodyPr wrap="square" lIns="0" tIns="0" rIns="0" bIns="0" rtlCol="0" anchor="ctr"/>
+          <a:lstStyle/>
+          <a:p>
+            <a:pPr indent="0" marL="0">
+              <a:buNone/>
+            </a:pPr>
+            <a:r>
+              <a:rPr lang="en-US" sz="950" b="1" dirty="0">
+                <a:solidFill>
+                  <a:srgbClr val="0068B7"/>
+                </a:solidFill>
+                <a:latin typeface="Aptos" pitchFamily="34" charset="0"/>
+                <a:ea typeface="Aptos" pitchFamily="34" charset="-122"/>
+                <a:cs typeface="Aptos" pitchFamily="34" charset="-120"/>
+              </a:rPr>
+              <a:t>Use this for</a:t>
+            </a:r>
+            <a:endParaRPr lang="en-US" sz="950" dirty="0"/>
+          </a:p>
+        </p:txBody>
+      </p:sp>
+      <p:sp>
+        <p:nvSpPr>
+          <p:cNvPr id="16" name="Text 14"/>
+          <p:cNvSpPr/>
+          <p:nvPr/>
+        </p:nvSpPr>
+        <p:spPr>
+          <a:xfrm>
+            <a:off x="8074152" y="3959352"/>
+            <a:ext cx="2825496" cy="1170432"/>
+          </a:xfrm>
+          <a:prstGeom prst="rect">
+            <a:avLst/>
+          </a:prstGeom>
+          <a:noFill/>
+          <a:ln/>
+        </p:spPr>
+        <p:txBody>
+          <a:bodyPr wrap="square" lIns="0" tIns="0" rIns="0" bIns="0" rtlCol="0" anchor="t">
+            <a:normAutofit/>
+          </a:bodyPr>
+          <a:lstStyle/>
+          <a:p>
+            <a:pPr indent="0" marL="0">
+              <a:buNone/>
+            </a:pPr>
+            <a:r>
+              <a:rPr lang="en-US" sz="1250" dirty="0">
+                <a:solidFill>
+                  <a:srgbClr val="17364A"/>
+                </a:solidFill>
+                <a:latin typeface="Aptos" pitchFamily="34" charset="0"/>
+                <a:ea typeface="Aptos" pitchFamily="34" charset="-122"/>
+                <a:cs typeface="Aptos" pitchFamily="34" charset="-120"/>
+              </a:rPr>
+              <a:t>Connect the concept to public health decisions, safeguards, documentation, or implementation work.</a:t>
+            </a:r>
+            <a:endParaRPr lang="en-US" sz="1250" dirty="0"/>
           </a:p>
         </p:txBody>
       </p:sp>
@@ -2937,7 +3467,32 @@
       </p:sp>
       <p:sp>
         <p:nvSpPr>
-          <p:cNvPr id="3" name="Text 1"/>
+          <p:cNvPr id="3" name="Shape 1"/>
+          <p:cNvSpPr/>
+          <p:nvPr/>
+        </p:nvSpPr>
+        <p:spPr>
+          <a:xfrm>
+            <a:off x="0" y="164592"/>
+            <a:ext cx="146304" cy="6693408"/>
+          </a:xfrm>
+          <a:prstGeom prst="rect">
+            <a:avLst/>
+          </a:prstGeom>
+          <a:solidFill>
+            <a:srgbClr val="2F8A28"/>
+          </a:solidFill>
+          <a:ln w="12700">
+            <a:solidFill>
+              <a:srgbClr val="2F8A28"/>
+            </a:solidFill>
+            <a:prstDash val="solid"/>
+          </a:ln>
+        </p:spPr>
+      </p:sp>
+      <p:sp>
+        <p:nvSpPr>
+          <p:cNvPr id="4" name="Text 2"/>
           <p:cNvSpPr/>
           <p:nvPr/>
         </p:nvSpPr>
@@ -2976,7 +3531,7 @@
       </p:sp>
       <p:sp>
         <p:nvSpPr>
-          <p:cNvPr id="4" name="Text 2"/>
+          <p:cNvPr id="5" name="Text 3"/>
           <p:cNvSpPr/>
           <p:nvPr/>
         </p:nvSpPr>
@@ -3015,7 +3570,7 @@
       </p:sp>
       <p:sp>
         <p:nvSpPr>
-          <p:cNvPr id="5" name="Text 3"/>
+          <p:cNvPr id="6" name="Text 4"/>
           <p:cNvSpPr/>
           <p:nvPr/>
         </p:nvSpPr>
@@ -3054,13 +3609,77 @@
       </p:sp>
       <p:sp>
         <p:nvSpPr>
-          <p:cNvPr id="6" name="Text 4"/>
+          <p:cNvPr id="7" name="Shape 5"/>
           <p:cNvSpPr/>
           <p:nvPr/>
         </p:nvSpPr>
         <p:spPr>
           <a:xfrm>
             <a:off x="640080" y="658368"/>
+            <a:ext cx="420624" cy="420624"/>
+          </a:xfrm>
+          <a:prstGeom prst="ellipse">
+            <a:avLst/>
+          </a:prstGeom>
+          <a:solidFill>
+            <a:srgbClr val="0068B7"/>
+          </a:solidFill>
+          <a:ln w="12700">
+            <a:solidFill>
+              <a:srgbClr val="0068B7"/>
+            </a:solidFill>
+            <a:prstDash val="solid"/>
+          </a:ln>
+        </p:spPr>
+      </p:sp>
+      <p:sp>
+        <p:nvSpPr>
+          <p:cNvPr id="8" name="Text 6"/>
+          <p:cNvSpPr/>
+          <p:nvPr/>
+        </p:nvSpPr>
+        <p:spPr>
+          <a:xfrm>
+            <a:off x="640080" y="731520"/>
+            <a:ext cx="420624" cy="164592"/>
+          </a:xfrm>
+          <a:prstGeom prst="rect">
+            <a:avLst/>
+          </a:prstGeom>
+          <a:noFill/>
+          <a:ln/>
+        </p:spPr>
+        <p:txBody>
+          <a:bodyPr wrap="square" lIns="0" tIns="0" rIns="0" bIns="0" rtlCol="0" anchor="ctr"/>
+          <a:lstStyle/>
+          <a:p>
+            <a:pPr algn="ctr" indent="0" marL="0">
+              <a:buNone/>
+            </a:pPr>
+            <a:r>
+              <a:rPr lang="en-US" sz="1100" b="1" dirty="0">
+                <a:solidFill>
+                  <a:srgbClr val="FFFFFF"/>
+                </a:solidFill>
+                <a:latin typeface="Aptos" pitchFamily="34" charset="0"/>
+                <a:ea typeface="Aptos" pitchFamily="34" charset="-122"/>
+                <a:cs typeface="Aptos" pitchFamily="34" charset="-120"/>
+              </a:rPr>
+              <a:t>7</a:t>
+            </a:r>
+            <a:endParaRPr lang="en-US" sz="1100" dirty="0"/>
+          </a:p>
+        </p:txBody>
+      </p:sp>
+      <p:sp>
+        <p:nvSpPr>
+          <p:cNvPr id="9" name="Text 7"/>
+          <p:cNvSpPr/>
+          <p:nvPr/>
+        </p:nvSpPr>
+        <p:spPr>
+          <a:xfrm>
+            <a:off x="640080" y="621792"/>
             <a:ext cx="10881360" cy="566928"/>
           </a:xfrm>
           <a:prstGeom prst="rect">
@@ -3087,7 +3706,7 @@
                 <a:ea typeface="Aptos Display" pitchFamily="34" charset="-122"/>
                 <a:cs typeface="Aptos Display" pitchFamily="34" charset="-120"/>
               </a:rPr>
-              <a:t>Reflection Questions Continued</a:t>
+              <a:t>Application to AI-Supported Workflows</a:t>
             </a:r>
             <a:endParaRPr lang="en-US" sz="2700" dirty="0"/>
           </a:p>
@@ -3095,32 +3714,178 @@
       </p:sp>
       <p:sp>
         <p:nvSpPr>
-          <p:cNvPr id="7" name="Text 5"/>
-          <p:cNvSpPr/>
-          <p:nvPr/>
-        </p:nvSpPr>
-        <p:spPr>
-          <a:xfrm>
-            <a:off x="822960" y="1325880"/>
-            <a:ext cx="10378440" cy="4800600"/>
-          </a:xfrm>
-          <a:prstGeom prst="rect">
-            <a:avLst/>
-          </a:prstGeom>
-          <a:noFill/>
-          <a:ln/>
-        </p:spPr>
-        <p:txBody>
-          <a:bodyPr wrap="square" lIns="1016" tIns="1016" rIns="1016" bIns="1016" rtlCol="0" anchor="t">
+          <p:cNvPr id="10" name="Text 8"/>
+          <p:cNvSpPr/>
+          <p:nvPr/>
+        </p:nvSpPr>
+        <p:spPr>
+          <a:xfrm>
+            <a:off x="868680" y="1417320"/>
+            <a:ext cx="6675120" cy="4434840"/>
+          </a:xfrm>
+          <a:prstGeom prst="rect">
+            <a:avLst/>
+          </a:prstGeom>
+          <a:noFill/>
+          <a:ln/>
+        </p:spPr>
+        <p:txBody>
+          <a:bodyPr wrap="square" lIns="635" tIns="635" rIns="635" bIns="635" rtlCol="0" anchor="t">
             <a:normAutofit/>
           </a:bodyPr>
           <a:lstStyle/>
           <a:p>
+            <a:r>
+              <a:rPr lang="en-US" sz="1700" dirty="0">
+                <a:solidFill>
+                  <a:srgbClr val="17364A"/>
+                </a:solidFill>
+                <a:latin typeface="Aptos" pitchFamily="34" charset="0"/>
+                <a:ea typeface="Aptos" pitchFamily="34" charset="-122"/>
+                <a:cs typeface="Aptos" pitchFamily="34" charset="-120"/>
+              </a:rPr>
+              <a:t>Generative AI requires staff who can review outputs and manage source accuracy.</a:t>
+            </a:r>
+            <a:endParaRPr lang="en-US" sz="1700" dirty="0"/>
+          </a:p>
+          <a:p>
+            <a:r>
+              <a:rPr lang="en-US" sz="1700" dirty="0">
+                <a:solidFill>
+                  <a:srgbClr val="17364A"/>
+                </a:solidFill>
+                <a:latin typeface="Aptos" pitchFamily="34" charset="0"/>
+                <a:ea typeface="Aptos" pitchFamily="34" charset="-122"/>
+                <a:cs typeface="Aptos" pitchFamily="34" charset="-120"/>
+              </a:rPr>
+              <a:t>Predictive analytics requires staff who can interpret performance and understand limitations.</a:t>
+            </a:r>
+            <a:endParaRPr lang="en-US" sz="1700" dirty="0"/>
+          </a:p>
+          <a:p>
+            <a:r>
+              <a:rPr lang="en-US" sz="1700" dirty="0">
+                <a:solidFill>
+                  <a:srgbClr val="17364A"/>
+                </a:solidFill>
+                <a:latin typeface="Aptos" pitchFamily="34" charset="0"/>
+                <a:ea typeface="Aptos" pitchFamily="34" charset="-122"/>
+                <a:cs typeface="Aptos" pitchFamily="34" charset="-120"/>
+              </a:rPr>
+              <a:t>Agentic workflows require staff who can oversee permissions, actions, escalation, and rollback.</a:t>
+            </a:r>
+            <a:endParaRPr lang="en-US" sz="1700" dirty="0"/>
+          </a:p>
+          <a:p>
+            <a:r>
+              <a:rPr lang="en-US" sz="1700" dirty="0">
+                <a:solidFill>
+                  <a:srgbClr val="17364A"/>
+                </a:solidFill>
+                <a:latin typeface="Aptos" pitchFamily="34" charset="0"/>
+                <a:ea typeface="Aptos" pitchFamily="34" charset="-122"/>
+                <a:cs typeface="Aptos" pitchFamily="34" charset="-120"/>
+              </a:rPr>
+              <a:t>Workforce strategy should connect each AI type to the roles needed to use it safely.</a:t>
+            </a:r>
+            <a:endParaRPr lang="en-US" sz="1700" dirty="0"/>
+          </a:p>
+        </p:txBody>
+      </p:sp>
+      <p:sp>
+        <p:nvSpPr>
+          <p:cNvPr id="11" name="Shape 9"/>
+          <p:cNvSpPr/>
+          <p:nvPr/>
+        </p:nvSpPr>
+        <p:spPr>
+          <a:xfrm>
+            <a:off x="7909560" y="1417320"/>
+            <a:ext cx="3154680" cy="1828800"/>
+          </a:xfrm>
+          <a:prstGeom prst="roundRect">
+            <a:avLst>
+              <a:gd name="adj" fmla="val 6000"/>
+            </a:avLst>
+          </a:prstGeom>
+          <a:solidFill>
+            <a:srgbClr val="EEF8ED"/>
+          </a:solidFill>
+          <a:ln w="12700">
+            <a:solidFill>
+              <a:srgbClr val="B9D7E6"/>
+            </a:solidFill>
+            <a:prstDash val="solid"/>
+          </a:ln>
+        </p:spPr>
+      </p:sp>
+      <p:sp>
+        <p:nvSpPr>
+          <p:cNvPr id="12" name="Text 10"/>
+          <p:cNvSpPr/>
+          <p:nvPr/>
+        </p:nvSpPr>
+        <p:spPr>
+          <a:xfrm>
+            <a:off x="8074152" y="1563624"/>
+            <a:ext cx="2825496" cy="201168"/>
+          </a:xfrm>
+          <a:prstGeom prst="rect">
+            <a:avLst/>
+          </a:prstGeom>
+          <a:noFill/>
+          <a:ln/>
+        </p:spPr>
+        <p:txBody>
+          <a:bodyPr wrap="square" lIns="0" tIns="0" rIns="0" bIns="0" rtlCol="0" anchor="ctr"/>
+          <a:lstStyle/>
+          <a:p>
             <a:pPr indent="0" marL="0">
               <a:buNone/>
             </a:pPr>
             <a:r>
-              <a:rPr lang="en-US" sz="1420" dirty="0">
+              <a:rPr lang="en-US" sz="950" b="1" dirty="0">
+                <a:solidFill>
+                  <a:srgbClr val="0068B7"/>
+                </a:solidFill>
+                <a:latin typeface="Aptos" pitchFamily="34" charset="0"/>
+                <a:ea typeface="Aptos" pitchFamily="34" charset="-122"/>
+                <a:cs typeface="Aptos" pitchFamily="34" charset="-120"/>
+              </a:rPr>
+              <a:t>Key idea</a:t>
+            </a:r>
+            <a:endParaRPr lang="en-US" sz="950" dirty="0"/>
+          </a:p>
+        </p:txBody>
+      </p:sp>
+      <p:sp>
+        <p:nvSpPr>
+          <p:cNvPr id="13" name="Text 11"/>
+          <p:cNvSpPr/>
+          <p:nvPr/>
+        </p:nvSpPr>
+        <p:spPr>
+          <a:xfrm>
+            <a:off x="8074152" y="1856232"/>
+            <a:ext cx="2825496" cy="1261872"/>
+          </a:xfrm>
+          <a:prstGeom prst="rect">
+            <a:avLst/>
+          </a:prstGeom>
+          <a:noFill/>
+          <a:ln/>
+        </p:spPr>
+        <p:txBody>
+          <a:bodyPr wrap="square" lIns="0" tIns="0" rIns="0" bIns="0" rtlCol="0" anchor="t">
+            <a:normAutofit/>
+          </a:bodyPr>
+          <a:lstStyle/>
+          <a:p>
+            <a:pPr indent="0" marL="0">
+              <a:buNone/>
+            </a:pPr>
+            <a:r>
+              <a:rPr lang="en-US" sz="1250" dirty="0">
                 <a:solidFill>
                   <a:srgbClr val="17364A"/>
                 </a:solidFill>
@@ -3128,9 +3893,116 @@
                 <a:ea typeface="Aptos" pitchFamily="34" charset="-122"/>
                 <a:cs typeface="Aptos" pitchFamily="34" charset="-120"/>
               </a:rPr>
-              <a:t>Which staff, partners, or communities would be affected if this issue were handled poorly? What policy, process, or artifact should be created or updated after this module?</a:t>
-            </a:r>
-            <a:endParaRPr lang="en-US" sz="1420" dirty="0"/>
+              <a:t>Generative AI requires staff who can review outputs and manage source accuracy.</a:t>
+            </a:r>
+            <a:endParaRPr lang="en-US" sz="1250" dirty="0"/>
+          </a:p>
+        </p:txBody>
+      </p:sp>
+      <p:sp>
+        <p:nvSpPr>
+          <p:cNvPr id="14" name="Shape 12"/>
+          <p:cNvSpPr/>
+          <p:nvPr/>
+        </p:nvSpPr>
+        <p:spPr>
+          <a:xfrm>
+            <a:off x="7909560" y="3520440"/>
+            <a:ext cx="3154680" cy="1737360"/>
+          </a:xfrm>
+          <a:prstGeom prst="roundRect">
+            <a:avLst>
+              <a:gd name="adj" fmla="val 6316"/>
+            </a:avLst>
+          </a:prstGeom>
+          <a:solidFill>
+            <a:srgbClr val="EAF6F8"/>
+          </a:solidFill>
+          <a:ln w="12700">
+            <a:solidFill>
+              <a:srgbClr val="B9D7E6"/>
+            </a:solidFill>
+            <a:prstDash val="solid"/>
+          </a:ln>
+        </p:spPr>
+      </p:sp>
+      <p:sp>
+        <p:nvSpPr>
+          <p:cNvPr id="15" name="Text 13"/>
+          <p:cNvSpPr/>
+          <p:nvPr/>
+        </p:nvSpPr>
+        <p:spPr>
+          <a:xfrm>
+            <a:off x="8074152" y="3666744"/>
+            <a:ext cx="2825496" cy="201168"/>
+          </a:xfrm>
+          <a:prstGeom prst="rect">
+            <a:avLst/>
+          </a:prstGeom>
+          <a:noFill/>
+          <a:ln/>
+        </p:spPr>
+        <p:txBody>
+          <a:bodyPr wrap="square" lIns="0" tIns="0" rIns="0" bIns="0" rtlCol="0" anchor="ctr"/>
+          <a:lstStyle/>
+          <a:p>
+            <a:pPr indent="0" marL="0">
+              <a:buNone/>
+            </a:pPr>
+            <a:r>
+              <a:rPr lang="en-US" sz="950" b="1" dirty="0">
+                <a:solidFill>
+                  <a:srgbClr val="0068B7"/>
+                </a:solidFill>
+                <a:latin typeface="Aptos" pitchFamily="34" charset="0"/>
+                <a:ea typeface="Aptos" pitchFamily="34" charset="-122"/>
+                <a:cs typeface="Aptos" pitchFamily="34" charset="-120"/>
+              </a:rPr>
+              <a:t>Use this for</a:t>
+            </a:r>
+            <a:endParaRPr lang="en-US" sz="950" dirty="0"/>
+          </a:p>
+        </p:txBody>
+      </p:sp>
+      <p:sp>
+        <p:nvSpPr>
+          <p:cNvPr id="16" name="Text 14"/>
+          <p:cNvSpPr/>
+          <p:nvPr/>
+        </p:nvSpPr>
+        <p:spPr>
+          <a:xfrm>
+            <a:off x="8074152" y="3959352"/>
+            <a:ext cx="2825496" cy="1170432"/>
+          </a:xfrm>
+          <a:prstGeom prst="rect">
+            <a:avLst/>
+          </a:prstGeom>
+          <a:noFill/>
+          <a:ln/>
+        </p:spPr>
+        <p:txBody>
+          <a:bodyPr wrap="square" lIns="0" tIns="0" rIns="0" bIns="0" rtlCol="0" anchor="t">
+            <a:normAutofit/>
+          </a:bodyPr>
+          <a:lstStyle/>
+          <a:p>
+            <a:pPr indent="0" marL="0">
+              <a:buNone/>
+            </a:pPr>
+            <a:r>
+              <a:rPr lang="en-US" sz="1250" dirty="0">
+                <a:solidFill>
+                  <a:srgbClr val="17364A"/>
+                </a:solidFill>
+                <a:latin typeface="Aptos" pitchFamily="34" charset="0"/>
+                <a:ea typeface="Aptos" pitchFamily="34" charset="-122"/>
+                <a:cs typeface="Aptos" pitchFamily="34" charset="-120"/>
+              </a:rPr>
+              <a:t>Connect the concept to public health decisions, safeguards, documentation, or implementation work.</a:t>
+            </a:r>
+            <a:endParaRPr lang="en-US" sz="1250" dirty="0"/>
           </a:p>
         </p:txBody>
       </p:sp>
@@ -3193,7 +4065,32 @@
       </p:sp>
       <p:sp>
         <p:nvSpPr>
-          <p:cNvPr id="3" name="Text 1"/>
+          <p:cNvPr id="3" name="Shape 1"/>
+          <p:cNvSpPr/>
+          <p:nvPr/>
+        </p:nvSpPr>
+        <p:spPr>
+          <a:xfrm>
+            <a:off x="0" y="164592"/>
+            <a:ext cx="146304" cy="6693408"/>
+          </a:xfrm>
+          <a:prstGeom prst="rect">
+            <a:avLst/>
+          </a:prstGeom>
+          <a:solidFill>
+            <a:srgbClr val="2F8A28"/>
+          </a:solidFill>
+          <a:ln w="12700">
+            <a:solidFill>
+              <a:srgbClr val="2F8A28"/>
+            </a:solidFill>
+            <a:prstDash val="solid"/>
+          </a:ln>
+        </p:spPr>
+      </p:sp>
+      <p:sp>
+        <p:nvSpPr>
+          <p:cNvPr id="4" name="Text 2"/>
           <p:cNvSpPr/>
           <p:nvPr/>
         </p:nvSpPr>
@@ -3232,7 +4129,7 @@
       </p:sp>
       <p:sp>
         <p:nvSpPr>
-          <p:cNvPr id="4" name="Text 2"/>
+          <p:cNvPr id="5" name="Text 3"/>
           <p:cNvSpPr/>
           <p:nvPr/>
         </p:nvSpPr>
@@ -3271,7 +4168,7 @@
       </p:sp>
       <p:sp>
         <p:nvSpPr>
-          <p:cNvPr id="5" name="Text 3"/>
+          <p:cNvPr id="6" name="Text 4"/>
           <p:cNvSpPr/>
           <p:nvPr/>
         </p:nvSpPr>
@@ -3310,13 +4207,77 @@
       </p:sp>
       <p:sp>
         <p:nvSpPr>
-          <p:cNvPr id="6" name="Text 4"/>
+          <p:cNvPr id="7" name="Shape 5"/>
           <p:cNvSpPr/>
           <p:nvPr/>
         </p:nvSpPr>
         <p:spPr>
           <a:xfrm>
             <a:off x="640080" y="658368"/>
+            <a:ext cx="420624" cy="420624"/>
+          </a:xfrm>
+          <a:prstGeom prst="ellipse">
+            <a:avLst/>
+          </a:prstGeom>
+          <a:solidFill>
+            <a:srgbClr val="0068B7"/>
+          </a:solidFill>
+          <a:ln w="12700">
+            <a:solidFill>
+              <a:srgbClr val="0068B7"/>
+            </a:solidFill>
+            <a:prstDash val="solid"/>
+          </a:ln>
+        </p:spPr>
+      </p:sp>
+      <p:sp>
+        <p:nvSpPr>
+          <p:cNvPr id="8" name="Text 6"/>
+          <p:cNvSpPr/>
+          <p:nvPr/>
+        </p:nvSpPr>
+        <p:spPr>
+          <a:xfrm>
+            <a:off x="640080" y="731520"/>
+            <a:ext cx="420624" cy="164592"/>
+          </a:xfrm>
+          <a:prstGeom prst="rect">
+            <a:avLst/>
+          </a:prstGeom>
+          <a:noFill/>
+          <a:ln/>
+        </p:spPr>
+        <p:txBody>
+          <a:bodyPr wrap="square" lIns="0" tIns="0" rIns="0" bIns="0" rtlCol="0" anchor="ctr"/>
+          <a:lstStyle/>
+          <a:p>
+            <a:pPr algn="ctr" indent="0" marL="0">
+              <a:buNone/>
+            </a:pPr>
+            <a:r>
+              <a:rPr lang="en-US" sz="1100" b="1" dirty="0">
+                <a:solidFill>
+                  <a:srgbClr val="FFFFFF"/>
+                </a:solidFill>
+                <a:latin typeface="Aptos" pitchFamily="34" charset="0"/>
+                <a:ea typeface="Aptos" pitchFamily="34" charset="-122"/>
+                <a:cs typeface="Aptos" pitchFamily="34" charset="-120"/>
+              </a:rPr>
+              <a:t>8</a:t>
+            </a:r>
+            <a:endParaRPr lang="en-US" sz="1100" dirty="0"/>
+          </a:p>
+        </p:txBody>
+      </p:sp>
+      <p:sp>
+        <p:nvSpPr>
+          <p:cNvPr id="9" name="Text 7"/>
+          <p:cNvSpPr/>
+          <p:nvPr/>
+        </p:nvSpPr>
+        <p:spPr>
+          <a:xfrm>
+            <a:off x="640080" y="621792"/>
             <a:ext cx="10881360" cy="566928"/>
           </a:xfrm>
           <a:prstGeom prst="rect">
@@ -3343,7 +4304,7 @@
                 <a:ea typeface="Aptos Display" pitchFamily="34" charset="-122"/>
                 <a:cs typeface="Aptos Display" pitchFamily="34" charset="-120"/>
               </a:rPr>
-              <a:t>Practical Exercise</a:t>
+              <a:t>Reflection Questions</a:t>
             </a:r>
             <a:endParaRPr lang="en-US" sz="2700" dirty="0"/>
           </a:p>
@@ -3351,32 +4312,164 @@
       </p:sp>
       <p:sp>
         <p:nvSpPr>
-          <p:cNvPr id="7" name="Text 5"/>
-          <p:cNvSpPr/>
-          <p:nvPr/>
-        </p:nvSpPr>
-        <p:spPr>
-          <a:xfrm>
-            <a:off x="822960" y="1325880"/>
-            <a:ext cx="10378440" cy="4800600"/>
-          </a:xfrm>
-          <a:prstGeom prst="rect">
-            <a:avLst/>
-          </a:prstGeom>
-          <a:noFill/>
-          <a:ln/>
-        </p:spPr>
-        <p:txBody>
-          <a:bodyPr wrap="square" lIns="1016" tIns="1016" rIns="1016" bIns="1016" rtlCol="0" anchor="t">
+          <p:cNvPr id="10" name="Text 8"/>
+          <p:cNvSpPr/>
+          <p:nvPr/>
+        </p:nvSpPr>
+        <p:spPr>
+          <a:xfrm>
+            <a:off x="868680" y="1417320"/>
+            <a:ext cx="6675120" cy="4434840"/>
+          </a:xfrm>
+          <a:prstGeom prst="rect">
+            <a:avLst/>
+          </a:prstGeom>
+          <a:noFill/>
+          <a:ln/>
+        </p:spPr>
+        <p:txBody>
+          <a:bodyPr wrap="square" lIns="635" tIns="635" rIns="635" bIns="635" rtlCol="0" anchor="t">
             <a:normAutofit/>
           </a:bodyPr>
           <a:lstStyle/>
           <a:p>
+            <a:r>
+              <a:rPr lang="en-US" sz="1700" dirty="0">
+                <a:solidFill>
+                  <a:srgbClr val="17364A"/>
+                </a:solidFill>
+                <a:latin typeface="Aptos" pitchFamily="34" charset="0"/>
+                <a:ea typeface="Aptos" pitchFamily="34" charset="-122"/>
+                <a:cs typeface="Aptos" pitchFamily="34" charset="-120"/>
+              </a:rPr>
+              <a:t>Which current or proposed AI use case in your agency raises this leadership or governance issue most clearly?</a:t>
+            </a:r>
+            <a:endParaRPr lang="en-US" sz="1700" dirty="0"/>
+          </a:p>
+          <a:p>
+            <a:r>
+              <a:rPr lang="en-US" sz="1700" dirty="0">
+                <a:solidFill>
+                  <a:srgbClr val="17364A"/>
+                </a:solidFill>
+                <a:latin typeface="Aptos" pitchFamily="34" charset="0"/>
+                <a:ea typeface="Aptos" pitchFamily="34" charset="-122"/>
+                <a:cs typeface="Aptos" pitchFamily="34" charset="-120"/>
+              </a:rPr>
+              <a:t>Who currently has authority to make decisions about this issue, and is that authority documented?</a:t>
+            </a:r>
+            <a:endParaRPr lang="en-US" sz="1700" dirty="0"/>
+          </a:p>
+          <a:p>
+            <a:r>
+              <a:rPr lang="en-US" sz="1700" dirty="0">
+                <a:solidFill>
+                  <a:srgbClr val="17364A"/>
+                </a:solidFill>
+                <a:latin typeface="Aptos" pitchFamily="34" charset="0"/>
+                <a:ea typeface="Aptos" pitchFamily="34" charset="-122"/>
+                <a:cs typeface="Aptos" pitchFamily="34" charset="-120"/>
+              </a:rPr>
+              <a:t>What evidence would governance or leadership need before approving the use case?</a:t>
+            </a:r>
+            <a:endParaRPr lang="en-US" sz="1700" dirty="0"/>
+          </a:p>
+        </p:txBody>
+      </p:sp>
+      <p:sp>
+        <p:nvSpPr>
+          <p:cNvPr id="11" name="Shape 9"/>
+          <p:cNvSpPr/>
+          <p:nvPr/>
+        </p:nvSpPr>
+        <p:spPr>
+          <a:xfrm>
+            <a:off x="7909560" y="1417320"/>
+            <a:ext cx="3154680" cy="1828800"/>
+          </a:xfrm>
+          <a:prstGeom prst="roundRect">
+            <a:avLst>
+              <a:gd name="adj" fmla="val 6000"/>
+            </a:avLst>
+          </a:prstGeom>
+          <a:solidFill>
+            <a:srgbClr val="EEF8ED"/>
+          </a:solidFill>
+          <a:ln w="12700">
+            <a:solidFill>
+              <a:srgbClr val="B9D7E6"/>
+            </a:solidFill>
+            <a:prstDash val="solid"/>
+          </a:ln>
+        </p:spPr>
+      </p:sp>
+      <p:sp>
+        <p:nvSpPr>
+          <p:cNvPr id="12" name="Text 10"/>
+          <p:cNvSpPr/>
+          <p:nvPr/>
+        </p:nvSpPr>
+        <p:spPr>
+          <a:xfrm>
+            <a:off x="8074152" y="1563624"/>
+            <a:ext cx="2825496" cy="201168"/>
+          </a:xfrm>
+          <a:prstGeom prst="rect">
+            <a:avLst/>
+          </a:prstGeom>
+          <a:noFill/>
+          <a:ln/>
+        </p:spPr>
+        <p:txBody>
+          <a:bodyPr wrap="square" lIns="0" tIns="0" rIns="0" bIns="0" rtlCol="0" anchor="ctr"/>
+          <a:lstStyle/>
+          <a:p>
             <a:pPr indent="0" marL="0">
               <a:buNone/>
             </a:pPr>
             <a:r>
-              <a:rPr lang="en-US" sz="1420" dirty="0">
+              <a:rPr lang="en-US" sz="950" b="1" dirty="0">
+                <a:solidFill>
+                  <a:srgbClr val="0068B7"/>
+                </a:solidFill>
+                <a:latin typeface="Aptos" pitchFamily="34" charset="0"/>
+                <a:ea typeface="Aptos" pitchFamily="34" charset="-122"/>
+                <a:cs typeface="Aptos" pitchFamily="34" charset="-120"/>
+              </a:rPr>
+              <a:t>Key idea</a:t>
+            </a:r>
+            <a:endParaRPr lang="en-US" sz="950" dirty="0"/>
+          </a:p>
+        </p:txBody>
+      </p:sp>
+      <p:sp>
+        <p:nvSpPr>
+          <p:cNvPr id="13" name="Text 11"/>
+          <p:cNvSpPr/>
+          <p:nvPr/>
+        </p:nvSpPr>
+        <p:spPr>
+          <a:xfrm>
+            <a:off x="8074152" y="1856232"/>
+            <a:ext cx="2825496" cy="1261872"/>
+          </a:xfrm>
+          <a:prstGeom prst="rect">
+            <a:avLst/>
+          </a:prstGeom>
+          <a:noFill/>
+          <a:ln/>
+        </p:spPr>
+        <p:txBody>
+          <a:bodyPr wrap="square" lIns="0" tIns="0" rIns="0" bIns="0" rtlCol="0" anchor="t">
+            <a:normAutofit/>
+          </a:bodyPr>
+          <a:lstStyle/>
+          <a:p>
+            <a:pPr indent="0" marL="0">
+              <a:buNone/>
+            </a:pPr>
+            <a:r>
+              <a:rPr lang="en-US" sz="1250" dirty="0">
                 <a:solidFill>
                   <a:srgbClr val="17364A"/>
                 </a:solidFill>
@@ -3384,9 +4477,116 @@
                 <a:ea typeface="Aptos" pitchFamily="34" charset="-122"/>
                 <a:cs typeface="Aptos" pitchFamily="34" charset="-120"/>
               </a:rPr>
-              <a:t>Create a role-based AI workforce readiness plan. Include role groups, competencies, required training, responsibilities, decision authority, and support needs.</a:t>
-            </a:r>
-            <a:endParaRPr lang="en-US" sz="1420" dirty="0"/>
+              <a:t>Which current or proposed AI use case in your agency raises this leadership or governance issue most clearly?</a:t>
+            </a:r>
+            <a:endParaRPr lang="en-US" sz="1250" dirty="0"/>
+          </a:p>
+        </p:txBody>
+      </p:sp>
+      <p:sp>
+        <p:nvSpPr>
+          <p:cNvPr id="14" name="Shape 12"/>
+          <p:cNvSpPr/>
+          <p:nvPr/>
+        </p:nvSpPr>
+        <p:spPr>
+          <a:xfrm>
+            <a:off x="7909560" y="3520440"/>
+            <a:ext cx="3154680" cy="1737360"/>
+          </a:xfrm>
+          <a:prstGeom prst="roundRect">
+            <a:avLst>
+              <a:gd name="adj" fmla="val 6316"/>
+            </a:avLst>
+          </a:prstGeom>
+          <a:solidFill>
+            <a:srgbClr val="EAF6F8"/>
+          </a:solidFill>
+          <a:ln w="12700">
+            <a:solidFill>
+              <a:srgbClr val="B9D7E6"/>
+            </a:solidFill>
+            <a:prstDash val="solid"/>
+          </a:ln>
+        </p:spPr>
+      </p:sp>
+      <p:sp>
+        <p:nvSpPr>
+          <p:cNvPr id="15" name="Text 13"/>
+          <p:cNvSpPr/>
+          <p:nvPr/>
+        </p:nvSpPr>
+        <p:spPr>
+          <a:xfrm>
+            <a:off x="8074152" y="3666744"/>
+            <a:ext cx="2825496" cy="201168"/>
+          </a:xfrm>
+          <a:prstGeom prst="rect">
+            <a:avLst/>
+          </a:prstGeom>
+          <a:noFill/>
+          <a:ln/>
+        </p:spPr>
+        <p:txBody>
+          <a:bodyPr wrap="square" lIns="0" tIns="0" rIns="0" bIns="0" rtlCol="0" anchor="ctr"/>
+          <a:lstStyle/>
+          <a:p>
+            <a:pPr indent="0" marL="0">
+              <a:buNone/>
+            </a:pPr>
+            <a:r>
+              <a:rPr lang="en-US" sz="950" b="1" dirty="0">
+                <a:solidFill>
+                  <a:srgbClr val="0068B7"/>
+                </a:solidFill>
+                <a:latin typeface="Aptos" pitchFamily="34" charset="0"/>
+                <a:ea typeface="Aptos" pitchFamily="34" charset="-122"/>
+                <a:cs typeface="Aptos" pitchFamily="34" charset="-120"/>
+              </a:rPr>
+              <a:t>Use this for</a:t>
+            </a:r>
+            <a:endParaRPr lang="en-US" sz="950" dirty="0"/>
+          </a:p>
+        </p:txBody>
+      </p:sp>
+      <p:sp>
+        <p:nvSpPr>
+          <p:cNvPr id="16" name="Text 14"/>
+          <p:cNvSpPr/>
+          <p:nvPr/>
+        </p:nvSpPr>
+        <p:spPr>
+          <a:xfrm>
+            <a:off x="8074152" y="3959352"/>
+            <a:ext cx="2825496" cy="1170432"/>
+          </a:xfrm>
+          <a:prstGeom prst="rect">
+            <a:avLst/>
+          </a:prstGeom>
+          <a:noFill/>
+          <a:ln/>
+        </p:spPr>
+        <p:txBody>
+          <a:bodyPr wrap="square" lIns="0" tIns="0" rIns="0" bIns="0" rtlCol="0" anchor="t">
+            <a:normAutofit/>
+          </a:bodyPr>
+          <a:lstStyle/>
+          <a:p>
+            <a:pPr indent="0" marL="0">
+              <a:buNone/>
+            </a:pPr>
+            <a:r>
+              <a:rPr lang="en-US" sz="1250" dirty="0">
+                <a:solidFill>
+                  <a:srgbClr val="17364A"/>
+                </a:solidFill>
+                <a:latin typeface="Aptos" pitchFamily="34" charset="0"/>
+                <a:ea typeface="Aptos" pitchFamily="34" charset="-122"/>
+                <a:cs typeface="Aptos" pitchFamily="34" charset="-120"/>
+              </a:rPr>
+              <a:t>Connect the concept to public health decisions, safeguards, documentation, or implementation work.</a:t>
+            </a:r>
+            <a:endParaRPr lang="en-US" sz="1250" dirty="0"/>
           </a:p>
         </p:txBody>
       </p:sp>
@@ -3449,7 +4649,32 @@
       </p:sp>
       <p:sp>
         <p:nvSpPr>
-          <p:cNvPr id="3" name="Text 1"/>
+          <p:cNvPr id="3" name="Shape 1"/>
+          <p:cNvSpPr/>
+          <p:nvPr/>
+        </p:nvSpPr>
+        <p:spPr>
+          <a:xfrm>
+            <a:off x="0" y="164592"/>
+            <a:ext cx="146304" cy="6693408"/>
+          </a:xfrm>
+          <a:prstGeom prst="rect">
+            <a:avLst/>
+          </a:prstGeom>
+          <a:solidFill>
+            <a:srgbClr val="2F8A28"/>
+          </a:solidFill>
+          <a:ln w="12700">
+            <a:solidFill>
+              <a:srgbClr val="2F8A28"/>
+            </a:solidFill>
+            <a:prstDash val="solid"/>
+          </a:ln>
+        </p:spPr>
+      </p:sp>
+      <p:sp>
+        <p:nvSpPr>
+          <p:cNvPr id="4" name="Text 2"/>
           <p:cNvSpPr/>
           <p:nvPr/>
         </p:nvSpPr>
@@ -3488,7 +4713,7 @@
       </p:sp>
       <p:sp>
         <p:nvSpPr>
-          <p:cNvPr id="4" name="Text 2"/>
+          <p:cNvPr id="5" name="Text 3"/>
           <p:cNvSpPr/>
           <p:nvPr/>
         </p:nvSpPr>
@@ -3527,7 +4752,7 @@
       </p:sp>
       <p:sp>
         <p:nvSpPr>
-          <p:cNvPr id="5" name="Text 3"/>
+          <p:cNvPr id="6" name="Text 4"/>
           <p:cNvSpPr/>
           <p:nvPr/>
         </p:nvSpPr>
@@ -3566,7 +4791,7 @@
       </p:sp>
       <p:sp>
         <p:nvSpPr>
-          <p:cNvPr id="6" name="Text 4"/>
+          <p:cNvPr id="7" name="Text 5"/>
           <p:cNvSpPr/>
           <p:nvPr/>
         </p:nvSpPr>
@@ -3599,7 +4824,7 @@
                 <a:ea typeface="Aptos Display" pitchFamily="34" charset="-122"/>
                 <a:cs typeface="Aptos Display" pitchFamily="34" charset="-120"/>
               </a:rPr>
-              <a:t>Before You Begin</a:t>
+              <a:t>Reflection Questions Continued</a:t>
             </a:r>
             <a:endParaRPr lang="en-US" sz="2700" dirty="0"/>
           </a:p>
@@ -3607,32 +4832,150 @@
       </p:sp>
       <p:sp>
         <p:nvSpPr>
-          <p:cNvPr id="7" name="Text 5"/>
-          <p:cNvSpPr/>
-          <p:nvPr/>
-        </p:nvSpPr>
-        <p:spPr>
-          <a:xfrm>
-            <a:off x="822960" y="1325880"/>
-            <a:ext cx="10378440" cy="4800600"/>
-          </a:xfrm>
-          <a:prstGeom prst="rect">
-            <a:avLst/>
-          </a:prstGeom>
-          <a:noFill/>
-          <a:ln/>
-        </p:spPr>
-        <p:txBody>
-          <a:bodyPr wrap="square" lIns="1016" tIns="1016" rIns="1016" bIns="1016" rtlCol="0" anchor="t">
+          <p:cNvPr id="8" name="Text 6"/>
+          <p:cNvSpPr/>
+          <p:nvPr/>
+        </p:nvSpPr>
+        <p:spPr>
+          <a:xfrm>
+            <a:off x="868680" y="1417320"/>
+            <a:ext cx="6675120" cy="4434840"/>
+          </a:xfrm>
+          <a:prstGeom prst="rect">
+            <a:avLst/>
+          </a:prstGeom>
+          <a:noFill/>
+          <a:ln/>
+        </p:spPr>
+        <p:txBody>
+          <a:bodyPr wrap="square" lIns="635" tIns="635" rIns="635" bIns="635" rtlCol="0" anchor="t">
             <a:normAutofit/>
           </a:bodyPr>
           <a:lstStyle/>
           <a:p>
+            <a:r>
+              <a:rPr lang="en-US" sz="1700" dirty="0">
+                <a:solidFill>
+                  <a:srgbClr val="17364A"/>
+                </a:solidFill>
+                <a:latin typeface="Aptos" pitchFamily="34" charset="0"/>
+                <a:ea typeface="Aptos" pitchFamily="34" charset="-122"/>
+                <a:cs typeface="Aptos" pitchFamily="34" charset="-120"/>
+              </a:rPr>
+              <a:t>Which staff, partners, or communities would be affected if this issue were handled poorly?</a:t>
+            </a:r>
+            <a:endParaRPr lang="en-US" sz="1700" dirty="0"/>
+          </a:p>
+          <a:p>
+            <a:r>
+              <a:rPr lang="en-US" sz="1700" dirty="0">
+                <a:solidFill>
+                  <a:srgbClr val="17364A"/>
+                </a:solidFill>
+                <a:latin typeface="Aptos" pitchFamily="34" charset="0"/>
+                <a:ea typeface="Aptos" pitchFamily="34" charset="-122"/>
+                <a:cs typeface="Aptos" pitchFamily="34" charset="-120"/>
+              </a:rPr>
+              <a:t>What policy, process, or artifact should be created or updated after this module?</a:t>
+            </a:r>
+            <a:endParaRPr lang="en-US" sz="1700" dirty="0"/>
+          </a:p>
+        </p:txBody>
+      </p:sp>
+      <p:sp>
+        <p:nvSpPr>
+          <p:cNvPr id="9" name="Shape 7"/>
+          <p:cNvSpPr/>
+          <p:nvPr/>
+        </p:nvSpPr>
+        <p:spPr>
+          <a:xfrm>
+            <a:off x="7909560" y="1417320"/>
+            <a:ext cx="3154680" cy="1828800"/>
+          </a:xfrm>
+          <a:prstGeom prst="roundRect">
+            <a:avLst>
+              <a:gd name="adj" fmla="val 6000"/>
+            </a:avLst>
+          </a:prstGeom>
+          <a:solidFill>
+            <a:srgbClr val="EEF8ED"/>
+          </a:solidFill>
+          <a:ln w="12700">
+            <a:solidFill>
+              <a:srgbClr val="B9D7E6"/>
+            </a:solidFill>
+            <a:prstDash val="solid"/>
+          </a:ln>
+        </p:spPr>
+      </p:sp>
+      <p:sp>
+        <p:nvSpPr>
+          <p:cNvPr id="10" name="Text 8"/>
+          <p:cNvSpPr/>
+          <p:nvPr/>
+        </p:nvSpPr>
+        <p:spPr>
+          <a:xfrm>
+            <a:off x="8074152" y="1563624"/>
+            <a:ext cx="2825496" cy="201168"/>
+          </a:xfrm>
+          <a:prstGeom prst="rect">
+            <a:avLst/>
+          </a:prstGeom>
+          <a:noFill/>
+          <a:ln/>
+        </p:spPr>
+        <p:txBody>
+          <a:bodyPr wrap="square" lIns="0" tIns="0" rIns="0" bIns="0" rtlCol="0" anchor="ctr"/>
+          <a:lstStyle/>
+          <a:p>
             <a:pPr indent="0" marL="0">
               <a:buNone/>
             </a:pPr>
             <a:r>
-              <a:rPr lang="en-US" sz="1420" dirty="0">
+              <a:rPr lang="en-US" sz="950" b="1" dirty="0">
+                <a:solidFill>
+                  <a:srgbClr val="0068B7"/>
+                </a:solidFill>
+                <a:latin typeface="Aptos" pitchFamily="34" charset="0"/>
+                <a:ea typeface="Aptos" pitchFamily="34" charset="-122"/>
+                <a:cs typeface="Aptos" pitchFamily="34" charset="-120"/>
+              </a:rPr>
+              <a:t>Key idea</a:t>
+            </a:r>
+            <a:endParaRPr lang="en-US" sz="950" dirty="0"/>
+          </a:p>
+        </p:txBody>
+      </p:sp>
+      <p:sp>
+        <p:nvSpPr>
+          <p:cNvPr id="11" name="Text 9"/>
+          <p:cNvSpPr/>
+          <p:nvPr/>
+        </p:nvSpPr>
+        <p:spPr>
+          <a:xfrm>
+            <a:off x="8074152" y="1856232"/>
+            <a:ext cx="2825496" cy="1261872"/>
+          </a:xfrm>
+          <a:prstGeom prst="rect">
+            <a:avLst/>
+          </a:prstGeom>
+          <a:noFill/>
+          <a:ln/>
+        </p:spPr>
+        <p:txBody>
+          <a:bodyPr wrap="square" lIns="0" tIns="0" rIns="0" bIns="0" rtlCol="0" anchor="t">
+            <a:normAutofit/>
+          </a:bodyPr>
+          <a:lstStyle/>
+          <a:p>
+            <a:pPr indent="0" marL="0">
+              <a:buNone/>
+            </a:pPr>
+            <a:r>
+              <a:rPr lang="en-US" sz="1250" dirty="0">
                 <a:solidFill>
                   <a:srgbClr val="17364A"/>
                 </a:solidFill>
@@ -3640,9 +4983,116 @@
                 <a:ea typeface="Aptos" pitchFamily="34" charset="-122"/>
                 <a:cs typeface="Aptos" pitchFamily="34" charset="-120"/>
               </a:rPr>
-              <a:t>Choose a real or realistic public health AI use case. Document assumptions, unresolved questions, and which agency roles would need to review the artifact before it is adopted. The exercise should produce a work product that could support governance review, leadership discussion, implementation planning, or policy development.</a:t>
-            </a:r>
-            <a:endParaRPr lang="en-US" sz="1420" dirty="0"/>
+              <a:t>Which staff, partners, or communities would be affected if this issue were handled poorly?</a:t>
+            </a:r>
+            <a:endParaRPr lang="en-US" sz="1250" dirty="0"/>
+          </a:p>
+        </p:txBody>
+      </p:sp>
+      <p:sp>
+        <p:nvSpPr>
+          <p:cNvPr id="12" name="Shape 10"/>
+          <p:cNvSpPr/>
+          <p:nvPr/>
+        </p:nvSpPr>
+        <p:spPr>
+          <a:xfrm>
+            <a:off x="7909560" y="3520440"/>
+            <a:ext cx="3154680" cy="1737360"/>
+          </a:xfrm>
+          <a:prstGeom prst="roundRect">
+            <a:avLst>
+              <a:gd name="adj" fmla="val 6316"/>
+            </a:avLst>
+          </a:prstGeom>
+          <a:solidFill>
+            <a:srgbClr val="EAF6F8"/>
+          </a:solidFill>
+          <a:ln w="12700">
+            <a:solidFill>
+              <a:srgbClr val="B9D7E6"/>
+            </a:solidFill>
+            <a:prstDash val="solid"/>
+          </a:ln>
+        </p:spPr>
+      </p:sp>
+      <p:sp>
+        <p:nvSpPr>
+          <p:cNvPr id="13" name="Text 11"/>
+          <p:cNvSpPr/>
+          <p:nvPr/>
+        </p:nvSpPr>
+        <p:spPr>
+          <a:xfrm>
+            <a:off x="8074152" y="3666744"/>
+            <a:ext cx="2825496" cy="201168"/>
+          </a:xfrm>
+          <a:prstGeom prst="rect">
+            <a:avLst/>
+          </a:prstGeom>
+          <a:noFill/>
+          <a:ln/>
+        </p:spPr>
+        <p:txBody>
+          <a:bodyPr wrap="square" lIns="0" tIns="0" rIns="0" bIns="0" rtlCol="0" anchor="ctr"/>
+          <a:lstStyle/>
+          <a:p>
+            <a:pPr indent="0" marL="0">
+              <a:buNone/>
+            </a:pPr>
+            <a:r>
+              <a:rPr lang="en-US" sz="950" b="1" dirty="0">
+                <a:solidFill>
+                  <a:srgbClr val="0068B7"/>
+                </a:solidFill>
+                <a:latin typeface="Aptos" pitchFamily="34" charset="0"/>
+                <a:ea typeface="Aptos" pitchFamily="34" charset="-122"/>
+                <a:cs typeface="Aptos" pitchFamily="34" charset="-120"/>
+              </a:rPr>
+              <a:t>Use this for</a:t>
+            </a:r>
+            <a:endParaRPr lang="en-US" sz="950" dirty="0"/>
+          </a:p>
+        </p:txBody>
+      </p:sp>
+      <p:sp>
+        <p:nvSpPr>
+          <p:cNvPr id="14" name="Text 12"/>
+          <p:cNvSpPr/>
+          <p:nvPr/>
+        </p:nvSpPr>
+        <p:spPr>
+          <a:xfrm>
+            <a:off x="8074152" y="3959352"/>
+            <a:ext cx="2825496" cy="1170432"/>
+          </a:xfrm>
+          <a:prstGeom prst="rect">
+            <a:avLst/>
+          </a:prstGeom>
+          <a:noFill/>
+          <a:ln/>
+        </p:spPr>
+        <p:txBody>
+          <a:bodyPr wrap="square" lIns="0" tIns="0" rIns="0" bIns="0" rtlCol="0" anchor="t">
+            <a:normAutofit/>
+          </a:bodyPr>
+          <a:lstStyle/>
+          <a:p>
+            <a:pPr indent="0" marL="0">
+              <a:buNone/>
+            </a:pPr>
+            <a:r>
+              <a:rPr lang="en-US" sz="1250" dirty="0">
+                <a:solidFill>
+                  <a:srgbClr val="17364A"/>
+                </a:solidFill>
+                <a:latin typeface="Aptos" pitchFamily="34" charset="0"/>
+                <a:ea typeface="Aptos" pitchFamily="34" charset="-122"/>
+                <a:cs typeface="Aptos" pitchFamily="34" charset="-120"/>
+              </a:rPr>
+              <a:t>Connect the concept to public health decisions, safeguards, documentation, or implementation work.</a:t>
+            </a:r>
+            <a:endParaRPr lang="en-US" sz="1250" dirty="0"/>
           </a:p>
         </p:txBody>
       </p:sp>
@@ -3705,7 +5155,32 @@
       </p:sp>
       <p:sp>
         <p:nvSpPr>
-          <p:cNvPr id="3" name="Text 1"/>
+          <p:cNvPr id="3" name="Shape 1"/>
+          <p:cNvSpPr/>
+          <p:nvPr/>
+        </p:nvSpPr>
+        <p:spPr>
+          <a:xfrm>
+            <a:off x="0" y="164592"/>
+            <a:ext cx="146304" cy="6693408"/>
+          </a:xfrm>
+          <a:prstGeom prst="rect">
+            <a:avLst/>
+          </a:prstGeom>
+          <a:solidFill>
+            <a:srgbClr val="2F8A28"/>
+          </a:solidFill>
+          <a:ln w="12700">
+            <a:solidFill>
+              <a:srgbClr val="2F8A28"/>
+            </a:solidFill>
+            <a:prstDash val="solid"/>
+          </a:ln>
+        </p:spPr>
+      </p:sp>
+      <p:sp>
+        <p:nvSpPr>
+          <p:cNvPr id="4" name="Text 2"/>
           <p:cNvSpPr/>
           <p:nvPr/>
         </p:nvSpPr>
@@ -3744,7 +5219,7 @@
       </p:sp>
       <p:sp>
         <p:nvSpPr>
-          <p:cNvPr id="4" name="Text 2"/>
+          <p:cNvPr id="5" name="Text 3"/>
           <p:cNvSpPr/>
           <p:nvPr/>
         </p:nvSpPr>
@@ -3783,7 +5258,7 @@
       </p:sp>
       <p:sp>
         <p:nvSpPr>
-          <p:cNvPr id="5" name="Text 3"/>
+          <p:cNvPr id="6" name="Text 4"/>
           <p:cNvSpPr/>
           <p:nvPr/>
         </p:nvSpPr>
@@ -3822,13 +5297,77 @@
       </p:sp>
       <p:sp>
         <p:nvSpPr>
-          <p:cNvPr id="6" name="Text 4"/>
+          <p:cNvPr id="7" name="Shape 5"/>
           <p:cNvSpPr/>
           <p:nvPr/>
         </p:nvSpPr>
         <p:spPr>
           <a:xfrm>
             <a:off x="640080" y="658368"/>
+            <a:ext cx="420624" cy="420624"/>
+          </a:xfrm>
+          <a:prstGeom prst="ellipse">
+            <a:avLst/>
+          </a:prstGeom>
+          <a:solidFill>
+            <a:srgbClr val="0068B7"/>
+          </a:solidFill>
+          <a:ln w="12700">
+            <a:solidFill>
+              <a:srgbClr val="0068B7"/>
+            </a:solidFill>
+            <a:prstDash val="solid"/>
+          </a:ln>
+        </p:spPr>
+      </p:sp>
+      <p:sp>
+        <p:nvSpPr>
+          <p:cNvPr id="8" name="Text 6"/>
+          <p:cNvSpPr/>
+          <p:nvPr/>
+        </p:nvSpPr>
+        <p:spPr>
+          <a:xfrm>
+            <a:off x="640080" y="731520"/>
+            <a:ext cx="420624" cy="164592"/>
+          </a:xfrm>
+          <a:prstGeom prst="rect">
+            <a:avLst/>
+          </a:prstGeom>
+          <a:noFill/>
+          <a:ln/>
+        </p:spPr>
+        <p:txBody>
+          <a:bodyPr wrap="square" lIns="0" tIns="0" rIns="0" bIns="0" rtlCol="0" anchor="ctr"/>
+          <a:lstStyle/>
+          <a:p>
+            <a:pPr algn="ctr" indent="0" marL="0">
+              <a:buNone/>
+            </a:pPr>
+            <a:r>
+              <a:rPr lang="en-US" sz="1100" b="1" dirty="0">
+                <a:solidFill>
+                  <a:srgbClr val="FFFFFF"/>
+                </a:solidFill>
+                <a:latin typeface="Aptos" pitchFamily="34" charset="0"/>
+                <a:ea typeface="Aptos" pitchFamily="34" charset="-122"/>
+                <a:cs typeface="Aptos" pitchFamily="34" charset="-120"/>
+              </a:rPr>
+              <a:t>9</a:t>
+            </a:r>
+            <a:endParaRPr lang="en-US" sz="1100" dirty="0"/>
+          </a:p>
+        </p:txBody>
+      </p:sp>
+      <p:sp>
+        <p:nvSpPr>
+          <p:cNvPr id="9" name="Text 7"/>
+          <p:cNvSpPr/>
+          <p:nvPr/>
+        </p:nvSpPr>
+        <p:spPr>
+          <a:xfrm>
+            <a:off x="640080" y="621792"/>
             <a:ext cx="10881360" cy="566928"/>
           </a:xfrm>
           <a:prstGeom prst="rect">
@@ -3855,7 +5394,7 @@
                 <a:ea typeface="Aptos Display" pitchFamily="34" charset="-122"/>
                 <a:cs typeface="Aptos Display" pitchFamily="34" charset="-120"/>
               </a:rPr>
-              <a:t>Expected Artifact or Evidence</a:t>
+              <a:t>Practical Exercise</a:t>
             </a:r>
             <a:endParaRPr lang="en-US" sz="2700" dirty="0"/>
           </a:p>
@@ -3863,32 +5402,150 @@
       </p:sp>
       <p:sp>
         <p:nvSpPr>
-          <p:cNvPr id="7" name="Text 5"/>
-          <p:cNvSpPr/>
-          <p:nvPr/>
-        </p:nvSpPr>
-        <p:spPr>
-          <a:xfrm>
-            <a:off x="822960" y="1325880"/>
-            <a:ext cx="10378440" cy="4800600"/>
-          </a:xfrm>
-          <a:prstGeom prst="rect">
-            <a:avLst/>
-          </a:prstGeom>
-          <a:noFill/>
-          <a:ln/>
-        </p:spPr>
-        <p:txBody>
-          <a:bodyPr wrap="square" lIns="1016" tIns="1016" rIns="1016" bIns="1016" rtlCol="0" anchor="t">
+          <p:cNvPr id="10" name="Text 8"/>
+          <p:cNvSpPr/>
+          <p:nvPr/>
+        </p:nvSpPr>
+        <p:spPr>
+          <a:xfrm>
+            <a:off x="868680" y="1417320"/>
+            <a:ext cx="6675120" cy="4434840"/>
+          </a:xfrm>
+          <a:prstGeom prst="rect">
+            <a:avLst/>
+          </a:prstGeom>
+          <a:noFill/>
+          <a:ln/>
+        </p:spPr>
+        <p:txBody>
+          <a:bodyPr wrap="square" lIns="635" tIns="635" rIns="635" bIns="635" rtlCol="0" anchor="t">
             <a:normAutofit/>
           </a:bodyPr>
           <a:lstStyle/>
           <a:p>
+            <a:r>
+              <a:rPr lang="en-US" sz="1700" dirty="0">
+                <a:solidFill>
+                  <a:srgbClr val="17364A"/>
+                </a:solidFill>
+                <a:latin typeface="Aptos" pitchFamily="34" charset="0"/>
+                <a:ea typeface="Aptos" pitchFamily="34" charset="-122"/>
+                <a:cs typeface="Aptos" pitchFamily="34" charset="-120"/>
+              </a:rPr>
+              <a:t>Create a role-based AI workforce readiness plan.</a:t>
+            </a:r>
+            <a:endParaRPr lang="en-US" sz="1700" dirty="0"/>
+          </a:p>
+          <a:p>
+            <a:r>
+              <a:rPr lang="en-US" sz="1700" dirty="0">
+                <a:solidFill>
+                  <a:srgbClr val="17364A"/>
+                </a:solidFill>
+                <a:latin typeface="Aptos" pitchFamily="34" charset="0"/>
+                <a:ea typeface="Aptos" pitchFamily="34" charset="-122"/>
+                <a:cs typeface="Aptos" pitchFamily="34" charset="-120"/>
+              </a:rPr>
+              <a:t>Include role groups, competencies, required training, responsibilities, decision authority, and support needs.</a:t>
+            </a:r>
+            <a:endParaRPr lang="en-US" sz="1700" dirty="0"/>
+          </a:p>
+        </p:txBody>
+      </p:sp>
+      <p:sp>
+        <p:nvSpPr>
+          <p:cNvPr id="11" name="Shape 9"/>
+          <p:cNvSpPr/>
+          <p:nvPr/>
+        </p:nvSpPr>
+        <p:spPr>
+          <a:xfrm>
+            <a:off x="7909560" y="1417320"/>
+            <a:ext cx="3154680" cy="1828800"/>
+          </a:xfrm>
+          <a:prstGeom prst="roundRect">
+            <a:avLst>
+              <a:gd name="adj" fmla="val 6000"/>
+            </a:avLst>
+          </a:prstGeom>
+          <a:solidFill>
+            <a:srgbClr val="EEF8ED"/>
+          </a:solidFill>
+          <a:ln w="12700">
+            <a:solidFill>
+              <a:srgbClr val="B9D7E6"/>
+            </a:solidFill>
+            <a:prstDash val="solid"/>
+          </a:ln>
+        </p:spPr>
+      </p:sp>
+      <p:sp>
+        <p:nvSpPr>
+          <p:cNvPr id="12" name="Text 10"/>
+          <p:cNvSpPr/>
+          <p:nvPr/>
+        </p:nvSpPr>
+        <p:spPr>
+          <a:xfrm>
+            <a:off x="8074152" y="1563624"/>
+            <a:ext cx="2825496" cy="201168"/>
+          </a:xfrm>
+          <a:prstGeom prst="rect">
+            <a:avLst/>
+          </a:prstGeom>
+          <a:noFill/>
+          <a:ln/>
+        </p:spPr>
+        <p:txBody>
+          <a:bodyPr wrap="square" lIns="0" tIns="0" rIns="0" bIns="0" rtlCol="0" anchor="ctr"/>
+          <a:lstStyle/>
+          <a:p>
             <a:pPr indent="0" marL="0">
               <a:buNone/>
             </a:pPr>
             <a:r>
-              <a:rPr lang="en-US" sz="1420" dirty="0">
+              <a:rPr lang="en-US" sz="950" b="1" dirty="0">
+                <a:solidFill>
+                  <a:srgbClr val="0068B7"/>
+                </a:solidFill>
+                <a:latin typeface="Aptos" pitchFamily="34" charset="0"/>
+                <a:ea typeface="Aptos" pitchFamily="34" charset="-122"/>
+                <a:cs typeface="Aptos" pitchFamily="34" charset="-120"/>
+              </a:rPr>
+              <a:t>Key idea</a:t>
+            </a:r>
+            <a:endParaRPr lang="en-US" sz="950" dirty="0"/>
+          </a:p>
+        </p:txBody>
+      </p:sp>
+      <p:sp>
+        <p:nvSpPr>
+          <p:cNvPr id="13" name="Text 11"/>
+          <p:cNvSpPr/>
+          <p:nvPr/>
+        </p:nvSpPr>
+        <p:spPr>
+          <a:xfrm>
+            <a:off x="8074152" y="1856232"/>
+            <a:ext cx="2825496" cy="1261872"/>
+          </a:xfrm>
+          <a:prstGeom prst="rect">
+            <a:avLst/>
+          </a:prstGeom>
+          <a:noFill/>
+          <a:ln/>
+        </p:spPr>
+        <p:txBody>
+          <a:bodyPr wrap="square" lIns="0" tIns="0" rIns="0" bIns="0" rtlCol="0" anchor="t">
+            <a:normAutofit/>
+          </a:bodyPr>
+          <a:lstStyle/>
+          <a:p>
+            <a:pPr indent="0" marL="0">
+              <a:buNone/>
+            </a:pPr>
+            <a:r>
+              <a:rPr lang="en-US" sz="1250" dirty="0">
                 <a:solidFill>
                   <a:srgbClr val="17364A"/>
                 </a:solidFill>
@@ -3896,9 +5553,116 @@
                 <a:ea typeface="Aptos" pitchFamily="34" charset="-122"/>
                 <a:cs typeface="Aptos" pitchFamily="34" charset="-120"/>
               </a:rPr>
-              <a:t>Workforce readiness plan; role-based competency matrix; training assignment matrix; AI bridge role description.</a:t>
-            </a:r>
-            <a:endParaRPr lang="en-US" sz="1420" dirty="0"/>
+              <a:t>Create a role-based AI workforce readiness plan.</a:t>
+            </a:r>
+            <a:endParaRPr lang="en-US" sz="1250" dirty="0"/>
+          </a:p>
+        </p:txBody>
+      </p:sp>
+      <p:sp>
+        <p:nvSpPr>
+          <p:cNvPr id="14" name="Shape 12"/>
+          <p:cNvSpPr/>
+          <p:nvPr/>
+        </p:nvSpPr>
+        <p:spPr>
+          <a:xfrm>
+            <a:off x="7909560" y="3520440"/>
+            <a:ext cx="3154680" cy="1737360"/>
+          </a:xfrm>
+          <a:prstGeom prst="roundRect">
+            <a:avLst>
+              <a:gd name="adj" fmla="val 6316"/>
+            </a:avLst>
+          </a:prstGeom>
+          <a:solidFill>
+            <a:srgbClr val="EAF6F8"/>
+          </a:solidFill>
+          <a:ln w="12700">
+            <a:solidFill>
+              <a:srgbClr val="B9D7E6"/>
+            </a:solidFill>
+            <a:prstDash val="solid"/>
+          </a:ln>
+        </p:spPr>
+      </p:sp>
+      <p:sp>
+        <p:nvSpPr>
+          <p:cNvPr id="15" name="Text 13"/>
+          <p:cNvSpPr/>
+          <p:nvPr/>
+        </p:nvSpPr>
+        <p:spPr>
+          <a:xfrm>
+            <a:off x="8074152" y="3666744"/>
+            <a:ext cx="2825496" cy="201168"/>
+          </a:xfrm>
+          <a:prstGeom prst="rect">
+            <a:avLst/>
+          </a:prstGeom>
+          <a:noFill/>
+          <a:ln/>
+        </p:spPr>
+        <p:txBody>
+          <a:bodyPr wrap="square" lIns="0" tIns="0" rIns="0" bIns="0" rtlCol="0" anchor="ctr"/>
+          <a:lstStyle/>
+          <a:p>
+            <a:pPr indent="0" marL="0">
+              <a:buNone/>
+            </a:pPr>
+            <a:r>
+              <a:rPr lang="en-US" sz="950" b="1" dirty="0">
+                <a:solidFill>
+                  <a:srgbClr val="0068B7"/>
+                </a:solidFill>
+                <a:latin typeface="Aptos" pitchFamily="34" charset="0"/>
+                <a:ea typeface="Aptos" pitchFamily="34" charset="-122"/>
+                <a:cs typeface="Aptos" pitchFamily="34" charset="-120"/>
+              </a:rPr>
+              <a:t>Use this for</a:t>
+            </a:r>
+            <a:endParaRPr lang="en-US" sz="950" dirty="0"/>
+          </a:p>
+        </p:txBody>
+      </p:sp>
+      <p:sp>
+        <p:nvSpPr>
+          <p:cNvPr id="16" name="Text 14"/>
+          <p:cNvSpPr/>
+          <p:nvPr/>
+        </p:nvSpPr>
+        <p:spPr>
+          <a:xfrm>
+            <a:off x="8074152" y="3959352"/>
+            <a:ext cx="2825496" cy="1170432"/>
+          </a:xfrm>
+          <a:prstGeom prst="rect">
+            <a:avLst/>
+          </a:prstGeom>
+          <a:noFill/>
+          <a:ln/>
+        </p:spPr>
+        <p:txBody>
+          <a:bodyPr wrap="square" lIns="0" tIns="0" rIns="0" bIns="0" rtlCol="0" anchor="t">
+            <a:normAutofit/>
+          </a:bodyPr>
+          <a:lstStyle/>
+          <a:p>
+            <a:pPr indent="0" marL="0">
+              <a:buNone/>
+            </a:pPr>
+            <a:r>
+              <a:rPr lang="en-US" sz="1250" dirty="0">
+                <a:solidFill>
+                  <a:srgbClr val="17364A"/>
+                </a:solidFill>
+                <a:latin typeface="Aptos" pitchFamily="34" charset="0"/>
+                <a:ea typeface="Aptos" pitchFamily="34" charset="-122"/>
+                <a:cs typeface="Aptos" pitchFamily="34" charset="-120"/>
+              </a:rPr>
+              <a:t>Connect the concept to public health decisions, safeguards, documentation, or implementation work.</a:t>
+            </a:r>
+            <a:endParaRPr lang="en-US" sz="1250" dirty="0"/>
           </a:p>
         </p:txBody>
       </p:sp>
@@ -3961,7 +5725,32 @@
       </p:sp>
       <p:sp>
         <p:nvSpPr>
-          <p:cNvPr id="3" name="Text 1"/>
+          <p:cNvPr id="3" name="Shape 1"/>
+          <p:cNvSpPr/>
+          <p:nvPr/>
+        </p:nvSpPr>
+        <p:spPr>
+          <a:xfrm>
+            <a:off x="0" y="164592"/>
+            <a:ext cx="146304" cy="6693408"/>
+          </a:xfrm>
+          <a:prstGeom prst="rect">
+            <a:avLst/>
+          </a:prstGeom>
+          <a:solidFill>
+            <a:srgbClr val="2F8A28"/>
+          </a:solidFill>
+          <a:ln w="12700">
+            <a:solidFill>
+              <a:srgbClr val="2F8A28"/>
+            </a:solidFill>
+            <a:prstDash val="solid"/>
+          </a:ln>
+        </p:spPr>
+      </p:sp>
+      <p:sp>
+        <p:nvSpPr>
+          <p:cNvPr id="4" name="Text 2"/>
           <p:cNvSpPr/>
           <p:nvPr/>
         </p:nvSpPr>
@@ -4000,7 +5789,7 @@
       </p:sp>
       <p:sp>
         <p:nvSpPr>
-          <p:cNvPr id="4" name="Text 2"/>
+          <p:cNvPr id="5" name="Text 3"/>
           <p:cNvSpPr/>
           <p:nvPr/>
         </p:nvSpPr>
@@ -4039,7 +5828,7 @@
       </p:sp>
       <p:sp>
         <p:nvSpPr>
-          <p:cNvPr id="5" name="Text 3"/>
+          <p:cNvPr id="6" name="Text 4"/>
           <p:cNvSpPr/>
           <p:nvPr/>
         </p:nvSpPr>
@@ -4078,13 +5867,77 @@
       </p:sp>
       <p:sp>
         <p:nvSpPr>
-          <p:cNvPr id="6" name="Text 4"/>
+          <p:cNvPr id="7" name="Shape 5"/>
           <p:cNvSpPr/>
           <p:nvPr/>
         </p:nvSpPr>
         <p:spPr>
           <a:xfrm>
             <a:off x="640080" y="658368"/>
+            <a:ext cx="420624" cy="420624"/>
+          </a:xfrm>
+          <a:prstGeom prst="ellipse">
+            <a:avLst/>
+          </a:prstGeom>
+          <a:solidFill>
+            <a:srgbClr val="0068B7"/>
+          </a:solidFill>
+          <a:ln w="12700">
+            <a:solidFill>
+              <a:srgbClr val="0068B7"/>
+            </a:solidFill>
+            <a:prstDash val="solid"/>
+          </a:ln>
+        </p:spPr>
+      </p:sp>
+      <p:sp>
+        <p:nvSpPr>
+          <p:cNvPr id="8" name="Text 6"/>
+          <p:cNvSpPr/>
+          <p:nvPr/>
+        </p:nvSpPr>
+        <p:spPr>
+          <a:xfrm>
+            <a:off x="640080" y="731520"/>
+            <a:ext cx="420624" cy="164592"/>
+          </a:xfrm>
+          <a:prstGeom prst="rect">
+            <a:avLst/>
+          </a:prstGeom>
+          <a:noFill/>
+          <a:ln/>
+        </p:spPr>
+        <p:txBody>
+          <a:bodyPr wrap="square" lIns="0" tIns="0" rIns="0" bIns="0" rtlCol="0" anchor="ctr"/>
+          <a:lstStyle/>
+          <a:p>
+            <a:pPr algn="ctr" indent="0" marL="0">
+              <a:buNone/>
+            </a:pPr>
+            <a:r>
+              <a:rPr lang="en-US" sz="1100" b="1" dirty="0">
+                <a:solidFill>
+                  <a:srgbClr val="FFFFFF"/>
+                </a:solidFill>
+                <a:latin typeface="Aptos" pitchFamily="34" charset="0"/>
+                <a:ea typeface="Aptos" pitchFamily="34" charset="-122"/>
+                <a:cs typeface="Aptos" pitchFamily="34" charset="-120"/>
+              </a:rPr>
+              <a:t>10</a:t>
+            </a:r>
+            <a:endParaRPr lang="en-US" sz="1100" dirty="0"/>
+          </a:p>
+        </p:txBody>
+      </p:sp>
+      <p:sp>
+        <p:nvSpPr>
+          <p:cNvPr id="9" name="Text 7"/>
+          <p:cNvSpPr/>
+          <p:nvPr/>
+        </p:nvSpPr>
+        <p:spPr>
+          <a:xfrm>
+            <a:off x="640080" y="621792"/>
             <a:ext cx="10881360" cy="566928"/>
           </a:xfrm>
           <a:prstGeom prst="rect">
@@ -4111,7 +5964,7 @@
                 <a:ea typeface="Aptos Display" pitchFamily="34" charset="-122"/>
                 <a:cs typeface="Aptos Display" pitchFamily="34" charset="-120"/>
               </a:rPr>
-              <a:t>Expected Assignment</a:t>
+              <a:t>Before You Begin</a:t>
             </a:r>
             <a:endParaRPr lang="en-US" sz="2700" dirty="0"/>
           </a:p>
@@ -4119,14 +5972,14 @@
       </p:sp>
       <p:sp>
         <p:nvSpPr>
-          <p:cNvPr id="7" name="Text 5"/>
-          <p:cNvSpPr/>
-          <p:nvPr/>
-        </p:nvSpPr>
-        <p:spPr>
-          <a:xfrm>
-            <a:off x="822960" y="1325880"/>
-            <a:ext cx="10378440" cy="4800600"/>
+          <p:cNvPr id="10" name="Text 8"/>
+          <p:cNvSpPr/>
+          <p:nvPr/>
+        </p:nvSpPr>
+        <p:spPr>
+          <a:xfrm>
+            <a:off x="868680" y="1417320"/>
+            <a:ext cx="6675120" cy="4434840"/>
           </a:xfrm>
           <a:prstGeom prst="rect">
             <a:avLst/>
@@ -4141,7 +5994,7 @@
           <a:lstStyle/>
           <a:p>
             <a:r>
-              <a:rPr lang="en-US" sz="1450" dirty="0">
+              <a:rPr lang="en-US" sz="1700" dirty="0">
                 <a:solidFill>
                   <a:srgbClr val="17364A"/>
                 </a:solidFill>
@@ -4149,9 +6002,251 @@
                 <a:ea typeface="Aptos" pitchFamily="34" charset="-122"/>
                 <a:cs typeface="Aptos" pitchFamily="34" charset="-120"/>
               </a:rPr>
-              <a:t>Workforce readiness plan; role-based competency matrix; training assignment matrix; AI bridge role description.</a:t>
-            </a:r>
-            <a:endParaRPr lang="en-US" sz="1450" dirty="0"/>
+              <a:t>Choose a real or realistic public health AI use case.</a:t>
+            </a:r>
+            <a:endParaRPr lang="en-US" sz="1700" dirty="0"/>
+          </a:p>
+          <a:p>
+            <a:r>
+              <a:rPr lang="en-US" sz="1700" dirty="0">
+                <a:solidFill>
+                  <a:srgbClr val="17364A"/>
+                </a:solidFill>
+                <a:latin typeface="Aptos" pitchFamily="34" charset="0"/>
+                <a:ea typeface="Aptos" pitchFamily="34" charset="-122"/>
+                <a:cs typeface="Aptos" pitchFamily="34" charset="-120"/>
+              </a:rPr>
+              <a:t>Document assumptions, unresolved questions, and which agency roles would need to review the artifact before it is adopted.</a:t>
+            </a:r>
+            <a:endParaRPr lang="en-US" sz="1700" dirty="0"/>
+          </a:p>
+          <a:p>
+            <a:r>
+              <a:rPr lang="en-US" sz="1700" dirty="0">
+                <a:solidFill>
+                  <a:srgbClr val="17364A"/>
+                </a:solidFill>
+                <a:latin typeface="Aptos" pitchFamily="34" charset="0"/>
+                <a:ea typeface="Aptos" pitchFamily="34" charset="-122"/>
+                <a:cs typeface="Aptos" pitchFamily="34" charset="-120"/>
+              </a:rPr>
+              <a:t>The exercise should produce a work product that could support governance review, leadership discussion, implementation.</a:t>
+            </a:r>
+            <a:endParaRPr lang="en-US" sz="1700" dirty="0"/>
+          </a:p>
+        </p:txBody>
+      </p:sp>
+      <p:sp>
+        <p:nvSpPr>
+          <p:cNvPr id="11" name="Shape 9"/>
+          <p:cNvSpPr/>
+          <p:nvPr/>
+        </p:nvSpPr>
+        <p:spPr>
+          <a:xfrm>
+            <a:off x="7909560" y="1417320"/>
+            <a:ext cx="3154680" cy="1828800"/>
+          </a:xfrm>
+          <a:prstGeom prst="roundRect">
+            <a:avLst>
+              <a:gd name="adj" fmla="val 6000"/>
+            </a:avLst>
+          </a:prstGeom>
+          <a:solidFill>
+            <a:srgbClr val="EEF8ED"/>
+          </a:solidFill>
+          <a:ln w="12700">
+            <a:solidFill>
+              <a:srgbClr val="B9D7E6"/>
+            </a:solidFill>
+            <a:prstDash val="solid"/>
+          </a:ln>
+        </p:spPr>
+      </p:sp>
+      <p:sp>
+        <p:nvSpPr>
+          <p:cNvPr id="12" name="Text 10"/>
+          <p:cNvSpPr/>
+          <p:nvPr/>
+        </p:nvSpPr>
+        <p:spPr>
+          <a:xfrm>
+            <a:off x="8074152" y="1563624"/>
+            <a:ext cx="2825496" cy="201168"/>
+          </a:xfrm>
+          <a:prstGeom prst="rect">
+            <a:avLst/>
+          </a:prstGeom>
+          <a:noFill/>
+          <a:ln/>
+        </p:spPr>
+        <p:txBody>
+          <a:bodyPr wrap="square" lIns="0" tIns="0" rIns="0" bIns="0" rtlCol="0" anchor="ctr"/>
+          <a:lstStyle/>
+          <a:p>
+            <a:pPr indent="0" marL="0">
+              <a:buNone/>
+            </a:pPr>
+            <a:r>
+              <a:rPr lang="en-US" sz="950" b="1" dirty="0">
+                <a:solidFill>
+                  <a:srgbClr val="0068B7"/>
+                </a:solidFill>
+                <a:latin typeface="Aptos" pitchFamily="34" charset="0"/>
+                <a:ea typeface="Aptos" pitchFamily="34" charset="-122"/>
+                <a:cs typeface="Aptos" pitchFamily="34" charset="-120"/>
+              </a:rPr>
+              <a:t>Key idea</a:t>
+            </a:r>
+            <a:endParaRPr lang="en-US" sz="950" dirty="0"/>
+          </a:p>
+        </p:txBody>
+      </p:sp>
+      <p:sp>
+        <p:nvSpPr>
+          <p:cNvPr id="13" name="Text 11"/>
+          <p:cNvSpPr/>
+          <p:nvPr/>
+        </p:nvSpPr>
+        <p:spPr>
+          <a:xfrm>
+            <a:off x="8074152" y="1856232"/>
+            <a:ext cx="2825496" cy="1261872"/>
+          </a:xfrm>
+          <a:prstGeom prst="rect">
+            <a:avLst/>
+          </a:prstGeom>
+          <a:noFill/>
+          <a:ln/>
+        </p:spPr>
+        <p:txBody>
+          <a:bodyPr wrap="square" lIns="0" tIns="0" rIns="0" bIns="0" rtlCol="0" anchor="t">
+            <a:normAutofit/>
+          </a:bodyPr>
+          <a:lstStyle/>
+          <a:p>
+            <a:pPr indent="0" marL="0">
+              <a:buNone/>
+            </a:pPr>
+            <a:r>
+              <a:rPr lang="en-US" sz="1250" dirty="0">
+                <a:solidFill>
+                  <a:srgbClr val="17364A"/>
+                </a:solidFill>
+                <a:latin typeface="Aptos" pitchFamily="34" charset="0"/>
+                <a:ea typeface="Aptos" pitchFamily="34" charset="-122"/>
+                <a:cs typeface="Aptos" pitchFamily="34" charset="-120"/>
+              </a:rPr>
+              <a:t>Choose a real or realistic public health AI use case.</a:t>
+            </a:r>
+            <a:endParaRPr lang="en-US" sz="1250" dirty="0"/>
+          </a:p>
+        </p:txBody>
+      </p:sp>
+      <p:sp>
+        <p:nvSpPr>
+          <p:cNvPr id="14" name="Shape 12"/>
+          <p:cNvSpPr/>
+          <p:nvPr/>
+        </p:nvSpPr>
+        <p:spPr>
+          <a:xfrm>
+            <a:off x="7909560" y="3520440"/>
+            <a:ext cx="3154680" cy="1737360"/>
+          </a:xfrm>
+          <a:prstGeom prst="roundRect">
+            <a:avLst>
+              <a:gd name="adj" fmla="val 6316"/>
+            </a:avLst>
+          </a:prstGeom>
+          <a:solidFill>
+            <a:srgbClr val="EAF6F8"/>
+          </a:solidFill>
+          <a:ln w="12700">
+            <a:solidFill>
+              <a:srgbClr val="B9D7E6"/>
+            </a:solidFill>
+            <a:prstDash val="solid"/>
+          </a:ln>
+        </p:spPr>
+      </p:sp>
+      <p:sp>
+        <p:nvSpPr>
+          <p:cNvPr id="15" name="Text 13"/>
+          <p:cNvSpPr/>
+          <p:nvPr/>
+        </p:nvSpPr>
+        <p:spPr>
+          <a:xfrm>
+            <a:off x="8074152" y="3666744"/>
+            <a:ext cx="2825496" cy="201168"/>
+          </a:xfrm>
+          <a:prstGeom prst="rect">
+            <a:avLst/>
+          </a:prstGeom>
+          <a:noFill/>
+          <a:ln/>
+        </p:spPr>
+        <p:txBody>
+          <a:bodyPr wrap="square" lIns="0" tIns="0" rIns="0" bIns="0" rtlCol="0" anchor="ctr"/>
+          <a:lstStyle/>
+          <a:p>
+            <a:pPr indent="0" marL="0">
+              <a:buNone/>
+            </a:pPr>
+            <a:r>
+              <a:rPr lang="en-US" sz="950" b="1" dirty="0">
+                <a:solidFill>
+                  <a:srgbClr val="0068B7"/>
+                </a:solidFill>
+                <a:latin typeface="Aptos" pitchFamily="34" charset="0"/>
+                <a:ea typeface="Aptos" pitchFamily="34" charset="-122"/>
+                <a:cs typeface="Aptos" pitchFamily="34" charset="-120"/>
+              </a:rPr>
+              <a:t>Use this for</a:t>
+            </a:r>
+            <a:endParaRPr lang="en-US" sz="950" dirty="0"/>
+          </a:p>
+        </p:txBody>
+      </p:sp>
+      <p:sp>
+        <p:nvSpPr>
+          <p:cNvPr id="16" name="Text 14"/>
+          <p:cNvSpPr/>
+          <p:nvPr/>
+        </p:nvSpPr>
+        <p:spPr>
+          <a:xfrm>
+            <a:off x="8074152" y="3959352"/>
+            <a:ext cx="2825496" cy="1170432"/>
+          </a:xfrm>
+          <a:prstGeom prst="rect">
+            <a:avLst/>
+          </a:prstGeom>
+          <a:noFill/>
+          <a:ln/>
+        </p:spPr>
+        <p:txBody>
+          <a:bodyPr wrap="square" lIns="0" tIns="0" rIns="0" bIns="0" rtlCol="0" anchor="t">
+            <a:normAutofit/>
+          </a:bodyPr>
+          <a:lstStyle/>
+          <a:p>
+            <a:pPr indent="0" marL="0">
+              <a:buNone/>
+            </a:pPr>
+            <a:r>
+              <a:rPr lang="en-US" sz="1250" dirty="0">
+                <a:solidFill>
+                  <a:srgbClr val="17364A"/>
+                </a:solidFill>
+                <a:latin typeface="Aptos" pitchFamily="34" charset="0"/>
+                <a:ea typeface="Aptos" pitchFamily="34" charset="-122"/>
+                <a:cs typeface="Aptos" pitchFamily="34" charset="-120"/>
+              </a:rPr>
+              <a:t>Connect the concept to public health decisions, safeguards, documentation, or implementation work.</a:t>
+            </a:r>
+            <a:endParaRPr lang="en-US" sz="1250" dirty="0"/>
           </a:p>
         </p:txBody>
       </p:sp>
@@ -4214,7 +6309,32 @@
       </p:sp>
       <p:sp>
         <p:nvSpPr>
-          <p:cNvPr id="3" name="Text 1"/>
+          <p:cNvPr id="3" name="Shape 1"/>
+          <p:cNvSpPr/>
+          <p:nvPr/>
+        </p:nvSpPr>
+        <p:spPr>
+          <a:xfrm>
+            <a:off x="0" y="164592"/>
+            <a:ext cx="146304" cy="6693408"/>
+          </a:xfrm>
+          <a:prstGeom prst="rect">
+            <a:avLst/>
+          </a:prstGeom>
+          <a:solidFill>
+            <a:srgbClr val="2F8A28"/>
+          </a:solidFill>
+          <a:ln w="12700">
+            <a:solidFill>
+              <a:srgbClr val="2F8A28"/>
+            </a:solidFill>
+            <a:prstDash val="solid"/>
+          </a:ln>
+        </p:spPr>
+      </p:sp>
+      <p:sp>
+        <p:nvSpPr>
+          <p:cNvPr id="4" name="Text 2"/>
           <p:cNvSpPr/>
           <p:nvPr/>
         </p:nvSpPr>
@@ -4253,7 +6373,7 @@
       </p:sp>
       <p:sp>
         <p:nvSpPr>
-          <p:cNvPr id="4" name="Text 2"/>
+          <p:cNvPr id="5" name="Text 3"/>
           <p:cNvSpPr/>
           <p:nvPr/>
         </p:nvSpPr>
@@ -4292,7 +6412,7 @@
       </p:sp>
       <p:sp>
         <p:nvSpPr>
-          <p:cNvPr id="5" name="Text 3"/>
+          <p:cNvPr id="6" name="Text 4"/>
           <p:cNvSpPr/>
           <p:nvPr/>
         </p:nvSpPr>
@@ -4331,13 +6451,77 @@
       </p:sp>
       <p:sp>
         <p:nvSpPr>
-          <p:cNvPr id="6" name="Text 4"/>
+          <p:cNvPr id="7" name="Shape 5"/>
           <p:cNvSpPr/>
           <p:nvPr/>
         </p:nvSpPr>
         <p:spPr>
           <a:xfrm>
             <a:off x="640080" y="658368"/>
+            <a:ext cx="420624" cy="420624"/>
+          </a:xfrm>
+          <a:prstGeom prst="ellipse">
+            <a:avLst/>
+          </a:prstGeom>
+          <a:solidFill>
+            <a:srgbClr val="0068B7"/>
+          </a:solidFill>
+          <a:ln w="12700">
+            <a:solidFill>
+              <a:srgbClr val="0068B7"/>
+            </a:solidFill>
+            <a:prstDash val="solid"/>
+          </a:ln>
+        </p:spPr>
+      </p:sp>
+      <p:sp>
+        <p:nvSpPr>
+          <p:cNvPr id="8" name="Text 6"/>
+          <p:cNvSpPr/>
+          <p:nvPr/>
+        </p:nvSpPr>
+        <p:spPr>
+          <a:xfrm>
+            <a:off x="640080" y="731520"/>
+            <a:ext cx="420624" cy="164592"/>
+          </a:xfrm>
+          <a:prstGeom prst="rect">
+            <a:avLst/>
+          </a:prstGeom>
+          <a:noFill/>
+          <a:ln/>
+        </p:spPr>
+        <p:txBody>
+          <a:bodyPr wrap="square" lIns="0" tIns="0" rIns="0" bIns="0" rtlCol="0" anchor="ctr"/>
+          <a:lstStyle/>
+          <a:p>
+            <a:pPr algn="ctr" indent="0" marL="0">
+              <a:buNone/>
+            </a:pPr>
+            <a:r>
+              <a:rPr lang="en-US" sz="1100" b="1" dirty="0">
+                <a:solidFill>
+                  <a:srgbClr val="FFFFFF"/>
+                </a:solidFill>
+                <a:latin typeface="Aptos" pitchFamily="34" charset="0"/>
+                <a:ea typeface="Aptos" pitchFamily="34" charset="-122"/>
+                <a:cs typeface="Aptos" pitchFamily="34" charset="-120"/>
+              </a:rPr>
+              <a:t>11</a:t>
+            </a:r>
+            <a:endParaRPr lang="en-US" sz="1100" dirty="0"/>
+          </a:p>
+        </p:txBody>
+      </p:sp>
+      <p:sp>
+        <p:nvSpPr>
+          <p:cNvPr id="9" name="Text 7"/>
+          <p:cNvSpPr/>
+          <p:nvPr/>
+        </p:nvSpPr>
+        <p:spPr>
+          <a:xfrm>
+            <a:off x="640080" y="621792"/>
             <a:ext cx="10881360" cy="566928"/>
           </a:xfrm>
           <a:prstGeom prst="rect">
@@ -4364,7 +6548,7 @@
                 <a:ea typeface="Aptos Display" pitchFamily="34" charset="-122"/>
                 <a:cs typeface="Aptos Display" pitchFamily="34" charset="-120"/>
               </a:rPr>
-              <a:t>Knowledge Check</a:t>
+              <a:t>Expected Artifact or Evidence</a:t>
             </a:r>
             <a:endParaRPr lang="en-US" sz="2700" dirty="0"/>
           </a:p>
@@ -4372,14 +6556,14 @@
       </p:sp>
       <p:sp>
         <p:nvSpPr>
-          <p:cNvPr id="7" name="Text 5"/>
-          <p:cNvSpPr/>
-          <p:nvPr/>
-        </p:nvSpPr>
-        <p:spPr>
-          <a:xfrm>
-            <a:off x="822960" y="1325880"/>
-            <a:ext cx="10378440" cy="4800600"/>
+          <p:cNvPr id="10" name="Text 8"/>
+          <p:cNvSpPr/>
+          <p:nvPr/>
+        </p:nvSpPr>
+        <p:spPr>
+          <a:xfrm>
+            <a:off x="868680" y="1417320"/>
+            <a:ext cx="6675120" cy="4434840"/>
           </a:xfrm>
           <a:prstGeom prst="rect">
             <a:avLst/>
@@ -4394,7 +6578,7 @@
           <a:lstStyle/>
           <a:p>
             <a:r>
-              <a:rPr lang="en-US" sz="1450" dirty="0">
+              <a:rPr lang="en-US" sz="1700" dirty="0">
                 <a:solidFill>
                   <a:srgbClr val="17364A"/>
                 </a:solidFill>
@@ -4402,13 +6586,106 @@
                 <a:ea typeface="Aptos" pitchFamily="34" charset="-122"/>
                 <a:cs typeface="Aptos" pitchFamily="34" charset="-120"/>
               </a:rPr>
-              <a:t>1. What is the strongest reason this module topic belongs in AI leadership and governance training?</a:t>
-            </a:r>
-            <a:endParaRPr lang="en-US" sz="1450" dirty="0"/>
-          </a:p>
-          <a:p>
-            <a:r>
-              <a:rPr lang="en-US" sz="1450" dirty="0">
+              <a:t>Workforce readiness plan; role-based competency matrix; training assignment matrix; AI bridge role description.</a:t>
+            </a:r>
+            <a:endParaRPr lang="en-US" sz="1700" dirty="0"/>
+          </a:p>
+        </p:txBody>
+      </p:sp>
+      <p:sp>
+        <p:nvSpPr>
+          <p:cNvPr id="11" name="Shape 9"/>
+          <p:cNvSpPr/>
+          <p:nvPr/>
+        </p:nvSpPr>
+        <p:spPr>
+          <a:xfrm>
+            <a:off x="7909560" y="1417320"/>
+            <a:ext cx="3154680" cy="1828800"/>
+          </a:xfrm>
+          <a:prstGeom prst="roundRect">
+            <a:avLst>
+              <a:gd name="adj" fmla="val 6000"/>
+            </a:avLst>
+          </a:prstGeom>
+          <a:solidFill>
+            <a:srgbClr val="EEF8ED"/>
+          </a:solidFill>
+          <a:ln w="12700">
+            <a:solidFill>
+              <a:srgbClr val="B9D7E6"/>
+            </a:solidFill>
+            <a:prstDash val="solid"/>
+          </a:ln>
+        </p:spPr>
+      </p:sp>
+      <p:sp>
+        <p:nvSpPr>
+          <p:cNvPr id="12" name="Text 10"/>
+          <p:cNvSpPr/>
+          <p:nvPr/>
+        </p:nvSpPr>
+        <p:spPr>
+          <a:xfrm>
+            <a:off x="8074152" y="1563624"/>
+            <a:ext cx="2825496" cy="201168"/>
+          </a:xfrm>
+          <a:prstGeom prst="rect">
+            <a:avLst/>
+          </a:prstGeom>
+          <a:noFill/>
+          <a:ln/>
+        </p:spPr>
+        <p:txBody>
+          <a:bodyPr wrap="square" lIns="0" tIns="0" rIns="0" bIns="0" rtlCol="0" anchor="ctr"/>
+          <a:lstStyle/>
+          <a:p>
+            <a:pPr indent="0" marL="0">
+              <a:buNone/>
+            </a:pPr>
+            <a:r>
+              <a:rPr lang="en-US" sz="950" b="1" dirty="0">
+                <a:solidFill>
+                  <a:srgbClr val="0068B7"/>
+                </a:solidFill>
+                <a:latin typeface="Aptos" pitchFamily="34" charset="0"/>
+                <a:ea typeface="Aptos" pitchFamily="34" charset="-122"/>
+                <a:cs typeface="Aptos" pitchFamily="34" charset="-120"/>
+              </a:rPr>
+              <a:t>Key idea</a:t>
+            </a:r>
+            <a:endParaRPr lang="en-US" sz="950" dirty="0"/>
+          </a:p>
+        </p:txBody>
+      </p:sp>
+      <p:sp>
+        <p:nvSpPr>
+          <p:cNvPr id="13" name="Text 11"/>
+          <p:cNvSpPr/>
+          <p:nvPr/>
+        </p:nvSpPr>
+        <p:spPr>
+          <a:xfrm>
+            <a:off x="8074152" y="1856232"/>
+            <a:ext cx="2825496" cy="1261872"/>
+          </a:xfrm>
+          <a:prstGeom prst="rect">
+            <a:avLst/>
+          </a:prstGeom>
+          <a:noFill/>
+          <a:ln/>
+        </p:spPr>
+        <p:txBody>
+          <a:bodyPr wrap="square" lIns="0" tIns="0" rIns="0" bIns="0" rtlCol="0" anchor="t">
+            <a:normAutofit/>
+          </a:bodyPr>
+          <a:lstStyle/>
+          <a:p>
+            <a:pPr indent="0" marL="0">
+              <a:buNone/>
+            </a:pPr>
+            <a:r>
+              <a:rPr lang="en-US" sz="1250" dirty="0">
                 <a:solidFill>
                   <a:srgbClr val="17364A"/>
                 </a:solidFill>
@@ -4416,13 +6693,106 @@
                 <a:ea typeface="Aptos" pitchFamily="34" charset="-122"/>
                 <a:cs typeface="Aptos" pitchFamily="34" charset="-120"/>
               </a:rPr>
-              <a:t>2. Which practice best supports accountable public health AI governance?</a:t>
-            </a:r>
-            <a:endParaRPr lang="en-US" sz="1450" dirty="0"/>
-          </a:p>
-          <a:p>
-            <a:r>
-              <a:rPr lang="en-US" sz="1450" dirty="0">
+              <a:t>Workforce readiness plan; role-based competency matrix; training assignment matrix; AI bridge role description.</a:t>
+            </a:r>
+            <a:endParaRPr lang="en-US" sz="1250" dirty="0"/>
+          </a:p>
+        </p:txBody>
+      </p:sp>
+      <p:sp>
+        <p:nvSpPr>
+          <p:cNvPr id="14" name="Shape 12"/>
+          <p:cNvSpPr/>
+          <p:nvPr/>
+        </p:nvSpPr>
+        <p:spPr>
+          <a:xfrm>
+            <a:off x="7909560" y="3520440"/>
+            <a:ext cx="3154680" cy="1737360"/>
+          </a:xfrm>
+          <a:prstGeom prst="roundRect">
+            <a:avLst>
+              <a:gd name="adj" fmla="val 6316"/>
+            </a:avLst>
+          </a:prstGeom>
+          <a:solidFill>
+            <a:srgbClr val="EAF6F8"/>
+          </a:solidFill>
+          <a:ln w="12700">
+            <a:solidFill>
+              <a:srgbClr val="B9D7E6"/>
+            </a:solidFill>
+            <a:prstDash val="solid"/>
+          </a:ln>
+        </p:spPr>
+      </p:sp>
+      <p:sp>
+        <p:nvSpPr>
+          <p:cNvPr id="15" name="Text 13"/>
+          <p:cNvSpPr/>
+          <p:nvPr/>
+        </p:nvSpPr>
+        <p:spPr>
+          <a:xfrm>
+            <a:off x="8074152" y="3666744"/>
+            <a:ext cx="2825496" cy="201168"/>
+          </a:xfrm>
+          <a:prstGeom prst="rect">
+            <a:avLst/>
+          </a:prstGeom>
+          <a:noFill/>
+          <a:ln/>
+        </p:spPr>
+        <p:txBody>
+          <a:bodyPr wrap="square" lIns="0" tIns="0" rIns="0" bIns="0" rtlCol="0" anchor="ctr"/>
+          <a:lstStyle/>
+          <a:p>
+            <a:pPr indent="0" marL="0">
+              <a:buNone/>
+            </a:pPr>
+            <a:r>
+              <a:rPr lang="en-US" sz="950" b="1" dirty="0">
+                <a:solidFill>
+                  <a:srgbClr val="0068B7"/>
+                </a:solidFill>
+                <a:latin typeface="Aptos" pitchFamily="34" charset="0"/>
+                <a:ea typeface="Aptos" pitchFamily="34" charset="-122"/>
+                <a:cs typeface="Aptos" pitchFamily="34" charset="-120"/>
+              </a:rPr>
+              <a:t>Use this for</a:t>
+            </a:r>
+            <a:endParaRPr lang="en-US" sz="950" dirty="0"/>
+          </a:p>
+        </p:txBody>
+      </p:sp>
+      <p:sp>
+        <p:nvSpPr>
+          <p:cNvPr id="16" name="Text 14"/>
+          <p:cNvSpPr/>
+          <p:nvPr/>
+        </p:nvSpPr>
+        <p:spPr>
+          <a:xfrm>
+            <a:off x="8074152" y="3959352"/>
+            <a:ext cx="2825496" cy="1170432"/>
+          </a:xfrm>
+          <a:prstGeom prst="rect">
+            <a:avLst/>
+          </a:prstGeom>
+          <a:noFill/>
+          <a:ln/>
+        </p:spPr>
+        <p:txBody>
+          <a:bodyPr wrap="square" lIns="0" tIns="0" rIns="0" bIns="0" rtlCol="0" anchor="t">
+            <a:normAutofit/>
+          </a:bodyPr>
+          <a:lstStyle/>
+          <a:p>
+            <a:pPr indent="0" marL="0">
+              <a:buNone/>
+            </a:pPr>
+            <a:r>
+              <a:rPr lang="en-US" sz="1250" dirty="0">
                 <a:solidFill>
                   <a:srgbClr val="17364A"/>
                 </a:solidFill>
@@ -4430,37 +6800,9 @@
                 <a:ea typeface="Aptos" pitchFamily="34" charset="-122"/>
                 <a:cs typeface="Aptos" pitchFamily="34" charset="-120"/>
               </a:rPr>
-              <a:t>3. When should an AI use case be escalated for leadership or governance review?</a:t>
-            </a:r>
-            <a:endParaRPr lang="en-US" sz="1450" dirty="0"/>
-          </a:p>
-          <a:p>
-            <a:r>
-              <a:rPr lang="en-US" sz="1450" dirty="0">
-                <a:solidFill>
-                  <a:srgbClr val="17364A"/>
-                </a:solidFill>
-                <a:latin typeface="Aptos" pitchFamily="34" charset="0"/>
-                <a:ea typeface="Aptos" pitchFamily="34" charset="-122"/>
-                <a:cs typeface="Aptos" pitchFamily="34" charset="-120"/>
-              </a:rPr>
-              <a:t>4. What is weak evidence of completion for a leadership and governance module?</a:t>
-            </a:r>
-            <a:endParaRPr lang="en-US" sz="1450" dirty="0"/>
-          </a:p>
-          <a:p>
-            <a:r>
-              <a:rPr lang="en-US" sz="1450" dirty="0">
-                <a:solidFill>
-                  <a:srgbClr val="17364A"/>
-                </a:solidFill>
-                <a:latin typeface="Aptos" pitchFamily="34" charset="0"/>
-                <a:ea typeface="Aptos" pitchFamily="34" charset="-122"/>
-                <a:cs typeface="Aptos" pitchFamily="34" charset="-120"/>
-              </a:rPr>
-              <a:t>5. What should leaders do when an AI use case has meaningful benefits but unresolved risks?</a:t>
-            </a:r>
-            <a:endParaRPr lang="en-US" sz="1450" dirty="0"/>
+              <a:t>Connect the concept to public health decisions, safeguards, documentation, or implementation work.</a:t>
+            </a:r>
+            <a:endParaRPr lang="en-US" sz="1250" dirty="0"/>
           </a:p>
         </p:txBody>
       </p:sp>
@@ -4523,7 +6865,32 @@
       </p:sp>
       <p:sp>
         <p:nvSpPr>
-          <p:cNvPr id="3" name="Text 1"/>
+          <p:cNvPr id="3" name="Shape 1"/>
+          <p:cNvSpPr/>
+          <p:nvPr/>
+        </p:nvSpPr>
+        <p:spPr>
+          <a:xfrm>
+            <a:off x="0" y="164592"/>
+            <a:ext cx="146304" cy="6693408"/>
+          </a:xfrm>
+          <a:prstGeom prst="rect">
+            <a:avLst/>
+          </a:prstGeom>
+          <a:solidFill>
+            <a:srgbClr val="2F8A28"/>
+          </a:solidFill>
+          <a:ln w="12700">
+            <a:solidFill>
+              <a:srgbClr val="2F8A28"/>
+            </a:solidFill>
+            <a:prstDash val="solid"/>
+          </a:ln>
+        </p:spPr>
+      </p:sp>
+      <p:sp>
+        <p:nvSpPr>
+          <p:cNvPr id="4" name="Text 2"/>
           <p:cNvSpPr/>
           <p:nvPr/>
         </p:nvSpPr>
@@ -4562,7 +6929,7 @@
       </p:sp>
       <p:sp>
         <p:nvSpPr>
-          <p:cNvPr id="4" name="Text 2"/>
+          <p:cNvPr id="5" name="Text 3"/>
           <p:cNvSpPr/>
           <p:nvPr/>
         </p:nvSpPr>
@@ -4601,7 +6968,7 @@
       </p:sp>
       <p:sp>
         <p:nvSpPr>
-          <p:cNvPr id="5" name="Text 3"/>
+          <p:cNvPr id="6" name="Text 4"/>
           <p:cNvSpPr/>
           <p:nvPr/>
         </p:nvSpPr>
@@ -4640,13 +7007,77 @@
       </p:sp>
       <p:sp>
         <p:nvSpPr>
-          <p:cNvPr id="6" name="Text 4"/>
+          <p:cNvPr id="7" name="Shape 5"/>
           <p:cNvSpPr/>
           <p:nvPr/>
         </p:nvSpPr>
         <p:spPr>
           <a:xfrm>
             <a:off x="640080" y="658368"/>
+            <a:ext cx="420624" cy="420624"/>
+          </a:xfrm>
+          <a:prstGeom prst="ellipse">
+            <a:avLst/>
+          </a:prstGeom>
+          <a:solidFill>
+            <a:srgbClr val="0068B7"/>
+          </a:solidFill>
+          <a:ln w="12700">
+            <a:solidFill>
+              <a:srgbClr val="0068B7"/>
+            </a:solidFill>
+            <a:prstDash val="solid"/>
+          </a:ln>
+        </p:spPr>
+      </p:sp>
+      <p:sp>
+        <p:nvSpPr>
+          <p:cNvPr id="8" name="Text 6"/>
+          <p:cNvSpPr/>
+          <p:nvPr/>
+        </p:nvSpPr>
+        <p:spPr>
+          <a:xfrm>
+            <a:off x="640080" y="731520"/>
+            <a:ext cx="420624" cy="164592"/>
+          </a:xfrm>
+          <a:prstGeom prst="rect">
+            <a:avLst/>
+          </a:prstGeom>
+          <a:noFill/>
+          <a:ln/>
+        </p:spPr>
+        <p:txBody>
+          <a:bodyPr wrap="square" lIns="0" tIns="0" rIns="0" bIns="0" rtlCol="0" anchor="ctr"/>
+          <a:lstStyle/>
+          <a:p>
+            <a:pPr algn="ctr" indent="0" marL="0">
+              <a:buNone/>
+            </a:pPr>
+            <a:r>
+              <a:rPr lang="en-US" sz="1100" b="1" dirty="0">
+                <a:solidFill>
+                  <a:srgbClr val="FFFFFF"/>
+                </a:solidFill>
+                <a:latin typeface="Aptos" pitchFamily="34" charset="0"/>
+                <a:ea typeface="Aptos" pitchFamily="34" charset="-122"/>
+                <a:cs typeface="Aptos" pitchFamily="34" charset="-120"/>
+              </a:rPr>
+              <a:t>12</a:t>
+            </a:r>
+            <a:endParaRPr lang="en-US" sz="1100" dirty="0"/>
+          </a:p>
+        </p:txBody>
+      </p:sp>
+      <p:sp>
+        <p:nvSpPr>
+          <p:cNvPr id="9" name="Text 7"/>
+          <p:cNvSpPr/>
+          <p:nvPr/>
+        </p:nvSpPr>
+        <p:spPr>
+          <a:xfrm>
+            <a:off x="640080" y="621792"/>
             <a:ext cx="10881360" cy="566928"/>
           </a:xfrm>
           <a:prstGeom prst="rect">
@@ -4673,7 +7104,7 @@
                 <a:ea typeface="Aptos Display" pitchFamily="34" charset="-122"/>
                 <a:cs typeface="Aptos Display" pitchFamily="34" charset="-120"/>
               </a:rPr>
-              <a:t>References and Resources</a:t>
+              <a:t>Expected Assignment</a:t>
             </a:r>
             <a:endParaRPr lang="en-US" sz="2700" dirty="0"/>
           </a:p>
@@ -4681,14 +7112,14 @@
       </p:sp>
       <p:sp>
         <p:nvSpPr>
-          <p:cNvPr id="7" name="Text 5"/>
-          <p:cNvSpPr/>
-          <p:nvPr/>
-        </p:nvSpPr>
-        <p:spPr>
-          <a:xfrm>
-            <a:off x="822960" y="1325880"/>
-            <a:ext cx="10378440" cy="4800600"/>
+          <p:cNvPr id="10" name="Text 8"/>
+          <p:cNvSpPr/>
+          <p:nvPr/>
+        </p:nvSpPr>
+        <p:spPr>
+          <a:xfrm>
+            <a:off x="868680" y="1417320"/>
+            <a:ext cx="6675120" cy="4434840"/>
           </a:xfrm>
           <a:prstGeom prst="rect">
             <a:avLst/>
@@ -4703,7 +7134,7 @@
           <a:lstStyle/>
           <a:p>
             <a:r>
-              <a:rPr lang="en-US" sz="1450" dirty="0">
+              <a:rPr lang="en-US" sz="1700" dirty="0">
                 <a:solidFill>
                   <a:srgbClr val="17364A"/>
                 </a:solidFill>
@@ -4711,13 +7142,106 @@
                 <a:ea typeface="Aptos" pitchFamily="34" charset="-122"/>
                 <a:cs typeface="Aptos" pitchFamily="34" charset="-120"/>
               </a:rPr>
-              <a:t>NIST Artificial Intelligence Risk Management Framework (AI RMF 1.0): https://www.nist.gov/itl/ai-risk-management-framework</a:t>
-            </a:r>
-            <a:endParaRPr lang="en-US" sz="1450" dirty="0"/>
-          </a:p>
-          <a:p>
-            <a:r>
-              <a:rPr lang="en-US" sz="1450" dirty="0">
+              <a:t>Workforce readiness plan; role-based competency matrix; training assignment matrix; AI bridge role description.</a:t>
+            </a:r>
+            <a:endParaRPr lang="en-US" sz="1700" dirty="0"/>
+          </a:p>
+        </p:txBody>
+      </p:sp>
+      <p:sp>
+        <p:nvSpPr>
+          <p:cNvPr id="11" name="Shape 9"/>
+          <p:cNvSpPr/>
+          <p:nvPr/>
+        </p:nvSpPr>
+        <p:spPr>
+          <a:xfrm>
+            <a:off x="7909560" y="1417320"/>
+            <a:ext cx="3154680" cy="1828800"/>
+          </a:xfrm>
+          <a:prstGeom prst="roundRect">
+            <a:avLst>
+              <a:gd name="adj" fmla="val 6000"/>
+            </a:avLst>
+          </a:prstGeom>
+          <a:solidFill>
+            <a:srgbClr val="EEF8ED"/>
+          </a:solidFill>
+          <a:ln w="12700">
+            <a:solidFill>
+              <a:srgbClr val="B9D7E6"/>
+            </a:solidFill>
+            <a:prstDash val="solid"/>
+          </a:ln>
+        </p:spPr>
+      </p:sp>
+      <p:sp>
+        <p:nvSpPr>
+          <p:cNvPr id="12" name="Text 10"/>
+          <p:cNvSpPr/>
+          <p:nvPr/>
+        </p:nvSpPr>
+        <p:spPr>
+          <a:xfrm>
+            <a:off x="8074152" y="1563624"/>
+            <a:ext cx="2825496" cy="201168"/>
+          </a:xfrm>
+          <a:prstGeom prst="rect">
+            <a:avLst/>
+          </a:prstGeom>
+          <a:noFill/>
+          <a:ln/>
+        </p:spPr>
+        <p:txBody>
+          <a:bodyPr wrap="square" lIns="0" tIns="0" rIns="0" bIns="0" rtlCol="0" anchor="ctr"/>
+          <a:lstStyle/>
+          <a:p>
+            <a:pPr indent="0" marL="0">
+              <a:buNone/>
+            </a:pPr>
+            <a:r>
+              <a:rPr lang="en-US" sz="950" b="1" dirty="0">
+                <a:solidFill>
+                  <a:srgbClr val="0068B7"/>
+                </a:solidFill>
+                <a:latin typeface="Aptos" pitchFamily="34" charset="0"/>
+                <a:ea typeface="Aptos" pitchFamily="34" charset="-122"/>
+                <a:cs typeface="Aptos" pitchFamily="34" charset="-120"/>
+              </a:rPr>
+              <a:t>Key idea</a:t>
+            </a:r>
+            <a:endParaRPr lang="en-US" sz="950" dirty="0"/>
+          </a:p>
+        </p:txBody>
+      </p:sp>
+      <p:sp>
+        <p:nvSpPr>
+          <p:cNvPr id="13" name="Text 11"/>
+          <p:cNvSpPr/>
+          <p:nvPr/>
+        </p:nvSpPr>
+        <p:spPr>
+          <a:xfrm>
+            <a:off x="8074152" y="1856232"/>
+            <a:ext cx="2825496" cy="1261872"/>
+          </a:xfrm>
+          <a:prstGeom prst="rect">
+            <a:avLst/>
+          </a:prstGeom>
+          <a:noFill/>
+          <a:ln/>
+        </p:spPr>
+        <p:txBody>
+          <a:bodyPr wrap="square" lIns="0" tIns="0" rIns="0" bIns="0" rtlCol="0" anchor="t">
+            <a:normAutofit/>
+          </a:bodyPr>
+          <a:lstStyle/>
+          <a:p>
+            <a:pPr indent="0" marL="0">
+              <a:buNone/>
+            </a:pPr>
+            <a:r>
+              <a:rPr lang="en-US" sz="1250" dirty="0">
                 <a:solidFill>
                   <a:srgbClr val="17364A"/>
                 </a:solidFill>
@@ -4725,13 +7249,106 @@
                 <a:ea typeface="Aptos" pitchFamily="34" charset="-122"/>
                 <a:cs typeface="Aptos" pitchFamily="34" charset="-120"/>
               </a:rPr>
-              <a:t>NIST Generative AI Profile: https://www.nist.gov/publications/artificial-intelligence-risk-management-framework-generative-artificial-intelligence</a:t>
-            </a:r>
-            <a:endParaRPr lang="en-US" sz="1450" dirty="0"/>
-          </a:p>
-          <a:p>
-            <a:r>
-              <a:rPr lang="en-US" sz="1450" dirty="0">
+              <a:t>Workforce readiness plan; role-based competency matrix; training assignment matrix; AI bridge role description.</a:t>
+            </a:r>
+            <a:endParaRPr lang="en-US" sz="1250" dirty="0"/>
+          </a:p>
+        </p:txBody>
+      </p:sp>
+      <p:sp>
+        <p:nvSpPr>
+          <p:cNvPr id="14" name="Shape 12"/>
+          <p:cNvSpPr/>
+          <p:nvPr/>
+        </p:nvSpPr>
+        <p:spPr>
+          <a:xfrm>
+            <a:off x="7909560" y="3520440"/>
+            <a:ext cx="3154680" cy="1737360"/>
+          </a:xfrm>
+          <a:prstGeom prst="roundRect">
+            <a:avLst>
+              <a:gd name="adj" fmla="val 6316"/>
+            </a:avLst>
+          </a:prstGeom>
+          <a:solidFill>
+            <a:srgbClr val="EAF6F8"/>
+          </a:solidFill>
+          <a:ln w="12700">
+            <a:solidFill>
+              <a:srgbClr val="B9D7E6"/>
+            </a:solidFill>
+            <a:prstDash val="solid"/>
+          </a:ln>
+        </p:spPr>
+      </p:sp>
+      <p:sp>
+        <p:nvSpPr>
+          <p:cNvPr id="15" name="Text 13"/>
+          <p:cNvSpPr/>
+          <p:nvPr/>
+        </p:nvSpPr>
+        <p:spPr>
+          <a:xfrm>
+            <a:off x="8074152" y="3666744"/>
+            <a:ext cx="2825496" cy="201168"/>
+          </a:xfrm>
+          <a:prstGeom prst="rect">
+            <a:avLst/>
+          </a:prstGeom>
+          <a:noFill/>
+          <a:ln/>
+        </p:spPr>
+        <p:txBody>
+          <a:bodyPr wrap="square" lIns="0" tIns="0" rIns="0" bIns="0" rtlCol="0" anchor="ctr"/>
+          <a:lstStyle/>
+          <a:p>
+            <a:pPr indent="0" marL="0">
+              <a:buNone/>
+            </a:pPr>
+            <a:r>
+              <a:rPr lang="en-US" sz="950" b="1" dirty="0">
+                <a:solidFill>
+                  <a:srgbClr val="0068B7"/>
+                </a:solidFill>
+                <a:latin typeface="Aptos" pitchFamily="34" charset="0"/>
+                <a:ea typeface="Aptos" pitchFamily="34" charset="-122"/>
+                <a:cs typeface="Aptos" pitchFamily="34" charset="-120"/>
+              </a:rPr>
+              <a:t>Use this for</a:t>
+            </a:r>
+            <a:endParaRPr lang="en-US" sz="950" dirty="0"/>
+          </a:p>
+        </p:txBody>
+      </p:sp>
+      <p:sp>
+        <p:nvSpPr>
+          <p:cNvPr id="16" name="Text 14"/>
+          <p:cNvSpPr/>
+          <p:nvPr/>
+        </p:nvSpPr>
+        <p:spPr>
+          <a:xfrm>
+            <a:off x="8074152" y="3959352"/>
+            <a:ext cx="2825496" cy="1170432"/>
+          </a:xfrm>
+          <a:prstGeom prst="rect">
+            <a:avLst/>
+          </a:prstGeom>
+          <a:noFill/>
+          <a:ln/>
+        </p:spPr>
+        <p:txBody>
+          <a:bodyPr wrap="square" lIns="0" tIns="0" rIns="0" bIns="0" rtlCol="0" anchor="t">
+            <a:normAutofit/>
+          </a:bodyPr>
+          <a:lstStyle/>
+          <a:p>
+            <a:pPr indent="0" marL="0">
+              <a:buNone/>
+            </a:pPr>
+            <a:r>
+              <a:rPr lang="en-US" sz="1250" dirty="0">
                 <a:solidFill>
                   <a:srgbClr val="17364A"/>
                 </a:solidFill>
@@ -4739,37 +7356,9 @@
                 <a:ea typeface="Aptos" pitchFamily="34" charset="-122"/>
                 <a:cs typeface="Aptos" pitchFamily="34" charset="-120"/>
               </a:rPr>
-              <a:t>NIST Privacy Framework</a:t>
-            </a:r>
-            <a:endParaRPr lang="en-US" sz="1450" dirty="0"/>
-          </a:p>
-          <a:p>
-            <a:r>
-              <a:rPr lang="en-US" sz="1450" dirty="0">
-                <a:solidFill>
-                  <a:srgbClr val="17364A"/>
-                </a:solidFill>
-                <a:latin typeface="Aptos" pitchFamily="34" charset="0"/>
-                <a:ea typeface="Aptos" pitchFamily="34" charset="-122"/>
-                <a:cs typeface="Aptos" pitchFamily="34" charset="-120"/>
-              </a:rPr>
-              <a:t>CDC Public Health Data Strategy and Data Modernization resources: https://www.cdc.gov/public-health-data-strategy/php/about/index.html</a:t>
-            </a:r>
-            <a:endParaRPr lang="en-US" sz="1450" dirty="0"/>
-          </a:p>
-          <a:p>
-            <a:r>
-              <a:rPr lang="en-US" sz="1450" dirty="0">
-                <a:solidFill>
-                  <a:srgbClr val="17364A"/>
-                </a:solidFill>
-                <a:latin typeface="Aptos" pitchFamily="34" charset="0"/>
-                <a:ea typeface="Aptos" pitchFamily="34" charset="-122"/>
-                <a:cs typeface="Aptos" pitchFamily="34" charset="-120"/>
-              </a:rPr>
-              <a:t>WHO Ethics and Governance of Artificial Intelligence for Health: https://www.who.int/publications/i/item/9789240029200</a:t>
-            </a:r>
-            <a:endParaRPr lang="en-US" sz="1450" dirty="0"/>
+              <a:t>Connect the concept to public health decisions, safeguards, documentation, or implementation work.</a:t>
+            </a:r>
+            <a:endParaRPr lang="en-US" sz="1250" dirty="0"/>
           </a:p>
         </p:txBody>
       </p:sp>
@@ -4832,7 +7421,32 @@
       </p:sp>
       <p:sp>
         <p:nvSpPr>
-          <p:cNvPr id="3" name="Text 1"/>
+          <p:cNvPr id="3" name="Shape 1"/>
+          <p:cNvSpPr/>
+          <p:nvPr/>
+        </p:nvSpPr>
+        <p:spPr>
+          <a:xfrm>
+            <a:off x="0" y="164592"/>
+            <a:ext cx="146304" cy="6693408"/>
+          </a:xfrm>
+          <a:prstGeom prst="rect">
+            <a:avLst/>
+          </a:prstGeom>
+          <a:solidFill>
+            <a:srgbClr val="2F8A28"/>
+          </a:solidFill>
+          <a:ln w="12700">
+            <a:solidFill>
+              <a:srgbClr val="2F8A28"/>
+            </a:solidFill>
+            <a:prstDash val="solid"/>
+          </a:ln>
+        </p:spPr>
+      </p:sp>
+      <p:sp>
+        <p:nvSpPr>
+          <p:cNvPr id="4" name="Text 2"/>
           <p:cNvSpPr/>
           <p:nvPr/>
         </p:nvSpPr>
@@ -4871,7 +7485,7 @@
       </p:sp>
       <p:sp>
         <p:nvSpPr>
-          <p:cNvPr id="4" name="Text 2"/>
+          <p:cNvPr id="5" name="Text 3"/>
           <p:cNvSpPr/>
           <p:nvPr/>
         </p:nvSpPr>
@@ -4910,7 +7524,7 @@
       </p:sp>
       <p:sp>
         <p:nvSpPr>
-          <p:cNvPr id="5" name="Text 3"/>
+          <p:cNvPr id="6" name="Text 4"/>
           <p:cNvSpPr/>
           <p:nvPr/>
         </p:nvSpPr>
@@ -4949,13 +7563,77 @@
       </p:sp>
       <p:sp>
         <p:nvSpPr>
-          <p:cNvPr id="6" name="Text 4"/>
+          <p:cNvPr id="7" name="Shape 5"/>
           <p:cNvSpPr/>
           <p:nvPr/>
         </p:nvSpPr>
         <p:spPr>
           <a:xfrm>
             <a:off x="640080" y="658368"/>
+            <a:ext cx="420624" cy="420624"/>
+          </a:xfrm>
+          <a:prstGeom prst="ellipse">
+            <a:avLst/>
+          </a:prstGeom>
+          <a:solidFill>
+            <a:srgbClr val="0068B7"/>
+          </a:solidFill>
+          <a:ln w="12700">
+            <a:solidFill>
+              <a:srgbClr val="0068B7"/>
+            </a:solidFill>
+            <a:prstDash val="solid"/>
+          </a:ln>
+        </p:spPr>
+      </p:sp>
+      <p:sp>
+        <p:nvSpPr>
+          <p:cNvPr id="8" name="Text 6"/>
+          <p:cNvSpPr/>
+          <p:nvPr/>
+        </p:nvSpPr>
+        <p:spPr>
+          <a:xfrm>
+            <a:off x="640080" y="731520"/>
+            <a:ext cx="420624" cy="164592"/>
+          </a:xfrm>
+          <a:prstGeom prst="rect">
+            <a:avLst/>
+          </a:prstGeom>
+          <a:noFill/>
+          <a:ln/>
+        </p:spPr>
+        <p:txBody>
+          <a:bodyPr wrap="square" lIns="0" tIns="0" rIns="0" bIns="0" rtlCol="0" anchor="ctr"/>
+          <a:lstStyle/>
+          <a:p>
+            <a:pPr algn="ctr" indent="0" marL="0">
+              <a:buNone/>
+            </a:pPr>
+            <a:r>
+              <a:rPr lang="en-US" sz="1100" b="1" dirty="0">
+                <a:solidFill>
+                  <a:srgbClr val="FFFFFF"/>
+                </a:solidFill>
+                <a:latin typeface="Aptos" pitchFamily="34" charset="0"/>
+                <a:ea typeface="Aptos" pitchFamily="34" charset="-122"/>
+                <a:cs typeface="Aptos" pitchFamily="34" charset="-120"/>
+              </a:rPr>
+              <a:t>13</a:t>
+            </a:r>
+            <a:endParaRPr lang="en-US" sz="1100" dirty="0"/>
+          </a:p>
+        </p:txBody>
+      </p:sp>
+      <p:sp>
+        <p:nvSpPr>
+          <p:cNvPr id="9" name="Text 7"/>
+          <p:cNvSpPr/>
+          <p:nvPr/>
+        </p:nvSpPr>
+        <p:spPr>
+          <a:xfrm>
+            <a:off x="640080" y="621792"/>
             <a:ext cx="10881360" cy="566928"/>
           </a:xfrm>
           <a:prstGeom prst="rect">
@@ -4982,7 +7660,7 @@
                 <a:ea typeface="Aptos Display" pitchFamily="34" charset="-122"/>
                 <a:cs typeface="Aptos Display" pitchFamily="34" charset="-120"/>
               </a:rPr>
-              <a:t>References and Resources Continued</a:t>
+              <a:t>Knowledge Check</a:t>
             </a:r>
             <a:endParaRPr lang="en-US" sz="2700" dirty="0"/>
           </a:p>
@@ -4990,14 +7668,14 @@
       </p:sp>
       <p:sp>
         <p:nvSpPr>
-          <p:cNvPr id="7" name="Text 5"/>
-          <p:cNvSpPr/>
-          <p:nvPr/>
-        </p:nvSpPr>
-        <p:spPr>
-          <a:xfrm>
-            <a:off x="822960" y="1325880"/>
-            <a:ext cx="10378440" cy="4800600"/>
+          <p:cNvPr id="10" name="Text 8"/>
+          <p:cNvSpPr/>
+          <p:nvPr/>
+        </p:nvSpPr>
+        <p:spPr>
+          <a:xfrm>
+            <a:off x="868680" y="1417320"/>
+            <a:ext cx="6675120" cy="4434840"/>
           </a:xfrm>
           <a:prstGeom prst="rect">
             <a:avLst/>
@@ -5012,7 +7690,7 @@
           <a:lstStyle/>
           <a:p>
             <a:r>
-              <a:rPr lang="en-US" sz="1450" dirty="0">
+              <a:rPr lang="en-US" sz="1700" dirty="0">
                 <a:solidFill>
                   <a:srgbClr val="17364A"/>
                 </a:solidFill>
@@ -5020,13 +7698,13 @@
                 <a:ea typeface="Aptos" pitchFamily="34" charset="-122"/>
                 <a:cs typeface="Aptos" pitchFamily="34" charset="-120"/>
               </a:rPr>
-              <a:t>OMB Memorandum M-24-10 on federal AI governance, risk management, and innovation, where relevant to public-sector governance models</a:t>
-            </a:r>
-            <a:endParaRPr lang="en-US" sz="1450" dirty="0"/>
-          </a:p>
-          <a:p>
-            <a:r>
-              <a:rPr lang="en-US" sz="1450" dirty="0">
+              <a:t>1. What is the strongest reason this module topic belongs in AI leadership and governance training?</a:t>
+            </a:r>
+            <a:endParaRPr lang="en-US" sz="1700" dirty="0"/>
+          </a:p>
+          <a:p>
+            <a:r>
+              <a:rPr lang="en-US" sz="1700" dirty="0">
                 <a:solidFill>
                   <a:srgbClr val="17364A"/>
                 </a:solidFill>
@@ -5034,9 +7712,849 @@
                 <a:ea typeface="Aptos" pitchFamily="34" charset="-122"/>
                 <a:cs typeface="Aptos" pitchFamily="34" charset="-120"/>
               </a:rPr>
-              <a:t>Agency strategic plans, procurement policies, privacy policies, cybersecurity policies, records policies, and equity plans</a:t>
-            </a:r>
-            <a:endParaRPr lang="en-US" sz="1450" dirty="0"/>
+              <a:t>2. Which practice best supports accountable public health AI governance?</a:t>
+            </a:r>
+            <a:endParaRPr lang="en-US" sz="1700" dirty="0"/>
+          </a:p>
+          <a:p>
+            <a:r>
+              <a:rPr lang="en-US" sz="1700" dirty="0">
+                <a:solidFill>
+                  <a:srgbClr val="17364A"/>
+                </a:solidFill>
+                <a:latin typeface="Aptos" pitchFamily="34" charset="0"/>
+                <a:ea typeface="Aptos" pitchFamily="34" charset="-122"/>
+                <a:cs typeface="Aptos" pitchFamily="34" charset="-120"/>
+              </a:rPr>
+              <a:t>3. When should an AI use case be escalated for leadership or governance review?</a:t>
+            </a:r>
+            <a:endParaRPr lang="en-US" sz="1700" dirty="0"/>
+          </a:p>
+          <a:p>
+            <a:r>
+              <a:rPr lang="en-US" sz="1700" dirty="0">
+                <a:solidFill>
+                  <a:srgbClr val="17364A"/>
+                </a:solidFill>
+                <a:latin typeface="Aptos" pitchFamily="34" charset="0"/>
+                <a:ea typeface="Aptos" pitchFamily="34" charset="-122"/>
+                <a:cs typeface="Aptos" pitchFamily="34" charset="-120"/>
+              </a:rPr>
+              <a:t>4. What is weak evidence of completion for a leadership and governance module?</a:t>
+            </a:r>
+            <a:endParaRPr lang="en-US" sz="1700" dirty="0"/>
+          </a:p>
+        </p:txBody>
+      </p:sp>
+      <p:sp>
+        <p:nvSpPr>
+          <p:cNvPr id="11" name="Shape 9"/>
+          <p:cNvSpPr/>
+          <p:nvPr/>
+        </p:nvSpPr>
+        <p:spPr>
+          <a:xfrm>
+            <a:off x="7909560" y="1417320"/>
+            <a:ext cx="3154680" cy="1828800"/>
+          </a:xfrm>
+          <a:prstGeom prst="roundRect">
+            <a:avLst>
+              <a:gd name="adj" fmla="val 6000"/>
+            </a:avLst>
+          </a:prstGeom>
+          <a:solidFill>
+            <a:srgbClr val="EEF8ED"/>
+          </a:solidFill>
+          <a:ln w="12700">
+            <a:solidFill>
+              <a:srgbClr val="B9D7E6"/>
+            </a:solidFill>
+            <a:prstDash val="solid"/>
+          </a:ln>
+        </p:spPr>
+      </p:sp>
+      <p:sp>
+        <p:nvSpPr>
+          <p:cNvPr id="12" name="Text 10"/>
+          <p:cNvSpPr/>
+          <p:nvPr/>
+        </p:nvSpPr>
+        <p:spPr>
+          <a:xfrm>
+            <a:off x="8074152" y="1563624"/>
+            <a:ext cx="2825496" cy="201168"/>
+          </a:xfrm>
+          <a:prstGeom prst="rect">
+            <a:avLst/>
+          </a:prstGeom>
+          <a:noFill/>
+          <a:ln/>
+        </p:spPr>
+        <p:txBody>
+          <a:bodyPr wrap="square" lIns="0" tIns="0" rIns="0" bIns="0" rtlCol="0" anchor="ctr"/>
+          <a:lstStyle/>
+          <a:p>
+            <a:pPr indent="0" marL="0">
+              <a:buNone/>
+            </a:pPr>
+            <a:r>
+              <a:rPr lang="en-US" sz="950" b="1" dirty="0">
+                <a:solidFill>
+                  <a:srgbClr val="0068B7"/>
+                </a:solidFill>
+                <a:latin typeface="Aptos" pitchFamily="34" charset="0"/>
+                <a:ea typeface="Aptos" pitchFamily="34" charset="-122"/>
+                <a:cs typeface="Aptos" pitchFamily="34" charset="-120"/>
+              </a:rPr>
+              <a:t>Key idea</a:t>
+            </a:r>
+            <a:endParaRPr lang="en-US" sz="950" dirty="0"/>
+          </a:p>
+        </p:txBody>
+      </p:sp>
+      <p:sp>
+        <p:nvSpPr>
+          <p:cNvPr id="13" name="Text 11"/>
+          <p:cNvSpPr/>
+          <p:nvPr/>
+        </p:nvSpPr>
+        <p:spPr>
+          <a:xfrm>
+            <a:off x="8074152" y="1856232"/>
+            <a:ext cx="2825496" cy="1261872"/>
+          </a:xfrm>
+          <a:prstGeom prst="rect">
+            <a:avLst/>
+          </a:prstGeom>
+          <a:noFill/>
+          <a:ln/>
+        </p:spPr>
+        <p:txBody>
+          <a:bodyPr wrap="square" lIns="0" tIns="0" rIns="0" bIns="0" rtlCol="0" anchor="t">
+            <a:normAutofit/>
+          </a:bodyPr>
+          <a:lstStyle/>
+          <a:p>
+            <a:pPr indent="0" marL="0">
+              <a:buNone/>
+            </a:pPr>
+            <a:r>
+              <a:rPr lang="en-US" sz="1250" dirty="0">
+                <a:solidFill>
+                  <a:srgbClr val="17364A"/>
+                </a:solidFill>
+                <a:latin typeface="Aptos" pitchFamily="34" charset="0"/>
+                <a:ea typeface="Aptos" pitchFamily="34" charset="-122"/>
+                <a:cs typeface="Aptos" pitchFamily="34" charset="-120"/>
+              </a:rPr>
+              <a:t>1. What is the strongest reason this module topic belongs in AI leadership and governance training?</a:t>
+            </a:r>
+            <a:endParaRPr lang="en-US" sz="1250" dirty="0"/>
+          </a:p>
+        </p:txBody>
+      </p:sp>
+      <p:sp>
+        <p:nvSpPr>
+          <p:cNvPr id="14" name="Shape 12"/>
+          <p:cNvSpPr/>
+          <p:nvPr/>
+        </p:nvSpPr>
+        <p:spPr>
+          <a:xfrm>
+            <a:off x="7909560" y="3520440"/>
+            <a:ext cx="3154680" cy="1737360"/>
+          </a:xfrm>
+          <a:prstGeom prst="roundRect">
+            <a:avLst>
+              <a:gd name="adj" fmla="val 6316"/>
+            </a:avLst>
+          </a:prstGeom>
+          <a:solidFill>
+            <a:srgbClr val="EAF6F8"/>
+          </a:solidFill>
+          <a:ln w="12700">
+            <a:solidFill>
+              <a:srgbClr val="B9D7E6"/>
+            </a:solidFill>
+            <a:prstDash val="solid"/>
+          </a:ln>
+        </p:spPr>
+      </p:sp>
+      <p:sp>
+        <p:nvSpPr>
+          <p:cNvPr id="15" name="Text 13"/>
+          <p:cNvSpPr/>
+          <p:nvPr/>
+        </p:nvSpPr>
+        <p:spPr>
+          <a:xfrm>
+            <a:off x="8074152" y="3666744"/>
+            <a:ext cx="2825496" cy="201168"/>
+          </a:xfrm>
+          <a:prstGeom prst="rect">
+            <a:avLst/>
+          </a:prstGeom>
+          <a:noFill/>
+          <a:ln/>
+        </p:spPr>
+        <p:txBody>
+          <a:bodyPr wrap="square" lIns="0" tIns="0" rIns="0" bIns="0" rtlCol="0" anchor="ctr"/>
+          <a:lstStyle/>
+          <a:p>
+            <a:pPr indent="0" marL="0">
+              <a:buNone/>
+            </a:pPr>
+            <a:r>
+              <a:rPr lang="en-US" sz="950" b="1" dirty="0">
+                <a:solidFill>
+                  <a:srgbClr val="0068B7"/>
+                </a:solidFill>
+                <a:latin typeface="Aptos" pitchFamily="34" charset="0"/>
+                <a:ea typeface="Aptos" pitchFamily="34" charset="-122"/>
+                <a:cs typeface="Aptos" pitchFamily="34" charset="-120"/>
+              </a:rPr>
+              <a:t>Use this for</a:t>
+            </a:r>
+            <a:endParaRPr lang="en-US" sz="950" dirty="0"/>
+          </a:p>
+        </p:txBody>
+      </p:sp>
+      <p:sp>
+        <p:nvSpPr>
+          <p:cNvPr id="16" name="Text 14"/>
+          <p:cNvSpPr/>
+          <p:nvPr/>
+        </p:nvSpPr>
+        <p:spPr>
+          <a:xfrm>
+            <a:off x="8074152" y="3959352"/>
+            <a:ext cx="2825496" cy="1170432"/>
+          </a:xfrm>
+          <a:prstGeom prst="rect">
+            <a:avLst/>
+          </a:prstGeom>
+          <a:noFill/>
+          <a:ln/>
+        </p:spPr>
+        <p:txBody>
+          <a:bodyPr wrap="square" lIns="0" tIns="0" rIns="0" bIns="0" rtlCol="0" anchor="t">
+            <a:normAutofit/>
+          </a:bodyPr>
+          <a:lstStyle/>
+          <a:p>
+            <a:pPr indent="0" marL="0">
+              <a:buNone/>
+            </a:pPr>
+            <a:r>
+              <a:rPr lang="en-US" sz="1250" dirty="0">
+                <a:solidFill>
+                  <a:srgbClr val="17364A"/>
+                </a:solidFill>
+                <a:latin typeface="Aptos" pitchFamily="34" charset="0"/>
+                <a:ea typeface="Aptos" pitchFamily="34" charset="-122"/>
+                <a:cs typeface="Aptos" pitchFamily="34" charset="-120"/>
+              </a:rPr>
+              <a:t>Connect the concept to public health decisions, safeguards, documentation, or implementation work.</a:t>
+            </a:r>
+            <a:endParaRPr lang="en-US" sz="1250" dirty="0"/>
+          </a:p>
+        </p:txBody>
+      </p:sp>
+    </p:spTree>
+  </p:cSld>
+  <p:clrMapOvr>
+    <a:masterClrMapping/>
+  </p:clrMapOvr>
+</p:sld>
+</file>
+
+<file path=ppt/slides/slide19.xml><?xml version="1.0" encoding="utf-8"?>
+<p:sld xmlns:a="http://schemas.openxmlformats.org/drawingml/2006/main" xmlns:r="http://schemas.openxmlformats.org/officeDocument/2006/relationships" xmlns:p="http://schemas.openxmlformats.org/presentationml/2006/main">
+  <p:cSld name="Slide 19">
+    <p:bg>
+      <p:bgPr>
+        <a:solidFill>
+          <a:srgbClr val="F7FBFD"/>
+        </a:solidFill>
+      </p:bgPr>
+    </p:bg>
+    <p:spTree>
+      <p:nvGrpSpPr>
+        <p:cNvPr id="1" name=""/>
+        <p:cNvGrpSpPr/>
+        <p:nvPr/>
+      </p:nvGrpSpPr>
+      <p:grpSpPr>
+        <a:xfrm>
+          <a:off x="0" y="0"/>
+          <a:ext cx="0" cy="0"/>
+          <a:chOff x="0" y="0"/>
+          <a:chExt cx="0" cy="0"/>
+        </a:xfrm>
+      </p:grpSpPr>
+      <p:sp>
+        <p:nvSpPr>
+          <p:cNvPr id="2" name="Shape 0"/>
+          <p:cNvSpPr/>
+          <p:nvPr/>
+        </p:nvSpPr>
+        <p:spPr>
+          <a:xfrm>
+            <a:off x="0" y="0"/>
+            <a:ext cx="12191695" cy="164592"/>
+          </a:xfrm>
+          <a:prstGeom prst="rect">
+            <a:avLst/>
+          </a:prstGeom>
+          <a:solidFill>
+            <a:srgbClr val="0068B7"/>
+          </a:solidFill>
+          <a:ln w="12700">
+            <a:solidFill>
+              <a:srgbClr val="0068B7"/>
+            </a:solidFill>
+            <a:prstDash val="solid"/>
+          </a:ln>
+        </p:spPr>
+      </p:sp>
+      <p:sp>
+        <p:nvSpPr>
+          <p:cNvPr id="3" name="Shape 1"/>
+          <p:cNvSpPr/>
+          <p:nvPr/>
+        </p:nvSpPr>
+        <p:spPr>
+          <a:xfrm>
+            <a:off x="0" y="164592"/>
+            <a:ext cx="146304" cy="6693408"/>
+          </a:xfrm>
+          <a:prstGeom prst="rect">
+            <a:avLst/>
+          </a:prstGeom>
+          <a:solidFill>
+            <a:srgbClr val="2F8A28"/>
+          </a:solidFill>
+          <a:ln w="12700">
+            <a:solidFill>
+              <a:srgbClr val="2F8A28"/>
+            </a:solidFill>
+            <a:prstDash val="solid"/>
+          </a:ln>
+        </p:spPr>
+      </p:sp>
+      <p:sp>
+        <p:nvSpPr>
+          <p:cNvPr id="4" name="Text 2"/>
+          <p:cNvSpPr/>
+          <p:nvPr/>
+        </p:nvSpPr>
+        <p:spPr>
+          <a:xfrm>
+            <a:off x="502920" y="292608"/>
+            <a:ext cx="10149840" cy="256032"/>
+          </a:xfrm>
+          <a:prstGeom prst="rect">
+            <a:avLst/>
+          </a:prstGeom>
+          <a:noFill/>
+          <a:ln/>
+        </p:spPr>
+        <p:txBody>
+          <a:bodyPr wrap="square" lIns="0" tIns="0" rIns="0" bIns="0" rtlCol="0" anchor="ctr"/>
+          <a:lstStyle/>
+          <a:p>
+            <a:pPr indent="0" marL="0">
+              <a:buNone/>
+            </a:pPr>
+            <a:r>
+              <a:rPr lang="en-US" sz="900" b="1" dirty="0">
+                <a:solidFill>
+                  <a:srgbClr val="5F7181"/>
+                </a:solidFill>
+                <a:latin typeface="Aptos" pitchFamily="34" charset="0"/>
+                <a:ea typeface="Aptos" pitchFamily="34" charset="-122"/>
+                <a:cs typeface="Aptos" pitchFamily="34" charset="-120"/>
+              </a:rPr>
+              <a:t>Workforce Strategy and AI Role Design</a:t>
+            </a:r>
+            <a:endParaRPr lang="en-US" sz="900" dirty="0"/>
+          </a:p>
+        </p:txBody>
+      </p:sp>
+      <p:sp>
+        <p:nvSpPr>
+          <p:cNvPr id="5" name="Text 3"/>
+          <p:cNvSpPr/>
+          <p:nvPr/>
+        </p:nvSpPr>
+        <p:spPr>
+          <a:xfrm>
+            <a:off x="502920" y="6537960"/>
+            <a:ext cx="7772400" cy="201168"/>
+          </a:xfrm>
+          <a:prstGeom prst="rect">
+            <a:avLst/>
+          </a:prstGeom>
+          <a:noFill/>
+          <a:ln/>
+        </p:spPr>
+        <p:txBody>
+          <a:bodyPr wrap="square" lIns="0" tIns="0" rIns="0" bIns="0" rtlCol="0" anchor="ctr"/>
+          <a:lstStyle/>
+          <a:p>
+            <a:pPr indent="0" marL="0">
+              <a:buNone/>
+            </a:pPr>
+            <a:r>
+              <a:rPr lang="en-US" sz="800" dirty="0">
+                <a:solidFill>
+                  <a:srgbClr val="5F7181"/>
+                </a:solidFill>
+                <a:latin typeface="Aptos" pitchFamily="34" charset="0"/>
+                <a:ea typeface="Aptos" pitchFamily="34" charset="-122"/>
+                <a:cs typeface="Aptos" pitchFamily="34" charset="-120"/>
+              </a:rPr>
+              <a:t>AI Playbook and Toolkit for Public Health Departments</a:t>
+            </a:r>
+            <a:endParaRPr lang="en-US" sz="800" dirty="0"/>
+          </a:p>
+        </p:txBody>
+      </p:sp>
+      <p:sp>
+        <p:nvSpPr>
+          <p:cNvPr id="6" name="Text 4"/>
+          <p:cNvSpPr/>
+          <p:nvPr/>
+        </p:nvSpPr>
+        <p:spPr>
+          <a:xfrm>
+            <a:off x="9966960" y="6537960"/>
+            <a:ext cx="1645920" cy="201168"/>
+          </a:xfrm>
+          <a:prstGeom prst="rect">
+            <a:avLst/>
+          </a:prstGeom>
+          <a:noFill/>
+          <a:ln/>
+        </p:spPr>
+        <p:txBody>
+          <a:bodyPr wrap="square" lIns="0" tIns="0" rIns="0" bIns="0" rtlCol="0" anchor="ctr"/>
+          <a:lstStyle/>
+          <a:p>
+            <a:pPr algn="r" indent="0" marL="0">
+              <a:buNone/>
+            </a:pPr>
+            <a:r>
+              <a:rPr lang="en-US" sz="800" dirty="0">
+                <a:solidFill>
+                  <a:srgbClr val="5F7181"/>
+                </a:solidFill>
+                <a:latin typeface="Aptos" pitchFamily="34" charset="0"/>
+                <a:ea typeface="Aptos" pitchFamily="34" charset="-122"/>
+                <a:cs typeface="Aptos" pitchFamily="34" charset="-120"/>
+              </a:rPr>
+              <a:t>© Paula Soper</a:t>
+            </a:r>
+            <a:endParaRPr lang="en-US" sz="800" dirty="0"/>
+          </a:p>
+        </p:txBody>
+      </p:sp>
+      <p:sp>
+        <p:nvSpPr>
+          <p:cNvPr id="7" name="Shape 5"/>
+          <p:cNvSpPr/>
+          <p:nvPr/>
+        </p:nvSpPr>
+        <p:spPr>
+          <a:xfrm>
+            <a:off x="640080" y="658368"/>
+            <a:ext cx="420624" cy="420624"/>
+          </a:xfrm>
+          <a:prstGeom prst="ellipse">
+            <a:avLst/>
+          </a:prstGeom>
+          <a:solidFill>
+            <a:srgbClr val="0068B7"/>
+          </a:solidFill>
+          <a:ln w="12700">
+            <a:solidFill>
+              <a:srgbClr val="0068B7"/>
+            </a:solidFill>
+            <a:prstDash val="solid"/>
+          </a:ln>
+        </p:spPr>
+      </p:sp>
+      <p:sp>
+        <p:nvSpPr>
+          <p:cNvPr id="8" name="Text 6"/>
+          <p:cNvSpPr/>
+          <p:nvPr/>
+        </p:nvSpPr>
+        <p:spPr>
+          <a:xfrm>
+            <a:off x="640080" y="731520"/>
+            <a:ext cx="420624" cy="164592"/>
+          </a:xfrm>
+          <a:prstGeom prst="rect">
+            <a:avLst/>
+          </a:prstGeom>
+          <a:noFill/>
+          <a:ln/>
+        </p:spPr>
+        <p:txBody>
+          <a:bodyPr wrap="square" lIns="0" tIns="0" rIns="0" bIns="0" rtlCol="0" anchor="ctr"/>
+          <a:lstStyle/>
+          <a:p>
+            <a:pPr algn="ctr" indent="0" marL="0">
+              <a:buNone/>
+            </a:pPr>
+            <a:r>
+              <a:rPr lang="en-US" sz="1100" b="1" dirty="0">
+                <a:solidFill>
+                  <a:srgbClr val="FFFFFF"/>
+                </a:solidFill>
+                <a:latin typeface="Aptos" pitchFamily="34" charset="0"/>
+                <a:ea typeface="Aptos" pitchFamily="34" charset="-122"/>
+                <a:cs typeface="Aptos" pitchFamily="34" charset="-120"/>
+              </a:rPr>
+              <a:t>14</a:t>
+            </a:r>
+            <a:endParaRPr lang="en-US" sz="1100" dirty="0"/>
+          </a:p>
+        </p:txBody>
+      </p:sp>
+      <p:sp>
+        <p:nvSpPr>
+          <p:cNvPr id="9" name="Text 7"/>
+          <p:cNvSpPr/>
+          <p:nvPr/>
+        </p:nvSpPr>
+        <p:spPr>
+          <a:xfrm>
+            <a:off x="640080" y="621792"/>
+            <a:ext cx="10881360" cy="566928"/>
+          </a:xfrm>
+          <a:prstGeom prst="rect">
+            <a:avLst/>
+          </a:prstGeom>
+          <a:noFill/>
+          <a:ln/>
+        </p:spPr>
+        <p:txBody>
+          <a:bodyPr wrap="square" lIns="0" tIns="0" rIns="0" bIns="0" rtlCol="0" anchor="ctr">
+            <a:normAutofit/>
+          </a:bodyPr>
+          <a:lstStyle/>
+          <a:p>
+            <a:pPr indent="0" marL="0">
+              <a:buNone/>
+            </a:pPr>
+            <a:r>
+              <a:rPr lang="en-US" sz="2700" b="1" dirty="0">
+                <a:solidFill>
+                  <a:srgbClr val="003A63"/>
+                </a:solidFill>
+                <a:latin typeface="Aptos Display" pitchFamily="34" charset="0"/>
+                <a:ea typeface="Aptos Display" pitchFamily="34" charset="-122"/>
+                <a:cs typeface="Aptos Display" pitchFamily="34" charset="-120"/>
+              </a:rPr>
+              <a:t>References and Resources</a:t>
+            </a:r>
+            <a:endParaRPr lang="en-US" sz="2700" dirty="0"/>
+          </a:p>
+        </p:txBody>
+      </p:sp>
+      <p:sp>
+        <p:nvSpPr>
+          <p:cNvPr id="10" name="Text 8"/>
+          <p:cNvSpPr/>
+          <p:nvPr/>
+        </p:nvSpPr>
+        <p:spPr>
+          <a:xfrm>
+            <a:off x="868680" y="1417320"/>
+            <a:ext cx="6675120" cy="4434840"/>
+          </a:xfrm>
+          <a:prstGeom prst="rect">
+            <a:avLst/>
+          </a:prstGeom>
+          <a:noFill/>
+          <a:ln/>
+        </p:spPr>
+        <p:txBody>
+          <a:bodyPr wrap="square" lIns="635" tIns="635" rIns="635" bIns="635" rtlCol="0" anchor="t">
+            <a:normAutofit/>
+          </a:bodyPr>
+          <a:lstStyle/>
+          <a:p>
+            <a:r>
+              <a:rPr lang="en-US" sz="1700" dirty="0">
+                <a:solidFill>
+                  <a:srgbClr val="17364A"/>
+                </a:solidFill>
+                <a:latin typeface="Aptos" pitchFamily="34" charset="0"/>
+                <a:ea typeface="Aptos" pitchFamily="34" charset="-122"/>
+                <a:cs typeface="Aptos" pitchFamily="34" charset="-120"/>
+              </a:rPr>
+              <a:t>NIST Artificial Intelligence Risk Management Framework (AI RMF 1.0): https://www.nist.gov/itl/ai-risk-management-framework</a:t>
+            </a:r>
+            <a:endParaRPr lang="en-US" sz="1700" dirty="0"/>
+          </a:p>
+          <a:p>
+            <a:r>
+              <a:rPr lang="en-US" sz="1700" dirty="0">
+                <a:solidFill>
+                  <a:srgbClr val="17364A"/>
+                </a:solidFill>
+                <a:latin typeface="Aptos" pitchFamily="34" charset="0"/>
+                <a:ea typeface="Aptos" pitchFamily="34" charset="-122"/>
+                <a:cs typeface="Aptos" pitchFamily="34" charset="-120"/>
+              </a:rPr>
+              <a:t>NIST Generative AI Profile:.</a:t>
+            </a:r>
+            <a:endParaRPr lang="en-US" sz="1700" dirty="0"/>
+          </a:p>
+          <a:p>
+            <a:r>
+              <a:rPr lang="en-US" sz="1700" dirty="0">
+                <a:solidFill>
+                  <a:srgbClr val="17364A"/>
+                </a:solidFill>
+                <a:latin typeface="Aptos" pitchFamily="34" charset="0"/>
+                <a:ea typeface="Aptos" pitchFamily="34" charset="-122"/>
+                <a:cs typeface="Aptos" pitchFamily="34" charset="-120"/>
+              </a:rPr>
+              <a:t>NIST Privacy Framework</a:t>
+            </a:r>
+            <a:endParaRPr lang="en-US" sz="1700" dirty="0"/>
+          </a:p>
+          <a:p>
+            <a:r>
+              <a:rPr lang="en-US" sz="1700" dirty="0">
+                <a:solidFill>
+                  <a:srgbClr val="17364A"/>
+                </a:solidFill>
+                <a:latin typeface="Aptos" pitchFamily="34" charset="0"/>
+                <a:ea typeface="Aptos" pitchFamily="34" charset="-122"/>
+                <a:cs typeface="Aptos" pitchFamily="34" charset="-120"/>
+              </a:rPr>
+              <a:t>CDC Public Health Data Strategy and Data Modernization resources:.</a:t>
+            </a:r>
+            <a:endParaRPr lang="en-US" sz="1700" dirty="0"/>
+          </a:p>
+        </p:txBody>
+      </p:sp>
+      <p:sp>
+        <p:nvSpPr>
+          <p:cNvPr id="11" name="Shape 9"/>
+          <p:cNvSpPr/>
+          <p:nvPr/>
+        </p:nvSpPr>
+        <p:spPr>
+          <a:xfrm>
+            <a:off x="7909560" y="1417320"/>
+            <a:ext cx="3154680" cy="1828800"/>
+          </a:xfrm>
+          <a:prstGeom prst="roundRect">
+            <a:avLst>
+              <a:gd name="adj" fmla="val 6000"/>
+            </a:avLst>
+          </a:prstGeom>
+          <a:solidFill>
+            <a:srgbClr val="EEF8ED"/>
+          </a:solidFill>
+          <a:ln w="12700">
+            <a:solidFill>
+              <a:srgbClr val="B9D7E6"/>
+            </a:solidFill>
+            <a:prstDash val="solid"/>
+          </a:ln>
+        </p:spPr>
+      </p:sp>
+      <p:sp>
+        <p:nvSpPr>
+          <p:cNvPr id="12" name="Text 10"/>
+          <p:cNvSpPr/>
+          <p:nvPr/>
+        </p:nvSpPr>
+        <p:spPr>
+          <a:xfrm>
+            <a:off x="8074152" y="1563624"/>
+            <a:ext cx="2825496" cy="201168"/>
+          </a:xfrm>
+          <a:prstGeom prst="rect">
+            <a:avLst/>
+          </a:prstGeom>
+          <a:noFill/>
+          <a:ln/>
+        </p:spPr>
+        <p:txBody>
+          <a:bodyPr wrap="square" lIns="0" tIns="0" rIns="0" bIns="0" rtlCol="0" anchor="ctr"/>
+          <a:lstStyle/>
+          <a:p>
+            <a:pPr indent="0" marL="0">
+              <a:buNone/>
+            </a:pPr>
+            <a:r>
+              <a:rPr lang="en-US" sz="950" b="1" dirty="0">
+                <a:solidFill>
+                  <a:srgbClr val="0068B7"/>
+                </a:solidFill>
+                <a:latin typeface="Aptos" pitchFamily="34" charset="0"/>
+                <a:ea typeface="Aptos" pitchFamily="34" charset="-122"/>
+                <a:cs typeface="Aptos" pitchFamily="34" charset="-120"/>
+              </a:rPr>
+              <a:t>Key idea</a:t>
+            </a:r>
+            <a:endParaRPr lang="en-US" sz="950" dirty="0"/>
+          </a:p>
+        </p:txBody>
+      </p:sp>
+      <p:sp>
+        <p:nvSpPr>
+          <p:cNvPr id="13" name="Text 11"/>
+          <p:cNvSpPr/>
+          <p:nvPr/>
+        </p:nvSpPr>
+        <p:spPr>
+          <a:xfrm>
+            <a:off x="8074152" y="1856232"/>
+            <a:ext cx="2825496" cy="1261872"/>
+          </a:xfrm>
+          <a:prstGeom prst="rect">
+            <a:avLst/>
+          </a:prstGeom>
+          <a:noFill/>
+          <a:ln/>
+        </p:spPr>
+        <p:txBody>
+          <a:bodyPr wrap="square" lIns="0" tIns="0" rIns="0" bIns="0" rtlCol="0" anchor="t">
+            <a:normAutofit/>
+          </a:bodyPr>
+          <a:lstStyle/>
+          <a:p>
+            <a:pPr indent="0" marL="0">
+              <a:buNone/>
+            </a:pPr>
+            <a:r>
+              <a:rPr lang="en-US" sz="1250" dirty="0">
+                <a:solidFill>
+                  <a:srgbClr val="17364A"/>
+                </a:solidFill>
+                <a:latin typeface="Aptos" pitchFamily="34" charset="0"/>
+                <a:ea typeface="Aptos" pitchFamily="34" charset="-122"/>
+                <a:cs typeface="Aptos" pitchFamily="34" charset="-120"/>
+              </a:rPr>
+              <a:t>NIST Artificial Intelligence Risk Management Framework (AI RMF 1.0): https://www.nist.gov/itl/ai-risk-management-framework</a:t>
+            </a:r>
+            <a:endParaRPr lang="en-US" sz="1250" dirty="0"/>
+          </a:p>
+        </p:txBody>
+      </p:sp>
+      <p:sp>
+        <p:nvSpPr>
+          <p:cNvPr id="14" name="Shape 12"/>
+          <p:cNvSpPr/>
+          <p:nvPr/>
+        </p:nvSpPr>
+        <p:spPr>
+          <a:xfrm>
+            <a:off x="7909560" y="3520440"/>
+            <a:ext cx="3154680" cy="1737360"/>
+          </a:xfrm>
+          <a:prstGeom prst="roundRect">
+            <a:avLst>
+              <a:gd name="adj" fmla="val 6316"/>
+            </a:avLst>
+          </a:prstGeom>
+          <a:solidFill>
+            <a:srgbClr val="EAF6F8"/>
+          </a:solidFill>
+          <a:ln w="12700">
+            <a:solidFill>
+              <a:srgbClr val="B9D7E6"/>
+            </a:solidFill>
+            <a:prstDash val="solid"/>
+          </a:ln>
+        </p:spPr>
+      </p:sp>
+      <p:sp>
+        <p:nvSpPr>
+          <p:cNvPr id="15" name="Text 13"/>
+          <p:cNvSpPr/>
+          <p:nvPr/>
+        </p:nvSpPr>
+        <p:spPr>
+          <a:xfrm>
+            <a:off x="8074152" y="3666744"/>
+            <a:ext cx="2825496" cy="201168"/>
+          </a:xfrm>
+          <a:prstGeom prst="rect">
+            <a:avLst/>
+          </a:prstGeom>
+          <a:noFill/>
+          <a:ln/>
+        </p:spPr>
+        <p:txBody>
+          <a:bodyPr wrap="square" lIns="0" tIns="0" rIns="0" bIns="0" rtlCol="0" anchor="ctr"/>
+          <a:lstStyle/>
+          <a:p>
+            <a:pPr indent="0" marL="0">
+              <a:buNone/>
+            </a:pPr>
+            <a:r>
+              <a:rPr lang="en-US" sz="950" b="1" dirty="0">
+                <a:solidFill>
+                  <a:srgbClr val="0068B7"/>
+                </a:solidFill>
+                <a:latin typeface="Aptos" pitchFamily="34" charset="0"/>
+                <a:ea typeface="Aptos" pitchFamily="34" charset="-122"/>
+                <a:cs typeface="Aptos" pitchFamily="34" charset="-120"/>
+              </a:rPr>
+              <a:t>Use this for</a:t>
+            </a:r>
+            <a:endParaRPr lang="en-US" sz="950" dirty="0"/>
+          </a:p>
+        </p:txBody>
+      </p:sp>
+      <p:sp>
+        <p:nvSpPr>
+          <p:cNvPr id="16" name="Text 14"/>
+          <p:cNvSpPr/>
+          <p:nvPr/>
+        </p:nvSpPr>
+        <p:spPr>
+          <a:xfrm>
+            <a:off x="8074152" y="3959352"/>
+            <a:ext cx="2825496" cy="1170432"/>
+          </a:xfrm>
+          <a:prstGeom prst="rect">
+            <a:avLst/>
+          </a:prstGeom>
+          <a:noFill/>
+          <a:ln/>
+        </p:spPr>
+        <p:txBody>
+          <a:bodyPr wrap="square" lIns="0" tIns="0" rIns="0" bIns="0" rtlCol="0" anchor="t">
+            <a:normAutofit/>
+          </a:bodyPr>
+          <a:lstStyle/>
+          <a:p>
+            <a:pPr indent="0" marL="0">
+              <a:buNone/>
+            </a:pPr>
+            <a:r>
+              <a:rPr lang="en-US" sz="1250" dirty="0">
+                <a:solidFill>
+                  <a:srgbClr val="17364A"/>
+                </a:solidFill>
+                <a:latin typeface="Aptos" pitchFamily="34" charset="0"/>
+                <a:ea typeface="Aptos" pitchFamily="34" charset="-122"/>
+                <a:cs typeface="Aptos" pitchFamily="34" charset="-120"/>
+              </a:rPr>
+              <a:t>Connect the concept to public health decisions, safeguards, documentation, or implementation work.</a:t>
+            </a:r>
+            <a:endParaRPr lang="en-US" sz="1250" dirty="0"/>
           </a:p>
         </p:txBody>
       </p:sp>
@@ -5099,7 +8617,32 @@
       </p:sp>
       <p:sp>
         <p:nvSpPr>
-          <p:cNvPr id="3" name="Text 1"/>
+          <p:cNvPr id="3" name="Shape 1"/>
+          <p:cNvSpPr/>
+          <p:nvPr/>
+        </p:nvSpPr>
+        <p:spPr>
+          <a:xfrm>
+            <a:off x="0" y="164592"/>
+            <a:ext cx="146304" cy="6693408"/>
+          </a:xfrm>
+          <a:prstGeom prst="rect">
+            <a:avLst/>
+          </a:prstGeom>
+          <a:solidFill>
+            <a:srgbClr val="2F8A28"/>
+          </a:solidFill>
+          <a:ln w="12700">
+            <a:solidFill>
+              <a:srgbClr val="2F8A28"/>
+            </a:solidFill>
+            <a:prstDash val="solid"/>
+          </a:ln>
+        </p:spPr>
+      </p:sp>
+      <p:sp>
+        <p:nvSpPr>
+          <p:cNvPr id="4" name="Text 2"/>
           <p:cNvSpPr/>
           <p:nvPr/>
         </p:nvSpPr>
@@ -5138,7 +8681,7 @@
       </p:sp>
       <p:sp>
         <p:nvSpPr>
-          <p:cNvPr id="4" name="Text 2"/>
+          <p:cNvPr id="5" name="Text 3"/>
           <p:cNvSpPr/>
           <p:nvPr/>
         </p:nvSpPr>
@@ -5177,7 +8720,7 @@
       </p:sp>
       <p:sp>
         <p:nvSpPr>
-          <p:cNvPr id="5" name="Text 3"/>
+          <p:cNvPr id="6" name="Text 4"/>
           <p:cNvSpPr/>
           <p:nvPr/>
         </p:nvSpPr>
@@ -5216,7 +8759,7 @@
       </p:sp>
       <p:sp>
         <p:nvSpPr>
-          <p:cNvPr id="6" name="Text 4"/>
+          <p:cNvPr id="7" name="Text 5"/>
           <p:cNvSpPr/>
           <p:nvPr/>
         </p:nvSpPr>
@@ -5249,7 +8792,7 @@
                 <a:ea typeface="Aptos Display" pitchFamily="34" charset="-122"/>
                 <a:cs typeface="Aptos Display" pitchFamily="34" charset="-120"/>
               </a:rPr>
-              <a:t>Module Context</a:t>
+              <a:t>What this module helps you do</a:t>
             </a:r>
             <a:endParaRPr lang="en-US" sz="2700" dirty="0"/>
           </a:p>
@@ -5257,14 +8800,14 @@
       </p:sp>
       <p:sp>
         <p:nvSpPr>
-          <p:cNvPr id="7" name="Text 5"/>
-          <p:cNvSpPr/>
-          <p:nvPr/>
-        </p:nvSpPr>
-        <p:spPr>
-          <a:xfrm>
-            <a:off x="822960" y="1325880"/>
-            <a:ext cx="10378440" cy="1371600"/>
+          <p:cNvPr id="8" name="Text 6"/>
+          <p:cNvSpPr/>
+          <p:nvPr/>
+        </p:nvSpPr>
+        <p:spPr>
+          <a:xfrm>
+            <a:off x="868680" y="1417320"/>
+            <a:ext cx="6675120" cy="3291840"/>
           </a:xfrm>
           <a:prstGeom prst="rect">
             <a:avLst/>
@@ -5279,7 +8822,7 @@
           <a:lstStyle/>
           <a:p>
             <a:r>
-              <a:rPr lang="en-US" sz="1600" dirty="0">
+              <a:rPr lang="en-US" sz="1700" dirty="0">
                 <a:solidFill>
                   <a:srgbClr val="17364A"/>
                 </a:solidFill>
@@ -5287,13 +8830,13 @@
                 <a:ea typeface="Aptos" pitchFamily="34" charset="-122"/>
                 <a:cs typeface="Aptos" pitchFamily="34" charset="-120"/>
               </a:rPr>
-              <a:t>Level: advanced/leadership</a:t>
-            </a:r>
-            <a:endParaRPr lang="en-US" sz="1600" dirty="0"/>
-          </a:p>
-          <a:p>
-            <a:r>
-              <a:rPr lang="en-US" sz="1600" dirty="0">
+              <a:t>AI changes the skills, roles, and collaboration patterns needed in public health agencies.</a:t>
+            </a:r>
+            <a:endParaRPr lang="en-US" sz="1700" dirty="0"/>
+          </a:p>
+          <a:p>
+            <a:r>
+              <a:rPr lang="en-US" sz="1700" dirty="0">
                 <a:solidFill>
                   <a:srgbClr val="17364A"/>
                 </a:solidFill>
@@ -5301,13 +8844,13 @@
                 <a:ea typeface="Aptos" pitchFamily="34" charset="-122"/>
                 <a:cs typeface="Aptos" pitchFamily="34" charset="-120"/>
               </a:rPr>
-              <a:t>Primary track: Public Health Executive Leadership Track</a:t>
-            </a:r>
-            <a:endParaRPr lang="en-US" sz="1600" dirty="0"/>
-          </a:p>
-          <a:p>
-            <a:r>
-              <a:rPr lang="en-US" sz="1600" dirty="0">
+              <a:t>It does not eliminate the need for public health expertise.</a:t>
+            </a:r>
+            <a:endParaRPr lang="en-US" sz="1700" dirty="0"/>
+          </a:p>
+          <a:p>
+            <a:r>
+              <a:rPr lang="en-US" sz="1700" dirty="0">
                 <a:solidFill>
                   <a:srgbClr val="17364A"/>
                 </a:solidFill>
@@ -5315,31 +8858,111 @@
                 <a:ea typeface="Aptos" pitchFamily="34" charset="-122"/>
                 <a:cs typeface="Aptos" pitchFamily="34" charset="-120"/>
               </a:rPr>
-              <a:t>Appears in tracks: governance-security</a:t>
-            </a:r>
-            <a:endParaRPr lang="en-US" sz="1600" dirty="0"/>
-          </a:p>
-        </p:txBody>
-      </p:sp>
-      <p:sp>
-        <p:nvSpPr>
-          <p:cNvPr id="8" name="Text 6"/>
-          <p:cNvSpPr/>
-          <p:nvPr/>
-        </p:nvSpPr>
-        <p:spPr>
-          <a:xfrm>
-            <a:off x="822960" y="2743200"/>
-            <a:ext cx="10378440" cy="2834640"/>
-          </a:xfrm>
-          <a:prstGeom prst="rect">
-            <a:avLst/>
-          </a:prstGeom>
-          <a:noFill/>
-          <a:ln/>
-        </p:spPr>
-        <p:txBody>
-          <a:bodyPr wrap="square" lIns="1016" tIns="1016" rIns="1016" bIns="1016" rtlCol="0" anchor="t">
+              <a:t>Instead, it increases the need for staff who can translate across program, data, technology, privacy, legal, equity, procurement, and community.</a:t>
+            </a:r>
+            <a:endParaRPr lang="en-US" sz="1700" dirty="0"/>
+          </a:p>
+          <a:p>
+            <a:r>
+              <a:rPr lang="en-US" sz="1700" dirty="0">
+                <a:solidFill>
+                  <a:srgbClr val="17364A"/>
+                </a:solidFill>
+                <a:latin typeface="Aptos" pitchFamily="34" charset="0"/>
+                <a:ea typeface="Aptos" pitchFamily="34" charset="-122"/>
+                <a:cs typeface="Aptos" pitchFamily="34" charset="-120"/>
+              </a:rPr>
+              <a:t>Leaders need a workforce strategy that prepares staff to use, review, govern, and improve AI-supported workflows.</a:t>
+            </a:r>
+            <a:endParaRPr lang="en-US" sz="1700" dirty="0"/>
+          </a:p>
+        </p:txBody>
+      </p:sp>
+      <p:sp>
+        <p:nvSpPr>
+          <p:cNvPr id="9" name="Shape 7"/>
+          <p:cNvSpPr/>
+          <p:nvPr/>
+        </p:nvSpPr>
+        <p:spPr>
+          <a:xfrm>
+            <a:off x="7909560" y="1417320"/>
+            <a:ext cx="3154680" cy="1920240"/>
+          </a:xfrm>
+          <a:prstGeom prst="roundRect">
+            <a:avLst>
+              <a:gd name="adj" fmla="val 5714"/>
+            </a:avLst>
+          </a:prstGeom>
+          <a:solidFill>
+            <a:srgbClr val="EAF6F8"/>
+          </a:solidFill>
+          <a:ln w="12700">
+            <a:solidFill>
+              <a:srgbClr val="B9D7E6"/>
+            </a:solidFill>
+            <a:prstDash val="solid"/>
+          </a:ln>
+        </p:spPr>
+      </p:sp>
+      <p:sp>
+        <p:nvSpPr>
+          <p:cNvPr id="10" name="Text 8"/>
+          <p:cNvSpPr/>
+          <p:nvPr/>
+        </p:nvSpPr>
+        <p:spPr>
+          <a:xfrm>
+            <a:off x="8074152" y="1563624"/>
+            <a:ext cx="2825496" cy="201168"/>
+          </a:xfrm>
+          <a:prstGeom prst="rect">
+            <a:avLst/>
+          </a:prstGeom>
+          <a:noFill/>
+          <a:ln/>
+        </p:spPr>
+        <p:txBody>
+          <a:bodyPr wrap="square" lIns="0" tIns="0" rIns="0" bIns="0" rtlCol="0" anchor="ctr"/>
+          <a:lstStyle/>
+          <a:p>
+            <a:pPr indent="0" marL="0">
+              <a:buNone/>
+            </a:pPr>
+            <a:r>
+              <a:rPr lang="en-US" sz="950" b="1" dirty="0">
+                <a:solidFill>
+                  <a:srgbClr val="0068B7"/>
+                </a:solidFill>
+                <a:latin typeface="Aptos" pitchFamily="34" charset="0"/>
+                <a:ea typeface="Aptos" pitchFamily="34" charset="-122"/>
+                <a:cs typeface="Aptos" pitchFamily="34" charset="-120"/>
+              </a:rPr>
+              <a:t>Module details</a:t>
+            </a:r>
+            <a:endParaRPr lang="en-US" sz="950" dirty="0"/>
+          </a:p>
+        </p:txBody>
+      </p:sp>
+      <p:sp>
+        <p:nvSpPr>
+          <p:cNvPr id="11" name="Text 9"/>
+          <p:cNvSpPr/>
+          <p:nvPr/>
+        </p:nvSpPr>
+        <p:spPr>
+          <a:xfrm>
+            <a:off x="8074152" y="1856232"/>
+            <a:ext cx="2825496" cy="1353312"/>
+          </a:xfrm>
+          <a:prstGeom prst="rect">
+            <a:avLst/>
+          </a:prstGeom>
+          <a:noFill/>
+          <a:ln/>
+        </p:spPr>
+        <p:txBody>
+          <a:bodyPr wrap="square" lIns="0" tIns="0" rIns="0" bIns="0" rtlCol="0" anchor="t">
             <a:normAutofit/>
           </a:bodyPr>
           <a:lstStyle/>
@@ -5348,7 +8971,7 @@
               <a:buNone/>
             </a:pPr>
             <a:r>
-              <a:rPr lang="en-US" sz="1400" dirty="0">
+              <a:rPr lang="en-US" sz="1250" dirty="0">
                 <a:solidFill>
                   <a:srgbClr val="17364A"/>
                 </a:solidFill>
@@ -5356,9 +8979,656 @@
                 <a:ea typeface="Aptos" pitchFamily="34" charset="-122"/>
                 <a:cs typeface="Aptos" pitchFamily="34" charset="-120"/>
               </a:rPr>
-              <a:t>AI changes the skills, roles, and collaboration patterns needed in public health agencies. It does not eliminate the need for public health expertise. Instead, it increases the need for staff who can translate across program, data, technology, privacy, legal, equity, procurement, and community perspectives. Leaders need a workforce strategy that prepares staff to use, review, govern, and improve AI-supported workflows. This module helps leaders identify AI-related roles and competencies. It emphasizes the need for role-based training, AI bridge professionals, governance participants, technical reviewers, program owners, data stewards, and frontline users. The module also addresses workload, job redesign, deskilling risk, upskilling, and equitable access to training.</a:t>
-            </a:r>
-            <a:endParaRPr lang="en-US" sz="1400" dirty="0"/>
+              <a:t>Level: advanced/leadership</a:t>
+            </a:r>
+            <a:endParaRPr lang="en-US" sz="1250" dirty="0"/>
+          </a:p>
+          <a:p>
+            <a:pPr indent="0" marL="0">
+              <a:buNone/>
+            </a:pPr>
+            <a:r>
+              <a:rPr lang="en-US" sz="1250" dirty="0">
+                <a:solidFill>
+                  <a:srgbClr val="17364A"/>
+                </a:solidFill>
+                <a:latin typeface="Aptos" pitchFamily="34" charset="0"/>
+                <a:ea typeface="Aptos" pitchFamily="34" charset="-122"/>
+                <a:cs typeface="Aptos" pitchFamily="34" charset="-120"/>
+              </a:rPr>
+              <a:t>Primary track: Public Health Executive Leadership Track</a:t>
+            </a:r>
+            <a:endParaRPr lang="en-US" sz="1250" dirty="0"/>
+          </a:p>
+          <a:p>
+            <a:pPr indent="0" marL="0">
+              <a:buNone/>
+            </a:pPr>
+            <a:r>
+              <a:rPr lang="en-US" sz="1250" dirty="0">
+                <a:solidFill>
+                  <a:srgbClr val="17364A"/>
+                </a:solidFill>
+                <a:latin typeface="Aptos" pitchFamily="34" charset="0"/>
+                <a:ea typeface="Aptos" pitchFamily="34" charset="-122"/>
+                <a:cs typeface="Aptos" pitchFamily="34" charset="-120"/>
+              </a:rPr>
+              <a:t>Appears in tracks: governance-security</a:t>
+            </a:r>
+            <a:endParaRPr lang="en-US" sz="1250" dirty="0"/>
+          </a:p>
+        </p:txBody>
+      </p:sp>
+      <p:sp>
+        <p:nvSpPr>
+          <p:cNvPr id="12" name="Shape 10"/>
+          <p:cNvSpPr/>
+          <p:nvPr/>
+        </p:nvSpPr>
+        <p:spPr>
+          <a:xfrm>
+            <a:off x="7909560" y="3611880"/>
+            <a:ext cx="3154680" cy="1783080"/>
+          </a:xfrm>
+          <a:prstGeom prst="roundRect">
+            <a:avLst>
+              <a:gd name="adj" fmla="val 6154"/>
+            </a:avLst>
+          </a:prstGeom>
+          <a:solidFill>
+            <a:srgbClr val="EEF8ED"/>
+          </a:solidFill>
+          <a:ln w="12700">
+            <a:solidFill>
+              <a:srgbClr val="B9D7E6"/>
+            </a:solidFill>
+            <a:prstDash val="solid"/>
+          </a:ln>
+        </p:spPr>
+      </p:sp>
+      <p:sp>
+        <p:nvSpPr>
+          <p:cNvPr id="13" name="Text 11"/>
+          <p:cNvSpPr/>
+          <p:nvPr/>
+        </p:nvSpPr>
+        <p:spPr>
+          <a:xfrm>
+            <a:off x="8074152" y="3758184"/>
+            <a:ext cx="2825496" cy="201168"/>
+          </a:xfrm>
+          <a:prstGeom prst="rect">
+            <a:avLst/>
+          </a:prstGeom>
+          <a:noFill/>
+          <a:ln/>
+        </p:spPr>
+        <p:txBody>
+          <a:bodyPr wrap="square" lIns="0" tIns="0" rIns="0" bIns="0" rtlCol="0" anchor="ctr"/>
+          <a:lstStyle/>
+          <a:p>
+            <a:pPr indent="0" marL="0">
+              <a:buNone/>
+            </a:pPr>
+            <a:r>
+              <a:rPr lang="en-US" sz="950" b="1" dirty="0">
+                <a:solidFill>
+                  <a:srgbClr val="0068B7"/>
+                </a:solidFill>
+                <a:latin typeface="Aptos" pitchFamily="34" charset="0"/>
+                <a:ea typeface="Aptos" pitchFamily="34" charset="-122"/>
+                <a:cs typeface="Aptos" pitchFamily="34" charset="-120"/>
+              </a:rPr>
+              <a:t>Learning approach</a:t>
+            </a:r>
+            <a:endParaRPr lang="en-US" sz="950" dirty="0"/>
+          </a:p>
+        </p:txBody>
+      </p:sp>
+      <p:sp>
+        <p:nvSpPr>
+          <p:cNvPr id="14" name="Text 12"/>
+          <p:cNvSpPr/>
+          <p:nvPr/>
+        </p:nvSpPr>
+        <p:spPr>
+          <a:xfrm>
+            <a:off x="8074152" y="4050792"/>
+            <a:ext cx="2825496" cy="1216152"/>
+          </a:xfrm>
+          <a:prstGeom prst="rect">
+            <a:avLst/>
+          </a:prstGeom>
+          <a:noFill/>
+          <a:ln/>
+        </p:spPr>
+        <p:txBody>
+          <a:bodyPr wrap="square" lIns="0" tIns="0" rIns="0" bIns="0" rtlCol="0" anchor="t">
+            <a:normAutofit/>
+          </a:bodyPr>
+          <a:lstStyle/>
+          <a:p>
+            <a:pPr indent="0" marL="0">
+              <a:buNone/>
+            </a:pPr>
+            <a:r>
+              <a:rPr lang="en-US" sz="1250" dirty="0">
+                <a:solidFill>
+                  <a:srgbClr val="17364A"/>
+                </a:solidFill>
+                <a:latin typeface="Aptos" pitchFamily="34" charset="0"/>
+                <a:ea typeface="Aptos" pitchFamily="34" charset="-122"/>
+                <a:cs typeface="Aptos" pitchFamily="34" charset="-120"/>
+              </a:rPr>
+              <a:t>Review the core ideas, complete the practical exercise, check your understanding, and use the related plays and tools to apply the lesson.</a:t>
+            </a:r>
+            <a:endParaRPr lang="en-US" sz="1250" dirty="0"/>
+          </a:p>
+        </p:txBody>
+      </p:sp>
+    </p:spTree>
+  </p:cSld>
+  <p:clrMapOvr>
+    <a:masterClrMapping/>
+  </p:clrMapOvr>
+</p:sld>
+</file>
+
+<file path=ppt/slides/slide20.xml><?xml version="1.0" encoding="utf-8"?>
+<p:sld xmlns:a="http://schemas.openxmlformats.org/drawingml/2006/main" xmlns:r="http://schemas.openxmlformats.org/officeDocument/2006/relationships" xmlns:p="http://schemas.openxmlformats.org/presentationml/2006/main">
+  <p:cSld name="Slide 20">
+    <p:bg>
+      <p:bgPr>
+        <a:solidFill>
+          <a:srgbClr val="F7FBFD"/>
+        </a:solidFill>
+      </p:bgPr>
+    </p:bg>
+    <p:spTree>
+      <p:nvGrpSpPr>
+        <p:cNvPr id="1" name=""/>
+        <p:cNvGrpSpPr/>
+        <p:nvPr/>
+      </p:nvGrpSpPr>
+      <p:grpSpPr>
+        <a:xfrm>
+          <a:off x="0" y="0"/>
+          <a:ext cx="0" cy="0"/>
+          <a:chOff x="0" y="0"/>
+          <a:chExt cx="0" cy="0"/>
+        </a:xfrm>
+      </p:grpSpPr>
+      <p:sp>
+        <p:nvSpPr>
+          <p:cNvPr id="2" name="Shape 0"/>
+          <p:cNvSpPr/>
+          <p:nvPr/>
+        </p:nvSpPr>
+        <p:spPr>
+          <a:xfrm>
+            <a:off x="0" y="0"/>
+            <a:ext cx="12191695" cy="164592"/>
+          </a:xfrm>
+          <a:prstGeom prst="rect">
+            <a:avLst/>
+          </a:prstGeom>
+          <a:solidFill>
+            <a:srgbClr val="0068B7"/>
+          </a:solidFill>
+          <a:ln w="12700">
+            <a:solidFill>
+              <a:srgbClr val="0068B7"/>
+            </a:solidFill>
+            <a:prstDash val="solid"/>
+          </a:ln>
+        </p:spPr>
+      </p:sp>
+      <p:sp>
+        <p:nvSpPr>
+          <p:cNvPr id="3" name="Shape 1"/>
+          <p:cNvSpPr/>
+          <p:nvPr/>
+        </p:nvSpPr>
+        <p:spPr>
+          <a:xfrm>
+            <a:off x="0" y="164592"/>
+            <a:ext cx="146304" cy="6693408"/>
+          </a:xfrm>
+          <a:prstGeom prst="rect">
+            <a:avLst/>
+          </a:prstGeom>
+          <a:solidFill>
+            <a:srgbClr val="2F8A28"/>
+          </a:solidFill>
+          <a:ln w="12700">
+            <a:solidFill>
+              <a:srgbClr val="2F8A28"/>
+            </a:solidFill>
+            <a:prstDash val="solid"/>
+          </a:ln>
+        </p:spPr>
+      </p:sp>
+      <p:sp>
+        <p:nvSpPr>
+          <p:cNvPr id="4" name="Text 2"/>
+          <p:cNvSpPr/>
+          <p:nvPr/>
+        </p:nvSpPr>
+        <p:spPr>
+          <a:xfrm>
+            <a:off x="502920" y="292608"/>
+            <a:ext cx="10149840" cy="256032"/>
+          </a:xfrm>
+          <a:prstGeom prst="rect">
+            <a:avLst/>
+          </a:prstGeom>
+          <a:noFill/>
+          <a:ln/>
+        </p:spPr>
+        <p:txBody>
+          <a:bodyPr wrap="square" lIns="0" tIns="0" rIns="0" bIns="0" rtlCol="0" anchor="ctr"/>
+          <a:lstStyle/>
+          <a:p>
+            <a:pPr indent="0" marL="0">
+              <a:buNone/>
+            </a:pPr>
+            <a:r>
+              <a:rPr lang="en-US" sz="900" b="1" dirty="0">
+                <a:solidFill>
+                  <a:srgbClr val="5F7181"/>
+                </a:solidFill>
+                <a:latin typeface="Aptos" pitchFamily="34" charset="0"/>
+                <a:ea typeface="Aptos" pitchFamily="34" charset="-122"/>
+                <a:cs typeface="Aptos" pitchFamily="34" charset="-120"/>
+              </a:rPr>
+              <a:t>Workforce Strategy and AI Role Design</a:t>
+            </a:r>
+            <a:endParaRPr lang="en-US" sz="900" dirty="0"/>
+          </a:p>
+        </p:txBody>
+      </p:sp>
+      <p:sp>
+        <p:nvSpPr>
+          <p:cNvPr id="5" name="Text 3"/>
+          <p:cNvSpPr/>
+          <p:nvPr/>
+        </p:nvSpPr>
+        <p:spPr>
+          <a:xfrm>
+            <a:off x="502920" y="6537960"/>
+            <a:ext cx="7772400" cy="201168"/>
+          </a:xfrm>
+          <a:prstGeom prst="rect">
+            <a:avLst/>
+          </a:prstGeom>
+          <a:noFill/>
+          <a:ln/>
+        </p:spPr>
+        <p:txBody>
+          <a:bodyPr wrap="square" lIns="0" tIns="0" rIns="0" bIns="0" rtlCol="0" anchor="ctr"/>
+          <a:lstStyle/>
+          <a:p>
+            <a:pPr indent="0" marL="0">
+              <a:buNone/>
+            </a:pPr>
+            <a:r>
+              <a:rPr lang="en-US" sz="800" dirty="0">
+                <a:solidFill>
+                  <a:srgbClr val="5F7181"/>
+                </a:solidFill>
+                <a:latin typeface="Aptos" pitchFamily="34" charset="0"/>
+                <a:ea typeface="Aptos" pitchFamily="34" charset="-122"/>
+                <a:cs typeface="Aptos" pitchFamily="34" charset="-120"/>
+              </a:rPr>
+              <a:t>AI Playbook and Toolkit for Public Health Departments</a:t>
+            </a:r>
+            <a:endParaRPr lang="en-US" sz="800" dirty="0"/>
+          </a:p>
+        </p:txBody>
+      </p:sp>
+      <p:sp>
+        <p:nvSpPr>
+          <p:cNvPr id="6" name="Text 4"/>
+          <p:cNvSpPr/>
+          <p:nvPr/>
+        </p:nvSpPr>
+        <p:spPr>
+          <a:xfrm>
+            <a:off x="9966960" y="6537960"/>
+            <a:ext cx="1645920" cy="201168"/>
+          </a:xfrm>
+          <a:prstGeom prst="rect">
+            <a:avLst/>
+          </a:prstGeom>
+          <a:noFill/>
+          <a:ln/>
+        </p:spPr>
+        <p:txBody>
+          <a:bodyPr wrap="square" lIns="0" tIns="0" rIns="0" bIns="0" rtlCol="0" anchor="ctr"/>
+          <a:lstStyle/>
+          <a:p>
+            <a:pPr algn="r" indent="0" marL="0">
+              <a:buNone/>
+            </a:pPr>
+            <a:r>
+              <a:rPr lang="en-US" sz="800" dirty="0">
+                <a:solidFill>
+                  <a:srgbClr val="5F7181"/>
+                </a:solidFill>
+                <a:latin typeface="Aptos" pitchFamily="34" charset="0"/>
+                <a:ea typeface="Aptos" pitchFamily="34" charset="-122"/>
+                <a:cs typeface="Aptos" pitchFamily="34" charset="-120"/>
+              </a:rPr>
+              <a:t>© Paula Soper</a:t>
+            </a:r>
+            <a:endParaRPr lang="en-US" sz="800" dirty="0"/>
+          </a:p>
+        </p:txBody>
+      </p:sp>
+      <p:sp>
+        <p:nvSpPr>
+          <p:cNvPr id="7" name="Text 5"/>
+          <p:cNvSpPr/>
+          <p:nvPr/>
+        </p:nvSpPr>
+        <p:spPr>
+          <a:xfrm>
+            <a:off x="640080" y="658368"/>
+            <a:ext cx="10881360" cy="566928"/>
+          </a:xfrm>
+          <a:prstGeom prst="rect">
+            <a:avLst/>
+          </a:prstGeom>
+          <a:noFill/>
+          <a:ln/>
+        </p:spPr>
+        <p:txBody>
+          <a:bodyPr wrap="square" lIns="0" tIns="0" rIns="0" bIns="0" rtlCol="0" anchor="ctr">
+            <a:normAutofit/>
+          </a:bodyPr>
+          <a:lstStyle/>
+          <a:p>
+            <a:pPr indent="0" marL="0">
+              <a:buNone/>
+            </a:pPr>
+            <a:r>
+              <a:rPr lang="en-US" sz="2700" b="1" dirty="0">
+                <a:solidFill>
+                  <a:srgbClr val="003A63"/>
+                </a:solidFill>
+                <a:latin typeface="Aptos Display" pitchFamily="34" charset="0"/>
+                <a:ea typeface="Aptos Display" pitchFamily="34" charset="-122"/>
+                <a:cs typeface="Aptos Display" pitchFamily="34" charset="-120"/>
+              </a:rPr>
+              <a:t>References and Resources Continued</a:t>
+            </a:r>
+            <a:endParaRPr lang="en-US" sz="2700" dirty="0"/>
+          </a:p>
+        </p:txBody>
+      </p:sp>
+      <p:sp>
+        <p:nvSpPr>
+          <p:cNvPr id="8" name="Text 6"/>
+          <p:cNvSpPr/>
+          <p:nvPr/>
+        </p:nvSpPr>
+        <p:spPr>
+          <a:xfrm>
+            <a:off x="868680" y="1417320"/>
+            <a:ext cx="6675120" cy="4434840"/>
+          </a:xfrm>
+          <a:prstGeom prst="rect">
+            <a:avLst/>
+          </a:prstGeom>
+          <a:noFill/>
+          <a:ln/>
+        </p:spPr>
+        <p:txBody>
+          <a:bodyPr wrap="square" lIns="635" tIns="635" rIns="635" bIns="635" rtlCol="0" anchor="t">
+            <a:normAutofit/>
+          </a:bodyPr>
+          <a:lstStyle/>
+          <a:p>
+            <a:r>
+              <a:rPr lang="en-US" sz="1700" dirty="0">
+                <a:solidFill>
+                  <a:srgbClr val="17364A"/>
+                </a:solidFill>
+                <a:latin typeface="Aptos" pitchFamily="34" charset="0"/>
+                <a:ea typeface="Aptos" pitchFamily="34" charset="-122"/>
+                <a:cs typeface="Aptos" pitchFamily="34" charset="-120"/>
+              </a:rPr>
+              <a:t>OMB Memorandum M-24-10 on federal AI governance, risk management, and innovation, where relevant to public-sector governance.</a:t>
+            </a:r>
+            <a:endParaRPr lang="en-US" sz="1700" dirty="0"/>
+          </a:p>
+          <a:p>
+            <a:r>
+              <a:rPr lang="en-US" sz="1700" dirty="0">
+                <a:solidFill>
+                  <a:srgbClr val="17364A"/>
+                </a:solidFill>
+                <a:latin typeface="Aptos" pitchFamily="34" charset="0"/>
+                <a:ea typeface="Aptos" pitchFamily="34" charset="-122"/>
+                <a:cs typeface="Aptos" pitchFamily="34" charset="-120"/>
+              </a:rPr>
+              <a:t>Agency strategic plans, procurement policies, privacy policies, cybersecurity policies, records policies, and equity plans</a:t>
+            </a:r>
+            <a:endParaRPr lang="en-US" sz="1700" dirty="0"/>
+          </a:p>
+        </p:txBody>
+      </p:sp>
+      <p:sp>
+        <p:nvSpPr>
+          <p:cNvPr id="9" name="Shape 7"/>
+          <p:cNvSpPr/>
+          <p:nvPr/>
+        </p:nvSpPr>
+        <p:spPr>
+          <a:xfrm>
+            <a:off x="7909560" y="1417320"/>
+            <a:ext cx="3154680" cy="1828800"/>
+          </a:xfrm>
+          <a:prstGeom prst="roundRect">
+            <a:avLst>
+              <a:gd name="adj" fmla="val 6000"/>
+            </a:avLst>
+          </a:prstGeom>
+          <a:solidFill>
+            <a:srgbClr val="EEF8ED"/>
+          </a:solidFill>
+          <a:ln w="12700">
+            <a:solidFill>
+              <a:srgbClr val="B9D7E6"/>
+            </a:solidFill>
+            <a:prstDash val="solid"/>
+          </a:ln>
+        </p:spPr>
+      </p:sp>
+      <p:sp>
+        <p:nvSpPr>
+          <p:cNvPr id="10" name="Text 8"/>
+          <p:cNvSpPr/>
+          <p:nvPr/>
+        </p:nvSpPr>
+        <p:spPr>
+          <a:xfrm>
+            <a:off x="8074152" y="1563624"/>
+            <a:ext cx="2825496" cy="201168"/>
+          </a:xfrm>
+          <a:prstGeom prst="rect">
+            <a:avLst/>
+          </a:prstGeom>
+          <a:noFill/>
+          <a:ln/>
+        </p:spPr>
+        <p:txBody>
+          <a:bodyPr wrap="square" lIns="0" tIns="0" rIns="0" bIns="0" rtlCol="0" anchor="ctr"/>
+          <a:lstStyle/>
+          <a:p>
+            <a:pPr indent="0" marL="0">
+              <a:buNone/>
+            </a:pPr>
+            <a:r>
+              <a:rPr lang="en-US" sz="950" b="1" dirty="0">
+                <a:solidFill>
+                  <a:srgbClr val="0068B7"/>
+                </a:solidFill>
+                <a:latin typeface="Aptos" pitchFamily="34" charset="0"/>
+                <a:ea typeface="Aptos" pitchFamily="34" charset="-122"/>
+                <a:cs typeface="Aptos" pitchFamily="34" charset="-120"/>
+              </a:rPr>
+              <a:t>Key idea</a:t>
+            </a:r>
+            <a:endParaRPr lang="en-US" sz="950" dirty="0"/>
+          </a:p>
+        </p:txBody>
+      </p:sp>
+      <p:sp>
+        <p:nvSpPr>
+          <p:cNvPr id="11" name="Text 9"/>
+          <p:cNvSpPr/>
+          <p:nvPr/>
+        </p:nvSpPr>
+        <p:spPr>
+          <a:xfrm>
+            <a:off x="8074152" y="1856232"/>
+            <a:ext cx="2825496" cy="1261872"/>
+          </a:xfrm>
+          <a:prstGeom prst="rect">
+            <a:avLst/>
+          </a:prstGeom>
+          <a:noFill/>
+          <a:ln/>
+        </p:spPr>
+        <p:txBody>
+          <a:bodyPr wrap="square" lIns="0" tIns="0" rIns="0" bIns="0" rtlCol="0" anchor="t">
+            <a:normAutofit/>
+          </a:bodyPr>
+          <a:lstStyle/>
+          <a:p>
+            <a:pPr indent="0" marL="0">
+              <a:buNone/>
+            </a:pPr>
+            <a:r>
+              <a:rPr lang="en-US" sz="1250" dirty="0">
+                <a:solidFill>
+                  <a:srgbClr val="17364A"/>
+                </a:solidFill>
+                <a:latin typeface="Aptos" pitchFamily="34" charset="0"/>
+                <a:ea typeface="Aptos" pitchFamily="34" charset="-122"/>
+                <a:cs typeface="Aptos" pitchFamily="34" charset="-120"/>
+              </a:rPr>
+              <a:t>OMB Memorandum M-24-10 on federal AI governance, risk management, and innovation, where relevant to public-sector governance.</a:t>
+            </a:r>
+            <a:endParaRPr lang="en-US" sz="1250" dirty="0"/>
+          </a:p>
+        </p:txBody>
+      </p:sp>
+      <p:sp>
+        <p:nvSpPr>
+          <p:cNvPr id="12" name="Shape 10"/>
+          <p:cNvSpPr/>
+          <p:nvPr/>
+        </p:nvSpPr>
+        <p:spPr>
+          <a:xfrm>
+            <a:off x="7909560" y="3520440"/>
+            <a:ext cx="3154680" cy="1737360"/>
+          </a:xfrm>
+          <a:prstGeom prst="roundRect">
+            <a:avLst>
+              <a:gd name="adj" fmla="val 6316"/>
+            </a:avLst>
+          </a:prstGeom>
+          <a:solidFill>
+            <a:srgbClr val="EAF6F8"/>
+          </a:solidFill>
+          <a:ln w="12700">
+            <a:solidFill>
+              <a:srgbClr val="B9D7E6"/>
+            </a:solidFill>
+            <a:prstDash val="solid"/>
+          </a:ln>
+        </p:spPr>
+      </p:sp>
+      <p:sp>
+        <p:nvSpPr>
+          <p:cNvPr id="13" name="Text 11"/>
+          <p:cNvSpPr/>
+          <p:nvPr/>
+        </p:nvSpPr>
+        <p:spPr>
+          <a:xfrm>
+            <a:off x="8074152" y="3666744"/>
+            <a:ext cx="2825496" cy="201168"/>
+          </a:xfrm>
+          <a:prstGeom prst="rect">
+            <a:avLst/>
+          </a:prstGeom>
+          <a:noFill/>
+          <a:ln/>
+        </p:spPr>
+        <p:txBody>
+          <a:bodyPr wrap="square" lIns="0" tIns="0" rIns="0" bIns="0" rtlCol="0" anchor="ctr"/>
+          <a:lstStyle/>
+          <a:p>
+            <a:pPr indent="0" marL="0">
+              <a:buNone/>
+            </a:pPr>
+            <a:r>
+              <a:rPr lang="en-US" sz="950" b="1" dirty="0">
+                <a:solidFill>
+                  <a:srgbClr val="0068B7"/>
+                </a:solidFill>
+                <a:latin typeface="Aptos" pitchFamily="34" charset="0"/>
+                <a:ea typeface="Aptos" pitchFamily="34" charset="-122"/>
+                <a:cs typeface="Aptos" pitchFamily="34" charset="-120"/>
+              </a:rPr>
+              <a:t>Use this for</a:t>
+            </a:r>
+            <a:endParaRPr lang="en-US" sz="950" dirty="0"/>
+          </a:p>
+        </p:txBody>
+      </p:sp>
+      <p:sp>
+        <p:nvSpPr>
+          <p:cNvPr id="14" name="Text 12"/>
+          <p:cNvSpPr/>
+          <p:nvPr/>
+        </p:nvSpPr>
+        <p:spPr>
+          <a:xfrm>
+            <a:off x="8074152" y="3959352"/>
+            <a:ext cx="2825496" cy="1170432"/>
+          </a:xfrm>
+          <a:prstGeom prst="rect">
+            <a:avLst/>
+          </a:prstGeom>
+          <a:noFill/>
+          <a:ln/>
+        </p:spPr>
+        <p:txBody>
+          <a:bodyPr wrap="square" lIns="0" tIns="0" rIns="0" bIns="0" rtlCol="0" anchor="t">
+            <a:normAutofit/>
+          </a:bodyPr>
+          <a:lstStyle/>
+          <a:p>
+            <a:pPr indent="0" marL="0">
+              <a:buNone/>
+            </a:pPr>
+            <a:r>
+              <a:rPr lang="en-US" sz="1250" dirty="0">
+                <a:solidFill>
+                  <a:srgbClr val="17364A"/>
+                </a:solidFill>
+                <a:latin typeface="Aptos" pitchFamily="34" charset="0"/>
+                <a:ea typeface="Aptos" pitchFamily="34" charset="-122"/>
+                <a:cs typeface="Aptos" pitchFamily="34" charset="-120"/>
+              </a:rPr>
+              <a:t>Connect the concept to public health decisions, safeguards, documentation, or implementation work.</a:t>
+            </a:r>
+            <a:endParaRPr lang="en-US" sz="1250" dirty="0"/>
           </a:p>
         </p:txBody>
       </p:sp>
@@ -5421,7 +9691,32 @@
       </p:sp>
       <p:sp>
         <p:nvSpPr>
-          <p:cNvPr id="3" name="Text 1"/>
+          <p:cNvPr id="3" name="Shape 1"/>
+          <p:cNvSpPr/>
+          <p:nvPr/>
+        </p:nvSpPr>
+        <p:spPr>
+          <a:xfrm>
+            <a:off x="0" y="164592"/>
+            <a:ext cx="146304" cy="6693408"/>
+          </a:xfrm>
+          <a:prstGeom prst="rect">
+            <a:avLst/>
+          </a:prstGeom>
+          <a:solidFill>
+            <a:srgbClr val="2F8A28"/>
+          </a:solidFill>
+          <a:ln w="12700">
+            <a:solidFill>
+              <a:srgbClr val="2F8A28"/>
+            </a:solidFill>
+            <a:prstDash val="solid"/>
+          </a:ln>
+        </p:spPr>
+      </p:sp>
+      <p:sp>
+        <p:nvSpPr>
+          <p:cNvPr id="4" name="Text 2"/>
           <p:cNvSpPr/>
           <p:nvPr/>
         </p:nvSpPr>
@@ -5460,7 +9755,7 @@
       </p:sp>
       <p:sp>
         <p:nvSpPr>
-          <p:cNvPr id="4" name="Text 2"/>
+          <p:cNvPr id="5" name="Text 3"/>
           <p:cNvSpPr/>
           <p:nvPr/>
         </p:nvSpPr>
@@ -5499,7 +9794,7 @@
       </p:sp>
       <p:sp>
         <p:nvSpPr>
-          <p:cNvPr id="5" name="Text 3"/>
+          <p:cNvPr id="6" name="Text 4"/>
           <p:cNvSpPr/>
           <p:nvPr/>
         </p:nvSpPr>
@@ -5538,7 +9833,7 @@
       </p:sp>
       <p:sp>
         <p:nvSpPr>
-          <p:cNvPr id="6" name="Text 4"/>
+          <p:cNvPr id="7" name="Text 5"/>
           <p:cNvSpPr/>
           <p:nvPr/>
         </p:nvSpPr>
@@ -5571,7 +9866,7 @@
                 <a:ea typeface="Aptos Display" pitchFamily="34" charset="-122"/>
                 <a:cs typeface="Aptos Display" pitchFamily="34" charset="-120"/>
               </a:rPr>
-              <a:t>Learning Objectives</a:t>
+              <a:t>How this module connects to the playbook</a:t>
             </a:r>
             <a:endParaRPr lang="en-US" sz="2700" dirty="0"/>
           </a:p>
@@ -5579,14 +9874,14 @@
       </p:sp>
       <p:sp>
         <p:nvSpPr>
-          <p:cNvPr id="7" name="Text 5"/>
-          <p:cNvSpPr/>
-          <p:nvPr/>
-        </p:nvSpPr>
-        <p:spPr>
-          <a:xfrm>
-            <a:off x="822960" y="1325880"/>
-            <a:ext cx="10378440" cy="4800600"/>
+          <p:cNvPr id="8" name="Text 6"/>
+          <p:cNvSpPr/>
+          <p:nvPr/>
+        </p:nvSpPr>
+        <p:spPr>
+          <a:xfrm>
+            <a:off x="868680" y="1417320"/>
+            <a:ext cx="6903720" cy="4480560"/>
           </a:xfrm>
           <a:prstGeom prst="rect">
             <a:avLst/>
@@ -5601,7 +9896,7 @@
           <a:lstStyle/>
           <a:p>
             <a:r>
-              <a:rPr lang="en-US" sz="1450" dirty="0">
+              <a:rPr lang="en-US" sz="1540" dirty="0">
                 <a:solidFill>
                   <a:srgbClr val="17364A"/>
                 </a:solidFill>
@@ -5609,13 +9904,13 @@
                 <a:ea typeface="Aptos" pitchFamily="34" charset="-122"/>
                 <a:cs typeface="Aptos" pitchFamily="34" charset="-120"/>
               </a:rPr>
-              <a:t>Identify workforce roles needed for responsible AI adoption in public health.</a:t>
-            </a:r>
-            <a:endParaRPr lang="en-US" sz="1450" dirty="0"/>
-          </a:p>
-          <a:p>
-            <a:r>
-              <a:rPr lang="en-US" sz="1450" dirty="0">
+              <a:t>Play 11: Build and Deploy AI Solutions - This lesson informs Play 11 by helping learners connect the lesson topic to build and deploy.</a:t>
+            </a:r>
+            <a:endParaRPr lang="en-US" sz="1540" dirty="0"/>
+          </a:p>
+          <a:p>
+            <a:r>
+              <a:rPr lang="en-US" sz="1540" dirty="0">
                 <a:solidFill>
                   <a:srgbClr val="17364A"/>
                 </a:solidFill>
@@ -5623,13 +9918,13 @@
                 <a:ea typeface="Aptos" pitchFamily="34" charset="-122"/>
                 <a:cs typeface="Aptos" pitchFamily="34" charset="-120"/>
               </a:rPr>
-              <a:t>Distinguish between AI users, reviewers, implementers, governance participants, and accountability owners.</a:t>
-            </a:r>
-            <a:endParaRPr lang="en-US" sz="1450" dirty="0"/>
-          </a:p>
-          <a:p>
-            <a:r>
-              <a:rPr lang="en-US" sz="1450" dirty="0">
+              <a:t>Play 2: Readiness Assessment - This lesson informs Play 2 by helping learners connect the lesson topic to readiness assessment work.</a:t>
+            </a:r>
+            <a:endParaRPr lang="en-US" sz="1540" dirty="0"/>
+          </a:p>
+          <a:p>
+            <a:r>
+              <a:rPr lang="en-US" sz="1540" dirty="0">
                 <a:solidFill>
                   <a:srgbClr val="17364A"/>
                 </a:solidFill>
@@ -5637,13 +9932,13 @@
                 <a:ea typeface="Aptos" pitchFamily="34" charset="-122"/>
                 <a:cs typeface="Aptos" pitchFamily="34" charset="-120"/>
               </a:rPr>
-              <a:t>Develop role-based competency expectations for AI-supported work.</a:t>
-            </a:r>
-            <a:endParaRPr lang="en-US" sz="1450" dirty="0"/>
-          </a:p>
-          <a:p>
-            <a:r>
-              <a:rPr lang="en-US" sz="1450" dirty="0">
+              <a:t>Play 3: Establish AI Governance - This lesson informs Play 3 by helping learners connect the lesson topic to establish ai governance.</a:t>
+            </a:r>
+            <a:endParaRPr lang="en-US" sz="1540" dirty="0"/>
+          </a:p>
+          <a:p>
+            <a:r>
+              <a:rPr lang="en-US" sz="1540" dirty="0">
                 <a:solidFill>
                   <a:srgbClr val="17364A"/>
                 </a:solidFill>
@@ -5651,13 +9946,106 @@
                 <a:ea typeface="Aptos" pitchFamily="34" charset="-122"/>
                 <a:cs typeface="Aptos" pitchFamily="34" charset="-120"/>
               </a:rPr>
-              <a:t>Recognize workforce risks such as deskilling, uneven access to training, and unclear role boundaries.</a:t>
-            </a:r>
-            <a:endParaRPr lang="en-US" sz="1450" dirty="0"/>
-          </a:p>
-          <a:p>
-            <a:r>
-              <a:rPr lang="en-US" sz="1450" dirty="0">
+              <a:t>Play 1: Vision &amp; Guardrails - This lesson informs Play 1 by helping learners connect the lesson topic to vision &amp; guardrails work in.</a:t>
+            </a:r>
+            <a:endParaRPr lang="en-US" sz="1540" dirty="0"/>
+          </a:p>
+        </p:txBody>
+      </p:sp>
+      <p:sp>
+        <p:nvSpPr>
+          <p:cNvPr id="9" name="Shape 7"/>
+          <p:cNvSpPr/>
+          <p:nvPr/>
+        </p:nvSpPr>
+        <p:spPr>
+          <a:xfrm>
+            <a:off x="8046720" y="1417320"/>
+            <a:ext cx="3063240" cy="2103120"/>
+          </a:xfrm>
+          <a:prstGeom prst="roundRect">
+            <a:avLst>
+              <a:gd name="adj" fmla="val 5217"/>
+            </a:avLst>
+          </a:prstGeom>
+          <a:solidFill>
+            <a:srgbClr val="EEF8ED"/>
+          </a:solidFill>
+          <a:ln w="12700">
+            <a:solidFill>
+              <a:srgbClr val="B9D7E6"/>
+            </a:solidFill>
+            <a:prstDash val="solid"/>
+          </a:ln>
+        </p:spPr>
+      </p:sp>
+      <p:sp>
+        <p:nvSpPr>
+          <p:cNvPr id="10" name="Text 8"/>
+          <p:cNvSpPr/>
+          <p:nvPr/>
+        </p:nvSpPr>
+        <p:spPr>
+          <a:xfrm>
+            <a:off x="8211312" y="1563624"/>
+            <a:ext cx="2734056" cy="201168"/>
+          </a:xfrm>
+          <a:prstGeom prst="rect">
+            <a:avLst/>
+          </a:prstGeom>
+          <a:noFill/>
+          <a:ln/>
+        </p:spPr>
+        <p:txBody>
+          <a:bodyPr wrap="square" lIns="0" tIns="0" rIns="0" bIns="0" rtlCol="0" anchor="ctr"/>
+          <a:lstStyle/>
+          <a:p>
+            <a:pPr indent="0" marL="0">
+              <a:buNone/>
+            </a:pPr>
+            <a:r>
+              <a:rPr lang="en-US" sz="950" b="1" dirty="0">
+                <a:solidFill>
+                  <a:srgbClr val="0068B7"/>
+                </a:solidFill>
+                <a:latin typeface="Aptos" pitchFamily="34" charset="0"/>
+                <a:ea typeface="Aptos" pitchFamily="34" charset="-122"/>
+                <a:cs typeface="Aptos" pitchFamily="34" charset="-120"/>
+              </a:rPr>
+              <a:t>Apply the lesson</a:t>
+            </a:r>
+            <a:endParaRPr lang="en-US" sz="950" dirty="0"/>
+          </a:p>
+        </p:txBody>
+      </p:sp>
+      <p:sp>
+        <p:nvSpPr>
+          <p:cNvPr id="11" name="Text 9"/>
+          <p:cNvSpPr/>
+          <p:nvPr/>
+        </p:nvSpPr>
+        <p:spPr>
+          <a:xfrm>
+            <a:off x="8211312" y="1856232"/>
+            <a:ext cx="2734056" cy="1536192"/>
+          </a:xfrm>
+          <a:prstGeom prst="rect">
+            <a:avLst/>
+          </a:prstGeom>
+          <a:noFill/>
+          <a:ln/>
+        </p:spPr>
+        <p:txBody>
+          <a:bodyPr wrap="square" lIns="0" tIns="0" rIns="0" bIns="0" rtlCol="0" anchor="t">
+            <a:normAutofit/>
+          </a:bodyPr>
+          <a:lstStyle/>
+          <a:p>
+            <a:pPr indent="0" marL="0">
+              <a:buNone/>
+            </a:pPr>
+            <a:r>
+              <a:rPr lang="en-US" sz="1250" dirty="0">
                 <a:solidFill>
                   <a:srgbClr val="17364A"/>
                 </a:solidFill>
@@ -5665,9 +10053,116 @@
                 <a:ea typeface="Aptos" pitchFamily="34" charset="-122"/>
                 <a:cs typeface="Aptos" pitchFamily="34" charset="-120"/>
               </a:rPr>
-              <a:t>Produce a workforce readiness and role design plan.</a:t>
-            </a:r>
-            <a:endParaRPr lang="en-US" sz="1450" dirty="0"/>
+              <a:t>Use the related plays to identify decisions, participants, timing, approvals, and documentation needed for responsible implementation.</a:t>
+            </a:r>
+            <a:endParaRPr lang="en-US" sz="1250" dirty="0"/>
+          </a:p>
+        </p:txBody>
+      </p:sp>
+      <p:sp>
+        <p:nvSpPr>
+          <p:cNvPr id="12" name="Shape 10"/>
+          <p:cNvSpPr/>
+          <p:nvPr/>
+        </p:nvSpPr>
+        <p:spPr>
+          <a:xfrm>
+            <a:off x="8046720" y="3794760"/>
+            <a:ext cx="3063240" cy="1508760"/>
+          </a:xfrm>
+          <a:prstGeom prst="roundRect">
+            <a:avLst>
+              <a:gd name="adj" fmla="val 7273"/>
+            </a:avLst>
+          </a:prstGeom>
+          <a:solidFill>
+            <a:srgbClr val="FFF4D9"/>
+          </a:solidFill>
+          <a:ln w="12700">
+            <a:solidFill>
+              <a:srgbClr val="B9D7E6"/>
+            </a:solidFill>
+            <a:prstDash val="solid"/>
+          </a:ln>
+        </p:spPr>
+      </p:sp>
+      <p:sp>
+        <p:nvSpPr>
+          <p:cNvPr id="13" name="Text 11"/>
+          <p:cNvSpPr/>
+          <p:nvPr/>
+        </p:nvSpPr>
+        <p:spPr>
+          <a:xfrm>
+            <a:off x="8211312" y="3941064"/>
+            <a:ext cx="2734056" cy="201168"/>
+          </a:xfrm>
+          <a:prstGeom prst="rect">
+            <a:avLst/>
+          </a:prstGeom>
+          <a:noFill/>
+          <a:ln/>
+        </p:spPr>
+        <p:txBody>
+          <a:bodyPr wrap="square" lIns="0" tIns="0" rIns="0" bIns="0" rtlCol="0" anchor="ctr"/>
+          <a:lstStyle/>
+          <a:p>
+            <a:pPr indent="0" marL="0">
+              <a:buNone/>
+            </a:pPr>
+            <a:r>
+              <a:rPr lang="en-US" sz="950" b="1" dirty="0">
+                <a:solidFill>
+                  <a:srgbClr val="0068B7"/>
+                </a:solidFill>
+                <a:latin typeface="Aptos" pitchFamily="34" charset="0"/>
+                <a:ea typeface="Aptos" pitchFamily="34" charset="-122"/>
+                <a:cs typeface="Aptos" pitchFamily="34" charset="-120"/>
+              </a:rPr>
+              <a:t>Keep in mind</a:t>
+            </a:r>
+            <a:endParaRPr lang="en-US" sz="950" dirty="0"/>
+          </a:p>
+        </p:txBody>
+      </p:sp>
+      <p:sp>
+        <p:nvSpPr>
+          <p:cNvPr id="14" name="Text 12"/>
+          <p:cNvSpPr/>
+          <p:nvPr/>
+        </p:nvSpPr>
+        <p:spPr>
+          <a:xfrm>
+            <a:off x="8211312" y="4233672"/>
+            <a:ext cx="2734056" cy="941832"/>
+          </a:xfrm>
+          <a:prstGeom prst="rect">
+            <a:avLst/>
+          </a:prstGeom>
+          <a:noFill/>
+          <a:ln/>
+        </p:spPr>
+        <p:txBody>
+          <a:bodyPr wrap="square" lIns="0" tIns="0" rIns="0" bIns="0" rtlCol="0" anchor="t">
+            <a:normAutofit/>
+          </a:bodyPr>
+          <a:lstStyle/>
+          <a:p>
+            <a:pPr indent="0" marL="0">
+              <a:buNone/>
+            </a:pPr>
+            <a:r>
+              <a:rPr lang="en-US" sz="1250" dirty="0">
+                <a:solidFill>
+                  <a:srgbClr val="17364A"/>
+                </a:solidFill>
+                <a:latin typeface="Aptos" pitchFamily="34" charset="0"/>
+                <a:ea typeface="Aptos" pitchFamily="34" charset="-122"/>
+                <a:cs typeface="Aptos" pitchFamily="34" charset="-120"/>
+              </a:rPr>
+              <a:t>The playbook connection helps turn training into agency work, not just individual knowledge.</a:t>
+            </a:r>
+            <a:endParaRPr lang="en-US" sz="1250" dirty="0"/>
           </a:p>
         </p:txBody>
       </p:sp>
@@ -5730,7 +10225,32 @@
       </p:sp>
       <p:sp>
         <p:nvSpPr>
-          <p:cNvPr id="3" name="Text 1"/>
+          <p:cNvPr id="3" name="Shape 1"/>
+          <p:cNvSpPr/>
+          <p:nvPr/>
+        </p:nvSpPr>
+        <p:spPr>
+          <a:xfrm>
+            <a:off x="0" y="164592"/>
+            <a:ext cx="146304" cy="6693408"/>
+          </a:xfrm>
+          <a:prstGeom prst="rect">
+            <a:avLst/>
+          </a:prstGeom>
+          <a:solidFill>
+            <a:srgbClr val="2F8A28"/>
+          </a:solidFill>
+          <a:ln w="12700">
+            <a:solidFill>
+              <a:srgbClr val="2F8A28"/>
+            </a:solidFill>
+            <a:prstDash val="solid"/>
+          </a:ln>
+        </p:spPr>
+      </p:sp>
+      <p:sp>
+        <p:nvSpPr>
+          <p:cNvPr id="4" name="Text 2"/>
           <p:cNvSpPr/>
           <p:nvPr/>
         </p:nvSpPr>
@@ -5769,7 +10289,7 @@
       </p:sp>
       <p:sp>
         <p:nvSpPr>
-          <p:cNvPr id="4" name="Text 2"/>
+          <p:cNvPr id="5" name="Text 3"/>
           <p:cNvSpPr/>
           <p:nvPr/>
         </p:nvSpPr>
@@ -5808,7 +10328,7 @@
       </p:sp>
       <p:sp>
         <p:nvSpPr>
-          <p:cNvPr id="5" name="Text 3"/>
+          <p:cNvPr id="6" name="Text 4"/>
           <p:cNvSpPr/>
           <p:nvPr/>
         </p:nvSpPr>
@@ -5847,7 +10367,7 @@
       </p:sp>
       <p:sp>
         <p:nvSpPr>
-          <p:cNvPr id="6" name="Text 4"/>
+          <p:cNvPr id="7" name="Text 5"/>
           <p:cNvSpPr/>
           <p:nvPr/>
         </p:nvSpPr>
@@ -5880,7 +10400,7 @@
                 <a:ea typeface="Aptos Display" pitchFamily="34" charset="-122"/>
                 <a:cs typeface="Aptos Display" pitchFamily="34" charset="-120"/>
               </a:rPr>
-              <a:t>Module Overview</a:t>
+              <a:t>Related toolkit resources</a:t>
             </a:r>
             <a:endParaRPr lang="en-US" sz="2700" dirty="0"/>
           </a:p>
@@ -5888,32 +10408,192 @@
       </p:sp>
       <p:sp>
         <p:nvSpPr>
-          <p:cNvPr id="7" name="Text 5"/>
-          <p:cNvSpPr/>
-          <p:nvPr/>
-        </p:nvSpPr>
-        <p:spPr>
-          <a:xfrm>
-            <a:off x="822960" y="1325880"/>
-            <a:ext cx="10378440" cy="4800600"/>
-          </a:xfrm>
-          <a:prstGeom prst="rect">
-            <a:avLst/>
-          </a:prstGeom>
-          <a:noFill/>
-          <a:ln/>
-        </p:spPr>
-        <p:txBody>
-          <a:bodyPr wrap="square" lIns="1016" tIns="1016" rIns="1016" bIns="1016" rtlCol="0" anchor="t">
+          <p:cNvPr id="8" name="Text 6"/>
+          <p:cNvSpPr/>
+          <p:nvPr/>
+        </p:nvSpPr>
+        <p:spPr>
+          <a:xfrm>
+            <a:off x="868680" y="1417320"/>
+            <a:ext cx="6903720" cy="4480560"/>
+          </a:xfrm>
+          <a:prstGeom prst="rect">
+            <a:avLst/>
+          </a:prstGeom>
+          <a:noFill/>
+          <a:ln/>
+        </p:spPr>
+        <p:txBody>
+          <a:bodyPr wrap="square" lIns="635" tIns="635" rIns="635" bIns="635" rtlCol="0" anchor="t">
             <a:normAutofit/>
           </a:bodyPr>
           <a:lstStyle/>
           <a:p>
+            <a:r>
+              <a:rPr lang="en-US" sz="1460" dirty="0">
+                <a:solidFill>
+                  <a:srgbClr val="17364A"/>
+                </a:solidFill>
+                <a:latin typeface="Aptos" pitchFamily="34" charset="0"/>
+                <a:ea typeface="Aptos" pitchFamily="34" charset="-122"/>
+                <a:cs typeface="Aptos" pitchFamily="34" charset="-120"/>
+              </a:rPr>
+              <a:t>Tool 4: AI Policy Landscape Scan (Worksheet) - Use AI Policy Landscape Scan to translate this lesson into a documented public health.</a:t>
+            </a:r>
+            <a:endParaRPr lang="en-US" sz="1460" dirty="0"/>
+          </a:p>
+          <a:p>
+            <a:r>
+              <a:rPr lang="en-US" sz="1460" dirty="0">
+                <a:solidFill>
+                  <a:srgbClr val="17364A"/>
+                </a:solidFill>
+                <a:latin typeface="Aptos" pitchFamily="34" charset="0"/>
+                <a:ea typeface="Aptos" pitchFamily="34" charset="-122"/>
+                <a:cs typeface="Aptos" pitchFamily="34" charset="-120"/>
+              </a:rPr>
+              <a:t>Tool 5: AI Environmental and Resource Impact Review (Checklist) - Use AI Environmental and Resource Impact Review to translate this.</a:t>
+            </a:r>
+            <a:endParaRPr lang="en-US" sz="1460" dirty="0"/>
+          </a:p>
+          <a:p>
+            <a:r>
+              <a:rPr lang="en-US" sz="1460" dirty="0">
+                <a:solidFill>
+                  <a:srgbClr val="17364A"/>
+                </a:solidFill>
+                <a:latin typeface="Aptos" pitchFamily="34" charset="0"/>
+                <a:ea typeface="Aptos" pitchFamily="34" charset="-122"/>
+                <a:cs typeface="Aptos" pitchFamily="34" charset="-120"/>
+              </a:rPr>
+              <a:t>Tool 6: Human-Centered AI Decision Rule Checklist (Checklist) - Use Human-Centered AI Decision Rule Checklist to translate this.</a:t>
+            </a:r>
+            <a:endParaRPr lang="en-US" sz="1460" dirty="0"/>
+          </a:p>
+          <a:p>
+            <a:r>
+              <a:rPr lang="en-US" sz="1460" dirty="0">
+                <a:solidFill>
+                  <a:srgbClr val="17364A"/>
+                </a:solidFill>
+                <a:latin typeface="Aptos" pitchFamily="34" charset="0"/>
+                <a:ea typeface="Aptos" pitchFamily="34" charset="-122"/>
+                <a:cs typeface="Aptos" pitchFamily="34" charset="-120"/>
+              </a:rPr>
+              <a:t>Tool 8: AI Project Charter (Planning) - Use AI Project Charter to translate this lesson into a documented public health AI planning,.</a:t>
+            </a:r>
+            <a:endParaRPr lang="en-US" sz="1460" dirty="0"/>
+          </a:p>
+          <a:p>
+            <a:r>
+              <a:rPr lang="en-US" sz="1460" dirty="0">
+                <a:solidFill>
+                  <a:srgbClr val="17364A"/>
+                </a:solidFill>
+                <a:latin typeface="Aptos" pitchFamily="34" charset="0"/>
+                <a:ea typeface="Aptos" pitchFamily="34" charset="-122"/>
+                <a:cs typeface="Aptos" pitchFamily="34" charset="-120"/>
+              </a:rPr>
+              <a:t>Tool 9: Data Quality Assessment Checklist (Checklist) - Use this tool to complete or strengthen the practical exercise for the module.</a:t>
+            </a:r>
+            <a:endParaRPr lang="en-US" sz="1460" dirty="0"/>
+          </a:p>
+        </p:txBody>
+      </p:sp>
+      <p:sp>
+        <p:nvSpPr>
+          <p:cNvPr id="9" name="Shape 7"/>
+          <p:cNvSpPr/>
+          <p:nvPr/>
+        </p:nvSpPr>
+        <p:spPr>
+          <a:xfrm>
+            <a:off x="8046720" y="1417320"/>
+            <a:ext cx="3063240" cy="2103120"/>
+          </a:xfrm>
+          <a:prstGeom prst="roundRect">
+            <a:avLst>
+              <a:gd name="adj" fmla="val 5217"/>
+            </a:avLst>
+          </a:prstGeom>
+          <a:solidFill>
+            <a:srgbClr val="EAF6F8"/>
+          </a:solidFill>
+          <a:ln w="12700">
+            <a:solidFill>
+              <a:srgbClr val="B9D7E6"/>
+            </a:solidFill>
+            <a:prstDash val="solid"/>
+          </a:ln>
+        </p:spPr>
+      </p:sp>
+      <p:sp>
+        <p:nvSpPr>
+          <p:cNvPr id="10" name="Text 8"/>
+          <p:cNvSpPr/>
+          <p:nvPr/>
+        </p:nvSpPr>
+        <p:spPr>
+          <a:xfrm>
+            <a:off x="8211312" y="1563624"/>
+            <a:ext cx="2734056" cy="201168"/>
+          </a:xfrm>
+          <a:prstGeom prst="rect">
+            <a:avLst/>
+          </a:prstGeom>
+          <a:noFill/>
+          <a:ln/>
+        </p:spPr>
+        <p:txBody>
+          <a:bodyPr wrap="square" lIns="0" tIns="0" rIns="0" bIns="0" rtlCol="0" anchor="ctr"/>
+          <a:lstStyle/>
+          <a:p>
             <a:pPr indent="0" marL="0">
               <a:buNone/>
             </a:pPr>
             <a:r>
-              <a:rPr lang="en-US" sz="1420" dirty="0">
+              <a:rPr lang="en-US" sz="950" b="1" dirty="0">
+                <a:solidFill>
+                  <a:srgbClr val="0068B7"/>
+                </a:solidFill>
+                <a:latin typeface="Aptos" pitchFamily="34" charset="0"/>
+                <a:ea typeface="Aptos" pitchFamily="34" charset="-122"/>
+                <a:cs typeface="Aptos" pitchFamily="34" charset="-120"/>
+              </a:rPr>
+              <a:t>Use the tools</a:t>
+            </a:r>
+            <a:endParaRPr lang="en-US" sz="950" dirty="0"/>
+          </a:p>
+        </p:txBody>
+      </p:sp>
+      <p:sp>
+        <p:nvSpPr>
+          <p:cNvPr id="11" name="Text 9"/>
+          <p:cNvSpPr/>
+          <p:nvPr/>
+        </p:nvSpPr>
+        <p:spPr>
+          <a:xfrm>
+            <a:off x="8211312" y="1856232"/>
+            <a:ext cx="2734056" cy="1536192"/>
+          </a:xfrm>
+          <a:prstGeom prst="rect">
+            <a:avLst/>
+          </a:prstGeom>
+          <a:noFill/>
+          <a:ln/>
+        </p:spPr>
+        <p:txBody>
+          <a:bodyPr wrap="square" lIns="0" tIns="0" rIns="0" bIns="0" rtlCol="0" anchor="t">
+            <a:normAutofit/>
+          </a:bodyPr>
+          <a:lstStyle/>
+          <a:p>
+            <a:pPr indent="0" marL="0">
+              <a:buNone/>
+            </a:pPr>
+            <a:r>
+              <a:rPr lang="en-US" sz="1250" dirty="0">
                 <a:solidFill>
                   <a:srgbClr val="17364A"/>
                 </a:solidFill>
@@ -5921,9 +10601,116 @@
                 <a:ea typeface="Aptos" pitchFamily="34" charset="-122"/>
                 <a:cs typeface="Aptos" pitchFamily="34" charset="-120"/>
               </a:rPr>
-              <a:t>AI changes the skills, roles, and collaboration patterns needed in public health agencies. It does not eliminate the need for public health expertise. Instead, it increases the need for staff who can translate across program, data, technology, privacy, legal, equity, procurement, and community perspectives. Leaders need a workforce strategy that prepares staff to use, review, govern, and improve AI-supported workflows. This module helps leaders identify AI-related roles and competencies. It emphasizes the need for role-based training, AI bridge professionals, governance participants, technical reviewers, program owners, data stewards, and frontline users. The module also addresses workload, job redesign, deskilling risk, upskilling, and equitable access to training.</a:t>
-            </a:r>
-            <a:endParaRPr lang="en-US" sz="1420" dirty="0"/>
+              <a:t>Use linked tools when your department needs a structured worksheet, template, checklist, review process, or documentation artifact.</a:t>
+            </a:r>
+            <a:endParaRPr lang="en-US" sz="1250" dirty="0"/>
+          </a:p>
+        </p:txBody>
+      </p:sp>
+      <p:sp>
+        <p:nvSpPr>
+          <p:cNvPr id="12" name="Shape 10"/>
+          <p:cNvSpPr/>
+          <p:nvPr/>
+        </p:nvSpPr>
+        <p:spPr>
+          <a:xfrm>
+            <a:off x="8046720" y="3794760"/>
+            <a:ext cx="3063240" cy="1508760"/>
+          </a:xfrm>
+          <a:prstGeom prst="roundRect">
+            <a:avLst>
+              <a:gd name="adj" fmla="val 7273"/>
+            </a:avLst>
+          </a:prstGeom>
+          <a:solidFill>
+            <a:srgbClr val="EEF8ED"/>
+          </a:solidFill>
+          <a:ln w="12700">
+            <a:solidFill>
+              <a:srgbClr val="B9D7E6"/>
+            </a:solidFill>
+            <a:prstDash val="solid"/>
+          </a:ln>
+        </p:spPr>
+      </p:sp>
+      <p:sp>
+        <p:nvSpPr>
+          <p:cNvPr id="13" name="Text 11"/>
+          <p:cNvSpPr/>
+          <p:nvPr/>
+        </p:nvSpPr>
+        <p:spPr>
+          <a:xfrm>
+            <a:off x="8211312" y="3941064"/>
+            <a:ext cx="2734056" cy="201168"/>
+          </a:xfrm>
+          <a:prstGeom prst="rect">
+            <a:avLst/>
+          </a:prstGeom>
+          <a:noFill/>
+          <a:ln/>
+        </p:spPr>
+        <p:txBody>
+          <a:bodyPr wrap="square" lIns="0" tIns="0" rIns="0" bIns="0" rtlCol="0" anchor="ctr"/>
+          <a:lstStyle/>
+          <a:p>
+            <a:pPr indent="0" marL="0">
+              <a:buNone/>
+            </a:pPr>
+            <a:r>
+              <a:rPr lang="en-US" sz="950" b="1" dirty="0">
+                <a:solidFill>
+                  <a:srgbClr val="0068B7"/>
+                </a:solidFill>
+                <a:latin typeface="Aptos" pitchFamily="34" charset="0"/>
+                <a:ea typeface="Aptos" pitchFamily="34" charset="-122"/>
+                <a:cs typeface="Aptos" pitchFamily="34" charset="-120"/>
+              </a:rPr>
+              <a:t>Avoid duplication</a:t>
+            </a:r>
+            <a:endParaRPr lang="en-US" sz="950" dirty="0"/>
+          </a:p>
+        </p:txBody>
+      </p:sp>
+      <p:sp>
+        <p:nvSpPr>
+          <p:cNvPr id="14" name="Text 12"/>
+          <p:cNvSpPr/>
+          <p:nvPr/>
+        </p:nvSpPr>
+        <p:spPr>
+          <a:xfrm>
+            <a:off x="8211312" y="4233672"/>
+            <a:ext cx="2734056" cy="941832"/>
+          </a:xfrm>
+          <a:prstGeom prst="rect">
+            <a:avLst/>
+          </a:prstGeom>
+          <a:noFill/>
+          <a:ln/>
+        </p:spPr>
+        <p:txBody>
+          <a:bodyPr wrap="square" lIns="0" tIns="0" rIns="0" bIns="0" rtlCol="0" anchor="t">
+            <a:normAutofit/>
+          </a:bodyPr>
+          <a:lstStyle/>
+          <a:p>
+            <a:pPr indent="0" marL="0">
+              <a:buNone/>
+            </a:pPr>
+            <a:r>
+              <a:rPr lang="en-US" sz="1250" dirty="0">
+                <a:solidFill>
+                  <a:srgbClr val="17364A"/>
+                </a:solidFill>
+                <a:latin typeface="Aptos" pitchFamily="34" charset="0"/>
+                <a:ea typeface="Aptos" pitchFamily="34" charset="-122"/>
+                <a:cs typeface="Aptos" pitchFamily="34" charset="-120"/>
+              </a:rPr>
+              <a:t>If your department already has a strong equivalent tool, adapt or use the existing process instead of recreating it.</a:t>
+            </a:r>
+            <a:endParaRPr lang="en-US" sz="1250" dirty="0"/>
           </a:p>
         </p:txBody>
       </p:sp>
@@ -5986,7 +10773,32 @@
       </p:sp>
       <p:sp>
         <p:nvSpPr>
-          <p:cNvPr id="3" name="Text 1"/>
+          <p:cNvPr id="3" name="Shape 1"/>
+          <p:cNvSpPr/>
+          <p:nvPr/>
+        </p:nvSpPr>
+        <p:spPr>
+          <a:xfrm>
+            <a:off x="0" y="164592"/>
+            <a:ext cx="146304" cy="6693408"/>
+          </a:xfrm>
+          <a:prstGeom prst="rect">
+            <a:avLst/>
+          </a:prstGeom>
+          <a:solidFill>
+            <a:srgbClr val="2F8A28"/>
+          </a:solidFill>
+          <a:ln w="12700">
+            <a:solidFill>
+              <a:srgbClr val="2F8A28"/>
+            </a:solidFill>
+            <a:prstDash val="solid"/>
+          </a:ln>
+        </p:spPr>
+      </p:sp>
+      <p:sp>
+        <p:nvSpPr>
+          <p:cNvPr id="4" name="Text 2"/>
           <p:cNvSpPr/>
           <p:nvPr/>
         </p:nvSpPr>
@@ -6025,7 +10837,7 @@
       </p:sp>
       <p:sp>
         <p:nvSpPr>
-          <p:cNvPr id="4" name="Text 2"/>
+          <p:cNvPr id="5" name="Text 3"/>
           <p:cNvSpPr/>
           <p:nvPr/>
         </p:nvSpPr>
@@ -6064,7 +10876,7 @@
       </p:sp>
       <p:sp>
         <p:nvSpPr>
-          <p:cNvPr id="5" name="Text 3"/>
+          <p:cNvPr id="6" name="Text 4"/>
           <p:cNvSpPr/>
           <p:nvPr/>
         </p:nvSpPr>
@@ -6103,13 +10915,77 @@
       </p:sp>
       <p:sp>
         <p:nvSpPr>
-          <p:cNvPr id="6" name="Text 4"/>
+          <p:cNvPr id="7" name="Shape 5"/>
           <p:cNvSpPr/>
           <p:nvPr/>
         </p:nvSpPr>
         <p:spPr>
           <a:xfrm>
             <a:off x="640080" y="658368"/>
+            <a:ext cx="420624" cy="420624"/>
+          </a:xfrm>
+          <a:prstGeom prst="ellipse">
+            <a:avLst/>
+          </a:prstGeom>
+          <a:solidFill>
+            <a:srgbClr val="0068B7"/>
+          </a:solidFill>
+          <a:ln w="12700">
+            <a:solidFill>
+              <a:srgbClr val="0068B7"/>
+            </a:solidFill>
+            <a:prstDash val="solid"/>
+          </a:ln>
+        </p:spPr>
+      </p:sp>
+      <p:sp>
+        <p:nvSpPr>
+          <p:cNvPr id="8" name="Text 6"/>
+          <p:cNvSpPr/>
+          <p:nvPr/>
+        </p:nvSpPr>
+        <p:spPr>
+          <a:xfrm>
+            <a:off x="640080" y="731520"/>
+            <a:ext cx="420624" cy="164592"/>
+          </a:xfrm>
+          <a:prstGeom prst="rect">
+            <a:avLst/>
+          </a:prstGeom>
+          <a:noFill/>
+          <a:ln/>
+        </p:spPr>
+        <p:txBody>
+          <a:bodyPr wrap="square" lIns="0" tIns="0" rIns="0" bIns="0" rtlCol="0" anchor="ctr"/>
+          <a:lstStyle/>
+          <a:p>
+            <a:pPr algn="ctr" indent="0" marL="0">
+              <a:buNone/>
+            </a:pPr>
+            <a:r>
+              <a:rPr lang="en-US" sz="1100" b="1" dirty="0">
+                <a:solidFill>
+                  <a:srgbClr val="FFFFFF"/>
+                </a:solidFill>
+                <a:latin typeface="Aptos" pitchFamily="34" charset="0"/>
+                <a:ea typeface="Aptos" pitchFamily="34" charset="-122"/>
+                <a:cs typeface="Aptos" pitchFamily="34" charset="-120"/>
+              </a:rPr>
+              <a:t>1</a:t>
+            </a:r>
+            <a:endParaRPr lang="en-US" sz="1100" dirty="0"/>
+          </a:p>
+        </p:txBody>
+      </p:sp>
+      <p:sp>
+        <p:nvSpPr>
+          <p:cNvPr id="9" name="Text 7"/>
+          <p:cNvSpPr/>
+          <p:nvPr/>
+        </p:nvSpPr>
+        <p:spPr>
+          <a:xfrm>
+            <a:off x="640080" y="621792"/>
             <a:ext cx="10881360" cy="566928"/>
           </a:xfrm>
           <a:prstGeom prst="rect">
@@ -6136,7 +11012,7 @@
                 <a:ea typeface="Aptos Display" pitchFamily="34" charset="-122"/>
                 <a:cs typeface="Aptos Display" pitchFamily="34" charset="-120"/>
               </a:rPr>
-              <a:t>Why This Topic Matters for Public Health AI</a:t>
+              <a:t>Learning Objectives</a:t>
             </a:r>
             <a:endParaRPr lang="en-US" sz="2700" dirty="0"/>
           </a:p>
@@ -6144,32 +11020,178 @@
       </p:sp>
       <p:sp>
         <p:nvSpPr>
-          <p:cNvPr id="7" name="Text 5"/>
-          <p:cNvSpPr/>
-          <p:nvPr/>
-        </p:nvSpPr>
-        <p:spPr>
-          <a:xfrm>
-            <a:off x="822960" y="1325880"/>
-            <a:ext cx="10378440" cy="4800600"/>
-          </a:xfrm>
-          <a:prstGeom prst="rect">
-            <a:avLst/>
-          </a:prstGeom>
-          <a:noFill/>
-          <a:ln/>
-        </p:spPr>
-        <p:txBody>
-          <a:bodyPr wrap="square" lIns="1016" tIns="1016" rIns="1016" bIns="1016" rtlCol="0" anchor="t">
+          <p:cNvPr id="10" name="Text 8"/>
+          <p:cNvSpPr/>
+          <p:nvPr/>
+        </p:nvSpPr>
+        <p:spPr>
+          <a:xfrm>
+            <a:off x="868680" y="1417320"/>
+            <a:ext cx="6675120" cy="4434840"/>
+          </a:xfrm>
+          <a:prstGeom prst="rect">
+            <a:avLst/>
+          </a:prstGeom>
+          <a:noFill/>
+          <a:ln/>
+        </p:spPr>
+        <p:txBody>
+          <a:bodyPr wrap="square" lIns="635" tIns="635" rIns="635" bIns="635" rtlCol="0" anchor="t">
             <a:normAutofit/>
           </a:bodyPr>
           <a:lstStyle/>
           <a:p>
+            <a:r>
+              <a:rPr lang="en-US" sz="1700" dirty="0">
+                <a:solidFill>
+                  <a:srgbClr val="17364A"/>
+                </a:solidFill>
+                <a:latin typeface="Aptos" pitchFamily="34" charset="0"/>
+                <a:ea typeface="Aptos" pitchFamily="34" charset="-122"/>
+                <a:cs typeface="Aptos" pitchFamily="34" charset="-120"/>
+              </a:rPr>
+              <a:t>Identify workforce roles needed for responsible AI adoption in public health.</a:t>
+            </a:r>
+            <a:endParaRPr lang="en-US" sz="1700" dirty="0"/>
+          </a:p>
+          <a:p>
+            <a:r>
+              <a:rPr lang="en-US" sz="1700" dirty="0">
+                <a:solidFill>
+                  <a:srgbClr val="17364A"/>
+                </a:solidFill>
+                <a:latin typeface="Aptos" pitchFamily="34" charset="0"/>
+                <a:ea typeface="Aptos" pitchFamily="34" charset="-122"/>
+                <a:cs typeface="Aptos" pitchFamily="34" charset="-120"/>
+              </a:rPr>
+              <a:t>Distinguish between AI users, reviewers, implementers, governance participants, and accountability owners.</a:t>
+            </a:r>
+            <a:endParaRPr lang="en-US" sz="1700" dirty="0"/>
+          </a:p>
+          <a:p>
+            <a:r>
+              <a:rPr lang="en-US" sz="1700" dirty="0">
+                <a:solidFill>
+                  <a:srgbClr val="17364A"/>
+                </a:solidFill>
+                <a:latin typeface="Aptos" pitchFamily="34" charset="0"/>
+                <a:ea typeface="Aptos" pitchFamily="34" charset="-122"/>
+                <a:cs typeface="Aptos" pitchFamily="34" charset="-120"/>
+              </a:rPr>
+              <a:t>Develop role-based competency expectations for AI-supported work.</a:t>
+            </a:r>
+            <a:endParaRPr lang="en-US" sz="1700" dirty="0"/>
+          </a:p>
+          <a:p>
+            <a:r>
+              <a:rPr lang="en-US" sz="1700" dirty="0">
+                <a:solidFill>
+                  <a:srgbClr val="17364A"/>
+                </a:solidFill>
+                <a:latin typeface="Aptos" pitchFamily="34" charset="0"/>
+                <a:ea typeface="Aptos" pitchFamily="34" charset="-122"/>
+                <a:cs typeface="Aptos" pitchFamily="34" charset="-120"/>
+              </a:rPr>
+              <a:t>Recognize workforce risks such as deskilling, uneven access to training, and unclear role boundaries.</a:t>
+            </a:r>
+            <a:endParaRPr lang="en-US" sz="1700" dirty="0"/>
+          </a:p>
+        </p:txBody>
+      </p:sp>
+      <p:sp>
+        <p:nvSpPr>
+          <p:cNvPr id="11" name="Shape 9"/>
+          <p:cNvSpPr/>
+          <p:nvPr/>
+        </p:nvSpPr>
+        <p:spPr>
+          <a:xfrm>
+            <a:off x="7909560" y="1417320"/>
+            <a:ext cx="3154680" cy="1828800"/>
+          </a:xfrm>
+          <a:prstGeom prst="roundRect">
+            <a:avLst>
+              <a:gd name="adj" fmla="val 6000"/>
+            </a:avLst>
+          </a:prstGeom>
+          <a:solidFill>
+            <a:srgbClr val="EEF8ED"/>
+          </a:solidFill>
+          <a:ln w="12700">
+            <a:solidFill>
+              <a:srgbClr val="B9D7E6"/>
+            </a:solidFill>
+            <a:prstDash val="solid"/>
+          </a:ln>
+        </p:spPr>
+      </p:sp>
+      <p:sp>
+        <p:nvSpPr>
+          <p:cNvPr id="12" name="Text 10"/>
+          <p:cNvSpPr/>
+          <p:nvPr/>
+        </p:nvSpPr>
+        <p:spPr>
+          <a:xfrm>
+            <a:off x="8074152" y="1563624"/>
+            <a:ext cx="2825496" cy="201168"/>
+          </a:xfrm>
+          <a:prstGeom prst="rect">
+            <a:avLst/>
+          </a:prstGeom>
+          <a:noFill/>
+          <a:ln/>
+        </p:spPr>
+        <p:txBody>
+          <a:bodyPr wrap="square" lIns="0" tIns="0" rIns="0" bIns="0" rtlCol="0" anchor="ctr"/>
+          <a:lstStyle/>
+          <a:p>
             <a:pPr indent="0" marL="0">
               <a:buNone/>
             </a:pPr>
             <a:r>
-              <a:rPr lang="en-US" sz="1420" dirty="0">
+              <a:rPr lang="en-US" sz="950" b="1" dirty="0">
+                <a:solidFill>
+                  <a:srgbClr val="0068B7"/>
+                </a:solidFill>
+                <a:latin typeface="Aptos" pitchFamily="34" charset="0"/>
+                <a:ea typeface="Aptos" pitchFamily="34" charset="-122"/>
+                <a:cs typeface="Aptos" pitchFamily="34" charset="-120"/>
+              </a:rPr>
+              <a:t>Key idea</a:t>
+            </a:r>
+            <a:endParaRPr lang="en-US" sz="950" dirty="0"/>
+          </a:p>
+        </p:txBody>
+      </p:sp>
+      <p:sp>
+        <p:nvSpPr>
+          <p:cNvPr id="13" name="Text 11"/>
+          <p:cNvSpPr/>
+          <p:nvPr/>
+        </p:nvSpPr>
+        <p:spPr>
+          <a:xfrm>
+            <a:off x="8074152" y="1856232"/>
+            <a:ext cx="2825496" cy="1261872"/>
+          </a:xfrm>
+          <a:prstGeom prst="rect">
+            <a:avLst/>
+          </a:prstGeom>
+          <a:noFill/>
+          <a:ln/>
+        </p:spPr>
+        <p:txBody>
+          <a:bodyPr wrap="square" lIns="0" tIns="0" rIns="0" bIns="0" rtlCol="0" anchor="t">
+            <a:normAutofit/>
+          </a:bodyPr>
+          <a:lstStyle/>
+          <a:p>
+            <a:pPr indent="0" marL="0">
+              <a:buNone/>
+            </a:pPr>
+            <a:r>
+              <a:rPr lang="en-US" sz="1250" dirty="0">
                 <a:solidFill>
                   <a:srgbClr val="17364A"/>
                 </a:solidFill>
@@ -6177,9 +11199,116 @@
                 <a:ea typeface="Aptos" pitchFamily="34" charset="-122"/>
                 <a:cs typeface="Aptos" pitchFamily="34" charset="-120"/>
               </a:rPr>
-              <a:t>Public health AI depends on people who understand both technology and context. A model may generate a summary, but an epidemiologist must judge whether the summary is meaningful. A vendor may describe a product, but an informatician must assess interoperability and data flow. A leader may approve a use case, but governance participants must ensure that privacy, equity, security, and legal concerns have been addressed. Workforce strategy helps agencies move beyond ad hoc training. It defines which staff need baseline literacy, which staff need deeper technical skills, which staff need governance training, and which roles require ongoing competency development. It also helps agencies avoid concentrating AI knowledge in a small group while leaving most staff dependent on informal guidance.</a:t>
-            </a:r>
-            <a:endParaRPr lang="en-US" sz="1420" dirty="0"/>
+              <a:t>Identify workforce roles needed for responsible AI adoption in public health.</a:t>
+            </a:r>
+            <a:endParaRPr lang="en-US" sz="1250" dirty="0"/>
+          </a:p>
+        </p:txBody>
+      </p:sp>
+      <p:sp>
+        <p:nvSpPr>
+          <p:cNvPr id="14" name="Shape 12"/>
+          <p:cNvSpPr/>
+          <p:nvPr/>
+        </p:nvSpPr>
+        <p:spPr>
+          <a:xfrm>
+            <a:off x="7909560" y="3520440"/>
+            <a:ext cx="3154680" cy="1737360"/>
+          </a:xfrm>
+          <a:prstGeom prst="roundRect">
+            <a:avLst>
+              <a:gd name="adj" fmla="val 6316"/>
+            </a:avLst>
+          </a:prstGeom>
+          <a:solidFill>
+            <a:srgbClr val="EAF6F8"/>
+          </a:solidFill>
+          <a:ln w="12700">
+            <a:solidFill>
+              <a:srgbClr val="B9D7E6"/>
+            </a:solidFill>
+            <a:prstDash val="solid"/>
+          </a:ln>
+        </p:spPr>
+      </p:sp>
+      <p:sp>
+        <p:nvSpPr>
+          <p:cNvPr id="15" name="Text 13"/>
+          <p:cNvSpPr/>
+          <p:nvPr/>
+        </p:nvSpPr>
+        <p:spPr>
+          <a:xfrm>
+            <a:off x="8074152" y="3666744"/>
+            <a:ext cx="2825496" cy="201168"/>
+          </a:xfrm>
+          <a:prstGeom prst="rect">
+            <a:avLst/>
+          </a:prstGeom>
+          <a:noFill/>
+          <a:ln/>
+        </p:spPr>
+        <p:txBody>
+          <a:bodyPr wrap="square" lIns="0" tIns="0" rIns="0" bIns="0" rtlCol="0" anchor="ctr"/>
+          <a:lstStyle/>
+          <a:p>
+            <a:pPr indent="0" marL="0">
+              <a:buNone/>
+            </a:pPr>
+            <a:r>
+              <a:rPr lang="en-US" sz="950" b="1" dirty="0">
+                <a:solidFill>
+                  <a:srgbClr val="0068B7"/>
+                </a:solidFill>
+                <a:latin typeface="Aptos" pitchFamily="34" charset="0"/>
+                <a:ea typeface="Aptos" pitchFamily="34" charset="-122"/>
+                <a:cs typeface="Aptos" pitchFamily="34" charset="-120"/>
+              </a:rPr>
+              <a:t>Use this for</a:t>
+            </a:r>
+            <a:endParaRPr lang="en-US" sz="950" dirty="0"/>
+          </a:p>
+        </p:txBody>
+      </p:sp>
+      <p:sp>
+        <p:nvSpPr>
+          <p:cNvPr id="16" name="Text 14"/>
+          <p:cNvSpPr/>
+          <p:nvPr/>
+        </p:nvSpPr>
+        <p:spPr>
+          <a:xfrm>
+            <a:off x="8074152" y="3959352"/>
+            <a:ext cx="2825496" cy="1170432"/>
+          </a:xfrm>
+          <a:prstGeom prst="rect">
+            <a:avLst/>
+          </a:prstGeom>
+          <a:noFill/>
+          <a:ln/>
+        </p:spPr>
+        <p:txBody>
+          <a:bodyPr wrap="square" lIns="0" tIns="0" rIns="0" bIns="0" rtlCol="0" anchor="t">
+            <a:normAutofit/>
+          </a:bodyPr>
+          <a:lstStyle/>
+          <a:p>
+            <a:pPr indent="0" marL="0">
+              <a:buNone/>
+            </a:pPr>
+            <a:r>
+              <a:rPr lang="en-US" sz="1250" dirty="0">
+                <a:solidFill>
+                  <a:srgbClr val="17364A"/>
+                </a:solidFill>
+                <a:latin typeface="Aptos" pitchFamily="34" charset="0"/>
+                <a:ea typeface="Aptos" pitchFamily="34" charset="-122"/>
+                <a:cs typeface="Aptos" pitchFamily="34" charset="-120"/>
+              </a:rPr>
+              <a:t>Connect the concept to public health decisions, safeguards, documentation, or implementation work.</a:t>
+            </a:r>
+            <a:endParaRPr lang="en-US" sz="1250" dirty="0"/>
           </a:p>
         </p:txBody>
       </p:sp>
@@ -6242,7 +11371,32 @@
       </p:sp>
       <p:sp>
         <p:nvSpPr>
-          <p:cNvPr id="3" name="Text 1"/>
+          <p:cNvPr id="3" name="Shape 1"/>
+          <p:cNvSpPr/>
+          <p:nvPr/>
+        </p:nvSpPr>
+        <p:spPr>
+          <a:xfrm>
+            <a:off x="0" y="164592"/>
+            <a:ext cx="146304" cy="6693408"/>
+          </a:xfrm>
+          <a:prstGeom prst="rect">
+            <a:avLst/>
+          </a:prstGeom>
+          <a:solidFill>
+            <a:srgbClr val="2F8A28"/>
+          </a:solidFill>
+          <a:ln w="12700">
+            <a:solidFill>
+              <a:srgbClr val="2F8A28"/>
+            </a:solidFill>
+            <a:prstDash val="solid"/>
+          </a:ln>
+        </p:spPr>
+      </p:sp>
+      <p:sp>
+        <p:nvSpPr>
+          <p:cNvPr id="4" name="Text 2"/>
           <p:cNvSpPr/>
           <p:nvPr/>
         </p:nvSpPr>
@@ -6281,7 +11435,7 @@
       </p:sp>
       <p:sp>
         <p:nvSpPr>
-          <p:cNvPr id="4" name="Text 2"/>
+          <p:cNvPr id="5" name="Text 3"/>
           <p:cNvSpPr/>
           <p:nvPr/>
         </p:nvSpPr>
@@ -6320,7 +11474,7 @@
       </p:sp>
       <p:sp>
         <p:nvSpPr>
-          <p:cNvPr id="5" name="Text 3"/>
+          <p:cNvPr id="6" name="Text 4"/>
           <p:cNvSpPr/>
           <p:nvPr/>
         </p:nvSpPr>
@@ -6359,13 +11513,77 @@
       </p:sp>
       <p:sp>
         <p:nvSpPr>
-          <p:cNvPr id="6" name="Text 4"/>
+          <p:cNvPr id="7" name="Shape 5"/>
           <p:cNvSpPr/>
           <p:nvPr/>
         </p:nvSpPr>
         <p:spPr>
           <a:xfrm>
             <a:off x="640080" y="658368"/>
+            <a:ext cx="420624" cy="420624"/>
+          </a:xfrm>
+          <a:prstGeom prst="ellipse">
+            <a:avLst/>
+          </a:prstGeom>
+          <a:solidFill>
+            <a:srgbClr val="0068B7"/>
+          </a:solidFill>
+          <a:ln w="12700">
+            <a:solidFill>
+              <a:srgbClr val="0068B7"/>
+            </a:solidFill>
+            <a:prstDash val="solid"/>
+          </a:ln>
+        </p:spPr>
+      </p:sp>
+      <p:sp>
+        <p:nvSpPr>
+          <p:cNvPr id="8" name="Text 6"/>
+          <p:cNvSpPr/>
+          <p:nvPr/>
+        </p:nvSpPr>
+        <p:spPr>
+          <a:xfrm>
+            <a:off x="640080" y="731520"/>
+            <a:ext cx="420624" cy="164592"/>
+          </a:xfrm>
+          <a:prstGeom prst="rect">
+            <a:avLst/>
+          </a:prstGeom>
+          <a:noFill/>
+          <a:ln/>
+        </p:spPr>
+        <p:txBody>
+          <a:bodyPr wrap="square" lIns="0" tIns="0" rIns="0" bIns="0" rtlCol="0" anchor="ctr"/>
+          <a:lstStyle/>
+          <a:p>
+            <a:pPr algn="ctr" indent="0" marL="0">
+              <a:buNone/>
+            </a:pPr>
+            <a:r>
+              <a:rPr lang="en-US" sz="1100" b="1" dirty="0">
+                <a:solidFill>
+                  <a:srgbClr val="FFFFFF"/>
+                </a:solidFill>
+                <a:latin typeface="Aptos" pitchFamily="34" charset="0"/>
+                <a:ea typeface="Aptos" pitchFamily="34" charset="-122"/>
+                <a:cs typeface="Aptos" pitchFamily="34" charset="-120"/>
+              </a:rPr>
+              <a:t>2</a:t>
+            </a:r>
+            <a:endParaRPr lang="en-US" sz="1100" dirty="0"/>
+          </a:p>
+        </p:txBody>
+      </p:sp>
+      <p:sp>
+        <p:nvSpPr>
+          <p:cNvPr id="9" name="Text 7"/>
+          <p:cNvSpPr/>
+          <p:nvPr/>
+        </p:nvSpPr>
+        <p:spPr>
+          <a:xfrm>
+            <a:off x="640080" y="621792"/>
             <a:ext cx="10881360" cy="566928"/>
           </a:xfrm>
           <a:prstGeom prst="rect">
@@ -6392,7 +11610,7 @@
                 <a:ea typeface="Aptos Display" pitchFamily="34" charset="-122"/>
                 <a:cs typeface="Aptos Display" pitchFamily="34" charset="-120"/>
               </a:rPr>
-              <a:t>Public Health Example</a:t>
+              <a:t>Module Overview</a:t>
             </a:r>
             <a:endParaRPr lang="en-US" sz="2700" dirty="0"/>
           </a:p>
@@ -6400,32 +11618,178 @@
       </p:sp>
       <p:sp>
         <p:nvSpPr>
-          <p:cNvPr id="7" name="Text 5"/>
-          <p:cNvSpPr/>
-          <p:nvPr/>
-        </p:nvSpPr>
-        <p:spPr>
-          <a:xfrm>
-            <a:off x="822960" y="1325880"/>
-            <a:ext cx="10378440" cy="4800600"/>
-          </a:xfrm>
-          <a:prstGeom prst="rect">
-            <a:avLst/>
-          </a:prstGeom>
-          <a:noFill/>
-          <a:ln/>
-        </p:spPr>
-        <p:txBody>
-          <a:bodyPr wrap="square" lIns="1016" tIns="1016" rIns="1016" bIns="1016" rtlCol="0" anchor="t">
+          <p:cNvPr id="10" name="Text 8"/>
+          <p:cNvSpPr/>
+          <p:nvPr/>
+        </p:nvSpPr>
+        <p:spPr>
+          <a:xfrm>
+            <a:off x="868680" y="1417320"/>
+            <a:ext cx="6675120" cy="4434840"/>
+          </a:xfrm>
+          <a:prstGeom prst="rect">
+            <a:avLst/>
+          </a:prstGeom>
+          <a:noFill/>
+          <a:ln/>
+        </p:spPr>
+        <p:txBody>
+          <a:bodyPr wrap="square" lIns="635" tIns="635" rIns="635" bIns="635" rtlCol="0" anchor="t">
             <a:normAutofit/>
           </a:bodyPr>
           <a:lstStyle/>
           <a:p>
+            <a:r>
+              <a:rPr lang="en-US" sz="1700" dirty="0">
+                <a:solidFill>
+                  <a:srgbClr val="17364A"/>
+                </a:solidFill>
+                <a:latin typeface="Aptos" pitchFamily="34" charset="0"/>
+                <a:ea typeface="Aptos" pitchFamily="34" charset="-122"/>
+                <a:cs typeface="Aptos" pitchFamily="34" charset="-120"/>
+              </a:rPr>
+              <a:t>AI changes the skills, roles, and collaboration patterns needed in public health agencies.</a:t>
+            </a:r>
+            <a:endParaRPr lang="en-US" sz="1700" dirty="0"/>
+          </a:p>
+          <a:p>
+            <a:r>
+              <a:rPr lang="en-US" sz="1700" dirty="0">
+                <a:solidFill>
+                  <a:srgbClr val="17364A"/>
+                </a:solidFill>
+                <a:latin typeface="Aptos" pitchFamily="34" charset="0"/>
+                <a:ea typeface="Aptos" pitchFamily="34" charset="-122"/>
+                <a:cs typeface="Aptos" pitchFamily="34" charset="-120"/>
+              </a:rPr>
+              <a:t>It does not eliminate the need for public health expertise.</a:t>
+            </a:r>
+            <a:endParaRPr lang="en-US" sz="1700" dirty="0"/>
+          </a:p>
+          <a:p>
+            <a:r>
+              <a:rPr lang="en-US" sz="1700" dirty="0">
+                <a:solidFill>
+                  <a:srgbClr val="17364A"/>
+                </a:solidFill>
+                <a:latin typeface="Aptos" pitchFamily="34" charset="0"/>
+                <a:ea typeface="Aptos" pitchFamily="34" charset="-122"/>
+                <a:cs typeface="Aptos" pitchFamily="34" charset="-120"/>
+              </a:rPr>
+              <a:t>Instead, it increases the need for staff who can translate across program, data, technology, privacy, legal, equity,.</a:t>
+            </a:r>
+            <a:endParaRPr lang="en-US" sz="1700" dirty="0"/>
+          </a:p>
+          <a:p>
+            <a:r>
+              <a:rPr lang="en-US" sz="1700" dirty="0">
+                <a:solidFill>
+                  <a:srgbClr val="17364A"/>
+                </a:solidFill>
+                <a:latin typeface="Aptos" pitchFamily="34" charset="0"/>
+                <a:ea typeface="Aptos" pitchFamily="34" charset="-122"/>
+                <a:cs typeface="Aptos" pitchFamily="34" charset="-120"/>
+              </a:rPr>
+              <a:t>Leaders need a workforce strategy that prepares staff to use, review, govern, and improve AI-supported workflows.</a:t>
+            </a:r>
+            <a:endParaRPr lang="en-US" sz="1700" dirty="0"/>
+          </a:p>
+        </p:txBody>
+      </p:sp>
+      <p:sp>
+        <p:nvSpPr>
+          <p:cNvPr id="11" name="Shape 9"/>
+          <p:cNvSpPr/>
+          <p:nvPr/>
+        </p:nvSpPr>
+        <p:spPr>
+          <a:xfrm>
+            <a:off x="7909560" y="1417320"/>
+            <a:ext cx="3154680" cy="1828800"/>
+          </a:xfrm>
+          <a:prstGeom prst="roundRect">
+            <a:avLst>
+              <a:gd name="adj" fmla="val 6000"/>
+            </a:avLst>
+          </a:prstGeom>
+          <a:solidFill>
+            <a:srgbClr val="EEF8ED"/>
+          </a:solidFill>
+          <a:ln w="12700">
+            <a:solidFill>
+              <a:srgbClr val="B9D7E6"/>
+            </a:solidFill>
+            <a:prstDash val="solid"/>
+          </a:ln>
+        </p:spPr>
+      </p:sp>
+      <p:sp>
+        <p:nvSpPr>
+          <p:cNvPr id="12" name="Text 10"/>
+          <p:cNvSpPr/>
+          <p:nvPr/>
+        </p:nvSpPr>
+        <p:spPr>
+          <a:xfrm>
+            <a:off x="8074152" y="1563624"/>
+            <a:ext cx="2825496" cy="201168"/>
+          </a:xfrm>
+          <a:prstGeom prst="rect">
+            <a:avLst/>
+          </a:prstGeom>
+          <a:noFill/>
+          <a:ln/>
+        </p:spPr>
+        <p:txBody>
+          <a:bodyPr wrap="square" lIns="0" tIns="0" rIns="0" bIns="0" rtlCol="0" anchor="ctr"/>
+          <a:lstStyle/>
+          <a:p>
             <a:pPr indent="0" marL="0">
               <a:buNone/>
             </a:pPr>
             <a:r>
-              <a:rPr lang="en-US" sz="1420" dirty="0">
+              <a:rPr lang="en-US" sz="950" b="1" dirty="0">
+                <a:solidFill>
+                  <a:srgbClr val="0068B7"/>
+                </a:solidFill>
+                <a:latin typeface="Aptos" pitchFamily="34" charset="0"/>
+                <a:ea typeface="Aptos" pitchFamily="34" charset="-122"/>
+                <a:cs typeface="Aptos" pitchFamily="34" charset="-120"/>
+              </a:rPr>
+              <a:t>Key idea</a:t>
+            </a:r>
+            <a:endParaRPr lang="en-US" sz="950" dirty="0"/>
+          </a:p>
+        </p:txBody>
+      </p:sp>
+      <p:sp>
+        <p:nvSpPr>
+          <p:cNvPr id="13" name="Text 11"/>
+          <p:cNvSpPr/>
+          <p:nvPr/>
+        </p:nvSpPr>
+        <p:spPr>
+          <a:xfrm>
+            <a:off x="8074152" y="1856232"/>
+            <a:ext cx="2825496" cy="1261872"/>
+          </a:xfrm>
+          <a:prstGeom prst="rect">
+            <a:avLst/>
+          </a:prstGeom>
+          <a:noFill/>
+          <a:ln/>
+        </p:spPr>
+        <p:txBody>
+          <a:bodyPr wrap="square" lIns="0" tIns="0" rIns="0" bIns="0" rtlCol="0" anchor="t">
+            <a:normAutofit/>
+          </a:bodyPr>
+          <a:lstStyle/>
+          <a:p>
+            <a:pPr indent="0" marL="0">
+              <a:buNone/>
+            </a:pPr>
+            <a:r>
+              <a:rPr lang="en-US" sz="1250" dirty="0">
                 <a:solidFill>
                   <a:srgbClr val="17364A"/>
                 </a:solidFill>
@@ -6433,9 +11797,116 @@
                 <a:ea typeface="Aptos" pitchFamily="34" charset="-122"/>
                 <a:cs typeface="Aptos" pitchFamily="34" charset="-120"/>
               </a:rPr>
-              <a:t>A public health agency implements several AI tools: a document assistant, a case summarization tool, a data quality monitor, and a predictive model for resource planning. Staff quickly discover that no single role owns all the knowledge needed. Program staff understand workflow, IT understands integration, privacy understands data restrictions, and analysts understand validation. However, there is no role that connects these perspectives consistently. The agency creates an AI bridge role to support use case development, governance preparation, workflow mapping, vendor questioning, training, and implementation review. The role does not replace technical specialists or program leaders. It helps them work together more effectively.</a:t>
-            </a:r>
-            <a:endParaRPr lang="en-US" sz="1420" dirty="0"/>
+              <a:t>AI changes the skills, roles, and collaboration patterns needed in public health agencies.</a:t>
+            </a:r>
+            <a:endParaRPr lang="en-US" sz="1250" dirty="0"/>
+          </a:p>
+        </p:txBody>
+      </p:sp>
+      <p:sp>
+        <p:nvSpPr>
+          <p:cNvPr id="14" name="Shape 12"/>
+          <p:cNvSpPr/>
+          <p:nvPr/>
+        </p:nvSpPr>
+        <p:spPr>
+          <a:xfrm>
+            <a:off x="7909560" y="3520440"/>
+            <a:ext cx="3154680" cy="1737360"/>
+          </a:xfrm>
+          <a:prstGeom prst="roundRect">
+            <a:avLst>
+              <a:gd name="adj" fmla="val 6316"/>
+            </a:avLst>
+          </a:prstGeom>
+          <a:solidFill>
+            <a:srgbClr val="EAF6F8"/>
+          </a:solidFill>
+          <a:ln w="12700">
+            <a:solidFill>
+              <a:srgbClr val="B9D7E6"/>
+            </a:solidFill>
+            <a:prstDash val="solid"/>
+          </a:ln>
+        </p:spPr>
+      </p:sp>
+      <p:sp>
+        <p:nvSpPr>
+          <p:cNvPr id="15" name="Text 13"/>
+          <p:cNvSpPr/>
+          <p:nvPr/>
+        </p:nvSpPr>
+        <p:spPr>
+          <a:xfrm>
+            <a:off x="8074152" y="3666744"/>
+            <a:ext cx="2825496" cy="201168"/>
+          </a:xfrm>
+          <a:prstGeom prst="rect">
+            <a:avLst/>
+          </a:prstGeom>
+          <a:noFill/>
+          <a:ln/>
+        </p:spPr>
+        <p:txBody>
+          <a:bodyPr wrap="square" lIns="0" tIns="0" rIns="0" bIns="0" rtlCol="0" anchor="ctr"/>
+          <a:lstStyle/>
+          <a:p>
+            <a:pPr indent="0" marL="0">
+              <a:buNone/>
+            </a:pPr>
+            <a:r>
+              <a:rPr lang="en-US" sz="950" b="1" dirty="0">
+                <a:solidFill>
+                  <a:srgbClr val="0068B7"/>
+                </a:solidFill>
+                <a:latin typeface="Aptos" pitchFamily="34" charset="0"/>
+                <a:ea typeface="Aptos" pitchFamily="34" charset="-122"/>
+                <a:cs typeface="Aptos" pitchFamily="34" charset="-120"/>
+              </a:rPr>
+              <a:t>Use this for</a:t>
+            </a:r>
+            <a:endParaRPr lang="en-US" sz="950" dirty="0"/>
+          </a:p>
+        </p:txBody>
+      </p:sp>
+      <p:sp>
+        <p:nvSpPr>
+          <p:cNvPr id="16" name="Text 14"/>
+          <p:cNvSpPr/>
+          <p:nvPr/>
+        </p:nvSpPr>
+        <p:spPr>
+          <a:xfrm>
+            <a:off x="8074152" y="3959352"/>
+            <a:ext cx="2825496" cy="1170432"/>
+          </a:xfrm>
+          <a:prstGeom prst="rect">
+            <a:avLst/>
+          </a:prstGeom>
+          <a:noFill/>
+          <a:ln/>
+        </p:spPr>
+        <p:txBody>
+          <a:bodyPr wrap="square" lIns="0" tIns="0" rIns="0" bIns="0" rtlCol="0" anchor="t">
+            <a:normAutofit/>
+          </a:bodyPr>
+          <a:lstStyle/>
+          <a:p>
+            <a:pPr indent="0" marL="0">
+              <a:buNone/>
+            </a:pPr>
+            <a:r>
+              <a:rPr lang="en-US" sz="1250" dirty="0">
+                <a:solidFill>
+                  <a:srgbClr val="17364A"/>
+                </a:solidFill>
+                <a:latin typeface="Aptos" pitchFamily="34" charset="0"/>
+                <a:ea typeface="Aptos" pitchFamily="34" charset="-122"/>
+                <a:cs typeface="Aptos" pitchFamily="34" charset="-120"/>
+              </a:rPr>
+              <a:t>Connect the concept to public health decisions, safeguards, documentation, or implementation work.</a:t>
+            </a:r>
+            <a:endParaRPr lang="en-US" sz="1250" dirty="0"/>
           </a:p>
         </p:txBody>
       </p:sp>
@@ -6498,7 +11969,32 @@
       </p:sp>
       <p:sp>
         <p:nvSpPr>
-          <p:cNvPr id="3" name="Text 1"/>
+          <p:cNvPr id="3" name="Shape 1"/>
+          <p:cNvSpPr/>
+          <p:nvPr/>
+        </p:nvSpPr>
+        <p:spPr>
+          <a:xfrm>
+            <a:off x="0" y="164592"/>
+            <a:ext cx="146304" cy="6693408"/>
+          </a:xfrm>
+          <a:prstGeom prst="rect">
+            <a:avLst/>
+          </a:prstGeom>
+          <a:solidFill>
+            <a:srgbClr val="2F8A28"/>
+          </a:solidFill>
+          <a:ln w="12700">
+            <a:solidFill>
+              <a:srgbClr val="2F8A28"/>
+            </a:solidFill>
+            <a:prstDash val="solid"/>
+          </a:ln>
+        </p:spPr>
+      </p:sp>
+      <p:sp>
+        <p:nvSpPr>
+          <p:cNvPr id="4" name="Text 2"/>
           <p:cNvSpPr/>
           <p:nvPr/>
         </p:nvSpPr>
@@ -6537,7 +12033,7 @@
       </p:sp>
       <p:sp>
         <p:nvSpPr>
-          <p:cNvPr id="4" name="Text 2"/>
+          <p:cNvPr id="5" name="Text 3"/>
           <p:cNvSpPr/>
           <p:nvPr/>
         </p:nvSpPr>
@@ -6576,7 +12072,7 @@
       </p:sp>
       <p:sp>
         <p:nvSpPr>
-          <p:cNvPr id="5" name="Text 3"/>
+          <p:cNvPr id="6" name="Text 4"/>
           <p:cNvSpPr/>
           <p:nvPr/>
         </p:nvSpPr>
@@ -6615,13 +12111,77 @@
       </p:sp>
       <p:sp>
         <p:nvSpPr>
-          <p:cNvPr id="6" name="Text 4"/>
+          <p:cNvPr id="7" name="Shape 5"/>
           <p:cNvSpPr/>
           <p:nvPr/>
         </p:nvSpPr>
         <p:spPr>
           <a:xfrm>
             <a:off x="640080" y="658368"/>
+            <a:ext cx="420624" cy="420624"/>
+          </a:xfrm>
+          <a:prstGeom prst="ellipse">
+            <a:avLst/>
+          </a:prstGeom>
+          <a:solidFill>
+            <a:srgbClr val="0068B7"/>
+          </a:solidFill>
+          <a:ln w="12700">
+            <a:solidFill>
+              <a:srgbClr val="0068B7"/>
+            </a:solidFill>
+            <a:prstDash val="solid"/>
+          </a:ln>
+        </p:spPr>
+      </p:sp>
+      <p:sp>
+        <p:nvSpPr>
+          <p:cNvPr id="8" name="Text 6"/>
+          <p:cNvSpPr/>
+          <p:nvPr/>
+        </p:nvSpPr>
+        <p:spPr>
+          <a:xfrm>
+            <a:off x="640080" y="731520"/>
+            <a:ext cx="420624" cy="164592"/>
+          </a:xfrm>
+          <a:prstGeom prst="rect">
+            <a:avLst/>
+          </a:prstGeom>
+          <a:noFill/>
+          <a:ln/>
+        </p:spPr>
+        <p:txBody>
+          <a:bodyPr wrap="square" lIns="0" tIns="0" rIns="0" bIns="0" rtlCol="0" anchor="ctr"/>
+          <a:lstStyle/>
+          <a:p>
+            <a:pPr algn="ctr" indent="0" marL="0">
+              <a:buNone/>
+            </a:pPr>
+            <a:r>
+              <a:rPr lang="en-US" sz="1100" b="1" dirty="0">
+                <a:solidFill>
+                  <a:srgbClr val="FFFFFF"/>
+                </a:solidFill>
+                <a:latin typeface="Aptos" pitchFamily="34" charset="0"/>
+                <a:ea typeface="Aptos" pitchFamily="34" charset="-122"/>
+                <a:cs typeface="Aptos" pitchFamily="34" charset="-120"/>
+              </a:rPr>
+              <a:t>3</a:t>
+            </a:r>
+            <a:endParaRPr lang="en-US" sz="1100" dirty="0"/>
+          </a:p>
+        </p:txBody>
+      </p:sp>
+      <p:sp>
+        <p:nvSpPr>
+          <p:cNvPr id="9" name="Text 7"/>
+          <p:cNvSpPr/>
+          <p:nvPr/>
+        </p:nvSpPr>
+        <p:spPr>
+          <a:xfrm>
+            <a:off x="640080" y="621792"/>
             <a:ext cx="10881360" cy="566928"/>
           </a:xfrm>
           <a:prstGeom prst="rect">
@@ -6648,7 +12208,7 @@
                 <a:ea typeface="Aptos Display" pitchFamily="34" charset="-122"/>
                 <a:cs typeface="Aptos Display" pitchFamily="34" charset="-120"/>
               </a:rPr>
-              <a:t>Technical and Governance Deep Dive</a:t>
+              <a:t>Why This Topic Matters for Public Health AI</a:t>
             </a:r>
             <a:endParaRPr lang="en-US" sz="2700" dirty="0"/>
           </a:p>
@@ -6656,32 +12216,178 @@
       </p:sp>
       <p:sp>
         <p:nvSpPr>
-          <p:cNvPr id="7" name="Text 5"/>
-          <p:cNvSpPr/>
-          <p:nvPr/>
-        </p:nvSpPr>
-        <p:spPr>
-          <a:xfrm>
-            <a:off x="822960" y="1325880"/>
-            <a:ext cx="10378440" cy="4800600"/>
-          </a:xfrm>
-          <a:prstGeom prst="rect">
-            <a:avLst/>
-          </a:prstGeom>
-          <a:noFill/>
-          <a:ln/>
-        </p:spPr>
-        <p:txBody>
-          <a:bodyPr wrap="square" lIns="1016" tIns="1016" rIns="1016" bIns="1016" rtlCol="0" anchor="t">
+          <p:cNvPr id="10" name="Text 8"/>
+          <p:cNvSpPr/>
+          <p:nvPr/>
+        </p:nvSpPr>
+        <p:spPr>
+          <a:xfrm>
+            <a:off x="868680" y="1417320"/>
+            <a:ext cx="6675120" cy="4434840"/>
+          </a:xfrm>
+          <a:prstGeom prst="rect">
+            <a:avLst/>
+          </a:prstGeom>
+          <a:noFill/>
+          <a:ln/>
+        </p:spPr>
+        <p:txBody>
+          <a:bodyPr wrap="square" lIns="635" tIns="635" rIns="635" bIns="635" rtlCol="0" anchor="t">
             <a:normAutofit/>
           </a:bodyPr>
           <a:lstStyle/>
           <a:p>
+            <a:r>
+              <a:rPr lang="en-US" sz="1700" dirty="0">
+                <a:solidFill>
+                  <a:srgbClr val="17364A"/>
+                </a:solidFill>
+                <a:latin typeface="Aptos" pitchFamily="34" charset="0"/>
+                <a:ea typeface="Aptos" pitchFamily="34" charset="-122"/>
+                <a:cs typeface="Aptos" pitchFamily="34" charset="-120"/>
+              </a:rPr>
+              <a:t>Public health AI depends on people who understand both technology and context.</a:t>
+            </a:r>
+            <a:endParaRPr lang="en-US" sz="1700" dirty="0"/>
+          </a:p>
+          <a:p>
+            <a:r>
+              <a:rPr lang="en-US" sz="1700" dirty="0">
+                <a:solidFill>
+                  <a:srgbClr val="17364A"/>
+                </a:solidFill>
+                <a:latin typeface="Aptos" pitchFamily="34" charset="0"/>
+                <a:ea typeface="Aptos" pitchFamily="34" charset="-122"/>
+                <a:cs typeface="Aptos" pitchFamily="34" charset="-120"/>
+              </a:rPr>
+              <a:t>A model may generate a summary, but an epidemiologist must judge whether the summary is meaningful.</a:t>
+            </a:r>
+            <a:endParaRPr lang="en-US" sz="1700" dirty="0"/>
+          </a:p>
+          <a:p>
+            <a:r>
+              <a:rPr lang="en-US" sz="1700" dirty="0">
+                <a:solidFill>
+                  <a:srgbClr val="17364A"/>
+                </a:solidFill>
+                <a:latin typeface="Aptos" pitchFamily="34" charset="0"/>
+                <a:ea typeface="Aptos" pitchFamily="34" charset="-122"/>
+                <a:cs typeface="Aptos" pitchFamily="34" charset="-120"/>
+              </a:rPr>
+              <a:t>A vendor may describe a product, but an informatician must assess interoperability and data flow.</a:t>
+            </a:r>
+            <a:endParaRPr lang="en-US" sz="1700" dirty="0"/>
+          </a:p>
+          <a:p>
+            <a:r>
+              <a:rPr lang="en-US" sz="1700" dirty="0">
+                <a:solidFill>
+                  <a:srgbClr val="17364A"/>
+                </a:solidFill>
+                <a:latin typeface="Aptos" pitchFamily="34" charset="0"/>
+                <a:ea typeface="Aptos" pitchFamily="34" charset="-122"/>
+                <a:cs typeface="Aptos" pitchFamily="34" charset="-120"/>
+              </a:rPr>
+              <a:t>A leader may approve a use case, but governance participants must ensure that privacy, equity, security, and legal concerns.</a:t>
+            </a:r>
+            <a:endParaRPr lang="en-US" sz="1700" dirty="0"/>
+          </a:p>
+        </p:txBody>
+      </p:sp>
+      <p:sp>
+        <p:nvSpPr>
+          <p:cNvPr id="11" name="Shape 9"/>
+          <p:cNvSpPr/>
+          <p:nvPr/>
+        </p:nvSpPr>
+        <p:spPr>
+          <a:xfrm>
+            <a:off x="7909560" y="1417320"/>
+            <a:ext cx="3154680" cy="1828800"/>
+          </a:xfrm>
+          <a:prstGeom prst="roundRect">
+            <a:avLst>
+              <a:gd name="adj" fmla="val 6000"/>
+            </a:avLst>
+          </a:prstGeom>
+          <a:solidFill>
+            <a:srgbClr val="EEF8ED"/>
+          </a:solidFill>
+          <a:ln w="12700">
+            <a:solidFill>
+              <a:srgbClr val="B9D7E6"/>
+            </a:solidFill>
+            <a:prstDash val="solid"/>
+          </a:ln>
+        </p:spPr>
+      </p:sp>
+      <p:sp>
+        <p:nvSpPr>
+          <p:cNvPr id="12" name="Text 10"/>
+          <p:cNvSpPr/>
+          <p:nvPr/>
+        </p:nvSpPr>
+        <p:spPr>
+          <a:xfrm>
+            <a:off x="8074152" y="1563624"/>
+            <a:ext cx="2825496" cy="201168"/>
+          </a:xfrm>
+          <a:prstGeom prst="rect">
+            <a:avLst/>
+          </a:prstGeom>
+          <a:noFill/>
+          <a:ln/>
+        </p:spPr>
+        <p:txBody>
+          <a:bodyPr wrap="square" lIns="0" tIns="0" rIns="0" bIns="0" rtlCol="0" anchor="ctr"/>
+          <a:lstStyle/>
+          <a:p>
             <a:pPr indent="0" marL="0">
               <a:buNone/>
             </a:pPr>
             <a:r>
-              <a:rPr lang="en-US" sz="1420" dirty="0">
+              <a:rPr lang="en-US" sz="950" b="1" dirty="0">
+                <a:solidFill>
+                  <a:srgbClr val="0068B7"/>
+                </a:solidFill>
+                <a:latin typeface="Aptos" pitchFamily="34" charset="0"/>
+                <a:ea typeface="Aptos" pitchFamily="34" charset="-122"/>
+                <a:cs typeface="Aptos" pitchFamily="34" charset="-120"/>
+              </a:rPr>
+              <a:t>Key idea</a:t>
+            </a:r>
+            <a:endParaRPr lang="en-US" sz="950" dirty="0"/>
+          </a:p>
+        </p:txBody>
+      </p:sp>
+      <p:sp>
+        <p:nvSpPr>
+          <p:cNvPr id="13" name="Text 11"/>
+          <p:cNvSpPr/>
+          <p:nvPr/>
+        </p:nvSpPr>
+        <p:spPr>
+          <a:xfrm>
+            <a:off x="8074152" y="1856232"/>
+            <a:ext cx="2825496" cy="1261872"/>
+          </a:xfrm>
+          <a:prstGeom prst="rect">
+            <a:avLst/>
+          </a:prstGeom>
+          <a:noFill/>
+          <a:ln/>
+        </p:spPr>
+        <p:txBody>
+          <a:bodyPr wrap="square" lIns="0" tIns="0" rIns="0" bIns="0" rtlCol="0" anchor="t">
+            <a:normAutofit/>
+          </a:bodyPr>
+          <a:lstStyle/>
+          <a:p>
+            <a:pPr indent="0" marL="0">
+              <a:buNone/>
+            </a:pPr>
+            <a:r>
+              <a:rPr lang="en-US" sz="1250" dirty="0">
                 <a:solidFill>
                   <a:srgbClr val="17364A"/>
                 </a:solidFill>
@@ -6689,9 +12395,116 @@
                 <a:ea typeface="Aptos" pitchFamily="34" charset="-122"/>
                 <a:cs typeface="Aptos" pitchFamily="34" charset="-120"/>
               </a:rPr>
-              <a:t>An AI workforce strategy should define role groups. General staff may need baseline AI literacy, approved-use guidance, and prompt safety. Frontline users need workflow-specific training and escalation expectations. Supervisors need to support review, feedback, and documentation. Program owners need to understand accountability and performance monitoring. Technical staff need deeper knowledge of data, architecture, validation, and security. Governance members need enough shared language to review proposals consistently. Competency expectations should be practical. Staff do not all need to become data scientists. However, many need to recognize when AI output is unsupported, when sensitive data should not be entered, when a use case exceeds approved boundaries, and when to escalate. Technical and informatics staff may need competencies in data quality, interoperability, model evaluation, RAG, security, and lifecycle monitoring. Role design should also address workload and equity. AI review and governance work require time. If these responsibilities are added informally to already overloaded staff, governance may become superficial. Leaders should identify protected time, training resources, role descriptions, and career pathways for staff who support responsible AI.</a:t>
-            </a:r>
-            <a:endParaRPr lang="en-US" sz="1420" dirty="0"/>
+              <a:t>Public health AI depends on people who understand both technology and context.</a:t>
+            </a:r>
+            <a:endParaRPr lang="en-US" sz="1250" dirty="0"/>
+          </a:p>
+        </p:txBody>
+      </p:sp>
+      <p:sp>
+        <p:nvSpPr>
+          <p:cNvPr id="14" name="Shape 12"/>
+          <p:cNvSpPr/>
+          <p:nvPr/>
+        </p:nvSpPr>
+        <p:spPr>
+          <a:xfrm>
+            <a:off x="7909560" y="3520440"/>
+            <a:ext cx="3154680" cy="1737360"/>
+          </a:xfrm>
+          <a:prstGeom prst="roundRect">
+            <a:avLst>
+              <a:gd name="adj" fmla="val 6316"/>
+            </a:avLst>
+          </a:prstGeom>
+          <a:solidFill>
+            <a:srgbClr val="EAF6F8"/>
+          </a:solidFill>
+          <a:ln w="12700">
+            <a:solidFill>
+              <a:srgbClr val="B9D7E6"/>
+            </a:solidFill>
+            <a:prstDash val="solid"/>
+          </a:ln>
+        </p:spPr>
+      </p:sp>
+      <p:sp>
+        <p:nvSpPr>
+          <p:cNvPr id="15" name="Text 13"/>
+          <p:cNvSpPr/>
+          <p:nvPr/>
+        </p:nvSpPr>
+        <p:spPr>
+          <a:xfrm>
+            <a:off x="8074152" y="3666744"/>
+            <a:ext cx="2825496" cy="201168"/>
+          </a:xfrm>
+          <a:prstGeom prst="rect">
+            <a:avLst/>
+          </a:prstGeom>
+          <a:noFill/>
+          <a:ln/>
+        </p:spPr>
+        <p:txBody>
+          <a:bodyPr wrap="square" lIns="0" tIns="0" rIns="0" bIns="0" rtlCol="0" anchor="ctr"/>
+          <a:lstStyle/>
+          <a:p>
+            <a:pPr indent="0" marL="0">
+              <a:buNone/>
+            </a:pPr>
+            <a:r>
+              <a:rPr lang="en-US" sz="950" b="1" dirty="0">
+                <a:solidFill>
+                  <a:srgbClr val="0068B7"/>
+                </a:solidFill>
+                <a:latin typeface="Aptos" pitchFamily="34" charset="0"/>
+                <a:ea typeface="Aptos" pitchFamily="34" charset="-122"/>
+                <a:cs typeface="Aptos" pitchFamily="34" charset="-120"/>
+              </a:rPr>
+              <a:t>Use this for</a:t>
+            </a:r>
+            <a:endParaRPr lang="en-US" sz="950" dirty="0"/>
+          </a:p>
+        </p:txBody>
+      </p:sp>
+      <p:sp>
+        <p:nvSpPr>
+          <p:cNvPr id="16" name="Text 14"/>
+          <p:cNvSpPr/>
+          <p:nvPr/>
+        </p:nvSpPr>
+        <p:spPr>
+          <a:xfrm>
+            <a:off x="8074152" y="3959352"/>
+            <a:ext cx="2825496" cy="1170432"/>
+          </a:xfrm>
+          <a:prstGeom prst="rect">
+            <a:avLst/>
+          </a:prstGeom>
+          <a:noFill/>
+          <a:ln/>
+        </p:spPr>
+        <p:txBody>
+          <a:bodyPr wrap="square" lIns="0" tIns="0" rIns="0" bIns="0" rtlCol="0" anchor="t">
+            <a:normAutofit/>
+          </a:bodyPr>
+          <a:lstStyle/>
+          <a:p>
+            <a:pPr indent="0" marL="0">
+              <a:buNone/>
+            </a:pPr>
+            <a:r>
+              <a:rPr lang="en-US" sz="1250" dirty="0">
+                <a:solidFill>
+                  <a:srgbClr val="17364A"/>
+                </a:solidFill>
+                <a:latin typeface="Aptos" pitchFamily="34" charset="0"/>
+                <a:ea typeface="Aptos" pitchFamily="34" charset="-122"/>
+                <a:cs typeface="Aptos" pitchFamily="34" charset="-120"/>
+              </a:rPr>
+              <a:t>Connect the concept to public health decisions, safeguards, documentation, or implementation work.</a:t>
+            </a:r>
+            <a:endParaRPr lang="en-US" sz="1250" dirty="0"/>
           </a:p>
         </p:txBody>
       </p:sp>
@@ -6754,7 +12567,32 @@
       </p:sp>
       <p:sp>
         <p:nvSpPr>
-          <p:cNvPr id="3" name="Text 1"/>
+          <p:cNvPr id="3" name="Shape 1"/>
+          <p:cNvSpPr/>
+          <p:nvPr/>
+        </p:nvSpPr>
+        <p:spPr>
+          <a:xfrm>
+            <a:off x="0" y="164592"/>
+            <a:ext cx="146304" cy="6693408"/>
+          </a:xfrm>
+          <a:prstGeom prst="rect">
+            <a:avLst/>
+          </a:prstGeom>
+          <a:solidFill>
+            <a:srgbClr val="2F8A28"/>
+          </a:solidFill>
+          <a:ln w="12700">
+            <a:solidFill>
+              <a:srgbClr val="2F8A28"/>
+            </a:solidFill>
+            <a:prstDash val="solid"/>
+          </a:ln>
+        </p:spPr>
+      </p:sp>
+      <p:sp>
+        <p:nvSpPr>
+          <p:cNvPr id="4" name="Text 2"/>
           <p:cNvSpPr/>
           <p:nvPr/>
         </p:nvSpPr>
@@ -6793,7 +12631,7 @@
       </p:sp>
       <p:sp>
         <p:nvSpPr>
-          <p:cNvPr id="4" name="Text 2"/>
+          <p:cNvPr id="5" name="Text 3"/>
           <p:cNvSpPr/>
           <p:nvPr/>
         </p:nvSpPr>
@@ -6832,7 +12670,7 @@
       </p:sp>
       <p:sp>
         <p:nvSpPr>
-          <p:cNvPr id="5" name="Text 3"/>
+          <p:cNvPr id="6" name="Text 4"/>
           <p:cNvSpPr/>
           <p:nvPr/>
         </p:nvSpPr>
@@ -6871,13 +12709,77 @@
       </p:sp>
       <p:sp>
         <p:nvSpPr>
-          <p:cNvPr id="6" name="Text 4"/>
+          <p:cNvPr id="7" name="Shape 5"/>
           <p:cNvSpPr/>
           <p:nvPr/>
         </p:nvSpPr>
         <p:spPr>
           <a:xfrm>
             <a:off x="640080" y="658368"/>
+            <a:ext cx="420624" cy="420624"/>
+          </a:xfrm>
+          <a:prstGeom prst="ellipse">
+            <a:avLst/>
+          </a:prstGeom>
+          <a:solidFill>
+            <a:srgbClr val="0068B7"/>
+          </a:solidFill>
+          <a:ln w="12700">
+            <a:solidFill>
+              <a:srgbClr val="0068B7"/>
+            </a:solidFill>
+            <a:prstDash val="solid"/>
+          </a:ln>
+        </p:spPr>
+      </p:sp>
+      <p:sp>
+        <p:nvSpPr>
+          <p:cNvPr id="8" name="Text 6"/>
+          <p:cNvSpPr/>
+          <p:nvPr/>
+        </p:nvSpPr>
+        <p:spPr>
+          <a:xfrm>
+            <a:off x="640080" y="731520"/>
+            <a:ext cx="420624" cy="164592"/>
+          </a:xfrm>
+          <a:prstGeom prst="rect">
+            <a:avLst/>
+          </a:prstGeom>
+          <a:noFill/>
+          <a:ln/>
+        </p:spPr>
+        <p:txBody>
+          <a:bodyPr wrap="square" lIns="0" tIns="0" rIns="0" bIns="0" rtlCol="0" anchor="ctr"/>
+          <a:lstStyle/>
+          <a:p>
+            <a:pPr algn="ctr" indent="0" marL="0">
+              <a:buNone/>
+            </a:pPr>
+            <a:r>
+              <a:rPr lang="en-US" sz="1100" b="1" dirty="0">
+                <a:solidFill>
+                  <a:srgbClr val="FFFFFF"/>
+                </a:solidFill>
+                <a:latin typeface="Aptos" pitchFamily="34" charset="0"/>
+                <a:ea typeface="Aptos" pitchFamily="34" charset="-122"/>
+                <a:cs typeface="Aptos" pitchFamily="34" charset="-120"/>
+              </a:rPr>
+              <a:t>4</a:t>
+            </a:r>
+            <a:endParaRPr lang="en-US" sz="1100" dirty="0"/>
+          </a:p>
+        </p:txBody>
+      </p:sp>
+      <p:sp>
+        <p:nvSpPr>
+          <p:cNvPr id="9" name="Text 7"/>
+          <p:cNvSpPr/>
+          <p:nvPr/>
+        </p:nvSpPr>
+        <p:spPr>
+          <a:xfrm>
+            <a:off x="640080" y="621792"/>
             <a:ext cx="10881360" cy="566928"/>
           </a:xfrm>
           <a:prstGeom prst="rect">
@@ -6904,7 +12806,7 @@
                 <a:ea typeface="Aptos Display" pitchFamily="34" charset="-122"/>
                 <a:cs typeface="Aptos Display" pitchFamily="34" charset="-120"/>
               </a:rPr>
-              <a:t>Risks, Failure Modes, and Guardrails</a:t>
+              <a:t>Public Health Example</a:t>
             </a:r>
             <a:endParaRPr lang="en-US" sz="2700" dirty="0"/>
           </a:p>
@@ -6912,32 +12814,178 @@
       </p:sp>
       <p:sp>
         <p:nvSpPr>
-          <p:cNvPr id="7" name="Text 5"/>
-          <p:cNvSpPr/>
-          <p:nvPr/>
-        </p:nvSpPr>
-        <p:spPr>
-          <a:xfrm>
-            <a:off x="822960" y="1325880"/>
-            <a:ext cx="10378440" cy="4800600"/>
-          </a:xfrm>
-          <a:prstGeom prst="rect">
-            <a:avLst/>
-          </a:prstGeom>
-          <a:noFill/>
-          <a:ln/>
-        </p:spPr>
-        <p:txBody>
-          <a:bodyPr wrap="square" lIns="1016" tIns="1016" rIns="1016" bIns="1016" rtlCol="0" anchor="t">
+          <p:cNvPr id="10" name="Text 8"/>
+          <p:cNvSpPr/>
+          <p:nvPr/>
+        </p:nvSpPr>
+        <p:spPr>
+          <a:xfrm>
+            <a:off x="868680" y="1417320"/>
+            <a:ext cx="6675120" cy="4434840"/>
+          </a:xfrm>
+          <a:prstGeom prst="rect">
+            <a:avLst/>
+          </a:prstGeom>
+          <a:noFill/>
+          <a:ln/>
+        </p:spPr>
+        <p:txBody>
+          <a:bodyPr wrap="square" lIns="635" tIns="635" rIns="635" bIns="635" rtlCol="0" anchor="t">
             <a:normAutofit/>
           </a:bodyPr>
           <a:lstStyle/>
           <a:p>
+            <a:r>
+              <a:rPr lang="en-US" sz="1700" dirty="0">
+                <a:solidFill>
+                  <a:srgbClr val="17364A"/>
+                </a:solidFill>
+                <a:latin typeface="Aptos" pitchFamily="34" charset="0"/>
+                <a:ea typeface="Aptos" pitchFamily="34" charset="-122"/>
+                <a:cs typeface="Aptos" pitchFamily="34" charset="-120"/>
+              </a:rPr>
+              <a:t>A public health agency implements several AI tools: a document assistant, a case summarization tool, a data quality.</a:t>
+            </a:r>
+            <a:endParaRPr lang="en-US" sz="1700" dirty="0"/>
+          </a:p>
+          <a:p>
+            <a:r>
+              <a:rPr lang="en-US" sz="1700" dirty="0">
+                <a:solidFill>
+                  <a:srgbClr val="17364A"/>
+                </a:solidFill>
+                <a:latin typeface="Aptos" pitchFamily="34" charset="0"/>
+                <a:ea typeface="Aptos" pitchFamily="34" charset="-122"/>
+                <a:cs typeface="Aptos" pitchFamily="34" charset="-120"/>
+              </a:rPr>
+              <a:t>Staff quickly discover that no single role owns all the knowledge needed.</a:t>
+            </a:r>
+            <a:endParaRPr lang="en-US" sz="1700" dirty="0"/>
+          </a:p>
+          <a:p>
+            <a:r>
+              <a:rPr lang="en-US" sz="1700" dirty="0">
+                <a:solidFill>
+                  <a:srgbClr val="17364A"/>
+                </a:solidFill>
+                <a:latin typeface="Aptos" pitchFamily="34" charset="0"/>
+                <a:ea typeface="Aptos" pitchFamily="34" charset="-122"/>
+                <a:cs typeface="Aptos" pitchFamily="34" charset="-120"/>
+              </a:rPr>
+              <a:t>Program staff understand workflow, IT understands integration, privacy understands data restrictions, and analysts.</a:t>
+            </a:r>
+            <a:endParaRPr lang="en-US" sz="1700" dirty="0"/>
+          </a:p>
+          <a:p>
+            <a:r>
+              <a:rPr lang="en-US" sz="1700" dirty="0">
+                <a:solidFill>
+                  <a:srgbClr val="17364A"/>
+                </a:solidFill>
+                <a:latin typeface="Aptos" pitchFamily="34" charset="0"/>
+                <a:ea typeface="Aptos" pitchFamily="34" charset="-122"/>
+                <a:cs typeface="Aptos" pitchFamily="34" charset="-120"/>
+              </a:rPr>
+              <a:t>However, there is no role that connects these perspectives consistently.</a:t>
+            </a:r>
+            <a:endParaRPr lang="en-US" sz="1700" dirty="0"/>
+          </a:p>
+        </p:txBody>
+      </p:sp>
+      <p:sp>
+        <p:nvSpPr>
+          <p:cNvPr id="11" name="Shape 9"/>
+          <p:cNvSpPr/>
+          <p:nvPr/>
+        </p:nvSpPr>
+        <p:spPr>
+          <a:xfrm>
+            <a:off x="7909560" y="1417320"/>
+            <a:ext cx="3154680" cy="1828800"/>
+          </a:xfrm>
+          <a:prstGeom prst="roundRect">
+            <a:avLst>
+              <a:gd name="adj" fmla="val 6000"/>
+            </a:avLst>
+          </a:prstGeom>
+          <a:solidFill>
+            <a:srgbClr val="EEF8ED"/>
+          </a:solidFill>
+          <a:ln w="12700">
+            <a:solidFill>
+              <a:srgbClr val="B9D7E6"/>
+            </a:solidFill>
+            <a:prstDash val="solid"/>
+          </a:ln>
+        </p:spPr>
+      </p:sp>
+      <p:sp>
+        <p:nvSpPr>
+          <p:cNvPr id="12" name="Text 10"/>
+          <p:cNvSpPr/>
+          <p:nvPr/>
+        </p:nvSpPr>
+        <p:spPr>
+          <a:xfrm>
+            <a:off x="8074152" y="1563624"/>
+            <a:ext cx="2825496" cy="201168"/>
+          </a:xfrm>
+          <a:prstGeom prst="rect">
+            <a:avLst/>
+          </a:prstGeom>
+          <a:noFill/>
+          <a:ln/>
+        </p:spPr>
+        <p:txBody>
+          <a:bodyPr wrap="square" lIns="0" tIns="0" rIns="0" bIns="0" rtlCol="0" anchor="ctr"/>
+          <a:lstStyle/>
+          <a:p>
             <a:pPr indent="0" marL="0">
               <a:buNone/>
             </a:pPr>
             <a:r>
-              <a:rPr lang="en-US" sz="1420" dirty="0">
+              <a:rPr lang="en-US" sz="950" b="1" dirty="0">
+                <a:solidFill>
+                  <a:srgbClr val="0068B7"/>
+                </a:solidFill>
+                <a:latin typeface="Aptos" pitchFamily="34" charset="0"/>
+                <a:ea typeface="Aptos" pitchFamily="34" charset="-122"/>
+                <a:cs typeface="Aptos" pitchFamily="34" charset="-120"/>
+              </a:rPr>
+              <a:t>Key idea</a:t>
+            </a:r>
+            <a:endParaRPr lang="en-US" sz="950" dirty="0"/>
+          </a:p>
+        </p:txBody>
+      </p:sp>
+      <p:sp>
+        <p:nvSpPr>
+          <p:cNvPr id="13" name="Text 11"/>
+          <p:cNvSpPr/>
+          <p:nvPr/>
+        </p:nvSpPr>
+        <p:spPr>
+          <a:xfrm>
+            <a:off x="8074152" y="1856232"/>
+            <a:ext cx="2825496" cy="1261872"/>
+          </a:xfrm>
+          <a:prstGeom prst="rect">
+            <a:avLst/>
+          </a:prstGeom>
+          <a:noFill/>
+          <a:ln/>
+        </p:spPr>
+        <p:txBody>
+          <a:bodyPr wrap="square" lIns="0" tIns="0" rIns="0" bIns="0" rtlCol="0" anchor="t">
+            <a:normAutofit/>
+          </a:bodyPr>
+          <a:lstStyle/>
+          <a:p>
+            <a:pPr indent="0" marL="0">
+              <a:buNone/>
+            </a:pPr>
+            <a:r>
+              <a:rPr lang="en-US" sz="1250" dirty="0">
                 <a:solidFill>
                   <a:srgbClr val="17364A"/>
                 </a:solidFill>
@@ -6945,9 +12993,116 @@
                 <a:ea typeface="Aptos" pitchFamily="34" charset="-122"/>
                 <a:cs typeface="Aptos" pitchFamily="34" charset="-120"/>
               </a:rPr>
-              <a:t>One risk is assuming that AI reduces workforce needs. In practice, responsible AI often requires new review, training, documentation, and monitoring work. A guardrail is to include workforce impact in every business case and implementation plan. Another risk is uneven access to AI skills. Staff in better-resourced programs may receive training first, while others fall behind. A guardrail is to create a role-based training plan that includes all relevant staff groups and supports equitable participation.</a:t>
-            </a:r>
-            <a:endParaRPr lang="en-US" sz="1420" dirty="0"/>
+              <a:t>A public health agency implements several AI tools: a document assistant, a case summarization tool, a data quality.</a:t>
+            </a:r>
+            <a:endParaRPr lang="en-US" sz="1250" dirty="0"/>
+          </a:p>
+        </p:txBody>
+      </p:sp>
+      <p:sp>
+        <p:nvSpPr>
+          <p:cNvPr id="14" name="Shape 12"/>
+          <p:cNvSpPr/>
+          <p:nvPr/>
+        </p:nvSpPr>
+        <p:spPr>
+          <a:xfrm>
+            <a:off x="7909560" y="3520440"/>
+            <a:ext cx="3154680" cy="1737360"/>
+          </a:xfrm>
+          <a:prstGeom prst="roundRect">
+            <a:avLst>
+              <a:gd name="adj" fmla="val 6316"/>
+            </a:avLst>
+          </a:prstGeom>
+          <a:solidFill>
+            <a:srgbClr val="EAF6F8"/>
+          </a:solidFill>
+          <a:ln w="12700">
+            <a:solidFill>
+              <a:srgbClr val="B9D7E6"/>
+            </a:solidFill>
+            <a:prstDash val="solid"/>
+          </a:ln>
+        </p:spPr>
+      </p:sp>
+      <p:sp>
+        <p:nvSpPr>
+          <p:cNvPr id="15" name="Text 13"/>
+          <p:cNvSpPr/>
+          <p:nvPr/>
+        </p:nvSpPr>
+        <p:spPr>
+          <a:xfrm>
+            <a:off x="8074152" y="3666744"/>
+            <a:ext cx="2825496" cy="201168"/>
+          </a:xfrm>
+          <a:prstGeom prst="rect">
+            <a:avLst/>
+          </a:prstGeom>
+          <a:noFill/>
+          <a:ln/>
+        </p:spPr>
+        <p:txBody>
+          <a:bodyPr wrap="square" lIns="0" tIns="0" rIns="0" bIns="0" rtlCol="0" anchor="ctr"/>
+          <a:lstStyle/>
+          <a:p>
+            <a:pPr indent="0" marL="0">
+              <a:buNone/>
+            </a:pPr>
+            <a:r>
+              <a:rPr lang="en-US" sz="950" b="1" dirty="0">
+                <a:solidFill>
+                  <a:srgbClr val="0068B7"/>
+                </a:solidFill>
+                <a:latin typeface="Aptos" pitchFamily="34" charset="0"/>
+                <a:ea typeface="Aptos" pitchFamily="34" charset="-122"/>
+                <a:cs typeface="Aptos" pitchFamily="34" charset="-120"/>
+              </a:rPr>
+              <a:t>Use this for</a:t>
+            </a:r>
+            <a:endParaRPr lang="en-US" sz="950" dirty="0"/>
+          </a:p>
+        </p:txBody>
+      </p:sp>
+      <p:sp>
+        <p:nvSpPr>
+          <p:cNvPr id="16" name="Text 14"/>
+          <p:cNvSpPr/>
+          <p:nvPr/>
+        </p:nvSpPr>
+        <p:spPr>
+          <a:xfrm>
+            <a:off x="8074152" y="3959352"/>
+            <a:ext cx="2825496" cy="1170432"/>
+          </a:xfrm>
+          <a:prstGeom prst="rect">
+            <a:avLst/>
+          </a:prstGeom>
+          <a:noFill/>
+          <a:ln/>
+        </p:spPr>
+        <p:txBody>
+          <a:bodyPr wrap="square" lIns="0" tIns="0" rIns="0" bIns="0" rtlCol="0" anchor="t">
+            <a:normAutofit/>
+          </a:bodyPr>
+          <a:lstStyle/>
+          <a:p>
+            <a:pPr indent="0" marL="0">
+              <a:buNone/>
+            </a:pPr>
+            <a:r>
+              <a:rPr lang="en-US" sz="1250" dirty="0">
+                <a:solidFill>
+                  <a:srgbClr val="17364A"/>
+                </a:solidFill>
+                <a:latin typeface="Aptos" pitchFamily="34" charset="0"/>
+                <a:ea typeface="Aptos" pitchFamily="34" charset="-122"/>
+                <a:cs typeface="Aptos" pitchFamily="34" charset="-120"/>
+              </a:rPr>
+              <a:t>Connect the concept to public health decisions, safeguards, documentation, or implementation work.</a:t>
+            </a:r>
+            <a:endParaRPr lang="en-US" sz="1250" dirty="0"/>
           </a:p>
         </p:txBody>
       </p:sp>
@@ -7010,7 +13165,32 @@
       </p:sp>
       <p:sp>
         <p:nvSpPr>
-          <p:cNvPr id="3" name="Text 1"/>
+          <p:cNvPr id="3" name="Shape 1"/>
+          <p:cNvSpPr/>
+          <p:nvPr/>
+        </p:nvSpPr>
+        <p:spPr>
+          <a:xfrm>
+            <a:off x="0" y="164592"/>
+            <a:ext cx="146304" cy="6693408"/>
+          </a:xfrm>
+          <a:prstGeom prst="rect">
+            <a:avLst/>
+          </a:prstGeom>
+          <a:solidFill>
+            <a:srgbClr val="2F8A28"/>
+          </a:solidFill>
+          <a:ln w="12700">
+            <a:solidFill>
+              <a:srgbClr val="2F8A28"/>
+            </a:solidFill>
+            <a:prstDash val="solid"/>
+          </a:ln>
+        </p:spPr>
+      </p:sp>
+      <p:sp>
+        <p:nvSpPr>
+          <p:cNvPr id="4" name="Text 2"/>
           <p:cNvSpPr/>
           <p:nvPr/>
         </p:nvSpPr>
@@ -7049,7 +13229,7 @@
       </p:sp>
       <p:sp>
         <p:nvSpPr>
-          <p:cNvPr id="4" name="Text 2"/>
+          <p:cNvPr id="5" name="Text 3"/>
           <p:cNvSpPr/>
           <p:nvPr/>
         </p:nvSpPr>
@@ -7088,7 +13268,7 @@
       </p:sp>
       <p:sp>
         <p:nvSpPr>
-          <p:cNvPr id="5" name="Text 3"/>
+          <p:cNvPr id="6" name="Text 4"/>
           <p:cNvSpPr/>
           <p:nvPr/>
         </p:nvSpPr>
@@ -7127,13 +13307,77 @@
       </p:sp>
       <p:sp>
         <p:nvSpPr>
-          <p:cNvPr id="6" name="Text 4"/>
+          <p:cNvPr id="7" name="Shape 5"/>
           <p:cNvSpPr/>
           <p:nvPr/>
         </p:nvSpPr>
         <p:spPr>
           <a:xfrm>
             <a:off x="640080" y="658368"/>
+            <a:ext cx="420624" cy="420624"/>
+          </a:xfrm>
+          <a:prstGeom prst="ellipse">
+            <a:avLst/>
+          </a:prstGeom>
+          <a:solidFill>
+            <a:srgbClr val="0068B7"/>
+          </a:solidFill>
+          <a:ln w="12700">
+            <a:solidFill>
+              <a:srgbClr val="0068B7"/>
+            </a:solidFill>
+            <a:prstDash val="solid"/>
+          </a:ln>
+        </p:spPr>
+      </p:sp>
+      <p:sp>
+        <p:nvSpPr>
+          <p:cNvPr id="8" name="Text 6"/>
+          <p:cNvSpPr/>
+          <p:nvPr/>
+        </p:nvSpPr>
+        <p:spPr>
+          <a:xfrm>
+            <a:off x="640080" y="731520"/>
+            <a:ext cx="420624" cy="164592"/>
+          </a:xfrm>
+          <a:prstGeom prst="rect">
+            <a:avLst/>
+          </a:prstGeom>
+          <a:noFill/>
+          <a:ln/>
+        </p:spPr>
+        <p:txBody>
+          <a:bodyPr wrap="square" lIns="0" tIns="0" rIns="0" bIns="0" rtlCol="0" anchor="ctr"/>
+          <a:lstStyle/>
+          <a:p>
+            <a:pPr algn="ctr" indent="0" marL="0">
+              <a:buNone/>
+            </a:pPr>
+            <a:r>
+              <a:rPr lang="en-US" sz="1100" b="1" dirty="0">
+                <a:solidFill>
+                  <a:srgbClr val="FFFFFF"/>
+                </a:solidFill>
+                <a:latin typeface="Aptos" pitchFamily="34" charset="0"/>
+                <a:ea typeface="Aptos" pitchFamily="34" charset="-122"/>
+                <a:cs typeface="Aptos" pitchFamily="34" charset="-120"/>
+              </a:rPr>
+              <a:t>5</a:t>
+            </a:r>
+            <a:endParaRPr lang="en-US" sz="1100" dirty="0"/>
+          </a:p>
+        </p:txBody>
+      </p:sp>
+      <p:sp>
+        <p:nvSpPr>
+          <p:cNvPr id="9" name="Text 7"/>
+          <p:cNvSpPr/>
+          <p:nvPr/>
+        </p:nvSpPr>
+        <p:spPr>
+          <a:xfrm>
+            <a:off x="640080" y="621792"/>
             <a:ext cx="10881360" cy="566928"/>
           </a:xfrm>
           <a:prstGeom prst="rect">
@@ -7160,7 +13404,7 @@
                 <a:ea typeface="Aptos Display" pitchFamily="34" charset="-122"/>
                 <a:cs typeface="Aptos Display" pitchFamily="34" charset="-120"/>
               </a:rPr>
-              <a:t>Application to AI-Supported Workflows</a:t>
+              <a:t>Technical and Governance Deep Dive</a:t>
             </a:r>
             <a:endParaRPr lang="en-US" sz="2700" dirty="0"/>
           </a:p>
@@ -7168,32 +13412,178 @@
       </p:sp>
       <p:sp>
         <p:nvSpPr>
-          <p:cNvPr id="7" name="Text 5"/>
-          <p:cNvSpPr/>
-          <p:nvPr/>
-        </p:nvSpPr>
-        <p:spPr>
-          <a:xfrm>
-            <a:off x="822960" y="1325880"/>
-            <a:ext cx="10378440" cy="4800600"/>
-          </a:xfrm>
-          <a:prstGeom prst="rect">
-            <a:avLst/>
-          </a:prstGeom>
-          <a:noFill/>
-          <a:ln/>
-        </p:spPr>
-        <p:txBody>
-          <a:bodyPr wrap="square" lIns="1016" tIns="1016" rIns="1016" bIns="1016" rtlCol="0" anchor="t">
+          <p:cNvPr id="10" name="Text 8"/>
+          <p:cNvSpPr/>
+          <p:nvPr/>
+        </p:nvSpPr>
+        <p:spPr>
+          <a:xfrm>
+            <a:off x="868680" y="1417320"/>
+            <a:ext cx="6675120" cy="4434840"/>
+          </a:xfrm>
+          <a:prstGeom prst="rect">
+            <a:avLst/>
+          </a:prstGeom>
+          <a:noFill/>
+          <a:ln/>
+        </p:spPr>
+        <p:txBody>
+          <a:bodyPr wrap="square" lIns="635" tIns="635" rIns="635" bIns="635" rtlCol="0" anchor="t">
             <a:normAutofit/>
           </a:bodyPr>
           <a:lstStyle/>
           <a:p>
+            <a:r>
+              <a:rPr lang="en-US" sz="1700" dirty="0">
+                <a:solidFill>
+                  <a:srgbClr val="17364A"/>
+                </a:solidFill>
+                <a:latin typeface="Aptos" pitchFamily="34" charset="0"/>
+                <a:ea typeface="Aptos" pitchFamily="34" charset="-122"/>
+                <a:cs typeface="Aptos" pitchFamily="34" charset="-120"/>
+              </a:rPr>
+              <a:t>An AI workforce strategy should define role groups.</a:t>
+            </a:r>
+            <a:endParaRPr lang="en-US" sz="1700" dirty="0"/>
+          </a:p>
+          <a:p>
+            <a:r>
+              <a:rPr lang="en-US" sz="1700" dirty="0">
+                <a:solidFill>
+                  <a:srgbClr val="17364A"/>
+                </a:solidFill>
+                <a:latin typeface="Aptos" pitchFamily="34" charset="0"/>
+                <a:ea typeface="Aptos" pitchFamily="34" charset="-122"/>
+                <a:cs typeface="Aptos" pitchFamily="34" charset="-120"/>
+              </a:rPr>
+              <a:t>General staff may need baseline AI literacy, approved-use guidance, and prompt safety.</a:t>
+            </a:r>
+            <a:endParaRPr lang="en-US" sz="1700" dirty="0"/>
+          </a:p>
+          <a:p>
+            <a:r>
+              <a:rPr lang="en-US" sz="1700" dirty="0">
+                <a:solidFill>
+                  <a:srgbClr val="17364A"/>
+                </a:solidFill>
+                <a:latin typeface="Aptos" pitchFamily="34" charset="0"/>
+                <a:ea typeface="Aptos" pitchFamily="34" charset="-122"/>
+                <a:cs typeface="Aptos" pitchFamily="34" charset="-120"/>
+              </a:rPr>
+              <a:t>Frontline users need workflow-specific training and escalation expectations.</a:t>
+            </a:r>
+            <a:endParaRPr lang="en-US" sz="1700" dirty="0"/>
+          </a:p>
+          <a:p>
+            <a:r>
+              <a:rPr lang="en-US" sz="1700" dirty="0">
+                <a:solidFill>
+                  <a:srgbClr val="17364A"/>
+                </a:solidFill>
+                <a:latin typeface="Aptos" pitchFamily="34" charset="0"/>
+                <a:ea typeface="Aptos" pitchFamily="34" charset="-122"/>
+                <a:cs typeface="Aptos" pitchFamily="34" charset="-120"/>
+              </a:rPr>
+              <a:t>Supervisors need to support review, feedback, and documentation.</a:t>
+            </a:r>
+            <a:endParaRPr lang="en-US" sz="1700" dirty="0"/>
+          </a:p>
+        </p:txBody>
+      </p:sp>
+      <p:sp>
+        <p:nvSpPr>
+          <p:cNvPr id="11" name="Shape 9"/>
+          <p:cNvSpPr/>
+          <p:nvPr/>
+        </p:nvSpPr>
+        <p:spPr>
+          <a:xfrm>
+            <a:off x="7909560" y="1417320"/>
+            <a:ext cx="3154680" cy="1828800"/>
+          </a:xfrm>
+          <a:prstGeom prst="roundRect">
+            <a:avLst>
+              <a:gd name="adj" fmla="val 6000"/>
+            </a:avLst>
+          </a:prstGeom>
+          <a:solidFill>
+            <a:srgbClr val="EEF8ED"/>
+          </a:solidFill>
+          <a:ln w="12700">
+            <a:solidFill>
+              <a:srgbClr val="B9D7E6"/>
+            </a:solidFill>
+            <a:prstDash val="solid"/>
+          </a:ln>
+        </p:spPr>
+      </p:sp>
+      <p:sp>
+        <p:nvSpPr>
+          <p:cNvPr id="12" name="Text 10"/>
+          <p:cNvSpPr/>
+          <p:nvPr/>
+        </p:nvSpPr>
+        <p:spPr>
+          <a:xfrm>
+            <a:off x="8074152" y="1563624"/>
+            <a:ext cx="2825496" cy="201168"/>
+          </a:xfrm>
+          <a:prstGeom prst="rect">
+            <a:avLst/>
+          </a:prstGeom>
+          <a:noFill/>
+          <a:ln/>
+        </p:spPr>
+        <p:txBody>
+          <a:bodyPr wrap="square" lIns="0" tIns="0" rIns="0" bIns="0" rtlCol="0" anchor="ctr"/>
+          <a:lstStyle/>
+          <a:p>
             <a:pPr indent="0" marL="0">
               <a:buNone/>
             </a:pPr>
             <a:r>
-              <a:rPr lang="en-US" sz="1420" dirty="0">
+              <a:rPr lang="en-US" sz="950" b="1" dirty="0">
+                <a:solidFill>
+                  <a:srgbClr val="0068B7"/>
+                </a:solidFill>
+                <a:latin typeface="Aptos" pitchFamily="34" charset="0"/>
+                <a:ea typeface="Aptos" pitchFamily="34" charset="-122"/>
+                <a:cs typeface="Aptos" pitchFamily="34" charset="-120"/>
+              </a:rPr>
+              <a:t>Key idea</a:t>
+            </a:r>
+            <a:endParaRPr lang="en-US" sz="950" dirty="0"/>
+          </a:p>
+        </p:txBody>
+      </p:sp>
+      <p:sp>
+        <p:nvSpPr>
+          <p:cNvPr id="13" name="Text 11"/>
+          <p:cNvSpPr/>
+          <p:nvPr/>
+        </p:nvSpPr>
+        <p:spPr>
+          <a:xfrm>
+            <a:off x="8074152" y="1856232"/>
+            <a:ext cx="2825496" cy="1261872"/>
+          </a:xfrm>
+          <a:prstGeom prst="rect">
+            <a:avLst/>
+          </a:prstGeom>
+          <a:noFill/>
+          <a:ln/>
+        </p:spPr>
+        <p:txBody>
+          <a:bodyPr wrap="square" lIns="0" tIns="0" rIns="0" bIns="0" rtlCol="0" anchor="t">
+            <a:normAutofit/>
+          </a:bodyPr>
+          <a:lstStyle/>
+          <a:p>
+            <a:pPr indent="0" marL="0">
+              <a:buNone/>
+            </a:pPr>
+            <a:r>
+              <a:rPr lang="en-US" sz="1250" dirty="0">
                 <a:solidFill>
                   <a:srgbClr val="17364A"/>
                 </a:solidFill>
@@ -7201,9 +13591,116 @@
                 <a:ea typeface="Aptos" pitchFamily="34" charset="-122"/>
                 <a:cs typeface="Aptos" pitchFamily="34" charset="-120"/>
               </a:rPr>
-              <a:t>Generative AI requires staff who can review outputs and manage source accuracy. Predictive analytics requires staff who can interpret performance and understand limitations. Agentic workflows require staff who can oversee permissions, actions, escalation, and rollback. Workforce strategy should connect each AI type to the roles needed to use it safely.</a:t>
-            </a:r>
-            <a:endParaRPr lang="en-US" sz="1420" dirty="0"/>
+              <a:t>An AI workforce strategy should define role groups.</a:t>
+            </a:r>
+            <a:endParaRPr lang="en-US" sz="1250" dirty="0"/>
+          </a:p>
+        </p:txBody>
+      </p:sp>
+      <p:sp>
+        <p:nvSpPr>
+          <p:cNvPr id="14" name="Shape 12"/>
+          <p:cNvSpPr/>
+          <p:nvPr/>
+        </p:nvSpPr>
+        <p:spPr>
+          <a:xfrm>
+            <a:off x="7909560" y="3520440"/>
+            <a:ext cx="3154680" cy="1737360"/>
+          </a:xfrm>
+          <a:prstGeom prst="roundRect">
+            <a:avLst>
+              <a:gd name="adj" fmla="val 6316"/>
+            </a:avLst>
+          </a:prstGeom>
+          <a:solidFill>
+            <a:srgbClr val="EAF6F8"/>
+          </a:solidFill>
+          <a:ln w="12700">
+            <a:solidFill>
+              <a:srgbClr val="B9D7E6"/>
+            </a:solidFill>
+            <a:prstDash val="solid"/>
+          </a:ln>
+        </p:spPr>
+      </p:sp>
+      <p:sp>
+        <p:nvSpPr>
+          <p:cNvPr id="15" name="Text 13"/>
+          <p:cNvSpPr/>
+          <p:nvPr/>
+        </p:nvSpPr>
+        <p:spPr>
+          <a:xfrm>
+            <a:off x="8074152" y="3666744"/>
+            <a:ext cx="2825496" cy="201168"/>
+          </a:xfrm>
+          <a:prstGeom prst="rect">
+            <a:avLst/>
+          </a:prstGeom>
+          <a:noFill/>
+          <a:ln/>
+        </p:spPr>
+        <p:txBody>
+          <a:bodyPr wrap="square" lIns="0" tIns="0" rIns="0" bIns="0" rtlCol="0" anchor="ctr"/>
+          <a:lstStyle/>
+          <a:p>
+            <a:pPr indent="0" marL="0">
+              <a:buNone/>
+            </a:pPr>
+            <a:r>
+              <a:rPr lang="en-US" sz="950" b="1" dirty="0">
+                <a:solidFill>
+                  <a:srgbClr val="0068B7"/>
+                </a:solidFill>
+                <a:latin typeface="Aptos" pitchFamily="34" charset="0"/>
+                <a:ea typeface="Aptos" pitchFamily="34" charset="-122"/>
+                <a:cs typeface="Aptos" pitchFamily="34" charset="-120"/>
+              </a:rPr>
+              <a:t>Use this for</a:t>
+            </a:r>
+            <a:endParaRPr lang="en-US" sz="950" dirty="0"/>
+          </a:p>
+        </p:txBody>
+      </p:sp>
+      <p:sp>
+        <p:nvSpPr>
+          <p:cNvPr id="16" name="Text 14"/>
+          <p:cNvSpPr/>
+          <p:nvPr/>
+        </p:nvSpPr>
+        <p:spPr>
+          <a:xfrm>
+            <a:off x="8074152" y="3959352"/>
+            <a:ext cx="2825496" cy="1170432"/>
+          </a:xfrm>
+          <a:prstGeom prst="rect">
+            <a:avLst/>
+          </a:prstGeom>
+          <a:noFill/>
+          <a:ln/>
+        </p:spPr>
+        <p:txBody>
+          <a:bodyPr wrap="square" lIns="0" tIns="0" rIns="0" bIns="0" rtlCol="0" anchor="t">
+            <a:normAutofit/>
+          </a:bodyPr>
+          <a:lstStyle/>
+          <a:p>
+            <a:pPr indent="0" marL="0">
+              <a:buNone/>
+            </a:pPr>
+            <a:r>
+              <a:rPr lang="en-US" sz="1250" dirty="0">
+                <a:solidFill>
+                  <a:srgbClr val="17364A"/>
+                </a:solidFill>
+                <a:latin typeface="Aptos" pitchFamily="34" charset="0"/>
+                <a:ea typeface="Aptos" pitchFamily="34" charset="-122"/>
+                <a:cs typeface="Aptos" pitchFamily="34" charset="-120"/>
+              </a:rPr>
+              <a:t>Connect the concept to public health decisions, safeguards, documentation, or implementation work.</a:t>
+            </a:r>
+            <a:endParaRPr lang="en-US" sz="1250" dirty="0"/>
           </a:p>
         </p:txBody>
       </p:sp>

--- a/downloads/presentations/modules/lesson-36-workforce-strategy-and-ai-role-design.pptx
+++ b/downloads/presentations/modules/lesson-36-workforce-strategy-and-ai-role-design.pptx
@@ -2810,6 +2810,45 @@
           </a:p>
         </p:txBody>
       </p:sp>
+      <p:sp>
+        <p:nvSpPr>
+          <p:cNvPr id="8" name="Text 5"/>
+          <p:cNvSpPr/>
+          <p:nvPr/>
+        </p:nvSpPr>
+        <p:spPr>
+          <a:xfrm>
+            <a:off x="11137392" y="6510528"/>
+            <a:ext cx="411480" cy="201168"/>
+          </a:xfrm>
+          <a:prstGeom prst="rect">
+            <a:avLst/>
+          </a:prstGeom>
+          <a:noFill/>
+          <a:ln/>
+        </p:spPr>
+        <p:txBody>
+          <a:bodyPr wrap="square" lIns="0" tIns="0" rIns="0" bIns="0" rtlCol="0" anchor="ctr"/>
+          <a:lstStyle/>
+          <a:p>
+            <a:pPr algn="r" indent="0" marL="0">
+              <a:buNone/>
+            </a:pPr>
+            <a:r>
+              <a:rPr lang="en-US" sz="900" dirty="0">
+                <a:solidFill>
+                  <a:srgbClr val="5F7181"/>
+                </a:solidFill>
+                <a:latin typeface="Aptos" pitchFamily="34" charset="0"/>
+                <a:ea typeface="Aptos" pitchFamily="34" charset="-122"/>
+                <a:cs typeface="Aptos" pitchFamily="34" charset="-120"/>
+              </a:rPr>
+              <a:t>1</a:t>
+            </a:r>
+            <a:endParaRPr lang="en-US" sz="900" dirty="0"/>
+          </a:p>
+        </p:txBody>
+      </p:sp>
     </p:spTree>
   </p:cSld>
   <p:clrMapOvr>
@@ -3003,7 +3042,7 @@
                 <a:ea typeface="Aptos" pitchFamily="34" charset="-122"/>
                 <a:cs typeface="Aptos" pitchFamily="34" charset="-120"/>
               </a:rPr>
-              <a:t>© Paula Soper</a:t>
+              <a:t>Â© Paula Soper</a:t>
             </a:r>
             <a:endParaRPr lang="en-US" sz="800" dirty="0"/>
           </a:p>
@@ -3011,7 +3050,46 @@
       </p:sp>
       <p:sp>
         <p:nvSpPr>
-          <p:cNvPr id="7" name="Shape 5"/>
+          <p:cNvPr id="7" name="Text 5"/>
+          <p:cNvSpPr/>
+          <p:nvPr/>
+        </p:nvSpPr>
+        <p:spPr>
+          <a:xfrm>
+            <a:off x="11137392" y="6510528"/>
+            <a:ext cx="411480" cy="201168"/>
+          </a:xfrm>
+          <a:prstGeom prst="rect">
+            <a:avLst/>
+          </a:prstGeom>
+          <a:noFill/>
+          <a:ln/>
+        </p:spPr>
+        <p:txBody>
+          <a:bodyPr wrap="square" lIns="0" tIns="0" rIns="0" bIns="0" rtlCol="0" anchor="ctr"/>
+          <a:lstStyle/>
+          <a:p>
+            <a:pPr algn="r" indent="0" marL="0">
+              <a:buNone/>
+            </a:pPr>
+            <a:r>
+              <a:rPr lang="en-US" sz="900" dirty="0">
+                <a:solidFill>
+                  <a:srgbClr val="5F7181"/>
+                </a:solidFill>
+                <a:latin typeface="Aptos" pitchFamily="34" charset="0"/>
+                <a:ea typeface="Aptos" pitchFamily="34" charset="-122"/>
+                <a:cs typeface="Aptos" pitchFamily="34" charset="-120"/>
+              </a:rPr>
+              <a:t>10</a:t>
+            </a:r>
+            <a:endParaRPr lang="en-US" sz="900" dirty="0"/>
+          </a:p>
+        </p:txBody>
+      </p:sp>
+      <p:sp>
+        <p:nvSpPr>
+          <p:cNvPr id="8" name="Shape 6"/>
           <p:cNvSpPr/>
           <p:nvPr/>
         </p:nvSpPr>
@@ -3036,7 +3114,7 @@
       </p:sp>
       <p:sp>
         <p:nvSpPr>
-          <p:cNvPr id="8" name="Text 6"/>
+          <p:cNvPr id="9" name="Text 7"/>
           <p:cNvSpPr/>
           <p:nvPr/>
         </p:nvSpPr>
@@ -3075,14 +3153,14 @@
       </p:sp>
       <p:sp>
         <p:nvSpPr>
-          <p:cNvPr id="9" name="Text 7"/>
+          <p:cNvPr id="10" name="Text 8"/>
           <p:cNvSpPr/>
           <p:nvPr/>
         </p:nvSpPr>
         <p:spPr>
           <a:xfrm>
             <a:off x="640080" y="621792"/>
-            <a:ext cx="10881360" cy="566928"/>
+            <a:ext cx="10881360" cy="713232"/>
           </a:xfrm>
           <a:prstGeom prst="rect">
             <a:avLst/>
@@ -3100,7 +3178,7 @@
               <a:buNone/>
             </a:pPr>
             <a:r>
-              <a:rPr lang="en-US" sz="2700" b="1" dirty="0">
+              <a:rPr lang="en-US" sz="3400" b="1" dirty="0">
                 <a:solidFill>
                   <a:srgbClr val="003A63"/>
                 </a:solidFill>
@@ -3110,20 +3188,20 @@
               </a:rPr>
               <a:t>Risks, Failure Modes, and Guardrails</a:t>
             </a:r>
-            <a:endParaRPr lang="en-US" sz="2700" dirty="0"/>
-          </a:p>
-        </p:txBody>
-      </p:sp>
-      <p:sp>
-        <p:nvSpPr>
-          <p:cNvPr id="10" name="Text 8"/>
-          <p:cNvSpPr/>
-          <p:nvPr/>
-        </p:nvSpPr>
-        <p:spPr>
-          <a:xfrm>
-            <a:off x="868680" y="1417320"/>
-            <a:ext cx="6675120" cy="4434840"/>
+            <a:endParaRPr lang="en-US" sz="3400" dirty="0"/>
+          </a:p>
+        </p:txBody>
+      </p:sp>
+      <p:sp>
+        <p:nvSpPr>
+          <p:cNvPr id="11" name="Text 9"/>
+          <p:cNvSpPr/>
+          <p:nvPr/>
+        </p:nvSpPr>
+        <p:spPr>
+          <a:xfrm>
+            <a:off x="868680" y="1508760"/>
+            <a:ext cx="6537960" cy="4160520"/>
           </a:xfrm>
           <a:prstGeom prst="rect">
             <a:avLst/>
@@ -3138,7 +3216,7 @@
           <a:lstStyle/>
           <a:p>
             <a:r>
-              <a:rPr lang="en-US" sz="1700" dirty="0">
+              <a:rPr lang="en-US" sz="2100" dirty="0">
                 <a:solidFill>
                   <a:srgbClr val="17364A"/>
                 </a:solidFill>
@@ -3148,11 +3226,11 @@
               </a:rPr>
               <a:t>One risk is assuming that AI reduces workforce needs.</a:t>
             </a:r>
-            <a:endParaRPr lang="en-US" sz="1700" dirty="0"/>
-          </a:p>
-          <a:p>
-            <a:r>
-              <a:rPr lang="en-US" sz="1700" dirty="0">
+            <a:endParaRPr lang="en-US" sz="2100" dirty="0"/>
+          </a:p>
+          <a:p>
+            <a:r>
+              <a:rPr lang="en-US" sz="2100" dirty="0">
                 <a:solidFill>
                   <a:srgbClr val="17364A"/>
                 </a:solidFill>
@@ -3162,11 +3240,11 @@
               </a:rPr>
               <a:t>In practice, responsible AI often requires new review, training, documentation, and monitoring work.</a:t>
             </a:r>
-            <a:endParaRPr lang="en-US" sz="1700" dirty="0"/>
-          </a:p>
-          <a:p>
-            <a:r>
-              <a:rPr lang="en-US" sz="1700" dirty="0">
+            <a:endParaRPr lang="en-US" sz="2100" dirty="0"/>
+          </a:p>
+          <a:p>
+            <a:r>
+              <a:rPr lang="en-US" sz="2100" dirty="0">
                 <a:solidFill>
                   <a:srgbClr val="17364A"/>
                 </a:solidFill>
@@ -3176,27 +3254,13 @@
               </a:rPr>
               <a:t>A guardrail is to include workforce impact in every business case and implementation plan.</a:t>
             </a:r>
-            <a:endParaRPr lang="en-US" sz="1700" dirty="0"/>
-          </a:p>
-          <a:p>
-            <a:r>
-              <a:rPr lang="en-US" sz="1700" dirty="0">
-                <a:solidFill>
-                  <a:srgbClr val="17364A"/>
-                </a:solidFill>
-                <a:latin typeface="Aptos" pitchFamily="34" charset="0"/>
-                <a:ea typeface="Aptos" pitchFamily="34" charset="-122"/>
-                <a:cs typeface="Aptos" pitchFamily="34" charset="-120"/>
-              </a:rPr>
-              <a:t>Another risk is uneven access to AI skills.</a:t>
-            </a:r>
-            <a:endParaRPr lang="en-US" sz="1700" dirty="0"/>
-          </a:p>
-        </p:txBody>
-      </p:sp>
-      <p:sp>
-        <p:nvSpPr>
-          <p:cNvPr id="11" name="Shape 9"/>
+            <a:endParaRPr lang="en-US" sz="2100" dirty="0"/>
+          </a:p>
+        </p:txBody>
+      </p:sp>
+      <p:sp>
+        <p:nvSpPr>
+          <p:cNvPr id="12" name="Shape 10"/>
           <p:cNvSpPr/>
           <p:nvPr/>
         </p:nvSpPr>
@@ -3223,14 +3287,14 @@
       </p:sp>
       <p:sp>
         <p:nvSpPr>
-          <p:cNvPr id="12" name="Text 10"/>
+          <p:cNvPr id="13" name="Text 11"/>
           <p:cNvSpPr/>
           <p:nvPr/>
         </p:nvSpPr>
         <p:spPr>
           <a:xfrm>
             <a:off x="8074152" y="1563624"/>
-            <a:ext cx="2825496" cy="201168"/>
+            <a:ext cx="2825496" cy="256032"/>
           </a:xfrm>
           <a:prstGeom prst="rect">
             <a:avLst/>
@@ -3246,7 +3310,7 @@
               <a:buNone/>
             </a:pPr>
             <a:r>
-              <a:rPr lang="en-US" sz="950" b="1" dirty="0">
+              <a:rPr lang="en-US" sz="1300" b="1" dirty="0">
                 <a:solidFill>
                   <a:srgbClr val="0068B7"/>
                 </a:solidFill>
@@ -3256,20 +3320,20 @@
               </a:rPr>
               <a:t>Key idea</a:t>
             </a:r>
-            <a:endParaRPr lang="en-US" sz="950" dirty="0"/>
-          </a:p>
-        </p:txBody>
-      </p:sp>
-      <p:sp>
-        <p:nvSpPr>
-          <p:cNvPr id="13" name="Text 11"/>
-          <p:cNvSpPr/>
-          <p:nvPr/>
-        </p:nvSpPr>
-        <p:spPr>
-          <a:xfrm>
-            <a:off x="8074152" y="1856232"/>
-            <a:ext cx="2825496" cy="1261872"/>
+            <a:endParaRPr lang="en-US" sz="1300" dirty="0"/>
+          </a:p>
+        </p:txBody>
+      </p:sp>
+      <p:sp>
+        <p:nvSpPr>
+          <p:cNvPr id="14" name="Text 12"/>
+          <p:cNvSpPr/>
+          <p:nvPr/>
+        </p:nvSpPr>
+        <p:spPr>
+          <a:xfrm>
+            <a:off x="8074152" y="1920240"/>
+            <a:ext cx="2825496" cy="1188720"/>
           </a:xfrm>
           <a:prstGeom prst="rect">
             <a:avLst/>
@@ -3287,7 +3351,7 @@
               <a:buNone/>
             </a:pPr>
             <a:r>
-              <a:rPr lang="en-US" sz="1250" dirty="0">
+              <a:rPr lang="en-US" sz="1550" dirty="0">
                 <a:solidFill>
                   <a:srgbClr val="17364A"/>
                 </a:solidFill>
@@ -3297,13 +3361,13 @@
               </a:rPr>
               <a:t>One risk is assuming that AI reduces workforce needs.</a:t>
             </a:r>
-            <a:endParaRPr lang="en-US" sz="1250" dirty="0"/>
-          </a:p>
-        </p:txBody>
-      </p:sp>
-      <p:sp>
-        <p:nvSpPr>
-          <p:cNvPr id="14" name="Shape 12"/>
+            <a:endParaRPr lang="en-US" sz="1550" dirty="0"/>
+          </a:p>
+        </p:txBody>
+      </p:sp>
+      <p:sp>
+        <p:nvSpPr>
+          <p:cNvPr id="15" name="Shape 13"/>
           <p:cNvSpPr/>
           <p:nvPr/>
         </p:nvSpPr>
@@ -3330,14 +3394,14 @@
       </p:sp>
       <p:sp>
         <p:nvSpPr>
-          <p:cNvPr id="15" name="Text 13"/>
+          <p:cNvPr id="16" name="Text 14"/>
           <p:cNvSpPr/>
           <p:nvPr/>
         </p:nvSpPr>
         <p:spPr>
           <a:xfrm>
             <a:off x="8074152" y="3666744"/>
-            <a:ext cx="2825496" cy="201168"/>
+            <a:ext cx="2825496" cy="256032"/>
           </a:xfrm>
           <a:prstGeom prst="rect">
             <a:avLst/>
@@ -3353,7 +3417,7 @@
               <a:buNone/>
             </a:pPr>
             <a:r>
-              <a:rPr lang="en-US" sz="950" b="1" dirty="0">
+              <a:rPr lang="en-US" sz="1300" b="1" dirty="0">
                 <a:solidFill>
                   <a:srgbClr val="0068B7"/>
                 </a:solidFill>
@@ -3363,20 +3427,20 @@
               </a:rPr>
               <a:t>Use this for</a:t>
             </a:r>
-            <a:endParaRPr lang="en-US" sz="950" dirty="0"/>
-          </a:p>
-        </p:txBody>
-      </p:sp>
-      <p:sp>
-        <p:nvSpPr>
-          <p:cNvPr id="16" name="Text 14"/>
-          <p:cNvSpPr/>
-          <p:nvPr/>
-        </p:nvSpPr>
-        <p:spPr>
-          <a:xfrm>
-            <a:off x="8074152" y="3959352"/>
-            <a:ext cx="2825496" cy="1170432"/>
+            <a:endParaRPr lang="en-US" sz="1300" dirty="0"/>
+          </a:p>
+        </p:txBody>
+      </p:sp>
+      <p:sp>
+        <p:nvSpPr>
+          <p:cNvPr id="17" name="Text 15"/>
+          <p:cNvSpPr/>
+          <p:nvPr/>
+        </p:nvSpPr>
+        <p:spPr>
+          <a:xfrm>
+            <a:off x="8074152" y="4023360"/>
+            <a:ext cx="2825496" cy="1097280"/>
           </a:xfrm>
           <a:prstGeom prst="rect">
             <a:avLst/>
@@ -3394,7 +3458,7 @@
               <a:buNone/>
             </a:pPr>
             <a:r>
-              <a:rPr lang="en-US" sz="1250" dirty="0">
+              <a:rPr lang="en-US" sz="1550" dirty="0">
                 <a:solidFill>
                   <a:srgbClr val="17364A"/>
                 </a:solidFill>
@@ -3404,7 +3468,7 @@
               </a:rPr>
               <a:t>Connect the concept to public health decisions, safeguards, documentation, or implementation work.</a:t>
             </a:r>
-            <a:endParaRPr lang="en-US" sz="1250" dirty="0"/>
+            <a:endParaRPr lang="en-US" sz="1550" dirty="0"/>
           </a:p>
         </p:txBody>
       </p:sp>
@@ -3601,7 +3665,7 @@
                 <a:ea typeface="Aptos" pitchFamily="34" charset="-122"/>
                 <a:cs typeface="Aptos" pitchFamily="34" charset="-120"/>
               </a:rPr>
-              <a:t>© Paula Soper</a:t>
+              <a:t>Â© Paula Soper</a:t>
             </a:r>
             <a:endParaRPr lang="en-US" sz="800" dirty="0"/>
           </a:p>
@@ -3609,7 +3673,46 @@
       </p:sp>
       <p:sp>
         <p:nvSpPr>
-          <p:cNvPr id="7" name="Shape 5"/>
+          <p:cNvPr id="7" name="Text 5"/>
+          <p:cNvSpPr/>
+          <p:nvPr/>
+        </p:nvSpPr>
+        <p:spPr>
+          <a:xfrm>
+            <a:off x="11137392" y="6510528"/>
+            <a:ext cx="411480" cy="201168"/>
+          </a:xfrm>
+          <a:prstGeom prst="rect">
+            <a:avLst/>
+          </a:prstGeom>
+          <a:noFill/>
+          <a:ln/>
+        </p:spPr>
+        <p:txBody>
+          <a:bodyPr wrap="square" lIns="0" tIns="0" rIns="0" bIns="0" rtlCol="0" anchor="ctr"/>
+          <a:lstStyle/>
+          <a:p>
+            <a:pPr algn="r" indent="0" marL="0">
+              <a:buNone/>
+            </a:pPr>
+            <a:r>
+              <a:rPr lang="en-US" sz="900" dirty="0">
+                <a:solidFill>
+                  <a:srgbClr val="5F7181"/>
+                </a:solidFill>
+                <a:latin typeface="Aptos" pitchFamily="34" charset="0"/>
+                <a:ea typeface="Aptos" pitchFamily="34" charset="-122"/>
+                <a:cs typeface="Aptos" pitchFamily="34" charset="-120"/>
+              </a:rPr>
+              <a:t>11</a:t>
+            </a:r>
+            <a:endParaRPr lang="en-US" sz="900" dirty="0"/>
+          </a:p>
+        </p:txBody>
+      </p:sp>
+      <p:sp>
+        <p:nvSpPr>
+          <p:cNvPr id="8" name="Shape 6"/>
           <p:cNvSpPr/>
           <p:nvPr/>
         </p:nvSpPr>
@@ -3634,7 +3737,7 @@
       </p:sp>
       <p:sp>
         <p:nvSpPr>
-          <p:cNvPr id="8" name="Text 6"/>
+          <p:cNvPr id="9" name="Text 7"/>
           <p:cNvSpPr/>
           <p:nvPr/>
         </p:nvSpPr>
@@ -3673,14 +3776,14 @@
       </p:sp>
       <p:sp>
         <p:nvSpPr>
-          <p:cNvPr id="9" name="Text 7"/>
+          <p:cNvPr id="10" name="Text 8"/>
           <p:cNvSpPr/>
           <p:nvPr/>
         </p:nvSpPr>
         <p:spPr>
           <a:xfrm>
             <a:off x="640080" y="621792"/>
-            <a:ext cx="10881360" cy="566928"/>
+            <a:ext cx="10881360" cy="713232"/>
           </a:xfrm>
           <a:prstGeom prst="rect">
             <a:avLst/>
@@ -3698,7 +3801,7 @@
               <a:buNone/>
             </a:pPr>
             <a:r>
-              <a:rPr lang="en-US" sz="2700" b="1" dirty="0">
+              <a:rPr lang="en-US" sz="3400" b="1" dirty="0">
                 <a:solidFill>
                   <a:srgbClr val="003A63"/>
                 </a:solidFill>
@@ -3708,20 +3811,20 @@
               </a:rPr>
               <a:t>Application to AI-Supported Workflows</a:t>
             </a:r>
-            <a:endParaRPr lang="en-US" sz="2700" dirty="0"/>
-          </a:p>
-        </p:txBody>
-      </p:sp>
-      <p:sp>
-        <p:nvSpPr>
-          <p:cNvPr id="10" name="Text 8"/>
-          <p:cNvSpPr/>
-          <p:nvPr/>
-        </p:nvSpPr>
-        <p:spPr>
-          <a:xfrm>
-            <a:off x="868680" y="1417320"/>
-            <a:ext cx="6675120" cy="4434840"/>
+            <a:endParaRPr lang="en-US" sz="3400" dirty="0"/>
+          </a:p>
+        </p:txBody>
+      </p:sp>
+      <p:sp>
+        <p:nvSpPr>
+          <p:cNvPr id="11" name="Text 9"/>
+          <p:cNvSpPr/>
+          <p:nvPr/>
+        </p:nvSpPr>
+        <p:spPr>
+          <a:xfrm>
+            <a:off x="868680" y="1508760"/>
+            <a:ext cx="6537960" cy="4160520"/>
           </a:xfrm>
           <a:prstGeom prst="rect">
             <a:avLst/>
@@ -3736,7 +3839,7 @@
           <a:lstStyle/>
           <a:p>
             <a:r>
-              <a:rPr lang="en-US" sz="1700" dirty="0">
+              <a:rPr lang="en-US" sz="2100" dirty="0">
                 <a:solidFill>
                   <a:srgbClr val="17364A"/>
                 </a:solidFill>
@@ -3746,11 +3849,11 @@
               </a:rPr>
               <a:t>Generative AI requires staff who can review outputs and manage source accuracy.</a:t>
             </a:r>
-            <a:endParaRPr lang="en-US" sz="1700" dirty="0"/>
-          </a:p>
-          <a:p>
-            <a:r>
-              <a:rPr lang="en-US" sz="1700" dirty="0">
+            <a:endParaRPr lang="en-US" sz="2100" dirty="0"/>
+          </a:p>
+          <a:p>
+            <a:r>
+              <a:rPr lang="en-US" sz="2100" dirty="0">
                 <a:solidFill>
                   <a:srgbClr val="17364A"/>
                 </a:solidFill>
@@ -3760,11 +3863,11 @@
               </a:rPr>
               <a:t>Predictive analytics requires staff who can interpret performance and understand limitations.</a:t>
             </a:r>
-            <a:endParaRPr lang="en-US" sz="1700" dirty="0"/>
-          </a:p>
-          <a:p>
-            <a:r>
-              <a:rPr lang="en-US" sz="1700" dirty="0">
+            <a:endParaRPr lang="en-US" sz="2100" dirty="0"/>
+          </a:p>
+          <a:p>
+            <a:r>
+              <a:rPr lang="en-US" sz="2100" dirty="0">
                 <a:solidFill>
                   <a:srgbClr val="17364A"/>
                 </a:solidFill>
@@ -3774,27 +3877,13 @@
               </a:rPr>
               <a:t>Agentic workflows require staff who can oversee permissions, actions, escalation, and rollback.</a:t>
             </a:r>
-            <a:endParaRPr lang="en-US" sz="1700" dirty="0"/>
-          </a:p>
-          <a:p>
-            <a:r>
-              <a:rPr lang="en-US" sz="1700" dirty="0">
-                <a:solidFill>
-                  <a:srgbClr val="17364A"/>
-                </a:solidFill>
-                <a:latin typeface="Aptos" pitchFamily="34" charset="0"/>
-                <a:ea typeface="Aptos" pitchFamily="34" charset="-122"/>
-                <a:cs typeface="Aptos" pitchFamily="34" charset="-120"/>
-              </a:rPr>
-              <a:t>Workforce strategy should connect each AI type to the roles needed to use it safely.</a:t>
-            </a:r>
-            <a:endParaRPr lang="en-US" sz="1700" dirty="0"/>
-          </a:p>
-        </p:txBody>
-      </p:sp>
-      <p:sp>
-        <p:nvSpPr>
-          <p:cNvPr id="11" name="Shape 9"/>
+            <a:endParaRPr lang="en-US" sz="2100" dirty="0"/>
+          </a:p>
+        </p:txBody>
+      </p:sp>
+      <p:sp>
+        <p:nvSpPr>
+          <p:cNvPr id="12" name="Shape 10"/>
           <p:cNvSpPr/>
           <p:nvPr/>
         </p:nvSpPr>
@@ -3821,14 +3910,14 @@
       </p:sp>
       <p:sp>
         <p:nvSpPr>
-          <p:cNvPr id="12" name="Text 10"/>
+          <p:cNvPr id="13" name="Text 11"/>
           <p:cNvSpPr/>
           <p:nvPr/>
         </p:nvSpPr>
         <p:spPr>
           <a:xfrm>
             <a:off x="8074152" y="1563624"/>
-            <a:ext cx="2825496" cy="201168"/>
+            <a:ext cx="2825496" cy="256032"/>
           </a:xfrm>
           <a:prstGeom prst="rect">
             <a:avLst/>
@@ -3844,7 +3933,7 @@
               <a:buNone/>
             </a:pPr>
             <a:r>
-              <a:rPr lang="en-US" sz="950" b="1" dirty="0">
+              <a:rPr lang="en-US" sz="1300" b="1" dirty="0">
                 <a:solidFill>
                   <a:srgbClr val="0068B7"/>
                 </a:solidFill>
@@ -3854,20 +3943,20 @@
               </a:rPr>
               <a:t>Key idea</a:t>
             </a:r>
-            <a:endParaRPr lang="en-US" sz="950" dirty="0"/>
-          </a:p>
-        </p:txBody>
-      </p:sp>
-      <p:sp>
-        <p:nvSpPr>
-          <p:cNvPr id="13" name="Text 11"/>
-          <p:cNvSpPr/>
-          <p:nvPr/>
-        </p:nvSpPr>
-        <p:spPr>
-          <a:xfrm>
-            <a:off x="8074152" y="1856232"/>
-            <a:ext cx="2825496" cy="1261872"/>
+            <a:endParaRPr lang="en-US" sz="1300" dirty="0"/>
+          </a:p>
+        </p:txBody>
+      </p:sp>
+      <p:sp>
+        <p:nvSpPr>
+          <p:cNvPr id="14" name="Text 12"/>
+          <p:cNvSpPr/>
+          <p:nvPr/>
+        </p:nvSpPr>
+        <p:spPr>
+          <a:xfrm>
+            <a:off x="8074152" y="1920240"/>
+            <a:ext cx="2825496" cy="1188720"/>
           </a:xfrm>
           <a:prstGeom prst="rect">
             <a:avLst/>
@@ -3885,7 +3974,7 @@
               <a:buNone/>
             </a:pPr>
             <a:r>
-              <a:rPr lang="en-US" sz="1250" dirty="0">
+              <a:rPr lang="en-US" sz="1550" dirty="0">
                 <a:solidFill>
                   <a:srgbClr val="17364A"/>
                 </a:solidFill>
@@ -3895,13 +3984,13 @@
               </a:rPr>
               <a:t>Generative AI requires staff who can review outputs and manage source accuracy.</a:t>
             </a:r>
-            <a:endParaRPr lang="en-US" sz="1250" dirty="0"/>
-          </a:p>
-        </p:txBody>
-      </p:sp>
-      <p:sp>
-        <p:nvSpPr>
-          <p:cNvPr id="14" name="Shape 12"/>
+            <a:endParaRPr lang="en-US" sz="1550" dirty="0"/>
+          </a:p>
+        </p:txBody>
+      </p:sp>
+      <p:sp>
+        <p:nvSpPr>
+          <p:cNvPr id="15" name="Shape 13"/>
           <p:cNvSpPr/>
           <p:nvPr/>
         </p:nvSpPr>
@@ -3928,14 +4017,14 @@
       </p:sp>
       <p:sp>
         <p:nvSpPr>
-          <p:cNvPr id="15" name="Text 13"/>
+          <p:cNvPr id="16" name="Text 14"/>
           <p:cNvSpPr/>
           <p:nvPr/>
         </p:nvSpPr>
         <p:spPr>
           <a:xfrm>
             <a:off x="8074152" y="3666744"/>
-            <a:ext cx="2825496" cy="201168"/>
+            <a:ext cx="2825496" cy="256032"/>
           </a:xfrm>
           <a:prstGeom prst="rect">
             <a:avLst/>
@@ -3951,7 +4040,7 @@
               <a:buNone/>
             </a:pPr>
             <a:r>
-              <a:rPr lang="en-US" sz="950" b="1" dirty="0">
+              <a:rPr lang="en-US" sz="1300" b="1" dirty="0">
                 <a:solidFill>
                   <a:srgbClr val="0068B7"/>
                 </a:solidFill>
@@ -3961,20 +4050,20 @@
               </a:rPr>
               <a:t>Use this for</a:t>
             </a:r>
-            <a:endParaRPr lang="en-US" sz="950" dirty="0"/>
-          </a:p>
-        </p:txBody>
-      </p:sp>
-      <p:sp>
-        <p:nvSpPr>
-          <p:cNvPr id="16" name="Text 14"/>
-          <p:cNvSpPr/>
-          <p:nvPr/>
-        </p:nvSpPr>
-        <p:spPr>
-          <a:xfrm>
-            <a:off x="8074152" y="3959352"/>
-            <a:ext cx="2825496" cy="1170432"/>
+            <a:endParaRPr lang="en-US" sz="1300" dirty="0"/>
+          </a:p>
+        </p:txBody>
+      </p:sp>
+      <p:sp>
+        <p:nvSpPr>
+          <p:cNvPr id="17" name="Text 15"/>
+          <p:cNvSpPr/>
+          <p:nvPr/>
+        </p:nvSpPr>
+        <p:spPr>
+          <a:xfrm>
+            <a:off x="8074152" y="4023360"/>
+            <a:ext cx="2825496" cy="1097280"/>
           </a:xfrm>
           <a:prstGeom prst="rect">
             <a:avLst/>
@@ -3992,7 +4081,7 @@
               <a:buNone/>
             </a:pPr>
             <a:r>
-              <a:rPr lang="en-US" sz="1250" dirty="0">
+              <a:rPr lang="en-US" sz="1550" dirty="0">
                 <a:solidFill>
                   <a:srgbClr val="17364A"/>
                 </a:solidFill>
@@ -4002,7 +4091,7 @@
               </a:rPr>
               <a:t>Connect the concept to public health decisions, safeguards, documentation, or implementation work.</a:t>
             </a:r>
-            <a:endParaRPr lang="en-US" sz="1250" dirty="0"/>
+            <a:endParaRPr lang="en-US" sz="1550" dirty="0"/>
           </a:p>
         </p:txBody>
       </p:sp>
@@ -4199,7 +4288,7 @@
                 <a:ea typeface="Aptos" pitchFamily="34" charset="-122"/>
                 <a:cs typeface="Aptos" pitchFamily="34" charset="-120"/>
               </a:rPr>
-              <a:t>© Paula Soper</a:t>
+              <a:t>Â© Paula Soper</a:t>
             </a:r>
             <a:endParaRPr lang="en-US" sz="800" dirty="0"/>
           </a:p>
@@ -4207,7 +4296,46 @@
       </p:sp>
       <p:sp>
         <p:nvSpPr>
-          <p:cNvPr id="7" name="Shape 5"/>
+          <p:cNvPr id="7" name="Text 5"/>
+          <p:cNvSpPr/>
+          <p:nvPr/>
+        </p:nvSpPr>
+        <p:spPr>
+          <a:xfrm>
+            <a:off x="11137392" y="6510528"/>
+            <a:ext cx="411480" cy="201168"/>
+          </a:xfrm>
+          <a:prstGeom prst="rect">
+            <a:avLst/>
+          </a:prstGeom>
+          <a:noFill/>
+          <a:ln/>
+        </p:spPr>
+        <p:txBody>
+          <a:bodyPr wrap="square" lIns="0" tIns="0" rIns="0" bIns="0" rtlCol="0" anchor="ctr"/>
+          <a:lstStyle/>
+          <a:p>
+            <a:pPr algn="r" indent="0" marL="0">
+              <a:buNone/>
+            </a:pPr>
+            <a:r>
+              <a:rPr lang="en-US" sz="900" dirty="0">
+                <a:solidFill>
+                  <a:srgbClr val="5F7181"/>
+                </a:solidFill>
+                <a:latin typeface="Aptos" pitchFamily="34" charset="0"/>
+                <a:ea typeface="Aptos" pitchFamily="34" charset="-122"/>
+                <a:cs typeface="Aptos" pitchFamily="34" charset="-120"/>
+              </a:rPr>
+              <a:t>12</a:t>
+            </a:r>
+            <a:endParaRPr lang="en-US" sz="900" dirty="0"/>
+          </a:p>
+        </p:txBody>
+      </p:sp>
+      <p:sp>
+        <p:nvSpPr>
+          <p:cNvPr id="8" name="Shape 6"/>
           <p:cNvSpPr/>
           <p:nvPr/>
         </p:nvSpPr>
@@ -4232,7 +4360,7 @@
       </p:sp>
       <p:sp>
         <p:nvSpPr>
-          <p:cNvPr id="8" name="Text 6"/>
+          <p:cNvPr id="9" name="Text 7"/>
           <p:cNvSpPr/>
           <p:nvPr/>
         </p:nvSpPr>
@@ -4271,14 +4399,14 @@
       </p:sp>
       <p:sp>
         <p:nvSpPr>
-          <p:cNvPr id="9" name="Text 7"/>
+          <p:cNvPr id="10" name="Text 8"/>
           <p:cNvSpPr/>
           <p:nvPr/>
         </p:nvSpPr>
         <p:spPr>
           <a:xfrm>
             <a:off x="640080" y="621792"/>
-            <a:ext cx="10881360" cy="566928"/>
+            <a:ext cx="10881360" cy="713232"/>
           </a:xfrm>
           <a:prstGeom prst="rect">
             <a:avLst/>
@@ -4296,7 +4424,7 @@
               <a:buNone/>
             </a:pPr>
             <a:r>
-              <a:rPr lang="en-US" sz="2700" b="1" dirty="0">
+              <a:rPr lang="en-US" sz="3400" b="1" dirty="0">
                 <a:solidFill>
                   <a:srgbClr val="003A63"/>
                 </a:solidFill>
@@ -4306,20 +4434,20 @@
               </a:rPr>
               <a:t>Reflection Questions</a:t>
             </a:r>
-            <a:endParaRPr lang="en-US" sz="2700" dirty="0"/>
-          </a:p>
-        </p:txBody>
-      </p:sp>
-      <p:sp>
-        <p:nvSpPr>
-          <p:cNvPr id="10" name="Text 8"/>
-          <p:cNvSpPr/>
-          <p:nvPr/>
-        </p:nvSpPr>
-        <p:spPr>
-          <a:xfrm>
-            <a:off x="868680" y="1417320"/>
-            <a:ext cx="6675120" cy="4434840"/>
+            <a:endParaRPr lang="en-US" sz="3400" dirty="0"/>
+          </a:p>
+        </p:txBody>
+      </p:sp>
+      <p:sp>
+        <p:nvSpPr>
+          <p:cNvPr id="11" name="Text 9"/>
+          <p:cNvSpPr/>
+          <p:nvPr/>
+        </p:nvSpPr>
+        <p:spPr>
+          <a:xfrm>
+            <a:off x="868680" y="1508760"/>
+            <a:ext cx="6537960" cy="4160520"/>
           </a:xfrm>
           <a:prstGeom prst="rect">
             <a:avLst/>
@@ -4334,7 +4462,7 @@
           <a:lstStyle/>
           <a:p>
             <a:r>
-              <a:rPr lang="en-US" sz="1700" dirty="0">
+              <a:rPr lang="en-US" sz="2100" dirty="0">
                 <a:solidFill>
                   <a:srgbClr val="17364A"/>
                 </a:solidFill>
@@ -4342,13 +4470,13 @@
                 <a:ea typeface="Aptos" pitchFamily="34" charset="-122"/>
                 <a:cs typeface="Aptos" pitchFamily="34" charset="-120"/>
               </a:rPr>
-              <a:t>Which current or proposed AI use case in your agency raises this leadership or governance issue most clearly?</a:t>
-            </a:r>
-            <a:endParaRPr lang="en-US" sz="1700" dirty="0"/>
-          </a:p>
-          <a:p>
-            <a:r>
-              <a:rPr lang="en-US" sz="1700" dirty="0">
+              <a:t>Which current or proposed AI use case in your agency raises this leadership or governance issue most.</a:t>
+            </a:r>
+            <a:endParaRPr lang="en-US" sz="2100" dirty="0"/>
+          </a:p>
+          <a:p>
+            <a:r>
+              <a:rPr lang="en-US" sz="2100" dirty="0">
                 <a:solidFill>
                   <a:srgbClr val="17364A"/>
                 </a:solidFill>
@@ -4358,11 +4486,11 @@
               </a:rPr>
               <a:t>Who currently has authority to make decisions about this issue, and is that authority documented?</a:t>
             </a:r>
-            <a:endParaRPr lang="en-US" sz="1700" dirty="0"/>
-          </a:p>
-          <a:p>
-            <a:r>
-              <a:rPr lang="en-US" sz="1700" dirty="0">
+            <a:endParaRPr lang="en-US" sz="2100" dirty="0"/>
+          </a:p>
+          <a:p>
+            <a:r>
+              <a:rPr lang="en-US" sz="2100" dirty="0">
                 <a:solidFill>
                   <a:srgbClr val="17364A"/>
                 </a:solidFill>
@@ -4372,13 +4500,13 @@
               </a:rPr>
               <a:t>What evidence would governance or leadership need before approving the use case?</a:t>
             </a:r>
-            <a:endParaRPr lang="en-US" sz="1700" dirty="0"/>
-          </a:p>
-        </p:txBody>
-      </p:sp>
-      <p:sp>
-        <p:nvSpPr>
-          <p:cNvPr id="11" name="Shape 9"/>
+            <a:endParaRPr lang="en-US" sz="2100" dirty="0"/>
+          </a:p>
+        </p:txBody>
+      </p:sp>
+      <p:sp>
+        <p:nvSpPr>
+          <p:cNvPr id="12" name="Shape 10"/>
           <p:cNvSpPr/>
           <p:nvPr/>
         </p:nvSpPr>
@@ -4405,14 +4533,14 @@
       </p:sp>
       <p:sp>
         <p:nvSpPr>
-          <p:cNvPr id="12" name="Text 10"/>
+          <p:cNvPr id="13" name="Text 11"/>
           <p:cNvSpPr/>
           <p:nvPr/>
         </p:nvSpPr>
         <p:spPr>
           <a:xfrm>
             <a:off x="8074152" y="1563624"/>
-            <a:ext cx="2825496" cy="201168"/>
+            <a:ext cx="2825496" cy="256032"/>
           </a:xfrm>
           <a:prstGeom prst="rect">
             <a:avLst/>
@@ -4428,7 +4556,7 @@
               <a:buNone/>
             </a:pPr>
             <a:r>
-              <a:rPr lang="en-US" sz="950" b="1" dirty="0">
+              <a:rPr lang="en-US" sz="1300" b="1" dirty="0">
                 <a:solidFill>
                   <a:srgbClr val="0068B7"/>
                 </a:solidFill>
@@ -4438,20 +4566,20 @@
               </a:rPr>
               <a:t>Key idea</a:t>
             </a:r>
-            <a:endParaRPr lang="en-US" sz="950" dirty="0"/>
-          </a:p>
-        </p:txBody>
-      </p:sp>
-      <p:sp>
-        <p:nvSpPr>
-          <p:cNvPr id="13" name="Text 11"/>
-          <p:cNvSpPr/>
-          <p:nvPr/>
-        </p:nvSpPr>
-        <p:spPr>
-          <a:xfrm>
-            <a:off x="8074152" y="1856232"/>
-            <a:ext cx="2825496" cy="1261872"/>
+            <a:endParaRPr lang="en-US" sz="1300" dirty="0"/>
+          </a:p>
+        </p:txBody>
+      </p:sp>
+      <p:sp>
+        <p:nvSpPr>
+          <p:cNvPr id="14" name="Text 12"/>
+          <p:cNvSpPr/>
+          <p:nvPr/>
+        </p:nvSpPr>
+        <p:spPr>
+          <a:xfrm>
+            <a:off x="8074152" y="1920240"/>
+            <a:ext cx="2825496" cy="1188720"/>
           </a:xfrm>
           <a:prstGeom prst="rect">
             <a:avLst/>
@@ -4469,7 +4597,7 @@
               <a:buNone/>
             </a:pPr>
             <a:r>
-              <a:rPr lang="en-US" sz="1250" dirty="0">
+              <a:rPr lang="en-US" sz="1550" dirty="0">
                 <a:solidFill>
                   <a:srgbClr val="17364A"/>
                 </a:solidFill>
@@ -4477,15 +4605,15 @@
                 <a:ea typeface="Aptos" pitchFamily="34" charset="-122"/>
                 <a:cs typeface="Aptos" pitchFamily="34" charset="-120"/>
               </a:rPr>
-              <a:t>Which current or proposed AI use case in your agency raises this leadership or governance issue most clearly?</a:t>
-            </a:r>
-            <a:endParaRPr lang="en-US" sz="1250" dirty="0"/>
-          </a:p>
-        </p:txBody>
-      </p:sp>
-      <p:sp>
-        <p:nvSpPr>
-          <p:cNvPr id="14" name="Shape 12"/>
+              <a:t>Which current or proposed AI use case in your agency raises this leadership or governance issue most.</a:t>
+            </a:r>
+            <a:endParaRPr lang="en-US" sz="1550" dirty="0"/>
+          </a:p>
+        </p:txBody>
+      </p:sp>
+      <p:sp>
+        <p:nvSpPr>
+          <p:cNvPr id="15" name="Shape 13"/>
           <p:cNvSpPr/>
           <p:nvPr/>
         </p:nvSpPr>
@@ -4512,14 +4640,14 @@
       </p:sp>
       <p:sp>
         <p:nvSpPr>
-          <p:cNvPr id="15" name="Text 13"/>
+          <p:cNvPr id="16" name="Text 14"/>
           <p:cNvSpPr/>
           <p:nvPr/>
         </p:nvSpPr>
         <p:spPr>
           <a:xfrm>
             <a:off x="8074152" y="3666744"/>
-            <a:ext cx="2825496" cy="201168"/>
+            <a:ext cx="2825496" cy="256032"/>
           </a:xfrm>
           <a:prstGeom prst="rect">
             <a:avLst/>
@@ -4535,7 +4663,7 @@
               <a:buNone/>
             </a:pPr>
             <a:r>
-              <a:rPr lang="en-US" sz="950" b="1" dirty="0">
+              <a:rPr lang="en-US" sz="1300" b="1" dirty="0">
                 <a:solidFill>
                   <a:srgbClr val="0068B7"/>
                 </a:solidFill>
@@ -4545,20 +4673,20 @@
               </a:rPr>
               <a:t>Use this for</a:t>
             </a:r>
-            <a:endParaRPr lang="en-US" sz="950" dirty="0"/>
-          </a:p>
-        </p:txBody>
-      </p:sp>
-      <p:sp>
-        <p:nvSpPr>
-          <p:cNvPr id="16" name="Text 14"/>
-          <p:cNvSpPr/>
-          <p:nvPr/>
-        </p:nvSpPr>
-        <p:spPr>
-          <a:xfrm>
-            <a:off x="8074152" y="3959352"/>
-            <a:ext cx="2825496" cy="1170432"/>
+            <a:endParaRPr lang="en-US" sz="1300" dirty="0"/>
+          </a:p>
+        </p:txBody>
+      </p:sp>
+      <p:sp>
+        <p:nvSpPr>
+          <p:cNvPr id="17" name="Text 15"/>
+          <p:cNvSpPr/>
+          <p:nvPr/>
+        </p:nvSpPr>
+        <p:spPr>
+          <a:xfrm>
+            <a:off x="8074152" y="4023360"/>
+            <a:ext cx="2825496" cy="1097280"/>
           </a:xfrm>
           <a:prstGeom prst="rect">
             <a:avLst/>
@@ -4576,7 +4704,7 @@
               <a:buNone/>
             </a:pPr>
             <a:r>
-              <a:rPr lang="en-US" sz="1250" dirty="0">
+              <a:rPr lang="en-US" sz="1550" dirty="0">
                 <a:solidFill>
                   <a:srgbClr val="17364A"/>
                 </a:solidFill>
@@ -4586,7 +4714,7 @@
               </a:rPr>
               <a:t>Connect the concept to public health decisions, safeguards, documentation, or implementation work.</a:t>
             </a:r>
-            <a:endParaRPr lang="en-US" sz="1250" dirty="0"/>
+            <a:endParaRPr lang="en-US" sz="1550" dirty="0"/>
           </a:p>
         </p:txBody>
       </p:sp>
@@ -4783,7 +4911,7 @@
                 <a:ea typeface="Aptos" pitchFamily="34" charset="-122"/>
                 <a:cs typeface="Aptos" pitchFamily="34" charset="-120"/>
               </a:rPr>
-              <a:t>© Paula Soper</a:t>
+              <a:t>Â© Paula Soper</a:t>
             </a:r>
             <a:endParaRPr lang="en-US" sz="800" dirty="0"/>
           </a:p>
@@ -4797,8 +4925,47 @@
         </p:nvSpPr>
         <p:spPr>
           <a:xfrm>
+            <a:off x="11137392" y="6510528"/>
+            <a:ext cx="411480" cy="201168"/>
+          </a:xfrm>
+          <a:prstGeom prst="rect">
+            <a:avLst/>
+          </a:prstGeom>
+          <a:noFill/>
+          <a:ln/>
+        </p:spPr>
+        <p:txBody>
+          <a:bodyPr wrap="square" lIns="0" tIns="0" rIns="0" bIns="0" rtlCol="0" anchor="ctr"/>
+          <a:lstStyle/>
+          <a:p>
+            <a:pPr algn="r" indent="0" marL="0">
+              <a:buNone/>
+            </a:pPr>
+            <a:r>
+              <a:rPr lang="en-US" sz="900" dirty="0">
+                <a:solidFill>
+                  <a:srgbClr val="5F7181"/>
+                </a:solidFill>
+                <a:latin typeface="Aptos" pitchFamily="34" charset="0"/>
+                <a:ea typeface="Aptos" pitchFamily="34" charset="-122"/>
+                <a:cs typeface="Aptos" pitchFamily="34" charset="-120"/>
+              </a:rPr>
+              <a:t>13</a:t>
+            </a:r>
+            <a:endParaRPr lang="en-US" sz="900" dirty="0"/>
+          </a:p>
+        </p:txBody>
+      </p:sp>
+      <p:sp>
+        <p:nvSpPr>
+          <p:cNvPr id="8" name="Text 6"/>
+          <p:cNvSpPr/>
+          <p:nvPr/>
+        </p:nvSpPr>
+        <p:spPr>
+          <a:xfrm>
             <a:off x="640080" y="658368"/>
-            <a:ext cx="10881360" cy="566928"/>
+            <a:ext cx="10881360" cy="713232"/>
           </a:xfrm>
           <a:prstGeom prst="rect">
             <a:avLst/>
@@ -4816,7 +4983,7 @@
               <a:buNone/>
             </a:pPr>
             <a:r>
-              <a:rPr lang="en-US" sz="2700" b="1" dirty="0">
+              <a:rPr lang="en-US" sz="3400" b="1" dirty="0">
                 <a:solidFill>
                   <a:srgbClr val="003A63"/>
                 </a:solidFill>
@@ -4826,20 +4993,20 @@
               </a:rPr>
               <a:t>Reflection Questions Continued</a:t>
             </a:r>
-            <a:endParaRPr lang="en-US" sz="2700" dirty="0"/>
-          </a:p>
-        </p:txBody>
-      </p:sp>
-      <p:sp>
-        <p:nvSpPr>
-          <p:cNvPr id="8" name="Text 6"/>
-          <p:cNvSpPr/>
-          <p:nvPr/>
-        </p:nvSpPr>
-        <p:spPr>
-          <a:xfrm>
-            <a:off x="868680" y="1417320"/>
-            <a:ext cx="6675120" cy="4434840"/>
+            <a:endParaRPr lang="en-US" sz="3400" dirty="0"/>
+          </a:p>
+        </p:txBody>
+      </p:sp>
+      <p:sp>
+        <p:nvSpPr>
+          <p:cNvPr id="9" name="Text 7"/>
+          <p:cNvSpPr/>
+          <p:nvPr/>
+        </p:nvSpPr>
+        <p:spPr>
+          <a:xfrm>
+            <a:off x="868680" y="1508760"/>
+            <a:ext cx="6537960" cy="4160520"/>
           </a:xfrm>
           <a:prstGeom prst="rect">
             <a:avLst/>
@@ -4854,7 +5021,7 @@
           <a:lstStyle/>
           <a:p>
             <a:r>
-              <a:rPr lang="en-US" sz="1700" dirty="0">
+              <a:rPr lang="en-US" sz="2100" dirty="0">
                 <a:solidFill>
                   <a:srgbClr val="17364A"/>
                 </a:solidFill>
@@ -4864,11 +5031,11 @@
               </a:rPr>
               <a:t>Which staff, partners, or communities would be affected if this issue were handled poorly?</a:t>
             </a:r>
-            <a:endParaRPr lang="en-US" sz="1700" dirty="0"/>
-          </a:p>
-          <a:p>
-            <a:r>
-              <a:rPr lang="en-US" sz="1700" dirty="0">
+            <a:endParaRPr lang="en-US" sz="2100" dirty="0"/>
+          </a:p>
+          <a:p>
+            <a:r>
+              <a:rPr lang="en-US" sz="2100" dirty="0">
                 <a:solidFill>
                   <a:srgbClr val="17364A"/>
                 </a:solidFill>
@@ -4878,13 +5045,13 @@
               </a:rPr>
               <a:t>What policy, process, or artifact should be created or updated after this module?</a:t>
             </a:r>
-            <a:endParaRPr lang="en-US" sz="1700" dirty="0"/>
-          </a:p>
-        </p:txBody>
-      </p:sp>
-      <p:sp>
-        <p:nvSpPr>
-          <p:cNvPr id="9" name="Shape 7"/>
+            <a:endParaRPr lang="en-US" sz="2100" dirty="0"/>
+          </a:p>
+        </p:txBody>
+      </p:sp>
+      <p:sp>
+        <p:nvSpPr>
+          <p:cNvPr id="10" name="Shape 8"/>
           <p:cNvSpPr/>
           <p:nvPr/>
         </p:nvSpPr>
@@ -4911,14 +5078,14 @@
       </p:sp>
       <p:sp>
         <p:nvSpPr>
-          <p:cNvPr id="10" name="Text 8"/>
+          <p:cNvPr id="11" name="Text 9"/>
           <p:cNvSpPr/>
           <p:nvPr/>
         </p:nvSpPr>
         <p:spPr>
           <a:xfrm>
             <a:off x="8074152" y="1563624"/>
-            <a:ext cx="2825496" cy="201168"/>
+            <a:ext cx="2825496" cy="256032"/>
           </a:xfrm>
           <a:prstGeom prst="rect">
             <a:avLst/>
@@ -4934,7 +5101,7 @@
               <a:buNone/>
             </a:pPr>
             <a:r>
-              <a:rPr lang="en-US" sz="950" b="1" dirty="0">
+              <a:rPr lang="en-US" sz="1300" b="1" dirty="0">
                 <a:solidFill>
                   <a:srgbClr val="0068B7"/>
                 </a:solidFill>
@@ -4944,20 +5111,20 @@
               </a:rPr>
               <a:t>Key idea</a:t>
             </a:r>
-            <a:endParaRPr lang="en-US" sz="950" dirty="0"/>
-          </a:p>
-        </p:txBody>
-      </p:sp>
-      <p:sp>
-        <p:nvSpPr>
-          <p:cNvPr id="11" name="Text 9"/>
-          <p:cNvSpPr/>
-          <p:nvPr/>
-        </p:nvSpPr>
-        <p:spPr>
-          <a:xfrm>
-            <a:off x="8074152" y="1856232"/>
-            <a:ext cx="2825496" cy="1261872"/>
+            <a:endParaRPr lang="en-US" sz="1300" dirty="0"/>
+          </a:p>
+        </p:txBody>
+      </p:sp>
+      <p:sp>
+        <p:nvSpPr>
+          <p:cNvPr id="12" name="Text 10"/>
+          <p:cNvSpPr/>
+          <p:nvPr/>
+        </p:nvSpPr>
+        <p:spPr>
+          <a:xfrm>
+            <a:off x="8074152" y="1920240"/>
+            <a:ext cx="2825496" cy="1188720"/>
           </a:xfrm>
           <a:prstGeom prst="rect">
             <a:avLst/>
@@ -4975,7 +5142,7 @@
               <a:buNone/>
             </a:pPr>
             <a:r>
-              <a:rPr lang="en-US" sz="1250" dirty="0">
+              <a:rPr lang="en-US" sz="1550" dirty="0">
                 <a:solidFill>
                   <a:srgbClr val="17364A"/>
                 </a:solidFill>
@@ -4985,13 +5152,13 @@
               </a:rPr>
               <a:t>Which staff, partners, or communities would be affected if this issue were handled poorly?</a:t>
             </a:r>
-            <a:endParaRPr lang="en-US" sz="1250" dirty="0"/>
-          </a:p>
-        </p:txBody>
-      </p:sp>
-      <p:sp>
-        <p:nvSpPr>
-          <p:cNvPr id="12" name="Shape 10"/>
+            <a:endParaRPr lang="en-US" sz="1550" dirty="0"/>
+          </a:p>
+        </p:txBody>
+      </p:sp>
+      <p:sp>
+        <p:nvSpPr>
+          <p:cNvPr id="13" name="Shape 11"/>
           <p:cNvSpPr/>
           <p:nvPr/>
         </p:nvSpPr>
@@ -5018,14 +5185,14 @@
       </p:sp>
       <p:sp>
         <p:nvSpPr>
-          <p:cNvPr id="13" name="Text 11"/>
+          <p:cNvPr id="14" name="Text 12"/>
           <p:cNvSpPr/>
           <p:nvPr/>
         </p:nvSpPr>
         <p:spPr>
           <a:xfrm>
             <a:off x="8074152" y="3666744"/>
-            <a:ext cx="2825496" cy="201168"/>
+            <a:ext cx="2825496" cy="256032"/>
           </a:xfrm>
           <a:prstGeom prst="rect">
             <a:avLst/>
@@ -5041,7 +5208,7 @@
               <a:buNone/>
             </a:pPr>
             <a:r>
-              <a:rPr lang="en-US" sz="950" b="1" dirty="0">
+              <a:rPr lang="en-US" sz="1300" b="1" dirty="0">
                 <a:solidFill>
                   <a:srgbClr val="0068B7"/>
                 </a:solidFill>
@@ -5051,20 +5218,20 @@
               </a:rPr>
               <a:t>Use this for</a:t>
             </a:r>
-            <a:endParaRPr lang="en-US" sz="950" dirty="0"/>
-          </a:p>
-        </p:txBody>
-      </p:sp>
-      <p:sp>
-        <p:nvSpPr>
-          <p:cNvPr id="14" name="Text 12"/>
-          <p:cNvSpPr/>
-          <p:nvPr/>
-        </p:nvSpPr>
-        <p:spPr>
-          <a:xfrm>
-            <a:off x="8074152" y="3959352"/>
-            <a:ext cx="2825496" cy="1170432"/>
+            <a:endParaRPr lang="en-US" sz="1300" dirty="0"/>
+          </a:p>
+        </p:txBody>
+      </p:sp>
+      <p:sp>
+        <p:nvSpPr>
+          <p:cNvPr id="15" name="Text 13"/>
+          <p:cNvSpPr/>
+          <p:nvPr/>
+        </p:nvSpPr>
+        <p:spPr>
+          <a:xfrm>
+            <a:off x="8074152" y="4023360"/>
+            <a:ext cx="2825496" cy="1097280"/>
           </a:xfrm>
           <a:prstGeom prst="rect">
             <a:avLst/>
@@ -5082,7 +5249,7 @@
               <a:buNone/>
             </a:pPr>
             <a:r>
-              <a:rPr lang="en-US" sz="1250" dirty="0">
+              <a:rPr lang="en-US" sz="1550" dirty="0">
                 <a:solidFill>
                   <a:srgbClr val="17364A"/>
                 </a:solidFill>
@@ -5092,7 +5259,7 @@
               </a:rPr>
               <a:t>Connect the concept to public health decisions, safeguards, documentation, or implementation work.</a:t>
             </a:r>
-            <a:endParaRPr lang="en-US" sz="1250" dirty="0"/>
+            <a:endParaRPr lang="en-US" sz="1550" dirty="0"/>
           </a:p>
         </p:txBody>
       </p:sp>
@@ -5289,7 +5456,7 @@
                 <a:ea typeface="Aptos" pitchFamily="34" charset="-122"/>
                 <a:cs typeface="Aptos" pitchFamily="34" charset="-120"/>
               </a:rPr>
-              <a:t>© Paula Soper</a:t>
+              <a:t>Â© Paula Soper</a:t>
             </a:r>
             <a:endParaRPr lang="en-US" sz="800" dirty="0"/>
           </a:p>
@@ -5297,7 +5464,46 @@
       </p:sp>
       <p:sp>
         <p:nvSpPr>
-          <p:cNvPr id="7" name="Shape 5"/>
+          <p:cNvPr id="7" name="Text 5"/>
+          <p:cNvSpPr/>
+          <p:nvPr/>
+        </p:nvSpPr>
+        <p:spPr>
+          <a:xfrm>
+            <a:off x="11137392" y="6510528"/>
+            <a:ext cx="411480" cy="201168"/>
+          </a:xfrm>
+          <a:prstGeom prst="rect">
+            <a:avLst/>
+          </a:prstGeom>
+          <a:noFill/>
+          <a:ln/>
+        </p:spPr>
+        <p:txBody>
+          <a:bodyPr wrap="square" lIns="0" tIns="0" rIns="0" bIns="0" rtlCol="0" anchor="ctr"/>
+          <a:lstStyle/>
+          <a:p>
+            <a:pPr algn="r" indent="0" marL="0">
+              <a:buNone/>
+            </a:pPr>
+            <a:r>
+              <a:rPr lang="en-US" sz="900" dirty="0">
+                <a:solidFill>
+                  <a:srgbClr val="5F7181"/>
+                </a:solidFill>
+                <a:latin typeface="Aptos" pitchFamily="34" charset="0"/>
+                <a:ea typeface="Aptos" pitchFamily="34" charset="-122"/>
+                <a:cs typeface="Aptos" pitchFamily="34" charset="-120"/>
+              </a:rPr>
+              <a:t>14</a:t>
+            </a:r>
+            <a:endParaRPr lang="en-US" sz="900" dirty="0"/>
+          </a:p>
+        </p:txBody>
+      </p:sp>
+      <p:sp>
+        <p:nvSpPr>
+          <p:cNvPr id="8" name="Shape 6"/>
           <p:cNvSpPr/>
           <p:nvPr/>
         </p:nvSpPr>
@@ -5322,7 +5528,7 @@
       </p:sp>
       <p:sp>
         <p:nvSpPr>
-          <p:cNvPr id="8" name="Text 6"/>
+          <p:cNvPr id="9" name="Text 7"/>
           <p:cNvSpPr/>
           <p:nvPr/>
         </p:nvSpPr>
@@ -5361,14 +5567,14 @@
       </p:sp>
       <p:sp>
         <p:nvSpPr>
-          <p:cNvPr id="9" name="Text 7"/>
+          <p:cNvPr id="10" name="Text 8"/>
           <p:cNvSpPr/>
           <p:nvPr/>
         </p:nvSpPr>
         <p:spPr>
           <a:xfrm>
             <a:off x="640080" y="621792"/>
-            <a:ext cx="10881360" cy="566928"/>
+            <a:ext cx="10881360" cy="713232"/>
           </a:xfrm>
           <a:prstGeom prst="rect">
             <a:avLst/>
@@ -5386,7 +5592,7 @@
               <a:buNone/>
             </a:pPr>
             <a:r>
-              <a:rPr lang="en-US" sz="2700" b="1" dirty="0">
+              <a:rPr lang="en-US" sz="3400" b="1" dirty="0">
                 <a:solidFill>
                   <a:srgbClr val="003A63"/>
                 </a:solidFill>
@@ -5396,20 +5602,20 @@
               </a:rPr>
               <a:t>Practical Exercise</a:t>
             </a:r>
-            <a:endParaRPr lang="en-US" sz="2700" dirty="0"/>
-          </a:p>
-        </p:txBody>
-      </p:sp>
-      <p:sp>
-        <p:nvSpPr>
-          <p:cNvPr id="10" name="Text 8"/>
-          <p:cNvSpPr/>
-          <p:nvPr/>
-        </p:nvSpPr>
-        <p:spPr>
-          <a:xfrm>
-            <a:off x="868680" y="1417320"/>
-            <a:ext cx="6675120" cy="4434840"/>
+            <a:endParaRPr lang="en-US" sz="3400" dirty="0"/>
+          </a:p>
+        </p:txBody>
+      </p:sp>
+      <p:sp>
+        <p:nvSpPr>
+          <p:cNvPr id="11" name="Text 9"/>
+          <p:cNvSpPr/>
+          <p:nvPr/>
+        </p:nvSpPr>
+        <p:spPr>
+          <a:xfrm>
+            <a:off x="868680" y="1508760"/>
+            <a:ext cx="6537960" cy="4160520"/>
           </a:xfrm>
           <a:prstGeom prst="rect">
             <a:avLst/>
@@ -5424,7 +5630,7 @@
           <a:lstStyle/>
           <a:p>
             <a:r>
-              <a:rPr lang="en-US" sz="1700" dirty="0">
+              <a:rPr lang="en-US" sz="2100" dirty="0">
                 <a:solidFill>
                   <a:srgbClr val="17364A"/>
                 </a:solidFill>
@@ -5434,11 +5640,11 @@
               </a:rPr>
               <a:t>Create a role-based AI workforce readiness plan.</a:t>
             </a:r>
-            <a:endParaRPr lang="en-US" sz="1700" dirty="0"/>
-          </a:p>
-          <a:p>
-            <a:r>
-              <a:rPr lang="en-US" sz="1700" dirty="0">
+            <a:endParaRPr lang="en-US" sz="2100" dirty="0"/>
+          </a:p>
+          <a:p>
+            <a:r>
+              <a:rPr lang="en-US" sz="2100" dirty="0">
                 <a:solidFill>
                   <a:srgbClr val="17364A"/>
                 </a:solidFill>
@@ -5446,15 +5652,15 @@
                 <a:ea typeface="Aptos" pitchFamily="34" charset="-122"/>
                 <a:cs typeface="Aptos" pitchFamily="34" charset="-120"/>
               </a:rPr>
-              <a:t>Include role groups, competencies, required training, responsibilities, decision authority, and support needs.</a:t>
-            </a:r>
-            <a:endParaRPr lang="en-US" sz="1700" dirty="0"/>
-          </a:p>
-        </p:txBody>
-      </p:sp>
-      <p:sp>
-        <p:nvSpPr>
-          <p:cNvPr id="11" name="Shape 9"/>
+              <a:t>Include role groups, competencies, required training, responsibilities, decision authority, and support.</a:t>
+            </a:r>
+            <a:endParaRPr lang="en-US" sz="2100" dirty="0"/>
+          </a:p>
+        </p:txBody>
+      </p:sp>
+      <p:sp>
+        <p:nvSpPr>
+          <p:cNvPr id="12" name="Shape 10"/>
           <p:cNvSpPr/>
           <p:nvPr/>
         </p:nvSpPr>
@@ -5481,14 +5687,14 @@
       </p:sp>
       <p:sp>
         <p:nvSpPr>
-          <p:cNvPr id="12" name="Text 10"/>
+          <p:cNvPr id="13" name="Text 11"/>
           <p:cNvSpPr/>
           <p:nvPr/>
         </p:nvSpPr>
         <p:spPr>
           <a:xfrm>
             <a:off x="8074152" y="1563624"/>
-            <a:ext cx="2825496" cy="201168"/>
+            <a:ext cx="2825496" cy="256032"/>
           </a:xfrm>
           <a:prstGeom prst="rect">
             <a:avLst/>
@@ -5504,7 +5710,7 @@
               <a:buNone/>
             </a:pPr>
             <a:r>
-              <a:rPr lang="en-US" sz="950" b="1" dirty="0">
+              <a:rPr lang="en-US" sz="1300" b="1" dirty="0">
                 <a:solidFill>
                   <a:srgbClr val="0068B7"/>
                 </a:solidFill>
@@ -5514,20 +5720,20 @@
               </a:rPr>
               <a:t>Key idea</a:t>
             </a:r>
-            <a:endParaRPr lang="en-US" sz="950" dirty="0"/>
-          </a:p>
-        </p:txBody>
-      </p:sp>
-      <p:sp>
-        <p:nvSpPr>
-          <p:cNvPr id="13" name="Text 11"/>
-          <p:cNvSpPr/>
-          <p:nvPr/>
-        </p:nvSpPr>
-        <p:spPr>
-          <a:xfrm>
-            <a:off x="8074152" y="1856232"/>
-            <a:ext cx="2825496" cy="1261872"/>
+            <a:endParaRPr lang="en-US" sz="1300" dirty="0"/>
+          </a:p>
+        </p:txBody>
+      </p:sp>
+      <p:sp>
+        <p:nvSpPr>
+          <p:cNvPr id="14" name="Text 12"/>
+          <p:cNvSpPr/>
+          <p:nvPr/>
+        </p:nvSpPr>
+        <p:spPr>
+          <a:xfrm>
+            <a:off x="8074152" y="1920240"/>
+            <a:ext cx="2825496" cy="1188720"/>
           </a:xfrm>
           <a:prstGeom prst="rect">
             <a:avLst/>
@@ -5545,7 +5751,7 @@
               <a:buNone/>
             </a:pPr>
             <a:r>
-              <a:rPr lang="en-US" sz="1250" dirty="0">
+              <a:rPr lang="en-US" sz="1550" dirty="0">
                 <a:solidFill>
                   <a:srgbClr val="17364A"/>
                 </a:solidFill>
@@ -5555,13 +5761,13 @@
               </a:rPr>
               <a:t>Create a role-based AI workforce readiness plan.</a:t>
             </a:r>
-            <a:endParaRPr lang="en-US" sz="1250" dirty="0"/>
-          </a:p>
-        </p:txBody>
-      </p:sp>
-      <p:sp>
-        <p:nvSpPr>
-          <p:cNvPr id="14" name="Shape 12"/>
+            <a:endParaRPr lang="en-US" sz="1550" dirty="0"/>
+          </a:p>
+        </p:txBody>
+      </p:sp>
+      <p:sp>
+        <p:nvSpPr>
+          <p:cNvPr id="15" name="Shape 13"/>
           <p:cNvSpPr/>
           <p:nvPr/>
         </p:nvSpPr>
@@ -5588,14 +5794,14 @@
       </p:sp>
       <p:sp>
         <p:nvSpPr>
-          <p:cNvPr id="15" name="Text 13"/>
+          <p:cNvPr id="16" name="Text 14"/>
           <p:cNvSpPr/>
           <p:nvPr/>
         </p:nvSpPr>
         <p:spPr>
           <a:xfrm>
             <a:off x="8074152" y="3666744"/>
-            <a:ext cx="2825496" cy="201168"/>
+            <a:ext cx="2825496" cy="256032"/>
           </a:xfrm>
           <a:prstGeom prst="rect">
             <a:avLst/>
@@ -5611,7 +5817,7 @@
               <a:buNone/>
             </a:pPr>
             <a:r>
-              <a:rPr lang="en-US" sz="950" b="1" dirty="0">
+              <a:rPr lang="en-US" sz="1300" b="1" dirty="0">
                 <a:solidFill>
                   <a:srgbClr val="0068B7"/>
                 </a:solidFill>
@@ -5621,20 +5827,20 @@
               </a:rPr>
               <a:t>Use this for</a:t>
             </a:r>
-            <a:endParaRPr lang="en-US" sz="950" dirty="0"/>
-          </a:p>
-        </p:txBody>
-      </p:sp>
-      <p:sp>
-        <p:nvSpPr>
-          <p:cNvPr id="16" name="Text 14"/>
-          <p:cNvSpPr/>
-          <p:nvPr/>
-        </p:nvSpPr>
-        <p:spPr>
-          <a:xfrm>
-            <a:off x="8074152" y="3959352"/>
-            <a:ext cx="2825496" cy="1170432"/>
+            <a:endParaRPr lang="en-US" sz="1300" dirty="0"/>
+          </a:p>
+        </p:txBody>
+      </p:sp>
+      <p:sp>
+        <p:nvSpPr>
+          <p:cNvPr id="17" name="Text 15"/>
+          <p:cNvSpPr/>
+          <p:nvPr/>
+        </p:nvSpPr>
+        <p:spPr>
+          <a:xfrm>
+            <a:off x="8074152" y="4023360"/>
+            <a:ext cx="2825496" cy="1097280"/>
           </a:xfrm>
           <a:prstGeom prst="rect">
             <a:avLst/>
@@ -5652,7 +5858,7 @@
               <a:buNone/>
             </a:pPr>
             <a:r>
-              <a:rPr lang="en-US" sz="1250" dirty="0">
+              <a:rPr lang="en-US" sz="1550" dirty="0">
                 <a:solidFill>
                   <a:srgbClr val="17364A"/>
                 </a:solidFill>
@@ -5662,7 +5868,7 @@
               </a:rPr>
               <a:t>Connect the concept to public health decisions, safeguards, documentation, or implementation work.</a:t>
             </a:r>
-            <a:endParaRPr lang="en-US" sz="1250" dirty="0"/>
+            <a:endParaRPr lang="en-US" sz="1550" dirty="0"/>
           </a:p>
         </p:txBody>
       </p:sp>
@@ -5859,7 +6065,7 @@
                 <a:ea typeface="Aptos" pitchFamily="34" charset="-122"/>
                 <a:cs typeface="Aptos" pitchFamily="34" charset="-120"/>
               </a:rPr>
-              <a:t>© Paula Soper</a:t>
+              <a:t>Â© Paula Soper</a:t>
             </a:r>
             <a:endParaRPr lang="en-US" sz="800" dirty="0"/>
           </a:p>
@@ -5867,7 +6073,46 @@
       </p:sp>
       <p:sp>
         <p:nvSpPr>
-          <p:cNvPr id="7" name="Shape 5"/>
+          <p:cNvPr id="7" name="Text 5"/>
+          <p:cNvSpPr/>
+          <p:nvPr/>
+        </p:nvSpPr>
+        <p:spPr>
+          <a:xfrm>
+            <a:off x="11137392" y="6510528"/>
+            <a:ext cx="411480" cy="201168"/>
+          </a:xfrm>
+          <a:prstGeom prst="rect">
+            <a:avLst/>
+          </a:prstGeom>
+          <a:noFill/>
+          <a:ln/>
+        </p:spPr>
+        <p:txBody>
+          <a:bodyPr wrap="square" lIns="0" tIns="0" rIns="0" bIns="0" rtlCol="0" anchor="ctr"/>
+          <a:lstStyle/>
+          <a:p>
+            <a:pPr algn="r" indent="0" marL="0">
+              <a:buNone/>
+            </a:pPr>
+            <a:r>
+              <a:rPr lang="en-US" sz="900" dirty="0">
+                <a:solidFill>
+                  <a:srgbClr val="5F7181"/>
+                </a:solidFill>
+                <a:latin typeface="Aptos" pitchFamily="34" charset="0"/>
+                <a:ea typeface="Aptos" pitchFamily="34" charset="-122"/>
+                <a:cs typeface="Aptos" pitchFamily="34" charset="-120"/>
+              </a:rPr>
+              <a:t>15</a:t>
+            </a:r>
+            <a:endParaRPr lang="en-US" sz="900" dirty="0"/>
+          </a:p>
+        </p:txBody>
+      </p:sp>
+      <p:sp>
+        <p:nvSpPr>
+          <p:cNvPr id="8" name="Shape 6"/>
           <p:cNvSpPr/>
           <p:nvPr/>
         </p:nvSpPr>
@@ -5892,7 +6137,7 @@
       </p:sp>
       <p:sp>
         <p:nvSpPr>
-          <p:cNvPr id="8" name="Text 6"/>
+          <p:cNvPr id="9" name="Text 7"/>
           <p:cNvSpPr/>
           <p:nvPr/>
         </p:nvSpPr>
@@ -5931,14 +6176,14 @@
       </p:sp>
       <p:sp>
         <p:nvSpPr>
-          <p:cNvPr id="9" name="Text 7"/>
+          <p:cNvPr id="10" name="Text 8"/>
           <p:cNvSpPr/>
           <p:nvPr/>
         </p:nvSpPr>
         <p:spPr>
           <a:xfrm>
             <a:off x="640080" y="621792"/>
-            <a:ext cx="10881360" cy="566928"/>
+            <a:ext cx="10881360" cy="713232"/>
           </a:xfrm>
           <a:prstGeom prst="rect">
             <a:avLst/>
@@ -5956,7 +6201,7 @@
               <a:buNone/>
             </a:pPr>
             <a:r>
-              <a:rPr lang="en-US" sz="2700" b="1" dirty="0">
+              <a:rPr lang="en-US" sz="3400" b="1" dirty="0">
                 <a:solidFill>
                   <a:srgbClr val="003A63"/>
                 </a:solidFill>
@@ -5966,20 +6211,20 @@
               </a:rPr>
               <a:t>Before You Begin</a:t>
             </a:r>
-            <a:endParaRPr lang="en-US" sz="2700" dirty="0"/>
-          </a:p>
-        </p:txBody>
-      </p:sp>
-      <p:sp>
-        <p:nvSpPr>
-          <p:cNvPr id="10" name="Text 8"/>
-          <p:cNvSpPr/>
-          <p:nvPr/>
-        </p:nvSpPr>
-        <p:spPr>
-          <a:xfrm>
-            <a:off x="868680" y="1417320"/>
-            <a:ext cx="6675120" cy="4434840"/>
+            <a:endParaRPr lang="en-US" sz="3400" dirty="0"/>
+          </a:p>
+        </p:txBody>
+      </p:sp>
+      <p:sp>
+        <p:nvSpPr>
+          <p:cNvPr id="11" name="Text 9"/>
+          <p:cNvSpPr/>
+          <p:nvPr/>
+        </p:nvSpPr>
+        <p:spPr>
+          <a:xfrm>
+            <a:off x="868680" y="1508760"/>
+            <a:ext cx="6537960" cy="4160520"/>
           </a:xfrm>
           <a:prstGeom prst="rect">
             <a:avLst/>
@@ -5994,7 +6239,7 @@
           <a:lstStyle/>
           <a:p>
             <a:r>
-              <a:rPr lang="en-US" sz="1700" dirty="0">
+              <a:rPr lang="en-US" sz="2100" dirty="0">
                 <a:solidFill>
                   <a:srgbClr val="17364A"/>
                 </a:solidFill>
@@ -6004,11 +6249,11 @@
               </a:rPr>
               <a:t>Choose a real or realistic public health AI use case.</a:t>
             </a:r>
-            <a:endParaRPr lang="en-US" sz="1700" dirty="0"/>
-          </a:p>
-          <a:p>
-            <a:r>
-              <a:rPr lang="en-US" sz="1700" dirty="0">
+            <a:endParaRPr lang="en-US" sz="2100" dirty="0"/>
+          </a:p>
+          <a:p>
+            <a:r>
+              <a:rPr lang="en-US" sz="2100" dirty="0">
                 <a:solidFill>
                   <a:srgbClr val="17364A"/>
                 </a:solidFill>
@@ -6016,13 +6261,13 @@
                 <a:ea typeface="Aptos" pitchFamily="34" charset="-122"/>
                 <a:cs typeface="Aptos" pitchFamily="34" charset="-120"/>
               </a:rPr>
-              <a:t>Document assumptions, unresolved questions, and which agency roles would need to review the artifact before it is adopted.</a:t>
-            </a:r>
-            <a:endParaRPr lang="en-US" sz="1700" dirty="0"/>
-          </a:p>
-          <a:p>
-            <a:r>
-              <a:rPr lang="en-US" sz="1700" dirty="0">
+              <a:t>Document assumptions, unresolved questions, and which agency roles would need to review the artifact.</a:t>
+            </a:r>
+            <a:endParaRPr lang="en-US" sz="2100" dirty="0"/>
+          </a:p>
+          <a:p>
+            <a:r>
+              <a:rPr lang="en-US" sz="2100" dirty="0">
                 <a:solidFill>
                   <a:srgbClr val="17364A"/>
                 </a:solidFill>
@@ -6030,15 +6275,15 @@
                 <a:ea typeface="Aptos" pitchFamily="34" charset="-122"/>
                 <a:cs typeface="Aptos" pitchFamily="34" charset="-120"/>
               </a:rPr>
-              <a:t>The exercise should produce a work product that could support governance review, leadership discussion, implementation.</a:t>
-            </a:r>
-            <a:endParaRPr lang="en-US" sz="1700" dirty="0"/>
-          </a:p>
-        </p:txBody>
-      </p:sp>
-      <p:sp>
-        <p:nvSpPr>
-          <p:cNvPr id="11" name="Shape 9"/>
+              <a:t>The exercise should produce a work product that could support governance review, leadership discussion,.</a:t>
+            </a:r>
+            <a:endParaRPr lang="en-US" sz="2100" dirty="0"/>
+          </a:p>
+        </p:txBody>
+      </p:sp>
+      <p:sp>
+        <p:nvSpPr>
+          <p:cNvPr id="12" name="Shape 10"/>
           <p:cNvSpPr/>
           <p:nvPr/>
         </p:nvSpPr>
@@ -6065,14 +6310,14 @@
       </p:sp>
       <p:sp>
         <p:nvSpPr>
-          <p:cNvPr id="12" name="Text 10"/>
+          <p:cNvPr id="13" name="Text 11"/>
           <p:cNvSpPr/>
           <p:nvPr/>
         </p:nvSpPr>
         <p:spPr>
           <a:xfrm>
             <a:off x="8074152" y="1563624"/>
-            <a:ext cx="2825496" cy="201168"/>
+            <a:ext cx="2825496" cy="256032"/>
           </a:xfrm>
           <a:prstGeom prst="rect">
             <a:avLst/>
@@ -6088,7 +6333,7 @@
               <a:buNone/>
             </a:pPr>
             <a:r>
-              <a:rPr lang="en-US" sz="950" b="1" dirty="0">
+              <a:rPr lang="en-US" sz="1300" b="1" dirty="0">
                 <a:solidFill>
                   <a:srgbClr val="0068B7"/>
                 </a:solidFill>
@@ -6098,20 +6343,20 @@
               </a:rPr>
               <a:t>Key idea</a:t>
             </a:r>
-            <a:endParaRPr lang="en-US" sz="950" dirty="0"/>
-          </a:p>
-        </p:txBody>
-      </p:sp>
-      <p:sp>
-        <p:nvSpPr>
-          <p:cNvPr id="13" name="Text 11"/>
-          <p:cNvSpPr/>
-          <p:nvPr/>
-        </p:nvSpPr>
-        <p:spPr>
-          <a:xfrm>
-            <a:off x="8074152" y="1856232"/>
-            <a:ext cx="2825496" cy="1261872"/>
+            <a:endParaRPr lang="en-US" sz="1300" dirty="0"/>
+          </a:p>
+        </p:txBody>
+      </p:sp>
+      <p:sp>
+        <p:nvSpPr>
+          <p:cNvPr id="14" name="Text 12"/>
+          <p:cNvSpPr/>
+          <p:nvPr/>
+        </p:nvSpPr>
+        <p:spPr>
+          <a:xfrm>
+            <a:off x="8074152" y="1920240"/>
+            <a:ext cx="2825496" cy="1188720"/>
           </a:xfrm>
           <a:prstGeom prst="rect">
             <a:avLst/>
@@ -6129,7 +6374,7 @@
               <a:buNone/>
             </a:pPr>
             <a:r>
-              <a:rPr lang="en-US" sz="1250" dirty="0">
+              <a:rPr lang="en-US" sz="1550" dirty="0">
                 <a:solidFill>
                   <a:srgbClr val="17364A"/>
                 </a:solidFill>
@@ -6139,13 +6384,13 @@
               </a:rPr>
               <a:t>Choose a real or realistic public health AI use case.</a:t>
             </a:r>
-            <a:endParaRPr lang="en-US" sz="1250" dirty="0"/>
-          </a:p>
-        </p:txBody>
-      </p:sp>
-      <p:sp>
-        <p:nvSpPr>
-          <p:cNvPr id="14" name="Shape 12"/>
+            <a:endParaRPr lang="en-US" sz="1550" dirty="0"/>
+          </a:p>
+        </p:txBody>
+      </p:sp>
+      <p:sp>
+        <p:nvSpPr>
+          <p:cNvPr id="15" name="Shape 13"/>
           <p:cNvSpPr/>
           <p:nvPr/>
         </p:nvSpPr>
@@ -6172,14 +6417,14 @@
       </p:sp>
       <p:sp>
         <p:nvSpPr>
-          <p:cNvPr id="15" name="Text 13"/>
+          <p:cNvPr id="16" name="Text 14"/>
           <p:cNvSpPr/>
           <p:nvPr/>
         </p:nvSpPr>
         <p:spPr>
           <a:xfrm>
             <a:off x="8074152" y="3666744"/>
-            <a:ext cx="2825496" cy="201168"/>
+            <a:ext cx="2825496" cy="256032"/>
           </a:xfrm>
           <a:prstGeom prst="rect">
             <a:avLst/>
@@ -6195,7 +6440,7 @@
               <a:buNone/>
             </a:pPr>
             <a:r>
-              <a:rPr lang="en-US" sz="950" b="1" dirty="0">
+              <a:rPr lang="en-US" sz="1300" b="1" dirty="0">
                 <a:solidFill>
                   <a:srgbClr val="0068B7"/>
                 </a:solidFill>
@@ -6205,20 +6450,20 @@
               </a:rPr>
               <a:t>Use this for</a:t>
             </a:r>
-            <a:endParaRPr lang="en-US" sz="950" dirty="0"/>
-          </a:p>
-        </p:txBody>
-      </p:sp>
-      <p:sp>
-        <p:nvSpPr>
-          <p:cNvPr id="16" name="Text 14"/>
-          <p:cNvSpPr/>
-          <p:nvPr/>
-        </p:nvSpPr>
-        <p:spPr>
-          <a:xfrm>
-            <a:off x="8074152" y="3959352"/>
-            <a:ext cx="2825496" cy="1170432"/>
+            <a:endParaRPr lang="en-US" sz="1300" dirty="0"/>
+          </a:p>
+        </p:txBody>
+      </p:sp>
+      <p:sp>
+        <p:nvSpPr>
+          <p:cNvPr id="17" name="Text 15"/>
+          <p:cNvSpPr/>
+          <p:nvPr/>
+        </p:nvSpPr>
+        <p:spPr>
+          <a:xfrm>
+            <a:off x="8074152" y="4023360"/>
+            <a:ext cx="2825496" cy="1097280"/>
           </a:xfrm>
           <a:prstGeom prst="rect">
             <a:avLst/>
@@ -6236,7 +6481,7 @@
               <a:buNone/>
             </a:pPr>
             <a:r>
-              <a:rPr lang="en-US" sz="1250" dirty="0">
+              <a:rPr lang="en-US" sz="1550" dirty="0">
                 <a:solidFill>
                   <a:srgbClr val="17364A"/>
                 </a:solidFill>
@@ -6246,7 +6491,7 @@
               </a:rPr>
               <a:t>Connect the concept to public health decisions, safeguards, documentation, or implementation work.</a:t>
             </a:r>
-            <a:endParaRPr lang="en-US" sz="1250" dirty="0"/>
+            <a:endParaRPr lang="en-US" sz="1550" dirty="0"/>
           </a:p>
         </p:txBody>
       </p:sp>
@@ -6443,7 +6688,7 @@
                 <a:ea typeface="Aptos" pitchFamily="34" charset="-122"/>
                 <a:cs typeface="Aptos" pitchFamily="34" charset="-120"/>
               </a:rPr>
-              <a:t>© Paula Soper</a:t>
+              <a:t>Â© Paula Soper</a:t>
             </a:r>
             <a:endParaRPr lang="en-US" sz="800" dirty="0"/>
           </a:p>
@@ -6451,7 +6696,46 @@
       </p:sp>
       <p:sp>
         <p:nvSpPr>
-          <p:cNvPr id="7" name="Shape 5"/>
+          <p:cNvPr id="7" name="Text 5"/>
+          <p:cNvSpPr/>
+          <p:nvPr/>
+        </p:nvSpPr>
+        <p:spPr>
+          <a:xfrm>
+            <a:off x="11137392" y="6510528"/>
+            <a:ext cx="411480" cy="201168"/>
+          </a:xfrm>
+          <a:prstGeom prst="rect">
+            <a:avLst/>
+          </a:prstGeom>
+          <a:noFill/>
+          <a:ln/>
+        </p:spPr>
+        <p:txBody>
+          <a:bodyPr wrap="square" lIns="0" tIns="0" rIns="0" bIns="0" rtlCol="0" anchor="ctr"/>
+          <a:lstStyle/>
+          <a:p>
+            <a:pPr algn="r" indent="0" marL="0">
+              <a:buNone/>
+            </a:pPr>
+            <a:r>
+              <a:rPr lang="en-US" sz="900" dirty="0">
+                <a:solidFill>
+                  <a:srgbClr val="5F7181"/>
+                </a:solidFill>
+                <a:latin typeface="Aptos" pitchFamily="34" charset="0"/>
+                <a:ea typeface="Aptos" pitchFamily="34" charset="-122"/>
+                <a:cs typeface="Aptos" pitchFamily="34" charset="-120"/>
+              </a:rPr>
+              <a:t>16</a:t>
+            </a:r>
+            <a:endParaRPr lang="en-US" sz="900" dirty="0"/>
+          </a:p>
+        </p:txBody>
+      </p:sp>
+      <p:sp>
+        <p:nvSpPr>
+          <p:cNvPr id="8" name="Shape 6"/>
           <p:cNvSpPr/>
           <p:nvPr/>
         </p:nvSpPr>
@@ -6476,7 +6760,7 @@
       </p:sp>
       <p:sp>
         <p:nvSpPr>
-          <p:cNvPr id="8" name="Text 6"/>
+          <p:cNvPr id="9" name="Text 7"/>
           <p:cNvSpPr/>
           <p:nvPr/>
         </p:nvSpPr>
@@ -6515,14 +6799,14 @@
       </p:sp>
       <p:sp>
         <p:nvSpPr>
-          <p:cNvPr id="9" name="Text 7"/>
+          <p:cNvPr id="10" name="Text 8"/>
           <p:cNvSpPr/>
           <p:nvPr/>
         </p:nvSpPr>
         <p:spPr>
           <a:xfrm>
             <a:off x="640080" y="621792"/>
-            <a:ext cx="10881360" cy="566928"/>
+            <a:ext cx="10881360" cy="713232"/>
           </a:xfrm>
           <a:prstGeom prst="rect">
             <a:avLst/>
@@ -6540,7 +6824,7 @@
               <a:buNone/>
             </a:pPr>
             <a:r>
-              <a:rPr lang="en-US" sz="2700" b="1" dirty="0">
+              <a:rPr lang="en-US" sz="3400" b="1" dirty="0">
                 <a:solidFill>
                   <a:srgbClr val="003A63"/>
                 </a:solidFill>
@@ -6550,20 +6834,20 @@
               </a:rPr>
               <a:t>Expected Artifact or Evidence</a:t>
             </a:r>
-            <a:endParaRPr lang="en-US" sz="2700" dirty="0"/>
-          </a:p>
-        </p:txBody>
-      </p:sp>
-      <p:sp>
-        <p:nvSpPr>
-          <p:cNvPr id="10" name="Text 8"/>
-          <p:cNvSpPr/>
-          <p:nvPr/>
-        </p:nvSpPr>
-        <p:spPr>
-          <a:xfrm>
-            <a:off x="868680" y="1417320"/>
-            <a:ext cx="6675120" cy="4434840"/>
+            <a:endParaRPr lang="en-US" sz="3400" dirty="0"/>
+          </a:p>
+        </p:txBody>
+      </p:sp>
+      <p:sp>
+        <p:nvSpPr>
+          <p:cNvPr id="11" name="Text 9"/>
+          <p:cNvSpPr/>
+          <p:nvPr/>
+        </p:nvSpPr>
+        <p:spPr>
+          <a:xfrm>
+            <a:off x="868680" y="1508760"/>
+            <a:ext cx="6537960" cy="4160520"/>
           </a:xfrm>
           <a:prstGeom prst="rect">
             <a:avLst/>
@@ -6578,7 +6862,7 @@
           <a:lstStyle/>
           <a:p>
             <a:r>
-              <a:rPr lang="en-US" sz="1700" dirty="0">
+              <a:rPr lang="en-US" sz="2100" dirty="0">
                 <a:solidFill>
                   <a:srgbClr val="17364A"/>
                 </a:solidFill>
@@ -6586,15 +6870,15 @@
                 <a:ea typeface="Aptos" pitchFamily="34" charset="-122"/>
                 <a:cs typeface="Aptos" pitchFamily="34" charset="-120"/>
               </a:rPr>
-              <a:t>Workforce readiness plan; role-based competency matrix; training assignment matrix; AI bridge role description.</a:t>
-            </a:r>
-            <a:endParaRPr lang="en-US" sz="1700" dirty="0"/>
-          </a:p>
-        </p:txBody>
-      </p:sp>
-      <p:sp>
-        <p:nvSpPr>
-          <p:cNvPr id="11" name="Shape 9"/>
+              <a:t>Workforce readiness plan; role-based competency matrix; training assignment matrix; AI bridge role.</a:t>
+            </a:r>
+            <a:endParaRPr lang="en-US" sz="2100" dirty="0"/>
+          </a:p>
+        </p:txBody>
+      </p:sp>
+      <p:sp>
+        <p:nvSpPr>
+          <p:cNvPr id="12" name="Shape 10"/>
           <p:cNvSpPr/>
           <p:nvPr/>
         </p:nvSpPr>
@@ -6621,14 +6905,14 @@
       </p:sp>
       <p:sp>
         <p:nvSpPr>
-          <p:cNvPr id="12" name="Text 10"/>
+          <p:cNvPr id="13" name="Text 11"/>
           <p:cNvSpPr/>
           <p:nvPr/>
         </p:nvSpPr>
         <p:spPr>
           <a:xfrm>
             <a:off x="8074152" y="1563624"/>
-            <a:ext cx="2825496" cy="201168"/>
+            <a:ext cx="2825496" cy="256032"/>
           </a:xfrm>
           <a:prstGeom prst="rect">
             <a:avLst/>
@@ -6644,7 +6928,7 @@
               <a:buNone/>
             </a:pPr>
             <a:r>
-              <a:rPr lang="en-US" sz="950" b="1" dirty="0">
+              <a:rPr lang="en-US" sz="1300" b="1" dirty="0">
                 <a:solidFill>
                   <a:srgbClr val="0068B7"/>
                 </a:solidFill>
@@ -6654,20 +6938,20 @@
               </a:rPr>
               <a:t>Key idea</a:t>
             </a:r>
-            <a:endParaRPr lang="en-US" sz="950" dirty="0"/>
-          </a:p>
-        </p:txBody>
-      </p:sp>
-      <p:sp>
-        <p:nvSpPr>
-          <p:cNvPr id="13" name="Text 11"/>
-          <p:cNvSpPr/>
-          <p:nvPr/>
-        </p:nvSpPr>
-        <p:spPr>
-          <a:xfrm>
-            <a:off x="8074152" y="1856232"/>
-            <a:ext cx="2825496" cy="1261872"/>
+            <a:endParaRPr lang="en-US" sz="1300" dirty="0"/>
+          </a:p>
+        </p:txBody>
+      </p:sp>
+      <p:sp>
+        <p:nvSpPr>
+          <p:cNvPr id="14" name="Text 12"/>
+          <p:cNvSpPr/>
+          <p:nvPr/>
+        </p:nvSpPr>
+        <p:spPr>
+          <a:xfrm>
+            <a:off x="8074152" y="1920240"/>
+            <a:ext cx="2825496" cy="1188720"/>
           </a:xfrm>
           <a:prstGeom prst="rect">
             <a:avLst/>
@@ -6685,7 +6969,7 @@
               <a:buNone/>
             </a:pPr>
             <a:r>
-              <a:rPr lang="en-US" sz="1250" dirty="0">
+              <a:rPr lang="en-US" sz="1550" dirty="0">
                 <a:solidFill>
                   <a:srgbClr val="17364A"/>
                 </a:solidFill>
@@ -6693,15 +6977,15 @@
                 <a:ea typeface="Aptos" pitchFamily="34" charset="-122"/>
                 <a:cs typeface="Aptos" pitchFamily="34" charset="-120"/>
               </a:rPr>
-              <a:t>Workforce readiness plan; role-based competency matrix; training assignment matrix; AI bridge role description.</a:t>
-            </a:r>
-            <a:endParaRPr lang="en-US" sz="1250" dirty="0"/>
-          </a:p>
-        </p:txBody>
-      </p:sp>
-      <p:sp>
-        <p:nvSpPr>
-          <p:cNvPr id="14" name="Shape 12"/>
+              <a:t>Workforce readiness plan; role-based competency matrix; training assignment matrix; AI bridge role.</a:t>
+            </a:r>
+            <a:endParaRPr lang="en-US" sz="1550" dirty="0"/>
+          </a:p>
+        </p:txBody>
+      </p:sp>
+      <p:sp>
+        <p:nvSpPr>
+          <p:cNvPr id="15" name="Shape 13"/>
           <p:cNvSpPr/>
           <p:nvPr/>
         </p:nvSpPr>
@@ -6728,14 +7012,14 @@
       </p:sp>
       <p:sp>
         <p:nvSpPr>
-          <p:cNvPr id="15" name="Text 13"/>
+          <p:cNvPr id="16" name="Text 14"/>
           <p:cNvSpPr/>
           <p:nvPr/>
         </p:nvSpPr>
         <p:spPr>
           <a:xfrm>
             <a:off x="8074152" y="3666744"/>
-            <a:ext cx="2825496" cy="201168"/>
+            <a:ext cx="2825496" cy="256032"/>
           </a:xfrm>
           <a:prstGeom prst="rect">
             <a:avLst/>
@@ -6751,7 +7035,7 @@
               <a:buNone/>
             </a:pPr>
             <a:r>
-              <a:rPr lang="en-US" sz="950" b="1" dirty="0">
+              <a:rPr lang="en-US" sz="1300" b="1" dirty="0">
                 <a:solidFill>
                   <a:srgbClr val="0068B7"/>
                 </a:solidFill>
@@ -6761,20 +7045,20 @@
               </a:rPr>
               <a:t>Use this for</a:t>
             </a:r>
-            <a:endParaRPr lang="en-US" sz="950" dirty="0"/>
-          </a:p>
-        </p:txBody>
-      </p:sp>
-      <p:sp>
-        <p:nvSpPr>
-          <p:cNvPr id="16" name="Text 14"/>
-          <p:cNvSpPr/>
-          <p:nvPr/>
-        </p:nvSpPr>
-        <p:spPr>
-          <a:xfrm>
-            <a:off x="8074152" y="3959352"/>
-            <a:ext cx="2825496" cy="1170432"/>
+            <a:endParaRPr lang="en-US" sz="1300" dirty="0"/>
+          </a:p>
+        </p:txBody>
+      </p:sp>
+      <p:sp>
+        <p:nvSpPr>
+          <p:cNvPr id="17" name="Text 15"/>
+          <p:cNvSpPr/>
+          <p:nvPr/>
+        </p:nvSpPr>
+        <p:spPr>
+          <a:xfrm>
+            <a:off x="8074152" y="4023360"/>
+            <a:ext cx="2825496" cy="1097280"/>
           </a:xfrm>
           <a:prstGeom prst="rect">
             <a:avLst/>
@@ -6792,7 +7076,7 @@
               <a:buNone/>
             </a:pPr>
             <a:r>
-              <a:rPr lang="en-US" sz="1250" dirty="0">
+              <a:rPr lang="en-US" sz="1550" dirty="0">
                 <a:solidFill>
                   <a:srgbClr val="17364A"/>
                 </a:solidFill>
@@ -6802,7 +7086,7 @@
               </a:rPr>
               <a:t>Connect the concept to public health decisions, safeguards, documentation, or implementation work.</a:t>
             </a:r>
-            <a:endParaRPr lang="en-US" sz="1250" dirty="0"/>
+            <a:endParaRPr lang="en-US" sz="1550" dirty="0"/>
           </a:p>
         </p:txBody>
       </p:sp>
@@ -6999,7 +7283,7 @@
                 <a:ea typeface="Aptos" pitchFamily="34" charset="-122"/>
                 <a:cs typeface="Aptos" pitchFamily="34" charset="-120"/>
               </a:rPr>
-              <a:t>© Paula Soper</a:t>
+              <a:t>Â© Paula Soper</a:t>
             </a:r>
             <a:endParaRPr lang="en-US" sz="800" dirty="0"/>
           </a:p>
@@ -7007,7 +7291,46 @@
       </p:sp>
       <p:sp>
         <p:nvSpPr>
-          <p:cNvPr id="7" name="Shape 5"/>
+          <p:cNvPr id="7" name="Text 5"/>
+          <p:cNvSpPr/>
+          <p:nvPr/>
+        </p:nvSpPr>
+        <p:spPr>
+          <a:xfrm>
+            <a:off x="11137392" y="6510528"/>
+            <a:ext cx="411480" cy="201168"/>
+          </a:xfrm>
+          <a:prstGeom prst="rect">
+            <a:avLst/>
+          </a:prstGeom>
+          <a:noFill/>
+          <a:ln/>
+        </p:spPr>
+        <p:txBody>
+          <a:bodyPr wrap="square" lIns="0" tIns="0" rIns="0" bIns="0" rtlCol="0" anchor="ctr"/>
+          <a:lstStyle/>
+          <a:p>
+            <a:pPr algn="r" indent="0" marL="0">
+              <a:buNone/>
+            </a:pPr>
+            <a:r>
+              <a:rPr lang="en-US" sz="900" dirty="0">
+                <a:solidFill>
+                  <a:srgbClr val="5F7181"/>
+                </a:solidFill>
+                <a:latin typeface="Aptos" pitchFamily="34" charset="0"/>
+                <a:ea typeface="Aptos" pitchFamily="34" charset="-122"/>
+                <a:cs typeface="Aptos" pitchFamily="34" charset="-120"/>
+              </a:rPr>
+              <a:t>17</a:t>
+            </a:r>
+            <a:endParaRPr lang="en-US" sz="900" dirty="0"/>
+          </a:p>
+        </p:txBody>
+      </p:sp>
+      <p:sp>
+        <p:nvSpPr>
+          <p:cNvPr id="8" name="Shape 6"/>
           <p:cNvSpPr/>
           <p:nvPr/>
         </p:nvSpPr>
@@ -7032,7 +7355,7 @@
       </p:sp>
       <p:sp>
         <p:nvSpPr>
-          <p:cNvPr id="8" name="Text 6"/>
+          <p:cNvPr id="9" name="Text 7"/>
           <p:cNvSpPr/>
           <p:nvPr/>
         </p:nvSpPr>
@@ -7071,14 +7394,14 @@
       </p:sp>
       <p:sp>
         <p:nvSpPr>
-          <p:cNvPr id="9" name="Text 7"/>
+          <p:cNvPr id="10" name="Text 8"/>
           <p:cNvSpPr/>
           <p:nvPr/>
         </p:nvSpPr>
         <p:spPr>
           <a:xfrm>
             <a:off x="640080" y="621792"/>
-            <a:ext cx="10881360" cy="566928"/>
+            <a:ext cx="10881360" cy="713232"/>
           </a:xfrm>
           <a:prstGeom prst="rect">
             <a:avLst/>
@@ -7096,7 +7419,7 @@
               <a:buNone/>
             </a:pPr>
             <a:r>
-              <a:rPr lang="en-US" sz="2700" b="1" dirty="0">
+              <a:rPr lang="en-US" sz="3400" b="1" dirty="0">
                 <a:solidFill>
                   <a:srgbClr val="003A63"/>
                 </a:solidFill>
@@ -7106,20 +7429,20 @@
               </a:rPr>
               <a:t>Expected Assignment</a:t>
             </a:r>
-            <a:endParaRPr lang="en-US" sz="2700" dirty="0"/>
-          </a:p>
-        </p:txBody>
-      </p:sp>
-      <p:sp>
-        <p:nvSpPr>
-          <p:cNvPr id="10" name="Text 8"/>
-          <p:cNvSpPr/>
-          <p:nvPr/>
-        </p:nvSpPr>
-        <p:spPr>
-          <a:xfrm>
-            <a:off x="868680" y="1417320"/>
-            <a:ext cx="6675120" cy="4434840"/>
+            <a:endParaRPr lang="en-US" sz="3400" dirty="0"/>
+          </a:p>
+        </p:txBody>
+      </p:sp>
+      <p:sp>
+        <p:nvSpPr>
+          <p:cNvPr id="11" name="Text 9"/>
+          <p:cNvSpPr/>
+          <p:nvPr/>
+        </p:nvSpPr>
+        <p:spPr>
+          <a:xfrm>
+            <a:off x="868680" y="1508760"/>
+            <a:ext cx="6537960" cy="4160520"/>
           </a:xfrm>
           <a:prstGeom prst="rect">
             <a:avLst/>
@@ -7134,7 +7457,7 @@
           <a:lstStyle/>
           <a:p>
             <a:r>
-              <a:rPr lang="en-US" sz="1700" dirty="0">
+              <a:rPr lang="en-US" sz="2100" dirty="0">
                 <a:solidFill>
                   <a:srgbClr val="17364A"/>
                 </a:solidFill>
@@ -7142,15 +7465,15 @@
                 <a:ea typeface="Aptos" pitchFamily="34" charset="-122"/>
                 <a:cs typeface="Aptos" pitchFamily="34" charset="-120"/>
               </a:rPr>
-              <a:t>Workforce readiness plan; role-based competency matrix; training assignment matrix; AI bridge role description.</a:t>
-            </a:r>
-            <a:endParaRPr lang="en-US" sz="1700" dirty="0"/>
-          </a:p>
-        </p:txBody>
-      </p:sp>
-      <p:sp>
-        <p:nvSpPr>
-          <p:cNvPr id="11" name="Shape 9"/>
+              <a:t>Workforce readiness plan; role-based competency matrix; training assignment matrix; AI bridge role.</a:t>
+            </a:r>
+            <a:endParaRPr lang="en-US" sz="2100" dirty="0"/>
+          </a:p>
+        </p:txBody>
+      </p:sp>
+      <p:sp>
+        <p:nvSpPr>
+          <p:cNvPr id="12" name="Shape 10"/>
           <p:cNvSpPr/>
           <p:nvPr/>
         </p:nvSpPr>
@@ -7177,14 +7500,14 @@
       </p:sp>
       <p:sp>
         <p:nvSpPr>
-          <p:cNvPr id="12" name="Text 10"/>
+          <p:cNvPr id="13" name="Text 11"/>
           <p:cNvSpPr/>
           <p:nvPr/>
         </p:nvSpPr>
         <p:spPr>
           <a:xfrm>
             <a:off x="8074152" y="1563624"/>
-            <a:ext cx="2825496" cy="201168"/>
+            <a:ext cx="2825496" cy="256032"/>
           </a:xfrm>
           <a:prstGeom prst="rect">
             <a:avLst/>
@@ -7200,7 +7523,7 @@
               <a:buNone/>
             </a:pPr>
             <a:r>
-              <a:rPr lang="en-US" sz="950" b="1" dirty="0">
+              <a:rPr lang="en-US" sz="1300" b="1" dirty="0">
                 <a:solidFill>
                   <a:srgbClr val="0068B7"/>
                 </a:solidFill>
@@ -7210,20 +7533,20 @@
               </a:rPr>
               <a:t>Key idea</a:t>
             </a:r>
-            <a:endParaRPr lang="en-US" sz="950" dirty="0"/>
-          </a:p>
-        </p:txBody>
-      </p:sp>
-      <p:sp>
-        <p:nvSpPr>
-          <p:cNvPr id="13" name="Text 11"/>
-          <p:cNvSpPr/>
-          <p:nvPr/>
-        </p:nvSpPr>
-        <p:spPr>
-          <a:xfrm>
-            <a:off x="8074152" y="1856232"/>
-            <a:ext cx="2825496" cy="1261872"/>
+            <a:endParaRPr lang="en-US" sz="1300" dirty="0"/>
+          </a:p>
+        </p:txBody>
+      </p:sp>
+      <p:sp>
+        <p:nvSpPr>
+          <p:cNvPr id="14" name="Text 12"/>
+          <p:cNvSpPr/>
+          <p:nvPr/>
+        </p:nvSpPr>
+        <p:spPr>
+          <a:xfrm>
+            <a:off x="8074152" y="1920240"/>
+            <a:ext cx="2825496" cy="1188720"/>
           </a:xfrm>
           <a:prstGeom prst="rect">
             <a:avLst/>
@@ -7241,7 +7564,7 @@
               <a:buNone/>
             </a:pPr>
             <a:r>
-              <a:rPr lang="en-US" sz="1250" dirty="0">
+              <a:rPr lang="en-US" sz="1550" dirty="0">
                 <a:solidFill>
                   <a:srgbClr val="17364A"/>
                 </a:solidFill>
@@ -7249,15 +7572,15 @@
                 <a:ea typeface="Aptos" pitchFamily="34" charset="-122"/>
                 <a:cs typeface="Aptos" pitchFamily="34" charset="-120"/>
               </a:rPr>
-              <a:t>Workforce readiness plan; role-based competency matrix; training assignment matrix; AI bridge role description.</a:t>
-            </a:r>
-            <a:endParaRPr lang="en-US" sz="1250" dirty="0"/>
-          </a:p>
-        </p:txBody>
-      </p:sp>
-      <p:sp>
-        <p:nvSpPr>
-          <p:cNvPr id="14" name="Shape 12"/>
+              <a:t>Workforce readiness plan; role-based competency matrix; training assignment matrix; AI bridge role.</a:t>
+            </a:r>
+            <a:endParaRPr lang="en-US" sz="1550" dirty="0"/>
+          </a:p>
+        </p:txBody>
+      </p:sp>
+      <p:sp>
+        <p:nvSpPr>
+          <p:cNvPr id="15" name="Shape 13"/>
           <p:cNvSpPr/>
           <p:nvPr/>
         </p:nvSpPr>
@@ -7284,14 +7607,14 @@
       </p:sp>
       <p:sp>
         <p:nvSpPr>
-          <p:cNvPr id="15" name="Text 13"/>
+          <p:cNvPr id="16" name="Text 14"/>
           <p:cNvSpPr/>
           <p:nvPr/>
         </p:nvSpPr>
         <p:spPr>
           <a:xfrm>
             <a:off x="8074152" y="3666744"/>
-            <a:ext cx="2825496" cy="201168"/>
+            <a:ext cx="2825496" cy="256032"/>
           </a:xfrm>
           <a:prstGeom prst="rect">
             <a:avLst/>
@@ -7307,7 +7630,7 @@
               <a:buNone/>
             </a:pPr>
             <a:r>
-              <a:rPr lang="en-US" sz="950" b="1" dirty="0">
+              <a:rPr lang="en-US" sz="1300" b="1" dirty="0">
                 <a:solidFill>
                   <a:srgbClr val="0068B7"/>
                 </a:solidFill>
@@ -7317,20 +7640,20 @@
               </a:rPr>
               <a:t>Use this for</a:t>
             </a:r>
-            <a:endParaRPr lang="en-US" sz="950" dirty="0"/>
-          </a:p>
-        </p:txBody>
-      </p:sp>
-      <p:sp>
-        <p:nvSpPr>
-          <p:cNvPr id="16" name="Text 14"/>
-          <p:cNvSpPr/>
-          <p:nvPr/>
-        </p:nvSpPr>
-        <p:spPr>
-          <a:xfrm>
-            <a:off x="8074152" y="3959352"/>
-            <a:ext cx="2825496" cy="1170432"/>
+            <a:endParaRPr lang="en-US" sz="1300" dirty="0"/>
+          </a:p>
+        </p:txBody>
+      </p:sp>
+      <p:sp>
+        <p:nvSpPr>
+          <p:cNvPr id="17" name="Text 15"/>
+          <p:cNvSpPr/>
+          <p:nvPr/>
+        </p:nvSpPr>
+        <p:spPr>
+          <a:xfrm>
+            <a:off x="8074152" y="4023360"/>
+            <a:ext cx="2825496" cy="1097280"/>
           </a:xfrm>
           <a:prstGeom prst="rect">
             <a:avLst/>
@@ -7348,7 +7671,7 @@
               <a:buNone/>
             </a:pPr>
             <a:r>
-              <a:rPr lang="en-US" sz="1250" dirty="0">
+              <a:rPr lang="en-US" sz="1550" dirty="0">
                 <a:solidFill>
                   <a:srgbClr val="17364A"/>
                 </a:solidFill>
@@ -7358,7 +7681,7 @@
               </a:rPr>
               <a:t>Connect the concept to public health decisions, safeguards, documentation, or implementation work.</a:t>
             </a:r>
-            <a:endParaRPr lang="en-US" sz="1250" dirty="0"/>
+            <a:endParaRPr lang="en-US" sz="1550" dirty="0"/>
           </a:p>
         </p:txBody>
       </p:sp>
@@ -7555,7 +7878,7 @@
                 <a:ea typeface="Aptos" pitchFamily="34" charset="-122"/>
                 <a:cs typeface="Aptos" pitchFamily="34" charset="-120"/>
               </a:rPr>
-              <a:t>© Paula Soper</a:t>
+              <a:t>Â© Paula Soper</a:t>
             </a:r>
             <a:endParaRPr lang="en-US" sz="800" dirty="0"/>
           </a:p>
@@ -7563,7 +7886,46 @@
       </p:sp>
       <p:sp>
         <p:nvSpPr>
-          <p:cNvPr id="7" name="Shape 5"/>
+          <p:cNvPr id="7" name="Text 5"/>
+          <p:cNvSpPr/>
+          <p:nvPr/>
+        </p:nvSpPr>
+        <p:spPr>
+          <a:xfrm>
+            <a:off x="11137392" y="6510528"/>
+            <a:ext cx="411480" cy="201168"/>
+          </a:xfrm>
+          <a:prstGeom prst="rect">
+            <a:avLst/>
+          </a:prstGeom>
+          <a:noFill/>
+          <a:ln/>
+        </p:spPr>
+        <p:txBody>
+          <a:bodyPr wrap="square" lIns="0" tIns="0" rIns="0" bIns="0" rtlCol="0" anchor="ctr"/>
+          <a:lstStyle/>
+          <a:p>
+            <a:pPr algn="r" indent="0" marL="0">
+              <a:buNone/>
+            </a:pPr>
+            <a:r>
+              <a:rPr lang="en-US" sz="900" dirty="0">
+                <a:solidFill>
+                  <a:srgbClr val="5F7181"/>
+                </a:solidFill>
+                <a:latin typeface="Aptos" pitchFamily="34" charset="0"/>
+                <a:ea typeface="Aptos" pitchFamily="34" charset="-122"/>
+                <a:cs typeface="Aptos" pitchFamily="34" charset="-120"/>
+              </a:rPr>
+              <a:t>18</a:t>
+            </a:r>
+            <a:endParaRPr lang="en-US" sz="900" dirty="0"/>
+          </a:p>
+        </p:txBody>
+      </p:sp>
+      <p:sp>
+        <p:nvSpPr>
+          <p:cNvPr id="8" name="Shape 6"/>
           <p:cNvSpPr/>
           <p:nvPr/>
         </p:nvSpPr>
@@ -7588,7 +7950,7 @@
       </p:sp>
       <p:sp>
         <p:nvSpPr>
-          <p:cNvPr id="8" name="Text 6"/>
+          <p:cNvPr id="9" name="Text 7"/>
           <p:cNvSpPr/>
           <p:nvPr/>
         </p:nvSpPr>
@@ -7627,14 +7989,14 @@
       </p:sp>
       <p:sp>
         <p:nvSpPr>
-          <p:cNvPr id="9" name="Text 7"/>
+          <p:cNvPr id="10" name="Text 8"/>
           <p:cNvSpPr/>
           <p:nvPr/>
         </p:nvSpPr>
         <p:spPr>
           <a:xfrm>
             <a:off x="640080" y="621792"/>
-            <a:ext cx="10881360" cy="566928"/>
+            <a:ext cx="10881360" cy="713232"/>
           </a:xfrm>
           <a:prstGeom prst="rect">
             <a:avLst/>
@@ -7652,7 +8014,7 @@
               <a:buNone/>
             </a:pPr>
             <a:r>
-              <a:rPr lang="en-US" sz="2700" b="1" dirty="0">
+              <a:rPr lang="en-US" sz="3400" b="1" dirty="0">
                 <a:solidFill>
                   <a:srgbClr val="003A63"/>
                 </a:solidFill>
@@ -7662,20 +8024,20 @@
               </a:rPr>
               <a:t>Knowledge Check</a:t>
             </a:r>
-            <a:endParaRPr lang="en-US" sz="2700" dirty="0"/>
-          </a:p>
-        </p:txBody>
-      </p:sp>
-      <p:sp>
-        <p:nvSpPr>
-          <p:cNvPr id="10" name="Text 8"/>
-          <p:cNvSpPr/>
-          <p:nvPr/>
-        </p:nvSpPr>
-        <p:spPr>
-          <a:xfrm>
-            <a:off x="868680" y="1417320"/>
-            <a:ext cx="6675120" cy="4434840"/>
+            <a:endParaRPr lang="en-US" sz="3400" dirty="0"/>
+          </a:p>
+        </p:txBody>
+      </p:sp>
+      <p:sp>
+        <p:nvSpPr>
+          <p:cNvPr id="11" name="Text 9"/>
+          <p:cNvSpPr/>
+          <p:nvPr/>
+        </p:nvSpPr>
+        <p:spPr>
+          <a:xfrm>
+            <a:off x="868680" y="1508760"/>
+            <a:ext cx="6537960" cy="4160520"/>
           </a:xfrm>
           <a:prstGeom prst="rect">
             <a:avLst/>
@@ -7690,7 +8052,7 @@
           <a:lstStyle/>
           <a:p>
             <a:r>
-              <a:rPr lang="en-US" sz="1700" dirty="0">
+              <a:rPr lang="en-US" sz="2100" dirty="0">
                 <a:solidFill>
                   <a:srgbClr val="17364A"/>
                 </a:solidFill>
@@ -7700,11 +8062,11 @@
               </a:rPr>
               <a:t>1. What is the strongest reason this module topic belongs in AI leadership and governance training?</a:t>
             </a:r>
-            <a:endParaRPr lang="en-US" sz="1700" dirty="0"/>
-          </a:p>
-          <a:p>
-            <a:r>
-              <a:rPr lang="en-US" sz="1700" dirty="0">
+            <a:endParaRPr lang="en-US" sz="2100" dirty="0"/>
+          </a:p>
+          <a:p>
+            <a:r>
+              <a:rPr lang="en-US" sz="2100" dirty="0">
                 <a:solidFill>
                   <a:srgbClr val="17364A"/>
                 </a:solidFill>
@@ -7714,11 +8076,11 @@
               </a:rPr>
               <a:t>2. Which practice best supports accountable public health AI governance?</a:t>
             </a:r>
-            <a:endParaRPr lang="en-US" sz="1700" dirty="0"/>
-          </a:p>
-          <a:p>
-            <a:r>
-              <a:rPr lang="en-US" sz="1700" dirty="0">
+            <a:endParaRPr lang="en-US" sz="2100" dirty="0"/>
+          </a:p>
+          <a:p>
+            <a:r>
+              <a:rPr lang="en-US" sz="2100" dirty="0">
                 <a:solidFill>
                   <a:srgbClr val="17364A"/>
                 </a:solidFill>
@@ -7728,27 +8090,13 @@
               </a:rPr>
               <a:t>3. When should an AI use case be escalated for leadership or governance review?</a:t>
             </a:r>
-            <a:endParaRPr lang="en-US" sz="1700" dirty="0"/>
-          </a:p>
-          <a:p>
-            <a:r>
-              <a:rPr lang="en-US" sz="1700" dirty="0">
-                <a:solidFill>
-                  <a:srgbClr val="17364A"/>
-                </a:solidFill>
-                <a:latin typeface="Aptos" pitchFamily="34" charset="0"/>
-                <a:ea typeface="Aptos" pitchFamily="34" charset="-122"/>
-                <a:cs typeface="Aptos" pitchFamily="34" charset="-120"/>
-              </a:rPr>
-              <a:t>4. What is weak evidence of completion for a leadership and governance module?</a:t>
-            </a:r>
-            <a:endParaRPr lang="en-US" sz="1700" dirty="0"/>
-          </a:p>
-        </p:txBody>
-      </p:sp>
-      <p:sp>
-        <p:nvSpPr>
-          <p:cNvPr id="11" name="Shape 9"/>
+            <a:endParaRPr lang="en-US" sz="2100" dirty="0"/>
+          </a:p>
+        </p:txBody>
+      </p:sp>
+      <p:sp>
+        <p:nvSpPr>
+          <p:cNvPr id="12" name="Shape 10"/>
           <p:cNvSpPr/>
           <p:nvPr/>
         </p:nvSpPr>
@@ -7775,14 +8123,14 @@
       </p:sp>
       <p:sp>
         <p:nvSpPr>
-          <p:cNvPr id="12" name="Text 10"/>
+          <p:cNvPr id="13" name="Text 11"/>
           <p:cNvSpPr/>
           <p:nvPr/>
         </p:nvSpPr>
         <p:spPr>
           <a:xfrm>
             <a:off x="8074152" y="1563624"/>
-            <a:ext cx="2825496" cy="201168"/>
+            <a:ext cx="2825496" cy="256032"/>
           </a:xfrm>
           <a:prstGeom prst="rect">
             <a:avLst/>
@@ -7798,7 +8146,7 @@
               <a:buNone/>
             </a:pPr>
             <a:r>
-              <a:rPr lang="en-US" sz="950" b="1" dirty="0">
+              <a:rPr lang="en-US" sz="1300" b="1" dirty="0">
                 <a:solidFill>
                   <a:srgbClr val="0068B7"/>
                 </a:solidFill>
@@ -7808,20 +8156,20 @@
               </a:rPr>
               <a:t>Key idea</a:t>
             </a:r>
-            <a:endParaRPr lang="en-US" sz="950" dirty="0"/>
-          </a:p>
-        </p:txBody>
-      </p:sp>
-      <p:sp>
-        <p:nvSpPr>
-          <p:cNvPr id="13" name="Text 11"/>
-          <p:cNvSpPr/>
-          <p:nvPr/>
-        </p:nvSpPr>
-        <p:spPr>
-          <a:xfrm>
-            <a:off x="8074152" y="1856232"/>
-            <a:ext cx="2825496" cy="1261872"/>
+            <a:endParaRPr lang="en-US" sz="1300" dirty="0"/>
+          </a:p>
+        </p:txBody>
+      </p:sp>
+      <p:sp>
+        <p:nvSpPr>
+          <p:cNvPr id="14" name="Text 12"/>
+          <p:cNvSpPr/>
+          <p:nvPr/>
+        </p:nvSpPr>
+        <p:spPr>
+          <a:xfrm>
+            <a:off x="8074152" y="1920240"/>
+            <a:ext cx="2825496" cy="1188720"/>
           </a:xfrm>
           <a:prstGeom prst="rect">
             <a:avLst/>
@@ -7839,7 +8187,7 @@
               <a:buNone/>
             </a:pPr>
             <a:r>
-              <a:rPr lang="en-US" sz="1250" dirty="0">
+              <a:rPr lang="en-US" sz="1550" dirty="0">
                 <a:solidFill>
                   <a:srgbClr val="17364A"/>
                 </a:solidFill>
@@ -7849,13 +8197,13 @@
               </a:rPr>
               <a:t>1. What is the strongest reason this module topic belongs in AI leadership and governance training?</a:t>
             </a:r>
-            <a:endParaRPr lang="en-US" sz="1250" dirty="0"/>
-          </a:p>
-        </p:txBody>
-      </p:sp>
-      <p:sp>
-        <p:nvSpPr>
-          <p:cNvPr id="14" name="Shape 12"/>
+            <a:endParaRPr lang="en-US" sz="1550" dirty="0"/>
+          </a:p>
+        </p:txBody>
+      </p:sp>
+      <p:sp>
+        <p:nvSpPr>
+          <p:cNvPr id="15" name="Shape 13"/>
           <p:cNvSpPr/>
           <p:nvPr/>
         </p:nvSpPr>
@@ -7882,14 +8230,14 @@
       </p:sp>
       <p:sp>
         <p:nvSpPr>
-          <p:cNvPr id="15" name="Text 13"/>
+          <p:cNvPr id="16" name="Text 14"/>
           <p:cNvSpPr/>
           <p:nvPr/>
         </p:nvSpPr>
         <p:spPr>
           <a:xfrm>
             <a:off x="8074152" y="3666744"/>
-            <a:ext cx="2825496" cy="201168"/>
+            <a:ext cx="2825496" cy="256032"/>
           </a:xfrm>
           <a:prstGeom prst="rect">
             <a:avLst/>
@@ -7905,7 +8253,7 @@
               <a:buNone/>
             </a:pPr>
             <a:r>
-              <a:rPr lang="en-US" sz="950" b="1" dirty="0">
+              <a:rPr lang="en-US" sz="1300" b="1" dirty="0">
                 <a:solidFill>
                   <a:srgbClr val="0068B7"/>
                 </a:solidFill>
@@ -7915,20 +8263,20 @@
               </a:rPr>
               <a:t>Use this for</a:t>
             </a:r>
-            <a:endParaRPr lang="en-US" sz="950" dirty="0"/>
-          </a:p>
-        </p:txBody>
-      </p:sp>
-      <p:sp>
-        <p:nvSpPr>
-          <p:cNvPr id="16" name="Text 14"/>
-          <p:cNvSpPr/>
-          <p:nvPr/>
-        </p:nvSpPr>
-        <p:spPr>
-          <a:xfrm>
-            <a:off x="8074152" y="3959352"/>
-            <a:ext cx="2825496" cy="1170432"/>
+            <a:endParaRPr lang="en-US" sz="1300" dirty="0"/>
+          </a:p>
+        </p:txBody>
+      </p:sp>
+      <p:sp>
+        <p:nvSpPr>
+          <p:cNvPr id="17" name="Text 15"/>
+          <p:cNvSpPr/>
+          <p:nvPr/>
+        </p:nvSpPr>
+        <p:spPr>
+          <a:xfrm>
+            <a:off x="8074152" y="4023360"/>
+            <a:ext cx="2825496" cy="1097280"/>
           </a:xfrm>
           <a:prstGeom prst="rect">
             <a:avLst/>
@@ -7946,7 +8294,7 @@
               <a:buNone/>
             </a:pPr>
             <a:r>
-              <a:rPr lang="en-US" sz="1250" dirty="0">
+              <a:rPr lang="en-US" sz="1550" dirty="0">
                 <a:solidFill>
                   <a:srgbClr val="17364A"/>
                 </a:solidFill>
@@ -7956,7 +8304,7 @@
               </a:rPr>
               <a:t>Connect the concept to public health decisions, safeguards, documentation, or implementation work.</a:t>
             </a:r>
-            <a:endParaRPr lang="en-US" sz="1250" dirty="0"/>
+            <a:endParaRPr lang="en-US" sz="1550" dirty="0"/>
           </a:p>
         </p:txBody>
       </p:sp>
@@ -8153,7 +8501,7 @@
                 <a:ea typeface="Aptos" pitchFamily="34" charset="-122"/>
                 <a:cs typeface="Aptos" pitchFamily="34" charset="-120"/>
               </a:rPr>
-              <a:t>© Paula Soper</a:t>
+              <a:t>Â© Paula Soper</a:t>
             </a:r>
             <a:endParaRPr lang="en-US" sz="800" dirty="0"/>
           </a:p>
@@ -8161,7 +8509,46 @@
       </p:sp>
       <p:sp>
         <p:nvSpPr>
-          <p:cNvPr id="7" name="Shape 5"/>
+          <p:cNvPr id="7" name="Text 5"/>
+          <p:cNvSpPr/>
+          <p:nvPr/>
+        </p:nvSpPr>
+        <p:spPr>
+          <a:xfrm>
+            <a:off x="11137392" y="6510528"/>
+            <a:ext cx="411480" cy="201168"/>
+          </a:xfrm>
+          <a:prstGeom prst="rect">
+            <a:avLst/>
+          </a:prstGeom>
+          <a:noFill/>
+          <a:ln/>
+        </p:spPr>
+        <p:txBody>
+          <a:bodyPr wrap="square" lIns="0" tIns="0" rIns="0" bIns="0" rtlCol="0" anchor="ctr"/>
+          <a:lstStyle/>
+          <a:p>
+            <a:pPr algn="r" indent="0" marL="0">
+              <a:buNone/>
+            </a:pPr>
+            <a:r>
+              <a:rPr lang="en-US" sz="900" dirty="0">
+                <a:solidFill>
+                  <a:srgbClr val="5F7181"/>
+                </a:solidFill>
+                <a:latin typeface="Aptos" pitchFamily="34" charset="0"/>
+                <a:ea typeface="Aptos" pitchFamily="34" charset="-122"/>
+                <a:cs typeface="Aptos" pitchFamily="34" charset="-120"/>
+              </a:rPr>
+              <a:t>19</a:t>
+            </a:r>
+            <a:endParaRPr lang="en-US" sz="900" dirty="0"/>
+          </a:p>
+        </p:txBody>
+      </p:sp>
+      <p:sp>
+        <p:nvSpPr>
+          <p:cNvPr id="8" name="Shape 6"/>
           <p:cNvSpPr/>
           <p:nvPr/>
         </p:nvSpPr>
@@ -8186,7 +8573,7 @@
       </p:sp>
       <p:sp>
         <p:nvSpPr>
-          <p:cNvPr id="8" name="Text 6"/>
+          <p:cNvPr id="9" name="Text 7"/>
           <p:cNvSpPr/>
           <p:nvPr/>
         </p:nvSpPr>
@@ -8225,14 +8612,14 @@
       </p:sp>
       <p:sp>
         <p:nvSpPr>
-          <p:cNvPr id="9" name="Text 7"/>
+          <p:cNvPr id="10" name="Text 8"/>
           <p:cNvSpPr/>
           <p:nvPr/>
         </p:nvSpPr>
         <p:spPr>
           <a:xfrm>
             <a:off x="640080" y="621792"/>
-            <a:ext cx="10881360" cy="566928"/>
+            <a:ext cx="10881360" cy="713232"/>
           </a:xfrm>
           <a:prstGeom prst="rect">
             <a:avLst/>
@@ -8250,7 +8637,7 @@
               <a:buNone/>
             </a:pPr>
             <a:r>
-              <a:rPr lang="en-US" sz="2700" b="1" dirty="0">
+              <a:rPr lang="en-US" sz="3400" b="1" dirty="0">
                 <a:solidFill>
                   <a:srgbClr val="003A63"/>
                 </a:solidFill>
@@ -8260,20 +8647,20 @@
               </a:rPr>
               <a:t>References and Resources</a:t>
             </a:r>
-            <a:endParaRPr lang="en-US" sz="2700" dirty="0"/>
-          </a:p>
-        </p:txBody>
-      </p:sp>
-      <p:sp>
-        <p:nvSpPr>
-          <p:cNvPr id="10" name="Text 8"/>
-          <p:cNvSpPr/>
-          <p:nvPr/>
-        </p:nvSpPr>
-        <p:spPr>
-          <a:xfrm>
-            <a:off x="868680" y="1417320"/>
-            <a:ext cx="6675120" cy="4434840"/>
+            <a:endParaRPr lang="en-US" sz="3400" dirty="0"/>
+          </a:p>
+        </p:txBody>
+      </p:sp>
+      <p:sp>
+        <p:nvSpPr>
+          <p:cNvPr id="11" name="Text 9"/>
+          <p:cNvSpPr/>
+          <p:nvPr/>
+        </p:nvSpPr>
+        <p:spPr>
+          <a:xfrm>
+            <a:off x="868680" y="1508760"/>
+            <a:ext cx="6537960" cy="4160520"/>
           </a:xfrm>
           <a:prstGeom prst="rect">
             <a:avLst/>
@@ -8288,7 +8675,7 @@
           <a:lstStyle/>
           <a:p>
             <a:r>
-              <a:rPr lang="en-US" sz="1700" dirty="0">
+              <a:rPr lang="en-US" sz="2100" dirty="0">
                 <a:solidFill>
                   <a:srgbClr val="17364A"/>
                 </a:solidFill>
@@ -8296,13 +8683,13 @@
                 <a:ea typeface="Aptos" pitchFamily="34" charset="-122"/>
                 <a:cs typeface="Aptos" pitchFamily="34" charset="-120"/>
               </a:rPr>
-              <a:t>NIST Artificial Intelligence Risk Management Framework (AI RMF 1.0): https://www.nist.gov/itl/ai-risk-management-framework</a:t>
-            </a:r>
-            <a:endParaRPr lang="en-US" sz="1700" dirty="0"/>
-          </a:p>
-          <a:p>
-            <a:r>
-              <a:rPr lang="en-US" sz="1700" dirty="0">
+              <a:t>NIST Artificial Intelligence Risk Management Framework (AI RMF 1.0):.</a:t>
+            </a:r>
+            <a:endParaRPr lang="en-US" sz="2100" dirty="0"/>
+          </a:p>
+          <a:p>
+            <a:r>
+              <a:rPr lang="en-US" sz="2100" dirty="0">
                 <a:solidFill>
                   <a:srgbClr val="17364A"/>
                 </a:solidFill>
@@ -8312,11 +8699,11 @@
               </a:rPr>
               <a:t>NIST Generative AI Profile:.</a:t>
             </a:r>
-            <a:endParaRPr lang="en-US" sz="1700" dirty="0"/>
-          </a:p>
-          <a:p>
-            <a:r>
-              <a:rPr lang="en-US" sz="1700" dirty="0">
+            <a:endParaRPr lang="en-US" sz="2100" dirty="0"/>
+          </a:p>
+          <a:p>
+            <a:r>
+              <a:rPr lang="en-US" sz="2100" dirty="0">
                 <a:solidFill>
                   <a:srgbClr val="17364A"/>
                 </a:solidFill>
@@ -8326,27 +8713,13 @@
               </a:rPr>
               <a:t>NIST Privacy Framework</a:t>
             </a:r>
-            <a:endParaRPr lang="en-US" sz="1700" dirty="0"/>
-          </a:p>
-          <a:p>
-            <a:r>
-              <a:rPr lang="en-US" sz="1700" dirty="0">
-                <a:solidFill>
-                  <a:srgbClr val="17364A"/>
-                </a:solidFill>
-                <a:latin typeface="Aptos" pitchFamily="34" charset="0"/>
-                <a:ea typeface="Aptos" pitchFamily="34" charset="-122"/>
-                <a:cs typeface="Aptos" pitchFamily="34" charset="-120"/>
-              </a:rPr>
-              <a:t>CDC Public Health Data Strategy and Data Modernization resources:.</a:t>
-            </a:r>
-            <a:endParaRPr lang="en-US" sz="1700" dirty="0"/>
-          </a:p>
-        </p:txBody>
-      </p:sp>
-      <p:sp>
-        <p:nvSpPr>
-          <p:cNvPr id="11" name="Shape 9"/>
+            <a:endParaRPr lang="en-US" sz="2100" dirty="0"/>
+          </a:p>
+        </p:txBody>
+      </p:sp>
+      <p:sp>
+        <p:nvSpPr>
+          <p:cNvPr id="12" name="Shape 10"/>
           <p:cNvSpPr/>
           <p:nvPr/>
         </p:nvSpPr>
@@ -8373,14 +8746,14 @@
       </p:sp>
       <p:sp>
         <p:nvSpPr>
-          <p:cNvPr id="12" name="Text 10"/>
+          <p:cNvPr id="13" name="Text 11"/>
           <p:cNvSpPr/>
           <p:nvPr/>
         </p:nvSpPr>
         <p:spPr>
           <a:xfrm>
             <a:off x="8074152" y="1563624"/>
-            <a:ext cx="2825496" cy="201168"/>
+            <a:ext cx="2825496" cy="256032"/>
           </a:xfrm>
           <a:prstGeom prst="rect">
             <a:avLst/>
@@ -8396,7 +8769,7 @@
               <a:buNone/>
             </a:pPr>
             <a:r>
-              <a:rPr lang="en-US" sz="950" b="1" dirty="0">
+              <a:rPr lang="en-US" sz="1300" b="1" dirty="0">
                 <a:solidFill>
                   <a:srgbClr val="0068B7"/>
                 </a:solidFill>
@@ -8406,20 +8779,20 @@
               </a:rPr>
               <a:t>Key idea</a:t>
             </a:r>
-            <a:endParaRPr lang="en-US" sz="950" dirty="0"/>
-          </a:p>
-        </p:txBody>
-      </p:sp>
-      <p:sp>
-        <p:nvSpPr>
-          <p:cNvPr id="13" name="Text 11"/>
-          <p:cNvSpPr/>
-          <p:nvPr/>
-        </p:nvSpPr>
-        <p:spPr>
-          <a:xfrm>
-            <a:off x="8074152" y="1856232"/>
-            <a:ext cx="2825496" cy="1261872"/>
+            <a:endParaRPr lang="en-US" sz="1300" dirty="0"/>
+          </a:p>
+        </p:txBody>
+      </p:sp>
+      <p:sp>
+        <p:nvSpPr>
+          <p:cNvPr id="14" name="Text 12"/>
+          <p:cNvSpPr/>
+          <p:nvPr/>
+        </p:nvSpPr>
+        <p:spPr>
+          <a:xfrm>
+            <a:off x="8074152" y="1920240"/>
+            <a:ext cx="2825496" cy="1188720"/>
           </a:xfrm>
           <a:prstGeom prst="rect">
             <a:avLst/>
@@ -8437,7 +8810,7 @@
               <a:buNone/>
             </a:pPr>
             <a:r>
-              <a:rPr lang="en-US" sz="1250" dirty="0">
+              <a:rPr lang="en-US" sz="1550" dirty="0">
                 <a:solidFill>
                   <a:srgbClr val="17364A"/>
                 </a:solidFill>
@@ -8445,15 +8818,15 @@
                 <a:ea typeface="Aptos" pitchFamily="34" charset="-122"/>
                 <a:cs typeface="Aptos" pitchFamily="34" charset="-120"/>
               </a:rPr>
-              <a:t>NIST Artificial Intelligence Risk Management Framework (AI RMF 1.0): https://www.nist.gov/itl/ai-risk-management-framework</a:t>
-            </a:r>
-            <a:endParaRPr lang="en-US" sz="1250" dirty="0"/>
-          </a:p>
-        </p:txBody>
-      </p:sp>
-      <p:sp>
-        <p:nvSpPr>
-          <p:cNvPr id="14" name="Shape 12"/>
+              <a:t>NIST Artificial Intelligence Risk Management Framework (AI RMF 1.0):.</a:t>
+            </a:r>
+            <a:endParaRPr lang="en-US" sz="1550" dirty="0"/>
+          </a:p>
+        </p:txBody>
+      </p:sp>
+      <p:sp>
+        <p:nvSpPr>
+          <p:cNvPr id="15" name="Shape 13"/>
           <p:cNvSpPr/>
           <p:nvPr/>
         </p:nvSpPr>
@@ -8480,14 +8853,14 @@
       </p:sp>
       <p:sp>
         <p:nvSpPr>
-          <p:cNvPr id="15" name="Text 13"/>
+          <p:cNvPr id="16" name="Text 14"/>
           <p:cNvSpPr/>
           <p:nvPr/>
         </p:nvSpPr>
         <p:spPr>
           <a:xfrm>
             <a:off x="8074152" y="3666744"/>
-            <a:ext cx="2825496" cy="201168"/>
+            <a:ext cx="2825496" cy="256032"/>
           </a:xfrm>
           <a:prstGeom prst="rect">
             <a:avLst/>
@@ -8503,7 +8876,7 @@
               <a:buNone/>
             </a:pPr>
             <a:r>
-              <a:rPr lang="en-US" sz="950" b="1" dirty="0">
+              <a:rPr lang="en-US" sz="1300" b="1" dirty="0">
                 <a:solidFill>
                   <a:srgbClr val="0068B7"/>
                 </a:solidFill>
@@ -8513,20 +8886,20 @@
               </a:rPr>
               <a:t>Use this for</a:t>
             </a:r>
-            <a:endParaRPr lang="en-US" sz="950" dirty="0"/>
-          </a:p>
-        </p:txBody>
-      </p:sp>
-      <p:sp>
-        <p:nvSpPr>
-          <p:cNvPr id="16" name="Text 14"/>
-          <p:cNvSpPr/>
-          <p:nvPr/>
-        </p:nvSpPr>
-        <p:spPr>
-          <a:xfrm>
-            <a:off x="8074152" y="3959352"/>
-            <a:ext cx="2825496" cy="1170432"/>
+            <a:endParaRPr lang="en-US" sz="1300" dirty="0"/>
+          </a:p>
+        </p:txBody>
+      </p:sp>
+      <p:sp>
+        <p:nvSpPr>
+          <p:cNvPr id="17" name="Text 15"/>
+          <p:cNvSpPr/>
+          <p:nvPr/>
+        </p:nvSpPr>
+        <p:spPr>
+          <a:xfrm>
+            <a:off x="8074152" y="4023360"/>
+            <a:ext cx="2825496" cy="1097280"/>
           </a:xfrm>
           <a:prstGeom prst="rect">
             <a:avLst/>
@@ -8544,7 +8917,7 @@
               <a:buNone/>
             </a:pPr>
             <a:r>
-              <a:rPr lang="en-US" sz="1250" dirty="0">
+              <a:rPr lang="en-US" sz="1550" dirty="0">
                 <a:solidFill>
                   <a:srgbClr val="17364A"/>
                 </a:solidFill>
@@ -8554,7 +8927,7 @@
               </a:rPr>
               <a:t>Connect the concept to public health decisions, safeguards, documentation, or implementation work.</a:t>
             </a:r>
-            <a:endParaRPr lang="en-US" sz="1250" dirty="0"/>
+            <a:endParaRPr lang="en-US" sz="1550" dirty="0"/>
           </a:p>
         </p:txBody>
       </p:sp>
@@ -8751,7 +9124,7 @@
                 <a:ea typeface="Aptos" pitchFamily="34" charset="-122"/>
                 <a:cs typeface="Aptos" pitchFamily="34" charset="-120"/>
               </a:rPr>
-              <a:t>© Paula Soper</a:t>
+              <a:t>Â© Paula Soper</a:t>
             </a:r>
             <a:endParaRPr lang="en-US" sz="800" dirty="0"/>
           </a:p>
@@ -8765,8 +9138,47 @@
         </p:nvSpPr>
         <p:spPr>
           <a:xfrm>
+            <a:off x="11137392" y="6510528"/>
+            <a:ext cx="411480" cy="201168"/>
+          </a:xfrm>
+          <a:prstGeom prst="rect">
+            <a:avLst/>
+          </a:prstGeom>
+          <a:noFill/>
+          <a:ln/>
+        </p:spPr>
+        <p:txBody>
+          <a:bodyPr wrap="square" lIns="0" tIns="0" rIns="0" bIns="0" rtlCol="0" anchor="ctr"/>
+          <a:lstStyle/>
+          <a:p>
+            <a:pPr algn="r" indent="0" marL="0">
+              <a:buNone/>
+            </a:pPr>
+            <a:r>
+              <a:rPr lang="en-US" sz="900" dirty="0">
+                <a:solidFill>
+                  <a:srgbClr val="5F7181"/>
+                </a:solidFill>
+                <a:latin typeface="Aptos" pitchFamily="34" charset="0"/>
+                <a:ea typeface="Aptos" pitchFamily="34" charset="-122"/>
+                <a:cs typeface="Aptos" pitchFamily="34" charset="-120"/>
+              </a:rPr>
+              <a:t>2</a:t>
+            </a:r>
+            <a:endParaRPr lang="en-US" sz="900" dirty="0"/>
+          </a:p>
+        </p:txBody>
+      </p:sp>
+      <p:sp>
+        <p:nvSpPr>
+          <p:cNvPr id="8" name="Text 6"/>
+          <p:cNvSpPr/>
+          <p:nvPr/>
+        </p:nvSpPr>
+        <p:spPr>
+          <a:xfrm>
             <a:off x="640080" y="658368"/>
-            <a:ext cx="10881360" cy="566928"/>
+            <a:ext cx="10881360" cy="713232"/>
           </a:xfrm>
           <a:prstGeom prst="rect">
             <a:avLst/>
@@ -8784,7 +9196,7 @@
               <a:buNone/>
             </a:pPr>
             <a:r>
-              <a:rPr lang="en-US" sz="2700" b="1" dirty="0">
+              <a:rPr lang="en-US" sz="3400" b="1" dirty="0">
                 <a:solidFill>
                   <a:srgbClr val="003A63"/>
                 </a:solidFill>
@@ -8794,20 +9206,20 @@
               </a:rPr>
               <a:t>What this module helps you do</a:t>
             </a:r>
-            <a:endParaRPr lang="en-US" sz="2700" dirty="0"/>
-          </a:p>
-        </p:txBody>
-      </p:sp>
-      <p:sp>
-        <p:nvSpPr>
-          <p:cNvPr id="8" name="Text 6"/>
-          <p:cNvSpPr/>
-          <p:nvPr/>
-        </p:nvSpPr>
-        <p:spPr>
-          <a:xfrm>
-            <a:off x="868680" y="1417320"/>
-            <a:ext cx="6675120" cy="3291840"/>
+            <a:endParaRPr lang="en-US" sz="3400" dirty="0"/>
+          </a:p>
+        </p:txBody>
+      </p:sp>
+      <p:sp>
+        <p:nvSpPr>
+          <p:cNvPr id="9" name="Text 7"/>
+          <p:cNvSpPr/>
+          <p:nvPr/>
+        </p:nvSpPr>
+        <p:spPr>
+          <a:xfrm>
+            <a:off x="868680" y="1508760"/>
+            <a:ext cx="6446520" cy="2926080"/>
           </a:xfrm>
           <a:prstGeom prst="rect">
             <a:avLst/>
@@ -8822,7 +9234,7 @@
           <a:lstStyle/>
           <a:p>
             <a:r>
-              <a:rPr lang="en-US" sz="1700" dirty="0">
+              <a:rPr lang="en-US" sz="2100" dirty="0">
                 <a:solidFill>
                   <a:srgbClr val="17364A"/>
                 </a:solidFill>
@@ -8832,11 +9244,11 @@
               </a:rPr>
               <a:t>AI changes the skills, roles, and collaboration patterns needed in public health agencies.</a:t>
             </a:r>
-            <a:endParaRPr lang="en-US" sz="1700" dirty="0"/>
-          </a:p>
-          <a:p>
-            <a:r>
-              <a:rPr lang="en-US" sz="1700" dirty="0">
+            <a:endParaRPr lang="en-US" sz="2100" dirty="0"/>
+          </a:p>
+          <a:p>
+            <a:r>
+              <a:rPr lang="en-US" sz="2100" dirty="0">
                 <a:solidFill>
                   <a:srgbClr val="17364A"/>
                 </a:solidFill>
@@ -8846,11 +9258,11 @@
               </a:rPr>
               <a:t>It does not eliminate the need for public health expertise.</a:t>
             </a:r>
-            <a:endParaRPr lang="en-US" sz="1700" dirty="0"/>
-          </a:p>
-          <a:p>
-            <a:r>
-              <a:rPr lang="en-US" sz="1700" dirty="0">
+            <a:endParaRPr lang="en-US" sz="2100" dirty="0"/>
+          </a:p>
+          <a:p>
+            <a:r>
+              <a:rPr lang="en-US" sz="2100" dirty="0">
                 <a:solidFill>
                   <a:srgbClr val="17364A"/>
                 </a:solidFill>
@@ -8858,29 +9270,15 @@
                 <a:ea typeface="Aptos" pitchFamily="34" charset="-122"/>
                 <a:cs typeface="Aptos" pitchFamily="34" charset="-120"/>
               </a:rPr>
-              <a:t>Instead, it increases the need for staff who can translate across program, data, technology, privacy, legal, equity, procurement, and community.</a:t>
-            </a:r>
-            <a:endParaRPr lang="en-US" sz="1700" dirty="0"/>
-          </a:p>
-          <a:p>
-            <a:r>
-              <a:rPr lang="en-US" sz="1700" dirty="0">
-                <a:solidFill>
-                  <a:srgbClr val="17364A"/>
-                </a:solidFill>
-                <a:latin typeface="Aptos" pitchFamily="34" charset="0"/>
-                <a:ea typeface="Aptos" pitchFamily="34" charset="-122"/>
-                <a:cs typeface="Aptos" pitchFamily="34" charset="-120"/>
-              </a:rPr>
-              <a:t>Leaders need a workforce strategy that prepares staff to use, review, govern, and improve AI-supported workflows.</a:t>
-            </a:r>
-            <a:endParaRPr lang="en-US" sz="1700" dirty="0"/>
-          </a:p>
-        </p:txBody>
-      </p:sp>
-      <p:sp>
-        <p:nvSpPr>
-          <p:cNvPr id="9" name="Shape 7"/>
+              <a:t>Instead, it increases the need for staff who can translate across program, data, technology, privacy, legal,.</a:t>
+            </a:r>
+            <a:endParaRPr lang="en-US" sz="2100" dirty="0"/>
+          </a:p>
+        </p:txBody>
+      </p:sp>
+      <p:sp>
+        <p:nvSpPr>
+          <p:cNvPr id="10" name="Shape 8"/>
           <p:cNvSpPr/>
           <p:nvPr/>
         </p:nvSpPr>
@@ -8907,14 +9305,14 @@
       </p:sp>
       <p:sp>
         <p:nvSpPr>
-          <p:cNvPr id="10" name="Text 8"/>
+          <p:cNvPr id="11" name="Text 9"/>
           <p:cNvSpPr/>
           <p:nvPr/>
         </p:nvSpPr>
         <p:spPr>
           <a:xfrm>
             <a:off x="8074152" y="1563624"/>
-            <a:ext cx="2825496" cy="201168"/>
+            <a:ext cx="2825496" cy="256032"/>
           </a:xfrm>
           <a:prstGeom prst="rect">
             <a:avLst/>
@@ -8930,7 +9328,7 @@
               <a:buNone/>
             </a:pPr>
             <a:r>
-              <a:rPr lang="en-US" sz="950" b="1" dirty="0">
+              <a:rPr lang="en-US" sz="1300" b="1" dirty="0">
                 <a:solidFill>
                   <a:srgbClr val="0068B7"/>
                 </a:solidFill>
@@ -8940,20 +9338,20 @@
               </a:rPr>
               <a:t>Module details</a:t>
             </a:r>
-            <a:endParaRPr lang="en-US" sz="950" dirty="0"/>
-          </a:p>
-        </p:txBody>
-      </p:sp>
-      <p:sp>
-        <p:nvSpPr>
-          <p:cNvPr id="11" name="Text 9"/>
-          <p:cNvSpPr/>
-          <p:nvPr/>
-        </p:nvSpPr>
-        <p:spPr>
-          <a:xfrm>
-            <a:off x="8074152" y="1856232"/>
-            <a:ext cx="2825496" cy="1353312"/>
+            <a:endParaRPr lang="en-US" sz="1300" dirty="0"/>
+          </a:p>
+        </p:txBody>
+      </p:sp>
+      <p:sp>
+        <p:nvSpPr>
+          <p:cNvPr id="12" name="Text 10"/>
+          <p:cNvSpPr/>
+          <p:nvPr/>
+        </p:nvSpPr>
+        <p:spPr>
+          <a:xfrm>
+            <a:off x="8074152" y="1920240"/>
+            <a:ext cx="2825496" cy="1280160"/>
           </a:xfrm>
           <a:prstGeom prst="rect">
             <a:avLst/>
@@ -8971,7 +9369,7 @@
               <a:buNone/>
             </a:pPr>
             <a:r>
-              <a:rPr lang="en-US" sz="1250" dirty="0">
+              <a:rPr lang="en-US" sz="1550" dirty="0">
                 <a:solidFill>
                   <a:srgbClr val="17364A"/>
                 </a:solidFill>
@@ -8981,14 +9379,14 @@
               </a:rPr>
               <a:t>Level: advanced/leadership</a:t>
             </a:r>
-            <a:endParaRPr lang="en-US" sz="1250" dirty="0"/>
+            <a:endParaRPr lang="en-US" sz="1550" dirty="0"/>
           </a:p>
           <a:p>
             <a:pPr indent="0" marL="0">
               <a:buNone/>
             </a:pPr>
             <a:r>
-              <a:rPr lang="en-US" sz="1250" dirty="0">
+              <a:rPr lang="en-US" sz="1550" dirty="0">
                 <a:solidFill>
                   <a:srgbClr val="17364A"/>
                 </a:solidFill>
@@ -8998,14 +9396,14 @@
               </a:rPr>
               <a:t>Primary track: Public Health Executive Leadership Track</a:t>
             </a:r>
-            <a:endParaRPr lang="en-US" sz="1250" dirty="0"/>
+            <a:endParaRPr lang="en-US" sz="1550" dirty="0"/>
           </a:p>
           <a:p>
             <a:pPr indent="0" marL="0">
               <a:buNone/>
             </a:pPr>
             <a:r>
-              <a:rPr lang="en-US" sz="1250" dirty="0">
+              <a:rPr lang="en-US" sz="1550" dirty="0">
                 <a:solidFill>
                   <a:srgbClr val="17364A"/>
                 </a:solidFill>
@@ -9015,32 +9413,32 @@
               </a:rPr>
               <a:t>Appears in tracks: governance-security</a:t>
             </a:r>
-            <a:endParaRPr lang="en-US" sz="1250" dirty="0"/>
-          </a:p>
-        </p:txBody>
-      </p:sp>
-      <p:sp>
-        <p:nvSpPr>
-          <p:cNvPr id="12" name="Shape 10"/>
-          <p:cNvSpPr/>
-          <p:nvPr/>
-        </p:nvSpPr>
-        <p:spPr>
-          <a:xfrm>
-            <a:off x="7909560" y="3611880"/>
-            <a:ext cx="3154680" cy="1783080"/>
+            <a:endParaRPr lang="en-US" sz="1550" dirty="0"/>
+          </a:p>
+        </p:txBody>
+      </p:sp>
+      <p:sp>
+        <p:nvSpPr>
+          <p:cNvPr id="13" name="Shape 11"/>
+          <p:cNvSpPr/>
+          <p:nvPr/>
+        </p:nvSpPr>
+        <p:spPr>
+          <a:xfrm>
+            <a:off x="7635240" y="3730752"/>
+            <a:ext cx="1033272" cy="749808"/>
           </a:xfrm>
           <a:prstGeom prst="roundRect">
             <a:avLst>
-              <a:gd name="adj" fmla="val 6154"/>
+              <a:gd name="adj" fmla="val 14634"/>
             </a:avLst>
           </a:prstGeom>
           <a:solidFill>
-            <a:srgbClr val="EEF8ED"/>
+            <a:srgbClr val="0068B7"/>
           </a:solidFill>
           <a:ln w="12700">
             <a:solidFill>
-              <a:srgbClr val="B9D7E6"/>
+              <a:srgbClr val="0068B7"/>
             </a:solidFill>
             <a:prstDash val="solid"/>
           </a:ln>
@@ -9048,81 +9446,256 @@
       </p:sp>
       <p:sp>
         <p:nvSpPr>
-          <p:cNvPr id="13" name="Text 11"/>
-          <p:cNvSpPr/>
-          <p:nvPr/>
-        </p:nvSpPr>
-        <p:spPr>
-          <a:xfrm>
-            <a:off x="8074152" y="3758184"/>
-            <a:ext cx="2825496" cy="201168"/>
-          </a:xfrm>
-          <a:prstGeom prst="rect">
-            <a:avLst/>
-          </a:prstGeom>
-          <a:noFill/>
-          <a:ln/>
-        </p:spPr>
-        <p:txBody>
-          <a:bodyPr wrap="square" lIns="0" tIns="0" rIns="0" bIns="0" rtlCol="0" anchor="ctr"/>
-          <a:lstStyle/>
-          <a:p>
-            <a:pPr indent="0" marL="0">
-              <a:buNone/>
-            </a:pPr>
-            <a:r>
-              <a:rPr lang="en-US" sz="950" b="1" dirty="0">
-                <a:solidFill>
-                  <a:srgbClr val="0068B7"/>
-                </a:solidFill>
-                <a:latin typeface="Aptos" pitchFamily="34" charset="0"/>
-                <a:ea typeface="Aptos" pitchFamily="34" charset="-122"/>
-                <a:cs typeface="Aptos" pitchFamily="34" charset="-120"/>
-              </a:rPr>
-              <a:t>Learning approach</a:t>
-            </a:r>
-            <a:endParaRPr lang="en-US" sz="950" dirty="0"/>
-          </a:p>
-        </p:txBody>
-      </p:sp>
-      <p:sp>
-        <p:nvSpPr>
           <p:cNvPr id="14" name="Text 12"/>
           <p:cNvSpPr/>
           <p:nvPr/>
         </p:nvSpPr>
         <p:spPr>
           <a:xfrm>
-            <a:off x="8074152" y="4050792"/>
-            <a:ext cx="2825496" cy="1216152"/>
-          </a:xfrm>
-          <a:prstGeom prst="rect">
-            <a:avLst/>
-          </a:prstGeom>
-          <a:noFill/>
-          <a:ln/>
-        </p:spPr>
-        <p:txBody>
-          <a:bodyPr wrap="square" lIns="0" tIns="0" rIns="0" bIns="0" rtlCol="0" anchor="t">
+            <a:off x="7708392" y="3922776"/>
+            <a:ext cx="886968" cy="310896"/>
+          </a:xfrm>
+          <a:prstGeom prst="rect">
+            <a:avLst/>
+          </a:prstGeom>
+          <a:noFill/>
+          <a:ln/>
+        </p:spPr>
+        <p:txBody>
+          <a:bodyPr wrap="square" lIns="0" tIns="0" rIns="0" bIns="0" rtlCol="0" anchor="ctr">
             <a:normAutofit/>
           </a:bodyPr>
           <a:lstStyle/>
           <a:p>
-            <a:pPr indent="0" marL="0">
-              <a:buNone/>
-            </a:pPr>
-            <a:r>
-              <a:rPr lang="en-US" sz="1250" dirty="0">
-                <a:solidFill>
-                  <a:srgbClr val="17364A"/>
-                </a:solidFill>
-                <a:latin typeface="Aptos" pitchFamily="34" charset="0"/>
-                <a:ea typeface="Aptos" pitchFamily="34" charset="-122"/>
-                <a:cs typeface="Aptos" pitchFamily="34" charset="-120"/>
-              </a:rPr>
-              <a:t>Review the core ideas, complete the practical exercise, check your understanding, and use the related plays and tools to apply the lesson.</a:t>
-            </a:r>
-            <a:endParaRPr lang="en-US" sz="1250" dirty="0"/>
+            <a:pPr algn="ctr" indent="0" marL="0">
+              <a:buNone/>
+            </a:pPr>
+            <a:r>
+              <a:rPr lang="en-US" sz="1500" b="1" dirty="0">
+                <a:solidFill>
+                  <a:srgbClr val="FFFFFF"/>
+                </a:solidFill>
+                <a:latin typeface="Aptos" pitchFamily="34" charset="0"/>
+                <a:ea typeface="Aptos" pitchFamily="34" charset="-122"/>
+                <a:cs typeface="Aptos" pitchFamily="34" charset="-120"/>
+              </a:rPr>
+              <a:t>Learn</a:t>
+            </a:r>
+            <a:endParaRPr lang="en-US" sz="1500" dirty="0"/>
+          </a:p>
+        </p:txBody>
+      </p:sp>
+      <p:sp>
+        <p:nvSpPr>
+          <p:cNvPr id="15" name="Text 13"/>
+          <p:cNvSpPr/>
+          <p:nvPr/>
+        </p:nvSpPr>
+        <p:spPr>
+          <a:xfrm>
+            <a:off x="8695944" y="3941064"/>
+            <a:ext cx="201168" cy="256032"/>
+          </a:xfrm>
+          <a:prstGeom prst="rect">
+            <a:avLst/>
+          </a:prstGeom>
+          <a:noFill/>
+          <a:ln/>
+        </p:spPr>
+        <p:txBody>
+          <a:bodyPr wrap="square" lIns="0" tIns="0" rIns="0" bIns="0" rtlCol="0" anchor="ctr"/>
+          <a:lstStyle/>
+          <a:p>
+            <a:pPr algn="ctr" indent="0" marL="0">
+              <a:buNone/>
+            </a:pPr>
+            <a:r>
+              <a:rPr lang="en-US" sz="1800" b="1" dirty="0">
+                <a:solidFill>
+                  <a:srgbClr val="0068B7"/>
+                </a:solidFill>
+                <a:latin typeface="Aptos" pitchFamily="34" charset="0"/>
+                <a:ea typeface="Aptos" pitchFamily="34" charset="-122"/>
+                <a:cs typeface="Aptos" pitchFamily="34" charset="-120"/>
+              </a:rPr>
+              <a:t>â†’</a:t>
+            </a:r>
+            <a:endParaRPr lang="en-US" sz="1800" dirty="0"/>
+          </a:p>
+        </p:txBody>
+      </p:sp>
+      <p:sp>
+        <p:nvSpPr>
+          <p:cNvPr id="16" name="Shape 14"/>
+          <p:cNvSpPr/>
+          <p:nvPr/>
+        </p:nvSpPr>
+        <p:spPr>
+          <a:xfrm>
+            <a:off x="8924544" y="3730752"/>
+            <a:ext cx="1033272" cy="749808"/>
+          </a:xfrm>
+          <a:prstGeom prst="roundRect">
+            <a:avLst>
+              <a:gd name="adj" fmla="val 14634"/>
+            </a:avLst>
+          </a:prstGeom>
+          <a:solidFill>
+            <a:srgbClr val="2F8A28"/>
+          </a:solidFill>
+          <a:ln w="12700">
+            <a:solidFill>
+              <a:srgbClr val="2F8A28"/>
+            </a:solidFill>
+            <a:prstDash val="solid"/>
+          </a:ln>
+        </p:spPr>
+      </p:sp>
+      <p:sp>
+        <p:nvSpPr>
+          <p:cNvPr id="17" name="Text 15"/>
+          <p:cNvSpPr/>
+          <p:nvPr/>
+        </p:nvSpPr>
+        <p:spPr>
+          <a:xfrm>
+            <a:off x="8997696" y="3922776"/>
+            <a:ext cx="886968" cy="310896"/>
+          </a:xfrm>
+          <a:prstGeom prst="rect">
+            <a:avLst/>
+          </a:prstGeom>
+          <a:noFill/>
+          <a:ln/>
+        </p:spPr>
+        <p:txBody>
+          <a:bodyPr wrap="square" lIns="0" tIns="0" rIns="0" bIns="0" rtlCol="0" anchor="ctr">
+            <a:normAutofit/>
+          </a:bodyPr>
+          <a:lstStyle/>
+          <a:p>
+            <a:pPr algn="ctr" indent="0" marL="0">
+              <a:buNone/>
+            </a:pPr>
+            <a:r>
+              <a:rPr lang="en-US" sz="1500" b="1" dirty="0">
+                <a:solidFill>
+                  <a:srgbClr val="FFFFFF"/>
+                </a:solidFill>
+                <a:latin typeface="Aptos" pitchFamily="34" charset="0"/>
+                <a:ea typeface="Aptos" pitchFamily="34" charset="-122"/>
+                <a:cs typeface="Aptos" pitchFamily="34" charset="-120"/>
+              </a:rPr>
+              <a:t>Apply</a:t>
+            </a:r>
+            <a:endParaRPr lang="en-US" sz="1500" dirty="0"/>
+          </a:p>
+        </p:txBody>
+      </p:sp>
+      <p:sp>
+        <p:nvSpPr>
+          <p:cNvPr id="18" name="Text 16"/>
+          <p:cNvSpPr/>
+          <p:nvPr/>
+        </p:nvSpPr>
+        <p:spPr>
+          <a:xfrm>
+            <a:off x="9985248" y="3941064"/>
+            <a:ext cx="201168" cy="256032"/>
+          </a:xfrm>
+          <a:prstGeom prst="rect">
+            <a:avLst/>
+          </a:prstGeom>
+          <a:noFill/>
+          <a:ln/>
+        </p:spPr>
+        <p:txBody>
+          <a:bodyPr wrap="square" lIns="0" tIns="0" rIns="0" bIns="0" rtlCol="0" anchor="ctr"/>
+          <a:lstStyle/>
+          <a:p>
+            <a:pPr algn="ctr" indent="0" marL="0">
+              <a:buNone/>
+            </a:pPr>
+            <a:r>
+              <a:rPr lang="en-US" sz="1800" b="1" dirty="0">
+                <a:solidFill>
+                  <a:srgbClr val="0068B7"/>
+                </a:solidFill>
+                <a:latin typeface="Aptos" pitchFamily="34" charset="0"/>
+                <a:ea typeface="Aptos" pitchFamily="34" charset="-122"/>
+                <a:cs typeface="Aptos" pitchFamily="34" charset="-120"/>
+              </a:rPr>
+              <a:t>â†’</a:t>
+            </a:r>
+            <a:endParaRPr lang="en-US" sz="1800" dirty="0"/>
+          </a:p>
+        </p:txBody>
+      </p:sp>
+      <p:sp>
+        <p:nvSpPr>
+          <p:cNvPr id="19" name="Shape 17"/>
+          <p:cNvSpPr/>
+          <p:nvPr/>
+        </p:nvSpPr>
+        <p:spPr>
+          <a:xfrm>
+            <a:off x="10213848" y="3730752"/>
+            <a:ext cx="1033272" cy="749808"/>
+          </a:xfrm>
+          <a:prstGeom prst="roundRect">
+            <a:avLst>
+              <a:gd name="adj" fmla="val 14634"/>
+            </a:avLst>
+          </a:prstGeom>
+          <a:solidFill>
+            <a:srgbClr val="6A4CA3"/>
+          </a:solidFill>
+          <a:ln w="12700">
+            <a:solidFill>
+              <a:srgbClr val="6A4CA3"/>
+            </a:solidFill>
+            <a:prstDash val="solid"/>
+          </a:ln>
+        </p:spPr>
+      </p:sp>
+      <p:sp>
+        <p:nvSpPr>
+          <p:cNvPr id="20" name="Text 18"/>
+          <p:cNvSpPr/>
+          <p:nvPr/>
+        </p:nvSpPr>
+        <p:spPr>
+          <a:xfrm>
+            <a:off x="10287000" y="3922776"/>
+            <a:ext cx="886968" cy="310896"/>
+          </a:xfrm>
+          <a:prstGeom prst="rect">
+            <a:avLst/>
+          </a:prstGeom>
+          <a:noFill/>
+          <a:ln/>
+        </p:spPr>
+        <p:txBody>
+          <a:bodyPr wrap="square" lIns="0" tIns="0" rIns="0" bIns="0" rtlCol="0" anchor="ctr">
+            <a:normAutofit/>
+          </a:bodyPr>
+          <a:lstStyle/>
+          <a:p>
+            <a:pPr algn="ctr" indent="0" marL="0">
+              <a:buNone/>
+            </a:pPr>
+            <a:r>
+              <a:rPr lang="en-US" sz="1500" b="1" dirty="0">
+                <a:solidFill>
+                  <a:srgbClr val="FFFFFF"/>
+                </a:solidFill>
+                <a:latin typeface="Aptos" pitchFamily="34" charset="0"/>
+                <a:ea typeface="Aptos" pitchFamily="34" charset="-122"/>
+                <a:cs typeface="Aptos" pitchFamily="34" charset="-120"/>
+              </a:rPr>
+              <a:t>Document</a:t>
+            </a:r>
+            <a:endParaRPr lang="en-US" sz="1500" dirty="0"/>
           </a:p>
         </p:txBody>
       </p:sp>
@@ -9319,7 +9892,7 @@
                 <a:ea typeface="Aptos" pitchFamily="34" charset="-122"/>
                 <a:cs typeface="Aptos" pitchFamily="34" charset="-120"/>
               </a:rPr>
-              <a:t>© Paula Soper</a:t>
+              <a:t>Â© Paula Soper</a:t>
             </a:r>
             <a:endParaRPr lang="en-US" sz="800" dirty="0"/>
           </a:p>
@@ -9333,8 +9906,47 @@
         </p:nvSpPr>
         <p:spPr>
           <a:xfrm>
+            <a:off x="11137392" y="6510528"/>
+            <a:ext cx="411480" cy="201168"/>
+          </a:xfrm>
+          <a:prstGeom prst="rect">
+            <a:avLst/>
+          </a:prstGeom>
+          <a:noFill/>
+          <a:ln/>
+        </p:spPr>
+        <p:txBody>
+          <a:bodyPr wrap="square" lIns="0" tIns="0" rIns="0" bIns="0" rtlCol="0" anchor="ctr"/>
+          <a:lstStyle/>
+          <a:p>
+            <a:pPr algn="r" indent="0" marL="0">
+              <a:buNone/>
+            </a:pPr>
+            <a:r>
+              <a:rPr lang="en-US" sz="900" dirty="0">
+                <a:solidFill>
+                  <a:srgbClr val="5F7181"/>
+                </a:solidFill>
+                <a:latin typeface="Aptos" pitchFamily="34" charset="0"/>
+                <a:ea typeface="Aptos" pitchFamily="34" charset="-122"/>
+                <a:cs typeface="Aptos" pitchFamily="34" charset="-120"/>
+              </a:rPr>
+              <a:t>20</a:t>
+            </a:r>
+            <a:endParaRPr lang="en-US" sz="900" dirty="0"/>
+          </a:p>
+        </p:txBody>
+      </p:sp>
+      <p:sp>
+        <p:nvSpPr>
+          <p:cNvPr id="8" name="Text 6"/>
+          <p:cNvSpPr/>
+          <p:nvPr/>
+        </p:nvSpPr>
+        <p:spPr>
+          <a:xfrm>
             <a:off x="640080" y="658368"/>
-            <a:ext cx="10881360" cy="566928"/>
+            <a:ext cx="10881360" cy="713232"/>
           </a:xfrm>
           <a:prstGeom prst="rect">
             <a:avLst/>
@@ -9352,7 +9964,7 @@
               <a:buNone/>
             </a:pPr>
             <a:r>
-              <a:rPr lang="en-US" sz="2700" b="1" dirty="0">
+              <a:rPr lang="en-US" sz="3400" b="1" dirty="0">
                 <a:solidFill>
                   <a:srgbClr val="003A63"/>
                 </a:solidFill>
@@ -9362,20 +9974,20 @@
               </a:rPr>
               <a:t>References and Resources Continued</a:t>
             </a:r>
-            <a:endParaRPr lang="en-US" sz="2700" dirty="0"/>
-          </a:p>
-        </p:txBody>
-      </p:sp>
-      <p:sp>
-        <p:nvSpPr>
-          <p:cNvPr id="8" name="Text 6"/>
-          <p:cNvSpPr/>
-          <p:nvPr/>
-        </p:nvSpPr>
-        <p:spPr>
-          <a:xfrm>
-            <a:off x="868680" y="1417320"/>
-            <a:ext cx="6675120" cy="4434840"/>
+            <a:endParaRPr lang="en-US" sz="3400" dirty="0"/>
+          </a:p>
+        </p:txBody>
+      </p:sp>
+      <p:sp>
+        <p:nvSpPr>
+          <p:cNvPr id="9" name="Text 7"/>
+          <p:cNvSpPr/>
+          <p:nvPr/>
+        </p:nvSpPr>
+        <p:spPr>
+          <a:xfrm>
+            <a:off x="868680" y="1508760"/>
+            <a:ext cx="6537960" cy="4160520"/>
           </a:xfrm>
           <a:prstGeom prst="rect">
             <a:avLst/>
@@ -9390,7 +10002,7 @@
           <a:lstStyle/>
           <a:p>
             <a:r>
-              <a:rPr lang="en-US" sz="1700" dirty="0">
+              <a:rPr lang="en-US" sz="2100" dirty="0">
                 <a:solidFill>
                   <a:srgbClr val="17364A"/>
                 </a:solidFill>
@@ -9398,13 +10010,13 @@
                 <a:ea typeface="Aptos" pitchFamily="34" charset="-122"/>
                 <a:cs typeface="Aptos" pitchFamily="34" charset="-120"/>
               </a:rPr>
-              <a:t>OMB Memorandum M-24-10 on federal AI governance, risk management, and innovation, where relevant to public-sector governance.</a:t>
-            </a:r>
-            <a:endParaRPr lang="en-US" sz="1700" dirty="0"/>
-          </a:p>
-          <a:p>
-            <a:r>
-              <a:rPr lang="en-US" sz="1700" dirty="0">
+              <a:t>OMB Memorandum M-24-10 on federal AI governance, risk management, and innovation, where relevant to.</a:t>
+            </a:r>
+            <a:endParaRPr lang="en-US" sz="2100" dirty="0"/>
+          </a:p>
+          <a:p>
+            <a:r>
+              <a:rPr lang="en-US" sz="2100" dirty="0">
                 <a:solidFill>
                   <a:srgbClr val="17364A"/>
                 </a:solidFill>
@@ -9412,15 +10024,15 @@
                 <a:ea typeface="Aptos" pitchFamily="34" charset="-122"/>
                 <a:cs typeface="Aptos" pitchFamily="34" charset="-120"/>
               </a:rPr>
-              <a:t>Agency strategic plans, procurement policies, privacy policies, cybersecurity policies, records policies, and equity plans</a:t>
-            </a:r>
-            <a:endParaRPr lang="en-US" sz="1700" dirty="0"/>
-          </a:p>
-        </p:txBody>
-      </p:sp>
-      <p:sp>
-        <p:nvSpPr>
-          <p:cNvPr id="9" name="Shape 7"/>
+              <a:t>Agency strategic plans, procurement policies, privacy policies, cybersecurity policies, records.</a:t>
+            </a:r>
+            <a:endParaRPr lang="en-US" sz="2100" dirty="0"/>
+          </a:p>
+        </p:txBody>
+      </p:sp>
+      <p:sp>
+        <p:nvSpPr>
+          <p:cNvPr id="10" name="Shape 8"/>
           <p:cNvSpPr/>
           <p:nvPr/>
         </p:nvSpPr>
@@ -9447,14 +10059,14 @@
       </p:sp>
       <p:sp>
         <p:nvSpPr>
-          <p:cNvPr id="10" name="Text 8"/>
+          <p:cNvPr id="11" name="Text 9"/>
           <p:cNvSpPr/>
           <p:nvPr/>
         </p:nvSpPr>
         <p:spPr>
           <a:xfrm>
             <a:off x="8074152" y="1563624"/>
-            <a:ext cx="2825496" cy="201168"/>
+            <a:ext cx="2825496" cy="256032"/>
           </a:xfrm>
           <a:prstGeom prst="rect">
             <a:avLst/>
@@ -9470,7 +10082,7 @@
               <a:buNone/>
             </a:pPr>
             <a:r>
-              <a:rPr lang="en-US" sz="950" b="1" dirty="0">
+              <a:rPr lang="en-US" sz="1300" b="1" dirty="0">
                 <a:solidFill>
                   <a:srgbClr val="0068B7"/>
                 </a:solidFill>
@@ -9480,20 +10092,20 @@
               </a:rPr>
               <a:t>Key idea</a:t>
             </a:r>
-            <a:endParaRPr lang="en-US" sz="950" dirty="0"/>
-          </a:p>
-        </p:txBody>
-      </p:sp>
-      <p:sp>
-        <p:nvSpPr>
-          <p:cNvPr id="11" name="Text 9"/>
-          <p:cNvSpPr/>
-          <p:nvPr/>
-        </p:nvSpPr>
-        <p:spPr>
-          <a:xfrm>
-            <a:off x="8074152" y="1856232"/>
-            <a:ext cx="2825496" cy="1261872"/>
+            <a:endParaRPr lang="en-US" sz="1300" dirty="0"/>
+          </a:p>
+        </p:txBody>
+      </p:sp>
+      <p:sp>
+        <p:nvSpPr>
+          <p:cNvPr id="12" name="Text 10"/>
+          <p:cNvSpPr/>
+          <p:nvPr/>
+        </p:nvSpPr>
+        <p:spPr>
+          <a:xfrm>
+            <a:off x="8074152" y="1920240"/>
+            <a:ext cx="2825496" cy="1188720"/>
           </a:xfrm>
           <a:prstGeom prst="rect">
             <a:avLst/>
@@ -9511,7 +10123,7 @@
               <a:buNone/>
             </a:pPr>
             <a:r>
-              <a:rPr lang="en-US" sz="1250" dirty="0">
+              <a:rPr lang="en-US" sz="1550" dirty="0">
                 <a:solidFill>
                   <a:srgbClr val="17364A"/>
                 </a:solidFill>
@@ -9519,15 +10131,15 @@
                 <a:ea typeface="Aptos" pitchFamily="34" charset="-122"/>
                 <a:cs typeface="Aptos" pitchFamily="34" charset="-120"/>
               </a:rPr>
-              <a:t>OMB Memorandum M-24-10 on federal AI governance, risk management, and innovation, where relevant to public-sector governance.</a:t>
-            </a:r>
-            <a:endParaRPr lang="en-US" sz="1250" dirty="0"/>
-          </a:p>
-        </p:txBody>
-      </p:sp>
-      <p:sp>
-        <p:nvSpPr>
-          <p:cNvPr id="12" name="Shape 10"/>
+              <a:t>OMB Memorandum M-24-10 on federal AI governance, risk management, and innovation, where relevant to.</a:t>
+            </a:r>
+            <a:endParaRPr lang="en-US" sz="1550" dirty="0"/>
+          </a:p>
+        </p:txBody>
+      </p:sp>
+      <p:sp>
+        <p:nvSpPr>
+          <p:cNvPr id="13" name="Shape 11"/>
           <p:cNvSpPr/>
           <p:nvPr/>
         </p:nvSpPr>
@@ -9554,14 +10166,14 @@
       </p:sp>
       <p:sp>
         <p:nvSpPr>
-          <p:cNvPr id="13" name="Text 11"/>
+          <p:cNvPr id="14" name="Text 12"/>
           <p:cNvSpPr/>
           <p:nvPr/>
         </p:nvSpPr>
         <p:spPr>
           <a:xfrm>
             <a:off x="8074152" y="3666744"/>
-            <a:ext cx="2825496" cy="201168"/>
+            <a:ext cx="2825496" cy="256032"/>
           </a:xfrm>
           <a:prstGeom prst="rect">
             <a:avLst/>
@@ -9577,7 +10189,7 @@
               <a:buNone/>
             </a:pPr>
             <a:r>
-              <a:rPr lang="en-US" sz="950" b="1" dirty="0">
+              <a:rPr lang="en-US" sz="1300" b="1" dirty="0">
                 <a:solidFill>
                   <a:srgbClr val="0068B7"/>
                 </a:solidFill>
@@ -9587,20 +10199,20 @@
               </a:rPr>
               <a:t>Use this for</a:t>
             </a:r>
-            <a:endParaRPr lang="en-US" sz="950" dirty="0"/>
-          </a:p>
-        </p:txBody>
-      </p:sp>
-      <p:sp>
-        <p:nvSpPr>
-          <p:cNvPr id="14" name="Text 12"/>
-          <p:cNvSpPr/>
-          <p:nvPr/>
-        </p:nvSpPr>
-        <p:spPr>
-          <a:xfrm>
-            <a:off x="8074152" y="3959352"/>
-            <a:ext cx="2825496" cy="1170432"/>
+            <a:endParaRPr lang="en-US" sz="1300" dirty="0"/>
+          </a:p>
+        </p:txBody>
+      </p:sp>
+      <p:sp>
+        <p:nvSpPr>
+          <p:cNvPr id="15" name="Text 13"/>
+          <p:cNvSpPr/>
+          <p:nvPr/>
+        </p:nvSpPr>
+        <p:spPr>
+          <a:xfrm>
+            <a:off x="8074152" y="4023360"/>
+            <a:ext cx="2825496" cy="1097280"/>
           </a:xfrm>
           <a:prstGeom prst="rect">
             <a:avLst/>
@@ -9618,7 +10230,7 @@
               <a:buNone/>
             </a:pPr>
             <a:r>
-              <a:rPr lang="en-US" sz="1250" dirty="0">
+              <a:rPr lang="en-US" sz="1550" dirty="0">
                 <a:solidFill>
                   <a:srgbClr val="17364A"/>
                 </a:solidFill>
@@ -9628,7 +10240,7 @@
               </a:rPr>
               <a:t>Connect the concept to public health decisions, safeguards, documentation, or implementation work.</a:t>
             </a:r>
-            <a:endParaRPr lang="en-US" sz="1250" dirty="0"/>
+            <a:endParaRPr lang="en-US" sz="1550" dirty="0"/>
           </a:p>
         </p:txBody>
       </p:sp>
@@ -9825,7 +10437,7 @@
                 <a:ea typeface="Aptos" pitchFamily="34" charset="-122"/>
                 <a:cs typeface="Aptos" pitchFamily="34" charset="-120"/>
               </a:rPr>
-              <a:t>© Paula Soper</a:t>
+              <a:t>Â© Paula Soper</a:t>
             </a:r>
             <a:endParaRPr lang="en-US" sz="800" dirty="0"/>
           </a:p>
@@ -9839,8 +10451,47 @@
         </p:nvSpPr>
         <p:spPr>
           <a:xfrm>
+            <a:off x="11137392" y="6510528"/>
+            <a:ext cx="411480" cy="201168"/>
+          </a:xfrm>
+          <a:prstGeom prst="rect">
+            <a:avLst/>
+          </a:prstGeom>
+          <a:noFill/>
+          <a:ln/>
+        </p:spPr>
+        <p:txBody>
+          <a:bodyPr wrap="square" lIns="0" tIns="0" rIns="0" bIns="0" rtlCol="0" anchor="ctr"/>
+          <a:lstStyle/>
+          <a:p>
+            <a:pPr algn="r" indent="0" marL="0">
+              <a:buNone/>
+            </a:pPr>
+            <a:r>
+              <a:rPr lang="en-US" sz="900" dirty="0">
+                <a:solidFill>
+                  <a:srgbClr val="5F7181"/>
+                </a:solidFill>
+                <a:latin typeface="Aptos" pitchFamily="34" charset="0"/>
+                <a:ea typeface="Aptos" pitchFamily="34" charset="-122"/>
+                <a:cs typeface="Aptos" pitchFamily="34" charset="-120"/>
+              </a:rPr>
+              <a:t>3</a:t>
+            </a:r>
+            <a:endParaRPr lang="en-US" sz="900" dirty="0"/>
+          </a:p>
+        </p:txBody>
+      </p:sp>
+      <p:sp>
+        <p:nvSpPr>
+          <p:cNvPr id="8" name="Text 6"/>
+          <p:cNvSpPr/>
+          <p:nvPr/>
+        </p:nvSpPr>
+        <p:spPr>
+          <a:xfrm>
             <a:off x="640080" y="658368"/>
-            <a:ext cx="10881360" cy="566928"/>
+            <a:ext cx="10881360" cy="713232"/>
           </a:xfrm>
           <a:prstGeom prst="rect">
             <a:avLst/>
@@ -9858,7 +10509,7 @@
               <a:buNone/>
             </a:pPr>
             <a:r>
-              <a:rPr lang="en-US" sz="2700" b="1" dirty="0">
+              <a:rPr lang="en-US" sz="3400" b="1" dirty="0">
                 <a:solidFill>
                   <a:srgbClr val="003A63"/>
                 </a:solidFill>
@@ -9868,20 +10519,20 @@
               </a:rPr>
               <a:t>How this module connects to the playbook</a:t>
             </a:r>
-            <a:endParaRPr lang="en-US" sz="2700" dirty="0"/>
-          </a:p>
-        </p:txBody>
-      </p:sp>
-      <p:sp>
-        <p:nvSpPr>
-          <p:cNvPr id="8" name="Text 6"/>
-          <p:cNvSpPr/>
-          <p:nvPr/>
-        </p:nvSpPr>
-        <p:spPr>
-          <a:xfrm>
-            <a:off x="868680" y="1417320"/>
-            <a:ext cx="6903720" cy="4480560"/>
+            <a:endParaRPr lang="en-US" sz="3400" dirty="0"/>
+          </a:p>
+        </p:txBody>
+      </p:sp>
+      <p:sp>
+        <p:nvSpPr>
+          <p:cNvPr id="9" name="Text 7"/>
+          <p:cNvSpPr/>
+          <p:nvPr/>
+        </p:nvSpPr>
+        <p:spPr>
+          <a:xfrm>
+            <a:off x="868680" y="1508760"/>
+            <a:ext cx="6812280" cy="3977640"/>
           </a:xfrm>
           <a:prstGeom prst="rect">
             <a:avLst/>
@@ -9896,7 +10547,7 @@
           <a:lstStyle/>
           <a:p>
             <a:r>
-              <a:rPr lang="en-US" sz="1540" dirty="0">
+              <a:rPr lang="en-US" sz="1900" dirty="0">
                 <a:solidFill>
                   <a:srgbClr val="17364A"/>
                 </a:solidFill>
@@ -9904,13 +10555,13 @@
                 <a:ea typeface="Aptos" pitchFamily="34" charset="-122"/>
                 <a:cs typeface="Aptos" pitchFamily="34" charset="-120"/>
               </a:rPr>
-              <a:t>Play 11: Build and Deploy AI Solutions - This lesson informs Play 11 by helping learners connect the lesson topic to build and deploy.</a:t>
-            </a:r>
-            <a:endParaRPr lang="en-US" sz="1540" dirty="0"/>
-          </a:p>
-          <a:p>
-            <a:r>
-              <a:rPr lang="en-US" sz="1540" dirty="0">
+              <a:t>Play 11: Build and Deploy AI Solutions - This lesson informs Play 11 by helping learners connect the lesson.</a:t>
+            </a:r>
+            <a:endParaRPr lang="en-US" sz="1900" dirty="0"/>
+          </a:p>
+          <a:p>
+            <a:r>
+              <a:rPr lang="en-US" sz="1900" dirty="0">
                 <a:solidFill>
                   <a:srgbClr val="17364A"/>
                 </a:solidFill>
@@ -9918,13 +10569,13 @@
                 <a:ea typeface="Aptos" pitchFamily="34" charset="-122"/>
                 <a:cs typeface="Aptos" pitchFamily="34" charset="-120"/>
               </a:rPr>
-              <a:t>Play 2: Readiness Assessment - This lesson informs Play 2 by helping learners connect the lesson topic to readiness assessment work.</a:t>
-            </a:r>
-            <a:endParaRPr lang="en-US" sz="1540" dirty="0"/>
-          </a:p>
-          <a:p>
-            <a:r>
-              <a:rPr lang="en-US" sz="1540" dirty="0">
+              <a:t>Play 2: Readiness Assessment - This lesson informs Play 2 by helping learners connect the lesson topic to.</a:t>
+            </a:r>
+            <a:endParaRPr lang="en-US" sz="1900" dirty="0"/>
+          </a:p>
+          <a:p>
+            <a:r>
+              <a:rPr lang="en-US" sz="1900" dirty="0">
                 <a:solidFill>
                   <a:srgbClr val="17364A"/>
                 </a:solidFill>
@@ -9932,13 +10583,13 @@
                 <a:ea typeface="Aptos" pitchFamily="34" charset="-122"/>
                 <a:cs typeface="Aptos" pitchFamily="34" charset="-120"/>
               </a:rPr>
-              <a:t>Play 3: Establish AI Governance - This lesson informs Play 3 by helping learners connect the lesson topic to establish ai governance.</a:t>
-            </a:r>
-            <a:endParaRPr lang="en-US" sz="1540" dirty="0"/>
-          </a:p>
-          <a:p>
-            <a:r>
-              <a:rPr lang="en-US" sz="1540" dirty="0">
+              <a:t>Play 3: Establish AI Governance - This lesson informs Play 3 by helping learners connect the lesson topic to.</a:t>
+            </a:r>
+            <a:endParaRPr lang="en-US" sz="1900" dirty="0"/>
+          </a:p>
+          <a:p>
+            <a:r>
+              <a:rPr lang="en-US" sz="1900" dirty="0">
                 <a:solidFill>
                   <a:srgbClr val="17364A"/>
                 </a:solidFill>
@@ -9946,15 +10597,15 @@
                 <a:ea typeface="Aptos" pitchFamily="34" charset="-122"/>
                 <a:cs typeface="Aptos" pitchFamily="34" charset="-120"/>
               </a:rPr>
-              <a:t>Play 1: Vision &amp; Guardrails - This lesson informs Play 1 by helping learners connect the lesson topic to vision &amp; guardrails work in.</a:t>
-            </a:r>
-            <a:endParaRPr lang="en-US" sz="1540" dirty="0"/>
-          </a:p>
-        </p:txBody>
-      </p:sp>
-      <p:sp>
-        <p:nvSpPr>
-          <p:cNvPr id="9" name="Shape 7"/>
+              <a:t>Play 1: Vision &amp; Guardrails - This lesson informs Play 1 by helping learners connect the lesson topic to.</a:t>
+            </a:r>
+            <a:endParaRPr lang="en-US" sz="1900" dirty="0"/>
+          </a:p>
+        </p:txBody>
+      </p:sp>
+      <p:sp>
+        <p:nvSpPr>
+          <p:cNvPr id="10" name="Shape 8"/>
           <p:cNvSpPr/>
           <p:nvPr/>
         </p:nvSpPr>
@@ -9981,14 +10632,14 @@
       </p:sp>
       <p:sp>
         <p:nvSpPr>
-          <p:cNvPr id="10" name="Text 8"/>
+          <p:cNvPr id="11" name="Text 9"/>
           <p:cNvSpPr/>
           <p:nvPr/>
         </p:nvSpPr>
         <p:spPr>
           <a:xfrm>
             <a:off x="8211312" y="1563624"/>
-            <a:ext cx="2734056" cy="201168"/>
+            <a:ext cx="2734056" cy="256032"/>
           </a:xfrm>
           <a:prstGeom prst="rect">
             <a:avLst/>
@@ -10004,7 +10655,7 @@
               <a:buNone/>
             </a:pPr>
             <a:r>
-              <a:rPr lang="en-US" sz="950" b="1" dirty="0">
+              <a:rPr lang="en-US" sz="1300" b="1" dirty="0">
                 <a:solidFill>
                   <a:srgbClr val="0068B7"/>
                 </a:solidFill>
@@ -10014,20 +10665,20 @@
               </a:rPr>
               <a:t>Apply the lesson</a:t>
             </a:r>
-            <a:endParaRPr lang="en-US" sz="950" dirty="0"/>
-          </a:p>
-        </p:txBody>
-      </p:sp>
-      <p:sp>
-        <p:nvSpPr>
-          <p:cNvPr id="11" name="Text 9"/>
-          <p:cNvSpPr/>
-          <p:nvPr/>
-        </p:nvSpPr>
-        <p:spPr>
-          <a:xfrm>
-            <a:off x="8211312" y="1856232"/>
-            <a:ext cx="2734056" cy="1536192"/>
+            <a:endParaRPr lang="en-US" sz="1300" dirty="0"/>
+          </a:p>
+        </p:txBody>
+      </p:sp>
+      <p:sp>
+        <p:nvSpPr>
+          <p:cNvPr id="12" name="Text 10"/>
+          <p:cNvSpPr/>
+          <p:nvPr/>
+        </p:nvSpPr>
+        <p:spPr>
+          <a:xfrm>
+            <a:off x="8211312" y="1920240"/>
+            <a:ext cx="2734056" cy="1463040"/>
           </a:xfrm>
           <a:prstGeom prst="rect">
             <a:avLst/>
@@ -10045,7 +10696,7 @@
               <a:buNone/>
             </a:pPr>
             <a:r>
-              <a:rPr lang="en-US" sz="1250" dirty="0">
+              <a:rPr lang="en-US" sz="1550" dirty="0">
                 <a:solidFill>
                   <a:srgbClr val="17364A"/>
                 </a:solidFill>
@@ -10055,32 +10706,32 @@
               </a:rPr>
               <a:t>Use the related plays to identify decisions, participants, timing, approvals, and documentation needed for responsible implementation.</a:t>
             </a:r>
-            <a:endParaRPr lang="en-US" sz="1250" dirty="0"/>
-          </a:p>
-        </p:txBody>
-      </p:sp>
-      <p:sp>
-        <p:nvSpPr>
-          <p:cNvPr id="12" name="Shape 10"/>
-          <p:cNvSpPr/>
-          <p:nvPr/>
-        </p:nvSpPr>
-        <p:spPr>
-          <a:xfrm>
-            <a:off x="8046720" y="3794760"/>
-            <a:ext cx="3063240" cy="1508760"/>
+            <a:endParaRPr lang="en-US" sz="1550" dirty="0"/>
+          </a:p>
+        </p:txBody>
+      </p:sp>
+      <p:sp>
+        <p:nvSpPr>
+          <p:cNvPr id="13" name="Shape 11"/>
+          <p:cNvSpPr/>
+          <p:nvPr/>
+        </p:nvSpPr>
+        <p:spPr>
+          <a:xfrm>
+            <a:off x="7818120" y="3977640"/>
+            <a:ext cx="972312" cy="749808"/>
           </a:xfrm>
           <a:prstGeom prst="roundRect">
             <a:avLst>
-              <a:gd name="adj" fmla="val 7273"/>
+              <a:gd name="adj" fmla="val 14634"/>
             </a:avLst>
           </a:prstGeom>
           <a:solidFill>
-            <a:srgbClr val="FFF4D9"/>
+            <a:srgbClr val="0068B7"/>
           </a:solidFill>
           <a:ln w="12700">
             <a:solidFill>
-              <a:srgbClr val="B9D7E6"/>
+              <a:srgbClr val="0068B7"/>
             </a:solidFill>
             <a:prstDash val="solid"/>
           </a:ln>
@@ -10088,81 +10739,256 @@
       </p:sp>
       <p:sp>
         <p:nvSpPr>
-          <p:cNvPr id="13" name="Text 11"/>
-          <p:cNvSpPr/>
-          <p:nvPr/>
-        </p:nvSpPr>
-        <p:spPr>
-          <a:xfrm>
-            <a:off x="8211312" y="3941064"/>
-            <a:ext cx="2734056" cy="201168"/>
-          </a:xfrm>
-          <a:prstGeom prst="rect">
-            <a:avLst/>
-          </a:prstGeom>
-          <a:noFill/>
-          <a:ln/>
-        </p:spPr>
-        <p:txBody>
-          <a:bodyPr wrap="square" lIns="0" tIns="0" rIns="0" bIns="0" rtlCol="0" anchor="ctr"/>
-          <a:lstStyle/>
-          <a:p>
-            <a:pPr indent="0" marL="0">
-              <a:buNone/>
-            </a:pPr>
-            <a:r>
-              <a:rPr lang="en-US" sz="950" b="1" dirty="0">
-                <a:solidFill>
-                  <a:srgbClr val="0068B7"/>
-                </a:solidFill>
-                <a:latin typeface="Aptos" pitchFamily="34" charset="0"/>
-                <a:ea typeface="Aptos" pitchFamily="34" charset="-122"/>
-                <a:cs typeface="Aptos" pitchFamily="34" charset="-120"/>
-              </a:rPr>
-              <a:t>Keep in mind</a:t>
-            </a:r>
-            <a:endParaRPr lang="en-US" sz="950" dirty="0"/>
-          </a:p>
-        </p:txBody>
-      </p:sp>
-      <p:sp>
-        <p:nvSpPr>
           <p:cNvPr id="14" name="Text 12"/>
           <p:cNvSpPr/>
           <p:nvPr/>
         </p:nvSpPr>
         <p:spPr>
           <a:xfrm>
-            <a:off x="8211312" y="4233672"/>
-            <a:ext cx="2734056" cy="941832"/>
-          </a:xfrm>
-          <a:prstGeom prst="rect">
-            <a:avLst/>
-          </a:prstGeom>
-          <a:noFill/>
-          <a:ln/>
-        </p:spPr>
-        <p:txBody>
-          <a:bodyPr wrap="square" lIns="0" tIns="0" rIns="0" bIns="0" rtlCol="0" anchor="t">
+            <a:off x="7891272" y="4169664"/>
+            <a:ext cx="826008" cy="310896"/>
+          </a:xfrm>
+          <a:prstGeom prst="rect">
+            <a:avLst/>
+          </a:prstGeom>
+          <a:noFill/>
+          <a:ln/>
+        </p:spPr>
+        <p:txBody>
+          <a:bodyPr wrap="square" lIns="0" tIns="0" rIns="0" bIns="0" rtlCol="0" anchor="ctr">
             <a:normAutofit/>
           </a:bodyPr>
           <a:lstStyle/>
           <a:p>
-            <a:pPr indent="0" marL="0">
-              <a:buNone/>
-            </a:pPr>
-            <a:r>
-              <a:rPr lang="en-US" sz="1250" dirty="0">
-                <a:solidFill>
-                  <a:srgbClr val="17364A"/>
-                </a:solidFill>
-                <a:latin typeface="Aptos" pitchFamily="34" charset="0"/>
-                <a:ea typeface="Aptos" pitchFamily="34" charset="-122"/>
-                <a:cs typeface="Aptos" pitchFamily="34" charset="-120"/>
-              </a:rPr>
-              <a:t>The playbook connection helps turn training into agency work, not just individual knowledge.</a:t>
-            </a:r>
-            <a:endParaRPr lang="en-US" sz="1250" dirty="0"/>
+            <a:pPr algn="ctr" indent="0" marL="0">
+              <a:buNone/>
+            </a:pPr>
+            <a:r>
+              <a:rPr lang="en-US" sz="1500" b="1" dirty="0">
+                <a:solidFill>
+                  <a:srgbClr val="FFFFFF"/>
+                </a:solidFill>
+                <a:latin typeface="Aptos" pitchFamily="34" charset="0"/>
+                <a:ea typeface="Aptos" pitchFamily="34" charset="-122"/>
+                <a:cs typeface="Aptos" pitchFamily="34" charset="-120"/>
+              </a:rPr>
+              <a:t>Lesson</a:t>
+            </a:r>
+            <a:endParaRPr lang="en-US" sz="1500" dirty="0"/>
+          </a:p>
+        </p:txBody>
+      </p:sp>
+      <p:sp>
+        <p:nvSpPr>
+          <p:cNvPr id="15" name="Text 13"/>
+          <p:cNvSpPr/>
+          <p:nvPr/>
+        </p:nvSpPr>
+        <p:spPr>
+          <a:xfrm>
+            <a:off x="8817864" y="4187952"/>
+            <a:ext cx="201168" cy="256032"/>
+          </a:xfrm>
+          <a:prstGeom prst="rect">
+            <a:avLst/>
+          </a:prstGeom>
+          <a:noFill/>
+          <a:ln/>
+        </p:spPr>
+        <p:txBody>
+          <a:bodyPr wrap="square" lIns="0" tIns="0" rIns="0" bIns="0" rtlCol="0" anchor="ctr"/>
+          <a:lstStyle/>
+          <a:p>
+            <a:pPr algn="ctr" indent="0" marL="0">
+              <a:buNone/>
+            </a:pPr>
+            <a:r>
+              <a:rPr lang="en-US" sz="1800" b="1" dirty="0">
+                <a:solidFill>
+                  <a:srgbClr val="0068B7"/>
+                </a:solidFill>
+                <a:latin typeface="Aptos" pitchFamily="34" charset="0"/>
+                <a:ea typeface="Aptos" pitchFamily="34" charset="-122"/>
+                <a:cs typeface="Aptos" pitchFamily="34" charset="-120"/>
+              </a:rPr>
+              <a:t>â†’</a:t>
+            </a:r>
+            <a:endParaRPr lang="en-US" sz="1800" dirty="0"/>
+          </a:p>
+        </p:txBody>
+      </p:sp>
+      <p:sp>
+        <p:nvSpPr>
+          <p:cNvPr id="16" name="Shape 14"/>
+          <p:cNvSpPr/>
+          <p:nvPr/>
+        </p:nvSpPr>
+        <p:spPr>
+          <a:xfrm>
+            <a:off x="9046464" y="3977640"/>
+            <a:ext cx="972312" cy="749808"/>
+          </a:xfrm>
+          <a:prstGeom prst="roundRect">
+            <a:avLst>
+              <a:gd name="adj" fmla="val 14634"/>
+            </a:avLst>
+          </a:prstGeom>
+          <a:solidFill>
+            <a:srgbClr val="2F8A28"/>
+          </a:solidFill>
+          <a:ln w="12700">
+            <a:solidFill>
+              <a:srgbClr val="2F8A28"/>
+            </a:solidFill>
+            <a:prstDash val="solid"/>
+          </a:ln>
+        </p:spPr>
+      </p:sp>
+      <p:sp>
+        <p:nvSpPr>
+          <p:cNvPr id="17" name="Text 15"/>
+          <p:cNvSpPr/>
+          <p:nvPr/>
+        </p:nvSpPr>
+        <p:spPr>
+          <a:xfrm>
+            <a:off x="9119616" y="4169664"/>
+            <a:ext cx="826008" cy="310896"/>
+          </a:xfrm>
+          <a:prstGeom prst="rect">
+            <a:avLst/>
+          </a:prstGeom>
+          <a:noFill/>
+          <a:ln/>
+        </p:spPr>
+        <p:txBody>
+          <a:bodyPr wrap="square" lIns="0" tIns="0" rIns="0" bIns="0" rtlCol="0" anchor="ctr">
+            <a:normAutofit/>
+          </a:bodyPr>
+          <a:lstStyle/>
+          <a:p>
+            <a:pPr algn="ctr" indent="0" marL="0">
+              <a:buNone/>
+            </a:pPr>
+            <a:r>
+              <a:rPr lang="en-US" sz="1500" b="1" dirty="0">
+                <a:solidFill>
+                  <a:srgbClr val="FFFFFF"/>
+                </a:solidFill>
+                <a:latin typeface="Aptos" pitchFamily="34" charset="0"/>
+                <a:ea typeface="Aptos" pitchFamily="34" charset="-122"/>
+                <a:cs typeface="Aptos" pitchFamily="34" charset="-120"/>
+              </a:rPr>
+              <a:t>Plays</a:t>
+            </a:r>
+            <a:endParaRPr lang="en-US" sz="1500" dirty="0"/>
+          </a:p>
+        </p:txBody>
+      </p:sp>
+      <p:sp>
+        <p:nvSpPr>
+          <p:cNvPr id="18" name="Text 16"/>
+          <p:cNvSpPr/>
+          <p:nvPr/>
+        </p:nvSpPr>
+        <p:spPr>
+          <a:xfrm>
+            <a:off x="10046208" y="4187952"/>
+            <a:ext cx="201168" cy="256032"/>
+          </a:xfrm>
+          <a:prstGeom prst="rect">
+            <a:avLst/>
+          </a:prstGeom>
+          <a:noFill/>
+          <a:ln/>
+        </p:spPr>
+        <p:txBody>
+          <a:bodyPr wrap="square" lIns="0" tIns="0" rIns="0" bIns="0" rtlCol="0" anchor="ctr"/>
+          <a:lstStyle/>
+          <a:p>
+            <a:pPr algn="ctr" indent="0" marL="0">
+              <a:buNone/>
+            </a:pPr>
+            <a:r>
+              <a:rPr lang="en-US" sz="1800" b="1" dirty="0">
+                <a:solidFill>
+                  <a:srgbClr val="0068B7"/>
+                </a:solidFill>
+                <a:latin typeface="Aptos" pitchFamily="34" charset="0"/>
+                <a:ea typeface="Aptos" pitchFamily="34" charset="-122"/>
+                <a:cs typeface="Aptos" pitchFamily="34" charset="-120"/>
+              </a:rPr>
+              <a:t>â†’</a:t>
+            </a:r>
+            <a:endParaRPr lang="en-US" sz="1800" dirty="0"/>
+          </a:p>
+        </p:txBody>
+      </p:sp>
+      <p:sp>
+        <p:nvSpPr>
+          <p:cNvPr id="19" name="Shape 17"/>
+          <p:cNvSpPr/>
+          <p:nvPr/>
+        </p:nvSpPr>
+        <p:spPr>
+          <a:xfrm>
+            <a:off x="10274808" y="3977640"/>
+            <a:ext cx="972312" cy="749808"/>
+          </a:xfrm>
+          <a:prstGeom prst="roundRect">
+            <a:avLst>
+              <a:gd name="adj" fmla="val 14634"/>
+            </a:avLst>
+          </a:prstGeom>
+          <a:solidFill>
+            <a:srgbClr val="6A4CA3"/>
+          </a:solidFill>
+          <a:ln w="12700">
+            <a:solidFill>
+              <a:srgbClr val="6A4CA3"/>
+            </a:solidFill>
+            <a:prstDash val="solid"/>
+          </a:ln>
+        </p:spPr>
+      </p:sp>
+      <p:sp>
+        <p:nvSpPr>
+          <p:cNvPr id="20" name="Text 18"/>
+          <p:cNvSpPr/>
+          <p:nvPr/>
+        </p:nvSpPr>
+        <p:spPr>
+          <a:xfrm>
+            <a:off x="10347960" y="4169664"/>
+            <a:ext cx="826008" cy="310896"/>
+          </a:xfrm>
+          <a:prstGeom prst="rect">
+            <a:avLst/>
+          </a:prstGeom>
+          <a:noFill/>
+          <a:ln/>
+        </p:spPr>
+        <p:txBody>
+          <a:bodyPr wrap="square" lIns="0" tIns="0" rIns="0" bIns="0" rtlCol="0" anchor="ctr">
+            <a:normAutofit/>
+          </a:bodyPr>
+          <a:lstStyle/>
+          <a:p>
+            <a:pPr algn="ctr" indent="0" marL="0">
+              <a:buNone/>
+            </a:pPr>
+            <a:r>
+              <a:rPr lang="en-US" sz="1500" b="1" dirty="0">
+                <a:solidFill>
+                  <a:srgbClr val="FFFFFF"/>
+                </a:solidFill>
+                <a:latin typeface="Aptos" pitchFamily="34" charset="0"/>
+                <a:ea typeface="Aptos" pitchFamily="34" charset="-122"/>
+                <a:cs typeface="Aptos" pitchFamily="34" charset="-120"/>
+              </a:rPr>
+              <a:t>Action</a:t>
+            </a:r>
+            <a:endParaRPr lang="en-US" sz="1500" dirty="0"/>
           </a:p>
         </p:txBody>
       </p:sp>
@@ -10359,7 +11185,7 @@
                 <a:ea typeface="Aptos" pitchFamily="34" charset="-122"/>
                 <a:cs typeface="Aptos" pitchFamily="34" charset="-120"/>
               </a:rPr>
-              <a:t>© Paula Soper</a:t>
+              <a:t>Â© Paula Soper</a:t>
             </a:r>
             <a:endParaRPr lang="en-US" sz="800" dirty="0"/>
           </a:p>
@@ -10373,8 +11199,47 @@
         </p:nvSpPr>
         <p:spPr>
           <a:xfrm>
+            <a:off x="11137392" y="6510528"/>
+            <a:ext cx="411480" cy="201168"/>
+          </a:xfrm>
+          <a:prstGeom prst="rect">
+            <a:avLst/>
+          </a:prstGeom>
+          <a:noFill/>
+          <a:ln/>
+        </p:spPr>
+        <p:txBody>
+          <a:bodyPr wrap="square" lIns="0" tIns="0" rIns="0" bIns="0" rtlCol="0" anchor="ctr"/>
+          <a:lstStyle/>
+          <a:p>
+            <a:pPr algn="r" indent="0" marL="0">
+              <a:buNone/>
+            </a:pPr>
+            <a:r>
+              <a:rPr lang="en-US" sz="900" dirty="0">
+                <a:solidFill>
+                  <a:srgbClr val="5F7181"/>
+                </a:solidFill>
+                <a:latin typeface="Aptos" pitchFamily="34" charset="0"/>
+                <a:ea typeface="Aptos" pitchFamily="34" charset="-122"/>
+                <a:cs typeface="Aptos" pitchFamily="34" charset="-120"/>
+              </a:rPr>
+              <a:t>4</a:t>
+            </a:r>
+            <a:endParaRPr lang="en-US" sz="900" dirty="0"/>
+          </a:p>
+        </p:txBody>
+      </p:sp>
+      <p:sp>
+        <p:nvSpPr>
+          <p:cNvPr id="8" name="Text 6"/>
+          <p:cNvSpPr/>
+          <p:nvPr/>
+        </p:nvSpPr>
+        <p:spPr>
+          <a:xfrm>
             <a:off x="640080" y="658368"/>
-            <a:ext cx="10881360" cy="566928"/>
+            <a:ext cx="10881360" cy="713232"/>
           </a:xfrm>
           <a:prstGeom prst="rect">
             <a:avLst/>
@@ -10392,7 +11257,7 @@
               <a:buNone/>
             </a:pPr>
             <a:r>
-              <a:rPr lang="en-US" sz="2700" b="1" dirty="0">
+              <a:rPr lang="en-US" sz="3400" b="1" dirty="0">
                 <a:solidFill>
                   <a:srgbClr val="003A63"/>
                 </a:solidFill>
@@ -10402,20 +11267,20 @@
               </a:rPr>
               <a:t>Related toolkit resources</a:t>
             </a:r>
-            <a:endParaRPr lang="en-US" sz="2700" dirty="0"/>
-          </a:p>
-        </p:txBody>
-      </p:sp>
-      <p:sp>
-        <p:nvSpPr>
-          <p:cNvPr id="8" name="Text 6"/>
-          <p:cNvSpPr/>
-          <p:nvPr/>
-        </p:nvSpPr>
-        <p:spPr>
-          <a:xfrm>
-            <a:off x="868680" y="1417320"/>
-            <a:ext cx="6903720" cy="4480560"/>
+            <a:endParaRPr lang="en-US" sz="3400" dirty="0"/>
+          </a:p>
+        </p:txBody>
+      </p:sp>
+      <p:sp>
+        <p:nvSpPr>
+          <p:cNvPr id="9" name="Text 7"/>
+          <p:cNvSpPr/>
+          <p:nvPr/>
+        </p:nvSpPr>
+        <p:spPr>
+          <a:xfrm>
+            <a:off x="868680" y="1508760"/>
+            <a:ext cx="6812280" cy="3977640"/>
           </a:xfrm>
           <a:prstGeom prst="rect">
             <a:avLst/>
@@ -10430,7 +11295,7 @@
           <a:lstStyle/>
           <a:p>
             <a:r>
-              <a:rPr lang="en-US" sz="1460" dirty="0">
+              <a:rPr lang="en-US" sz="1850" dirty="0">
                 <a:solidFill>
                   <a:srgbClr val="17364A"/>
                 </a:solidFill>
@@ -10438,13 +11303,13 @@
                 <a:ea typeface="Aptos" pitchFamily="34" charset="-122"/>
                 <a:cs typeface="Aptos" pitchFamily="34" charset="-120"/>
               </a:rPr>
-              <a:t>Tool 4: AI Policy Landscape Scan (Worksheet) - Use AI Policy Landscape Scan to translate this lesson into a documented public health.</a:t>
-            </a:r>
-            <a:endParaRPr lang="en-US" sz="1460" dirty="0"/>
-          </a:p>
-          <a:p>
-            <a:r>
-              <a:rPr lang="en-US" sz="1460" dirty="0">
+              <a:t>Tool 4: AI Policy Landscape Scan (Worksheet) - Use AI Policy Landscape Scan to translate this lesson into a.</a:t>
+            </a:r>
+            <a:endParaRPr lang="en-US" sz="1850" dirty="0"/>
+          </a:p>
+          <a:p>
+            <a:r>
+              <a:rPr lang="en-US" sz="1850" dirty="0">
                 <a:solidFill>
                   <a:srgbClr val="17364A"/>
                 </a:solidFill>
@@ -10452,13 +11317,13 @@
                 <a:ea typeface="Aptos" pitchFamily="34" charset="-122"/>
                 <a:cs typeface="Aptos" pitchFamily="34" charset="-120"/>
               </a:rPr>
-              <a:t>Tool 5: AI Environmental and Resource Impact Review (Checklist) - Use AI Environmental and Resource Impact Review to translate this.</a:t>
-            </a:r>
-            <a:endParaRPr lang="en-US" sz="1460" dirty="0"/>
-          </a:p>
-          <a:p>
-            <a:r>
-              <a:rPr lang="en-US" sz="1460" dirty="0">
+              <a:t>Tool 5: AI Environmental and Resource Impact Review (Checklist) - Use AI Environmental and Resource Impact.</a:t>
+            </a:r>
+            <a:endParaRPr lang="en-US" sz="1850" dirty="0"/>
+          </a:p>
+          <a:p>
+            <a:r>
+              <a:rPr lang="en-US" sz="1850" dirty="0">
                 <a:solidFill>
                   <a:srgbClr val="17364A"/>
                 </a:solidFill>
@@ -10466,13 +11331,13 @@
                 <a:ea typeface="Aptos" pitchFamily="34" charset="-122"/>
                 <a:cs typeface="Aptos" pitchFamily="34" charset="-120"/>
               </a:rPr>
-              <a:t>Tool 6: Human-Centered AI Decision Rule Checklist (Checklist) - Use Human-Centered AI Decision Rule Checklist to translate this.</a:t>
-            </a:r>
-            <a:endParaRPr lang="en-US" sz="1460" dirty="0"/>
-          </a:p>
-          <a:p>
-            <a:r>
-              <a:rPr lang="en-US" sz="1460" dirty="0">
+              <a:t>Tool 6: Human-Centered AI Decision Rule Checklist (Checklist) - Use Human-Centered AI Decision Rule.</a:t>
+            </a:r>
+            <a:endParaRPr lang="en-US" sz="1850" dirty="0"/>
+          </a:p>
+          <a:p>
+            <a:r>
+              <a:rPr lang="en-US" sz="1850" dirty="0">
                 <a:solidFill>
                   <a:srgbClr val="17364A"/>
                 </a:solidFill>
@@ -10480,29 +11345,15 @@
                 <a:ea typeface="Aptos" pitchFamily="34" charset="-122"/>
                 <a:cs typeface="Aptos" pitchFamily="34" charset="-120"/>
               </a:rPr>
-              <a:t>Tool 8: AI Project Charter (Planning) - Use AI Project Charter to translate this lesson into a documented public health AI planning,.</a:t>
-            </a:r>
-            <a:endParaRPr lang="en-US" sz="1460" dirty="0"/>
-          </a:p>
-          <a:p>
-            <a:r>
-              <a:rPr lang="en-US" sz="1460" dirty="0">
-                <a:solidFill>
-                  <a:srgbClr val="17364A"/>
-                </a:solidFill>
-                <a:latin typeface="Aptos" pitchFamily="34" charset="0"/>
-                <a:ea typeface="Aptos" pitchFamily="34" charset="-122"/>
-                <a:cs typeface="Aptos" pitchFamily="34" charset="-120"/>
-              </a:rPr>
-              <a:t>Tool 9: Data Quality Assessment Checklist (Checklist) - Use this tool to complete or strengthen the practical exercise for the module.</a:t>
-            </a:r>
-            <a:endParaRPr lang="en-US" sz="1460" dirty="0"/>
-          </a:p>
-        </p:txBody>
-      </p:sp>
-      <p:sp>
-        <p:nvSpPr>
-          <p:cNvPr id="9" name="Shape 7"/>
+              <a:t>Tool 8: AI Project Charter (Planning) - Use AI Project Charter to translate this lesson into a documented.</a:t>
+            </a:r>
+            <a:endParaRPr lang="en-US" sz="1850" dirty="0"/>
+          </a:p>
+        </p:txBody>
+      </p:sp>
+      <p:sp>
+        <p:nvSpPr>
+          <p:cNvPr id="10" name="Shape 8"/>
           <p:cNvSpPr/>
           <p:nvPr/>
         </p:nvSpPr>
@@ -10529,14 +11380,14 @@
       </p:sp>
       <p:sp>
         <p:nvSpPr>
-          <p:cNvPr id="10" name="Text 8"/>
+          <p:cNvPr id="11" name="Text 9"/>
           <p:cNvSpPr/>
           <p:nvPr/>
         </p:nvSpPr>
         <p:spPr>
           <a:xfrm>
             <a:off x="8211312" y="1563624"/>
-            <a:ext cx="2734056" cy="201168"/>
+            <a:ext cx="2734056" cy="256032"/>
           </a:xfrm>
           <a:prstGeom prst="rect">
             <a:avLst/>
@@ -10552,7 +11403,7 @@
               <a:buNone/>
             </a:pPr>
             <a:r>
-              <a:rPr lang="en-US" sz="950" b="1" dirty="0">
+              <a:rPr lang="en-US" sz="1300" b="1" dirty="0">
                 <a:solidFill>
                   <a:srgbClr val="0068B7"/>
                 </a:solidFill>
@@ -10562,20 +11413,20 @@
               </a:rPr>
               <a:t>Use the tools</a:t>
             </a:r>
-            <a:endParaRPr lang="en-US" sz="950" dirty="0"/>
-          </a:p>
-        </p:txBody>
-      </p:sp>
-      <p:sp>
-        <p:nvSpPr>
-          <p:cNvPr id="11" name="Text 9"/>
-          <p:cNvSpPr/>
-          <p:nvPr/>
-        </p:nvSpPr>
-        <p:spPr>
-          <a:xfrm>
-            <a:off x="8211312" y="1856232"/>
-            <a:ext cx="2734056" cy="1536192"/>
+            <a:endParaRPr lang="en-US" sz="1300" dirty="0"/>
+          </a:p>
+        </p:txBody>
+      </p:sp>
+      <p:sp>
+        <p:nvSpPr>
+          <p:cNvPr id="12" name="Text 10"/>
+          <p:cNvSpPr/>
+          <p:nvPr/>
+        </p:nvSpPr>
+        <p:spPr>
+          <a:xfrm>
+            <a:off x="8211312" y="1920240"/>
+            <a:ext cx="2734056" cy="1463040"/>
           </a:xfrm>
           <a:prstGeom prst="rect">
             <a:avLst/>
@@ -10593,7 +11444,7 @@
               <a:buNone/>
             </a:pPr>
             <a:r>
-              <a:rPr lang="en-US" sz="1250" dirty="0">
+              <a:rPr lang="en-US" sz="1550" dirty="0">
                 <a:solidFill>
                   <a:srgbClr val="17364A"/>
                 </a:solidFill>
@@ -10603,32 +11454,32 @@
               </a:rPr>
               <a:t>Use linked tools when your department needs a structured worksheet, template, checklist, review process, or documentation artifact.</a:t>
             </a:r>
-            <a:endParaRPr lang="en-US" sz="1250" dirty="0"/>
-          </a:p>
-        </p:txBody>
-      </p:sp>
-      <p:sp>
-        <p:nvSpPr>
-          <p:cNvPr id="12" name="Shape 10"/>
-          <p:cNvSpPr/>
-          <p:nvPr/>
-        </p:nvSpPr>
-        <p:spPr>
-          <a:xfrm>
-            <a:off x="8046720" y="3794760"/>
-            <a:ext cx="3063240" cy="1508760"/>
+            <a:endParaRPr lang="en-US" sz="1550" dirty="0"/>
+          </a:p>
+        </p:txBody>
+      </p:sp>
+      <p:sp>
+        <p:nvSpPr>
+          <p:cNvPr id="13" name="Shape 11"/>
+          <p:cNvSpPr/>
+          <p:nvPr/>
+        </p:nvSpPr>
+        <p:spPr>
+          <a:xfrm>
+            <a:off x="7818120" y="3977640"/>
+            <a:ext cx="972312" cy="749808"/>
           </a:xfrm>
           <a:prstGeom prst="roundRect">
             <a:avLst>
-              <a:gd name="adj" fmla="val 7273"/>
+              <a:gd name="adj" fmla="val 14634"/>
             </a:avLst>
           </a:prstGeom>
           <a:solidFill>
-            <a:srgbClr val="EEF8ED"/>
+            <a:srgbClr val="0068B7"/>
           </a:solidFill>
           <a:ln w="12700">
             <a:solidFill>
-              <a:srgbClr val="B9D7E6"/>
+              <a:srgbClr val="0068B7"/>
             </a:solidFill>
             <a:prstDash val="solid"/>
           </a:ln>
@@ -10636,81 +11487,256 @@
       </p:sp>
       <p:sp>
         <p:nvSpPr>
-          <p:cNvPr id="13" name="Text 11"/>
-          <p:cNvSpPr/>
-          <p:nvPr/>
-        </p:nvSpPr>
-        <p:spPr>
-          <a:xfrm>
-            <a:off x="8211312" y="3941064"/>
-            <a:ext cx="2734056" cy="201168"/>
-          </a:xfrm>
-          <a:prstGeom prst="rect">
-            <a:avLst/>
-          </a:prstGeom>
-          <a:noFill/>
-          <a:ln/>
-        </p:spPr>
-        <p:txBody>
-          <a:bodyPr wrap="square" lIns="0" tIns="0" rIns="0" bIns="0" rtlCol="0" anchor="ctr"/>
-          <a:lstStyle/>
-          <a:p>
-            <a:pPr indent="0" marL="0">
-              <a:buNone/>
-            </a:pPr>
-            <a:r>
-              <a:rPr lang="en-US" sz="950" b="1" dirty="0">
-                <a:solidFill>
-                  <a:srgbClr val="0068B7"/>
-                </a:solidFill>
-                <a:latin typeface="Aptos" pitchFamily="34" charset="0"/>
-                <a:ea typeface="Aptos" pitchFamily="34" charset="-122"/>
-                <a:cs typeface="Aptos" pitchFamily="34" charset="-120"/>
-              </a:rPr>
-              <a:t>Avoid duplication</a:t>
-            </a:r>
-            <a:endParaRPr lang="en-US" sz="950" dirty="0"/>
-          </a:p>
-        </p:txBody>
-      </p:sp>
-      <p:sp>
-        <p:nvSpPr>
           <p:cNvPr id="14" name="Text 12"/>
           <p:cNvSpPr/>
           <p:nvPr/>
         </p:nvSpPr>
         <p:spPr>
           <a:xfrm>
-            <a:off x="8211312" y="4233672"/>
-            <a:ext cx="2734056" cy="941832"/>
-          </a:xfrm>
-          <a:prstGeom prst="rect">
-            <a:avLst/>
-          </a:prstGeom>
-          <a:noFill/>
-          <a:ln/>
-        </p:spPr>
-        <p:txBody>
-          <a:bodyPr wrap="square" lIns="0" tIns="0" rIns="0" bIns="0" rtlCol="0" anchor="t">
+            <a:off x="7891272" y="4169664"/>
+            <a:ext cx="826008" cy="310896"/>
+          </a:xfrm>
+          <a:prstGeom prst="rect">
+            <a:avLst/>
+          </a:prstGeom>
+          <a:noFill/>
+          <a:ln/>
+        </p:spPr>
+        <p:txBody>
+          <a:bodyPr wrap="square" lIns="0" tIns="0" rIns="0" bIns="0" rtlCol="0" anchor="ctr">
             <a:normAutofit/>
           </a:bodyPr>
           <a:lstStyle/>
           <a:p>
-            <a:pPr indent="0" marL="0">
-              <a:buNone/>
-            </a:pPr>
-            <a:r>
-              <a:rPr lang="en-US" sz="1250" dirty="0">
-                <a:solidFill>
-                  <a:srgbClr val="17364A"/>
-                </a:solidFill>
-                <a:latin typeface="Aptos" pitchFamily="34" charset="0"/>
-                <a:ea typeface="Aptos" pitchFamily="34" charset="-122"/>
-                <a:cs typeface="Aptos" pitchFamily="34" charset="-120"/>
-              </a:rPr>
-              <a:t>If your department already has a strong equivalent tool, adapt or use the existing process instead of recreating it.</a:t>
-            </a:r>
-            <a:endParaRPr lang="en-US" sz="1250" dirty="0"/>
+            <a:pPr algn="ctr" indent="0" marL="0">
+              <a:buNone/>
+            </a:pPr>
+            <a:r>
+              <a:rPr lang="en-US" sz="1500" b="1" dirty="0">
+                <a:solidFill>
+                  <a:srgbClr val="FFFFFF"/>
+                </a:solidFill>
+                <a:latin typeface="Aptos" pitchFamily="34" charset="0"/>
+                <a:ea typeface="Aptos" pitchFamily="34" charset="-122"/>
+                <a:cs typeface="Aptos" pitchFamily="34" charset="-120"/>
+              </a:rPr>
+              <a:t>Concept</a:t>
+            </a:r>
+            <a:endParaRPr lang="en-US" sz="1500" dirty="0"/>
+          </a:p>
+        </p:txBody>
+      </p:sp>
+      <p:sp>
+        <p:nvSpPr>
+          <p:cNvPr id="15" name="Text 13"/>
+          <p:cNvSpPr/>
+          <p:nvPr/>
+        </p:nvSpPr>
+        <p:spPr>
+          <a:xfrm>
+            <a:off x="8817864" y="4187952"/>
+            <a:ext cx="201168" cy="256032"/>
+          </a:xfrm>
+          <a:prstGeom prst="rect">
+            <a:avLst/>
+          </a:prstGeom>
+          <a:noFill/>
+          <a:ln/>
+        </p:spPr>
+        <p:txBody>
+          <a:bodyPr wrap="square" lIns="0" tIns="0" rIns="0" bIns="0" rtlCol="0" anchor="ctr"/>
+          <a:lstStyle/>
+          <a:p>
+            <a:pPr algn="ctr" indent="0" marL="0">
+              <a:buNone/>
+            </a:pPr>
+            <a:r>
+              <a:rPr lang="en-US" sz="1800" b="1" dirty="0">
+                <a:solidFill>
+                  <a:srgbClr val="0068B7"/>
+                </a:solidFill>
+                <a:latin typeface="Aptos" pitchFamily="34" charset="0"/>
+                <a:ea typeface="Aptos" pitchFamily="34" charset="-122"/>
+                <a:cs typeface="Aptos" pitchFamily="34" charset="-120"/>
+              </a:rPr>
+              <a:t>â†’</a:t>
+            </a:r>
+            <a:endParaRPr lang="en-US" sz="1800" dirty="0"/>
+          </a:p>
+        </p:txBody>
+      </p:sp>
+      <p:sp>
+        <p:nvSpPr>
+          <p:cNvPr id="16" name="Shape 14"/>
+          <p:cNvSpPr/>
+          <p:nvPr/>
+        </p:nvSpPr>
+        <p:spPr>
+          <a:xfrm>
+            <a:off x="9046464" y="3977640"/>
+            <a:ext cx="972312" cy="749808"/>
+          </a:xfrm>
+          <a:prstGeom prst="roundRect">
+            <a:avLst>
+              <a:gd name="adj" fmla="val 14634"/>
+            </a:avLst>
+          </a:prstGeom>
+          <a:solidFill>
+            <a:srgbClr val="2F8A28"/>
+          </a:solidFill>
+          <a:ln w="12700">
+            <a:solidFill>
+              <a:srgbClr val="2F8A28"/>
+            </a:solidFill>
+            <a:prstDash val="solid"/>
+          </a:ln>
+        </p:spPr>
+      </p:sp>
+      <p:sp>
+        <p:nvSpPr>
+          <p:cNvPr id="17" name="Text 15"/>
+          <p:cNvSpPr/>
+          <p:nvPr/>
+        </p:nvSpPr>
+        <p:spPr>
+          <a:xfrm>
+            <a:off x="9119616" y="4169664"/>
+            <a:ext cx="826008" cy="310896"/>
+          </a:xfrm>
+          <a:prstGeom prst="rect">
+            <a:avLst/>
+          </a:prstGeom>
+          <a:noFill/>
+          <a:ln/>
+        </p:spPr>
+        <p:txBody>
+          <a:bodyPr wrap="square" lIns="0" tIns="0" rIns="0" bIns="0" rtlCol="0" anchor="ctr">
+            <a:normAutofit/>
+          </a:bodyPr>
+          <a:lstStyle/>
+          <a:p>
+            <a:pPr algn="ctr" indent="0" marL="0">
+              <a:buNone/>
+            </a:pPr>
+            <a:r>
+              <a:rPr lang="en-US" sz="1500" b="1" dirty="0">
+                <a:solidFill>
+                  <a:srgbClr val="FFFFFF"/>
+                </a:solidFill>
+                <a:latin typeface="Aptos" pitchFamily="34" charset="0"/>
+                <a:ea typeface="Aptos" pitchFamily="34" charset="-122"/>
+                <a:cs typeface="Aptos" pitchFamily="34" charset="-120"/>
+              </a:rPr>
+              <a:t>Tool</a:t>
+            </a:r>
+            <a:endParaRPr lang="en-US" sz="1500" dirty="0"/>
+          </a:p>
+        </p:txBody>
+      </p:sp>
+      <p:sp>
+        <p:nvSpPr>
+          <p:cNvPr id="18" name="Text 16"/>
+          <p:cNvSpPr/>
+          <p:nvPr/>
+        </p:nvSpPr>
+        <p:spPr>
+          <a:xfrm>
+            <a:off x="10046208" y="4187952"/>
+            <a:ext cx="201168" cy="256032"/>
+          </a:xfrm>
+          <a:prstGeom prst="rect">
+            <a:avLst/>
+          </a:prstGeom>
+          <a:noFill/>
+          <a:ln/>
+        </p:spPr>
+        <p:txBody>
+          <a:bodyPr wrap="square" lIns="0" tIns="0" rIns="0" bIns="0" rtlCol="0" anchor="ctr"/>
+          <a:lstStyle/>
+          <a:p>
+            <a:pPr algn="ctr" indent="0" marL="0">
+              <a:buNone/>
+            </a:pPr>
+            <a:r>
+              <a:rPr lang="en-US" sz="1800" b="1" dirty="0">
+                <a:solidFill>
+                  <a:srgbClr val="0068B7"/>
+                </a:solidFill>
+                <a:latin typeface="Aptos" pitchFamily="34" charset="0"/>
+                <a:ea typeface="Aptos" pitchFamily="34" charset="-122"/>
+                <a:cs typeface="Aptos" pitchFamily="34" charset="-120"/>
+              </a:rPr>
+              <a:t>â†’</a:t>
+            </a:r>
+            <a:endParaRPr lang="en-US" sz="1800" dirty="0"/>
+          </a:p>
+        </p:txBody>
+      </p:sp>
+      <p:sp>
+        <p:nvSpPr>
+          <p:cNvPr id="19" name="Shape 17"/>
+          <p:cNvSpPr/>
+          <p:nvPr/>
+        </p:nvSpPr>
+        <p:spPr>
+          <a:xfrm>
+            <a:off x="10274808" y="3977640"/>
+            <a:ext cx="972312" cy="749808"/>
+          </a:xfrm>
+          <a:prstGeom prst="roundRect">
+            <a:avLst>
+              <a:gd name="adj" fmla="val 14634"/>
+            </a:avLst>
+          </a:prstGeom>
+          <a:solidFill>
+            <a:srgbClr val="D69A2D"/>
+          </a:solidFill>
+          <a:ln w="12700">
+            <a:solidFill>
+              <a:srgbClr val="D69A2D"/>
+            </a:solidFill>
+            <a:prstDash val="solid"/>
+          </a:ln>
+        </p:spPr>
+      </p:sp>
+      <p:sp>
+        <p:nvSpPr>
+          <p:cNvPr id="20" name="Text 18"/>
+          <p:cNvSpPr/>
+          <p:nvPr/>
+        </p:nvSpPr>
+        <p:spPr>
+          <a:xfrm>
+            <a:off x="10347960" y="4169664"/>
+            <a:ext cx="826008" cy="310896"/>
+          </a:xfrm>
+          <a:prstGeom prst="rect">
+            <a:avLst/>
+          </a:prstGeom>
+          <a:noFill/>
+          <a:ln/>
+        </p:spPr>
+        <p:txBody>
+          <a:bodyPr wrap="square" lIns="0" tIns="0" rIns="0" bIns="0" rtlCol="0" anchor="ctr">
+            <a:normAutofit/>
+          </a:bodyPr>
+          <a:lstStyle/>
+          <a:p>
+            <a:pPr algn="ctr" indent="0" marL="0">
+              <a:buNone/>
+            </a:pPr>
+            <a:r>
+              <a:rPr lang="en-US" sz="1500" b="1" dirty="0">
+                <a:solidFill>
+                  <a:srgbClr val="FFFFFF"/>
+                </a:solidFill>
+                <a:latin typeface="Aptos" pitchFamily="34" charset="0"/>
+                <a:ea typeface="Aptos" pitchFamily="34" charset="-122"/>
+                <a:cs typeface="Aptos" pitchFamily="34" charset="-120"/>
+              </a:rPr>
+              <a:t>Artifact</a:t>
+            </a:r>
+            <a:endParaRPr lang="en-US" sz="1500" dirty="0"/>
           </a:p>
         </p:txBody>
       </p:sp>
@@ -10907,7 +11933,7 @@
                 <a:ea typeface="Aptos" pitchFamily="34" charset="-122"/>
                 <a:cs typeface="Aptos" pitchFamily="34" charset="-120"/>
               </a:rPr>
-              <a:t>© Paula Soper</a:t>
+              <a:t>Â© Paula Soper</a:t>
             </a:r>
             <a:endParaRPr lang="en-US" sz="800" dirty="0"/>
           </a:p>
@@ -10915,7 +11941,46 @@
       </p:sp>
       <p:sp>
         <p:nvSpPr>
-          <p:cNvPr id="7" name="Shape 5"/>
+          <p:cNvPr id="7" name="Text 5"/>
+          <p:cNvSpPr/>
+          <p:nvPr/>
+        </p:nvSpPr>
+        <p:spPr>
+          <a:xfrm>
+            <a:off x="11137392" y="6510528"/>
+            <a:ext cx="411480" cy="201168"/>
+          </a:xfrm>
+          <a:prstGeom prst="rect">
+            <a:avLst/>
+          </a:prstGeom>
+          <a:noFill/>
+          <a:ln/>
+        </p:spPr>
+        <p:txBody>
+          <a:bodyPr wrap="square" lIns="0" tIns="0" rIns="0" bIns="0" rtlCol="0" anchor="ctr"/>
+          <a:lstStyle/>
+          <a:p>
+            <a:pPr algn="r" indent="0" marL="0">
+              <a:buNone/>
+            </a:pPr>
+            <a:r>
+              <a:rPr lang="en-US" sz="900" dirty="0">
+                <a:solidFill>
+                  <a:srgbClr val="5F7181"/>
+                </a:solidFill>
+                <a:latin typeface="Aptos" pitchFamily="34" charset="0"/>
+                <a:ea typeface="Aptos" pitchFamily="34" charset="-122"/>
+                <a:cs typeface="Aptos" pitchFamily="34" charset="-120"/>
+              </a:rPr>
+              <a:t>5</a:t>
+            </a:r>
+            <a:endParaRPr lang="en-US" sz="900" dirty="0"/>
+          </a:p>
+        </p:txBody>
+      </p:sp>
+      <p:sp>
+        <p:nvSpPr>
+          <p:cNvPr id="8" name="Shape 6"/>
           <p:cNvSpPr/>
           <p:nvPr/>
         </p:nvSpPr>
@@ -10940,7 +12005,7 @@
       </p:sp>
       <p:sp>
         <p:nvSpPr>
-          <p:cNvPr id="8" name="Text 6"/>
+          <p:cNvPr id="9" name="Text 7"/>
           <p:cNvSpPr/>
           <p:nvPr/>
         </p:nvSpPr>
@@ -10979,14 +12044,14 @@
       </p:sp>
       <p:sp>
         <p:nvSpPr>
-          <p:cNvPr id="9" name="Text 7"/>
+          <p:cNvPr id="10" name="Text 8"/>
           <p:cNvSpPr/>
           <p:nvPr/>
         </p:nvSpPr>
         <p:spPr>
           <a:xfrm>
             <a:off x="640080" y="621792"/>
-            <a:ext cx="10881360" cy="566928"/>
+            <a:ext cx="10881360" cy="713232"/>
           </a:xfrm>
           <a:prstGeom prst="rect">
             <a:avLst/>
@@ -11004,7 +12069,7 @@
               <a:buNone/>
             </a:pPr>
             <a:r>
-              <a:rPr lang="en-US" sz="2700" b="1" dirty="0">
+              <a:rPr lang="en-US" sz="3400" b="1" dirty="0">
                 <a:solidFill>
                   <a:srgbClr val="003A63"/>
                 </a:solidFill>
@@ -11014,20 +12079,20 @@
               </a:rPr>
               <a:t>Learning Objectives</a:t>
             </a:r>
-            <a:endParaRPr lang="en-US" sz="2700" dirty="0"/>
-          </a:p>
-        </p:txBody>
-      </p:sp>
-      <p:sp>
-        <p:nvSpPr>
-          <p:cNvPr id="10" name="Text 8"/>
-          <p:cNvSpPr/>
-          <p:nvPr/>
-        </p:nvSpPr>
-        <p:spPr>
-          <a:xfrm>
-            <a:off x="868680" y="1417320"/>
-            <a:ext cx="6675120" cy="4434840"/>
+            <a:endParaRPr lang="en-US" sz="3400" dirty="0"/>
+          </a:p>
+        </p:txBody>
+      </p:sp>
+      <p:sp>
+        <p:nvSpPr>
+          <p:cNvPr id="11" name="Text 9"/>
+          <p:cNvSpPr/>
+          <p:nvPr/>
+        </p:nvSpPr>
+        <p:spPr>
+          <a:xfrm>
+            <a:off x="868680" y="1508760"/>
+            <a:ext cx="6537960" cy="4160520"/>
           </a:xfrm>
           <a:prstGeom prst="rect">
             <a:avLst/>
@@ -11042,7 +12107,7 @@
           <a:lstStyle/>
           <a:p>
             <a:r>
-              <a:rPr lang="en-US" sz="1700" dirty="0">
+              <a:rPr lang="en-US" sz="2100" dirty="0">
                 <a:solidFill>
                   <a:srgbClr val="17364A"/>
                 </a:solidFill>
@@ -11052,11 +12117,11 @@
               </a:rPr>
               <a:t>Identify workforce roles needed for responsible AI adoption in public health.</a:t>
             </a:r>
-            <a:endParaRPr lang="en-US" sz="1700" dirty="0"/>
-          </a:p>
-          <a:p>
-            <a:r>
-              <a:rPr lang="en-US" sz="1700" dirty="0">
+            <a:endParaRPr lang="en-US" sz="2100" dirty="0"/>
+          </a:p>
+          <a:p>
+            <a:r>
+              <a:rPr lang="en-US" sz="2100" dirty="0">
                 <a:solidFill>
                   <a:srgbClr val="17364A"/>
                 </a:solidFill>
@@ -11064,13 +12129,13 @@
                 <a:ea typeface="Aptos" pitchFamily="34" charset="-122"/>
                 <a:cs typeface="Aptos" pitchFamily="34" charset="-120"/>
               </a:rPr>
-              <a:t>Distinguish between AI users, reviewers, implementers, governance participants, and accountability owners.</a:t>
-            </a:r>
-            <a:endParaRPr lang="en-US" sz="1700" dirty="0"/>
-          </a:p>
-          <a:p>
-            <a:r>
-              <a:rPr lang="en-US" sz="1700" dirty="0">
+              <a:t>Distinguish between AI users, reviewers, implementers, governance participants, and accountability.</a:t>
+            </a:r>
+            <a:endParaRPr lang="en-US" sz="2100" dirty="0"/>
+          </a:p>
+          <a:p>
+            <a:r>
+              <a:rPr lang="en-US" sz="2100" dirty="0">
                 <a:solidFill>
                   <a:srgbClr val="17364A"/>
                 </a:solidFill>
@@ -11080,27 +12145,13 @@
               </a:rPr>
               <a:t>Develop role-based competency expectations for AI-supported work.</a:t>
             </a:r>
-            <a:endParaRPr lang="en-US" sz="1700" dirty="0"/>
-          </a:p>
-          <a:p>
-            <a:r>
-              <a:rPr lang="en-US" sz="1700" dirty="0">
-                <a:solidFill>
-                  <a:srgbClr val="17364A"/>
-                </a:solidFill>
-                <a:latin typeface="Aptos" pitchFamily="34" charset="0"/>
-                <a:ea typeface="Aptos" pitchFamily="34" charset="-122"/>
-                <a:cs typeface="Aptos" pitchFamily="34" charset="-120"/>
-              </a:rPr>
-              <a:t>Recognize workforce risks such as deskilling, uneven access to training, and unclear role boundaries.</a:t>
-            </a:r>
-            <a:endParaRPr lang="en-US" sz="1700" dirty="0"/>
-          </a:p>
-        </p:txBody>
-      </p:sp>
-      <p:sp>
-        <p:nvSpPr>
-          <p:cNvPr id="11" name="Shape 9"/>
+            <a:endParaRPr lang="en-US" sz="2100" dirty="0"/>
+          </a:p>
+        </p:txBody>
+      </p:sp>
+      <p:sp>
+        <p:nvSpPr>
+          <p:cNvPr id="12" name="Shape 10"/>
           <p:cNvSpPr/>
           <p:nvPr/>
         </p:nvSpPr>
@@ -11127,14 +12178,14 @@
       </p:sp>
       <p:sp>
         <p:nvSpPr>
-          <p:cNvPr id="12" name="Text 10"/>
+          <p:cNvPr id="13" name="Text 11"/>
           <p:cNvSpPr/>
           <p:nvPr/>
         </p:nvSpPr>
         <p:spPr>
           <a:xfrm>
             <a:off x="8074152" y="1563624"/>
-            <a:ext cx="2825496" cy="201168"/>
+            <a:ext cx="2825496" cy="256032"/>
           </a:xfrm>
           <a:prstGeom prst="rect">
             <a:avLst/>
@@ -11150,7 +12201,7 @@
               <a:buNone/>
             </a:pPr>
             <a:r>
-              <a:rPr lang="en-US" sz="950" b="1" dirty="0">
+              <a:rPr lang="en-US" sz="1300" b="1" dirty="0">
                 <a:solidFill>
                   <a:srgbClr val="0068B7"/>
                 </a:solidFill>
@@ -11160,20 +12211,20 @@
               </a:rPr>
               <a:t>Key idea</a:t>
             </a:r>
-            <a:endParaRPr lang="en-US" sz="950" dirty="0"/>
-          </a:p>
-        </p:txBody>
-      </p:sp>
-      <p:sp>
-        <p:nvSpPr>
-          <p:cNvPr id="13" name="Text 11"/>
-          <p:cNvSpPr/>
-          <p:nvPr/>
-        </p:nvSpPr>
-        <p:spPr>
-          <a:xfrm>
-            <a:off x="8074152" y="1856232"/>
-            <a:ext cx="2825496" cy="1261872"/>
+            <a:endParaRPr lang="en-US" sz="1300" dirty="0"/>
+          </a:p>
+        </p:txBody>
+      </p:sp>
+      <p:sp>
+        <p:nvSpPr>
+          <p:cNvPr id="14" name="Text 12"/>
+          <p:cNvSpPr/>
+          <p:nvPr/>
+        </p:nvSpPr>
+        <p:spPr>
+          <a:xfrm>
+            <a:off x="8074152" y="1920240"/>
+            <a:ext cx="2825496" cy="1188720"/>
           </a:xfrm>
           <a:prstGeom prst="rect">
             <a:avLst/>
@@ -11191,7 +12242,7 @@
               <a:buNone/>
             </a:pPr>
             <a:r>
-              <a:rPr lang="en-US" sz="1250" dirty="0">
+              <a:rPr lang="en-US" sz="1550" dirty="0">
                 <a:solidFill>
                   <a:srgbClr val="17364A"/>
                 </a:solidFill>
@@ -11201,13 +12252,13 @@
               </a:rPr>
               <a:t>Identify workforce roles needed for responsible AI adoption in public health.</a:t>
             </a:r>
-            <a:endParaRPr lang="en-US" sz="1250" dirty="0"/>
-          </a:p>
-        </p:txBody>
-      </p:sp>
-      <p:sp>
-        <p:nvSpPr>
-          <p:cNvPr id="14" name="Shape 12"/>
+            <a:endParaRPr lang="en-US" sz="1550" dirty="0"/>
+          </a:p>
+        </p:txBody>
+      </p:sp>
+      <p:sp>
+        <p:nvSpPr>
+          <p:cNvPr id="15" name="Shape 13"/>
           <p:cNvSpPr/>
           <p:nvPr/>
         </p:nvSpPr>
@@ -11234,14 +12285,14 @@
       </p:sp>
       <p:sp>
         <p:nvSpPr>
-          <p:cNvPr id="15" name="Text 13"/>
+          <p:cNvPr id="16" name="Text 14"/>
           <p:cNvSpPr/>
           <p:nvPr/>
         </p:nvSpPr>
         <p:spPr>
           <a:xfrm>
             <a:off x="8074152" y="3666744"/>
-            <a:ext cx="2825496" cy="201168"/>
+            <a:ext cx="2825496" cy="256032"/>
           </a:xfrm>
           <a:prstGeom prst="rect">
             <a:avLst/>
@@ -11257,7 +12308,7 @@
               <a:buNone/>
             </a:pPr>
             <a:r>
-              <a:rPr lang="en-US" sz="950" b="1" dirty="0">
+              <a:rPr lang="en-US" sz="1300" b="1" dirty="0">
                 <a:solidFill>
                   <a:srgbClr val="0068B7"/>
                 </a:solidFill>
@@ -11267,20 +12318,20 @@
               </a:rPr>
               <a:t>Use this for</a:t>
             </a:r>
-            <a:endParaRPr lang="en-US" sz="950" dirty="0"/>
-          </a:p>
-        </p:txBody>
-      </p:sp>
-      <p:sp>
-        <p:nvSpPr>
-          <p:cNvPr id="16" name="Text 14"/>
-          <p:cNvSpPr/>
-          <p:nvPr/>
-        </p:nvSpPr>
-        <p:spPr>
-          <a:xfrm>
-            <a:off x="8074152" y="3959352"/>
-            <a:ext cx="2825496" cy="1170432"/>
+            <a:endParaRPr lang="en-US" sz="1300" dirty="0"/>
+          </a:p>
+        </p:txBody>
+      </p:sp>
+      <p:sp>
+        <p:nvSpPr>
+          <p:cNvPr id="17" name="Text 15"/>
+          <p:cNvSpPr/>
+          <p:nvPr/>
+        </p:nvSpPr>
+        <p:spPr>
+          <a:xfrm>
+            <a:off x="8074152" y="4023360"/>
+            <a:ext cx="2825496" cy="1097280"/>
           </a:xfrm>
           <a:prstGeom prst="rect">
             <a:avLst/>
@@ -11298,7 +12349,7 @@
               <a:buNone/>
             </a:pPr>
             <a:r>
-              <a:rPr lang="en-US" sz="1250" dirty="0">
+              <a:rPr lang="en-US" sz="1550" dirty="0">
                 <a:solidFill>
                   <a:srgbClr val="17364A"/>
                 </a:solidFill>
@@ -11308,7 +12359,7 @@
               </a:rPr>
               <a:t>Connect the concept to public health decisions, safeguards, documentation, or implementation work.</a:t>
             </a:r>
-            <a:endParaRPr lang="en-US" sz="1250" dirty="0"/>
+            <a:endParaRPr lang="en-US" sz="1550" dirty="0"/>
           </a:p>
         </p:txBody>
       </p:sp>
@@ -11505,7 +12556,7 @@
                 <a:ea typeface="Aptos" pitchFamily="34" charset="-122"/>
                 <a:cs typeface="Aptos" pitchFamily="34" charset="-120"/>
               </a:rPr>
-              <a:t>© Paula Soper</a:t>
+              <a:t>Â© Paula Soper</a:t>
             </a:r>
             <a:endParaRPr lang="en-US" sz="800" dirty="0"/>
           </a:p>
@@ -11513,7 +12564,46 @@
       </p:sp>
       <p:sp>
         <p:nvSpPr>
-          <p:cNvPr id="7" name="Shape 5"/>
+          <p:cNvPr id="7" name="Text 5"/>
+          <p:cNvSpPr/>
+          <p:nvPr/>
+        </p:nvSpPr>
+        <p:spPr>
+          <a:xfrm>
+            <a:off x="11137392" y="6510528"/>
+            <a:ext cx="411480" cy="201168"/>
+          </a:xfrm>
+          <a:prstGeom prst="rect">
+            <a:avLst/>
+          </a:prstGeom>
+          <a:noFill/>
+          <a:ln/>
+        </p:spPr>
+        <p:txBody>
+          <a:bodyPr wrap="square" lIns="0" tIns="0" rIns="0" bIns="0" rtlCol="0" anchor="ctr"/>
+          <a:lstStyle/>
+          <a:p>
+            <a:pPr algn="r" indent="0" marL="0">
+              <a:buNone/>
+            </a:pPr>
+            <a:r>
+              <a:rPr lang="en-US" sz="900" dirty="0">
+                <a:solidFill>
+                  <a:srgbClr val="5F7181"/>
+                </a:solidFill>
+                <a:latin typeface="Aptos" pitchFamily="34" charset="0"/>
+                <a:ea typeface="Aptos" pitchFamily="34" charset="-122"/>
+                <a:cs typeface="Aptos" pitchFamily="34" charset="-120"/>
+              </a:rPr>
+              <a:t>6</a:t>
+            </a:r>
+            <a:endParaRPr lang="en-US" sz="900" dirty="0"/>
+          </a:p>
+        </p:txBody>
+      </p:sp>
+      <p:sp>
+        <p:nvSpPr>
+          <p:cNvPr id="8" name="Shape 6"/>
           <p:cNvSpPr/>
           <p:nvPr/>
         </p:nvSpPr>
@@ -11538,7 +12628,7 @@
       </p:sp>
       <p:sp>
         <p:nvSpPr>
-          <p:cNvPr id="8" name="Text 6"/>
+          <p:cNvPr id="9" name="Text 7"/>
           <p:cNvSpPr/>
           <p:nvPr/>
         </p:nvSpPr>
@@ -11577,14 +12667,14 @@
       </p:sp>
       <p:sp>
         <p:nvSpPr>
-          <p:cNvPr id="9" name="Text 7"/>
+          <p:cNvPr id="10" name="Text 8"/>
           <p:cNvSpPr/>
           <p:nvPr/>
         </p:nvSpPr>
         <p:spPr>
           <a:xfrm>
             <a:off x="640080" y="621792"/>
-            <a:ext cx="10881360" cy="566928"/>
+            <a:ext cx="10881360" cy="713232"/>
           </a:xfrm>
           <a:prstGeom prst="rect">
             <a:avLst/>
@@ -11602,7 +12692,7 @@
               <a:buNone/>
             </a:pPr>
             <a:r>
-              <a:rPr lang="en-US" sz="2700" b="1" dirty="0">
+              <a:rPr lang="en-US" sz="3400" b="1" dirty="0">
                 <a:solidFill>
                   <a:srgbClr val="003A63"/>
                 </a:solidFill>
@@ -11612,20 +12702,20 @@
               </a:rPr>
               <a:t>Module Overview</a:t>
             </a:r>
-            <a:endParaRPr lang="en-US" sz="2700" dirty="0"/>
-          </a:p>
-        </p:txBody>
-      </p:sp>
-      <p:sp>
-        <p:nvSpPr>
-          <p:cNvPr id="10" name="Text 8"/>
-          <p:cNvSpPr/>
-          <p:nvPr/>
-        </p:nvSpPr>
-        <p:spPr>
-          <a:xfrm>
-            <a:off x="868680" y="1417320"/>
-            <a:ext cx="6675120" cy="4434840"/>
+            <a:endParaRPr lang="en-US" sz="3400" dirty="0"/>
+          </a:p>
+        </p:txBody>
+      </p:sp>
+      <p:sp>
+        <p:nvSpPr>
+          <p:cNvPr id="11" name="Text 9"/>
+          <p:cNvSpPr/>
+          <p:nvPr/>
+        </p:nvSpPr>
+        <p:spPr>
+          <a:xfrm>
+            <a:off x="868680" y="1508760"/>
+            <a:ext cx="6537960" cy="4160520"/>
           </a:xfrm>
           <a:prstGeom prst="rect">
             <a:avLst/>
@@ -11640,7 +12730,7 @@
           <a:lstStyle/>
           <a:p>
             <a:r>
-              <a:rPr lang="en-US" sz="1700" dirty="0">
+              <a:rPr lang="en-US" sz="2100" dirty="0">
                 <a:solidFill>
                   <a:srgbClr val="17364A"/>
                 </a:solidFill>
@@ -11650,11 +12740,11 @@
               </a:rPr>
               <a:t>AI changes the skills, roles, and collaboration patterns needed in public health agencies.</a:t>
             </a:r>
-            <a:endParaRPr lang="en-US" sz="1700" dirty="0"/>
-          </a:p>
-          <a:p>
-            <a:r>
-              <a:rPr lang="en-US" sz="1700" dirty="0">
+            <a:endParaRPr lang="en-US" sz="2100" dirty="0"/>
+          </a:p>
+          <a:p>
+            <a:r>
+              <a:rPr lang="en-US" sz="2100" dirty="0">
                 <a:solidFill>
                   <a:srgbClr val="17364A"/>
                 </a:solidFill>
@@ -11664,11 +12754,11 @@
               </a:rPr>
               <a:t>It does not eliminate the need for public health expertise.</a:t>
             </a:r>
-            <a:endParaRPr lang="en-US" sz="1700" dirty="0"/>
-          </a:p>
-          <a:p>
-            <a:r>
-              <a:rPr lang="en-US" sz="1700" dirty="0">
+            <a:endParaRPr lang="en-US" sz="2100" dirty="0"/>
+          </a:p>
+          <a:p>
+            <a:r>
+              <a:rPr lang="en-US" sz="2100" dirty="0">
                 <a:solidFill>
                   <a:srgbClr val="17364A"/>
                 </a:solidFill>
@@ -11676,29 +12766,15 @@
                 <a:ea typeface="Aptos" pitchFamily="34" charset="-122"/>
                 <a:cs typeface="Aptos" pitchFamily="34" charset="-120"/>
               </a:rPr>
-              <a:t>Instead, it increases the need for staff who can translate across program, data, technology, privacy, legal, equity,.</a:t>
-            </a:r>
-            <a:endParaRPr lang="en-US" sz="1700" dirty="0"/>
-          </a:p>
-          <a:p>
-            <a:r>
-              <a:rPr lang="en-US" sz="1700" dirty="0">
-                <a:solidFill>
-                  <a:srgbClr val="17364A"/>
-                </a:solidFill>
-                <a:latin typeface="Aptos" pitchFamily="34" charset="0"/>
-                <a:ea typeface="Aptos" pitchFamily="34" charset="-122"/>
-                <a:cs typeface="Aptos" pitchFamily="34" charset="-120"/>
-              </a:rPr>
-              <a:t>Leaders need a workforce strategy that prepares staff to use, review, govern, and improve AI-supported workflows.</a:t>
-            </a:r>
-            <a:endParaRPr lang="en-US" sz="1700" dirty="0"/>
-          </a:p>
-        </p:txBody>
-      </p:sp>
-      <p:sp>
-        <p:nvSpPr>
-          <p:cNvPr id="11" name="Shape 9"/>
+              <a:t>Instead, it increases the need for staff who can translate across program, data, technology, privacy,.</a:t>
+            </a:r>
+            <a:endParaRPr lang="en-US" sz="2100" dirty="0"/>
+          </a:p>
+        </p:txBody>
+      </p:sp>
+      <p:sp>
+        <p:nvSpPr>
+          <p:cNvPr id="12" name="Shape 10"/>
           <p:cNvSpPr/>
           <p:nvPr/>
         </p:nvSpPr>
@@ -11725,14 +12801,14 @@
       </p:sp>
       <p:sp>
         <p:nvSpPr>
-          <p:cNvPr id="12" name="Text 10"/>
+          <p:cNvPr id="13" name="Text 11"/>
           <p:cNvSpPr/>
           <p:nvPr/>
         </p:nvSpPr>
         <p:spPr>
           <a:xfrm>
             <a:off x="8074152" y="1563624"/>
-            <a:ext cx="2825496" cy="201168"/>
+            <a:ext cx="2825496" cy="256032"/>
           </a:xfrm>
           <a:prstGeom prst="rect">
             <a:avLst/>
@@ -11748,7 +12824,7 @@
               <a:buNone/>
             </a:pPr>
             <a:r>
-              <a:rPr lang="en-US" sz="950" b="1" dirty="0">
+              <a:rPr lang="en-US" sz="1300" b="1" dirty="0">
                 <a:solidFill>
                   <a:srgbClr val="0068B7"/>
                 </a:solidFill>
@@ -11758,20 +12834,20 @@
               </a:rPr>
               <a:t>Key idea</a:t>
             </a:r>
-            <a:endParaRPr lang="en-US" sz="950" dirty="0"/>
-          </a:p>
-        </p:txBody>
-      </p:sp>
-      <p:sp>
-        <p:nvSpPr>
-          <p:cNvPr id="13" name="Text 11"/>
-          <p:cNvSpPr/>
-          <p:nvPr/>
-        </p:nvSpPr>
-        <p:spPr>
-          <a:xfrm>
-            <a:off x="8074152" y="1856232"/>
-            <a:ext cx="2825496" cy="1261872"/>
+            <a:endParaRPr lang="en-US" sz="1300" dirty="0"/>
+          </a:p>
+        </p:txBody>
+      </p:sp>
+      <p:sp>
+        <p:nvSpPr>
+          <p:cNvPr id="14" name="Text 12"/>
+          <p:cNvSpPr/>
+          <p:nvPr/>
+        </p:nvSpPr>
+        <p:spPr>
+          <a:xfrm>
+            <a:off x="8074152" y="1920240"/>
+            <a:ext cx="2825496" cy="1188720"/>
           </a:xfrm>
           <a:prstGeom prst="rect">
             <a:avLst/>
@@ -11789,7 +12865,7 @@
               <a:buNone/>
             </a:pPr>
             <a:r>
-              <a:rPr lang="en-US" sz="1250" dirty="0">
+              <a:rPr lang="en-US" sz="1550" dirty="0">
                 <a:solidFill>
                   <a:srgbClr val="17364A"/>
                 </a:solidFill>
@@ -11799,13 +12875,13 @@
               </a:rPr>
               <a:t>AI changes the skills, roles, and collaboration patterns needed in public health agencies.</a:t>
             </a:r>
-            <a:endParaRPr lang="en-US" sz="1250" dirty="0"/>
-          </a:p>
-        </p:txBody>
-      </p:sp>
-      <p:sp>
-        <p:nvSpPr>
-          <p:cNvPr id="14" name="Shape 12"/>
+            <a:endParaRPr lang="en-US" sz="1550" dirty="0"/>
+          </a:p>
+        </p:txBody>
+      </p:sp>
+      <p:sp>
+        <p:nvSpPr>
+          <p:cNvPr id="15" name="Shape 13"/>
           <p:cNvSpPr/>
           <p:nvPr/>
         </p:nvSpPr>
@@ -11832,14 +12908,14 @@
       </p:sp>
       <p:sp>
         <p:nvSpPr>
-          <p:cNvPr id="15" name="Text 13"/>
+          <p:cNvPr id="16" name="Text 14"/>
           <p:cNvSpPr/>
           <p:nvPr/>
         </p:nvSpPr>
         <p:spPr>
           <a:xfrm>
             <a:off x="8074152" y="3666744"/>
-            <a:ext cx="2825496" cy="201168"/>
+            <a:ext cx="2825496" cy="256032"/>
           </a:xfrm>
           <a:prstGeom prst="rect">
             <a:avLst/>
@@ -11855,7 +12931,7 @@
               <a:buNone/>
             </a:pPr>
             <a:r>
-              <a:rPr lang="en-US" sz="950" b="1" dirty="0">
+              <a:rPr lang="en-US" sz="1300" b="1" dirty="0">
                 <a:solidFill>
                   <a:srgbClr val="0068B7"/>
                 </a:solidFill>
@@ -11865,20 +12941,20 @@
               </a:rPr>
               <a:t>Use this for</a:t>
             </a:r>
-            <a:endParaRPr lang="en-US" sz="950" dirty="0"/>
-          </a:p>
-        </p:txBody>
-      </p:sp>
-      <p:sp>
-        <p:nvSpPr>
-          <p:cNvPr id="16" name="Text 14"/>
-          <p:cNvSpPr/>
-          <p:nvPr/>
-        </p:nvSpPr>
-        <p:spPr>
-          <a:xfrm>
-            <a:off x="8074152" y="3959352"/>
-            <a:ext cx="2825496" cy="1170432"/>
+            <a:endParaRPr lang="en-US" sz="1300" dirty="0"/>
+          </a:p>
+        </p:txBody>
+      </p:sp>
+      <p:sp>
+        <p:nvSpPr>
+          <p:cNvPr id="17" name="Text 15"/>
+          <p:cNvSpPr/>
+          <p:nvPr/>
+        </p:nvSpPr>
+        <p:spPr>
+          <a:xfrm>
+            <a:off x="8074152" y="4023360"/>
+            <a:ext cx="2825496" cy="1097280"/>
           </a:xfrm>
           <a:prstGeom prst="rect">
             <a:avLst/>
@@ -11896,7 +12972,7 @@
               <a:buNone/>
             </a:pPr>
             <a:r>
-              <a:rPr lang="en-US" sz="1250" dirty="0">
+              <a:rPr lang="en-US" sz="1550" dirty="0">
                 <a:solidFill>
                   <a:srgbClr val="17364A"/>
                 </a:solidFill>
@@ -11906,7 +12982,7 @@
               </a:rPr>
               <a:t>Connect the concept to public health decisions, safeguards, documentation, or implementation work.</a:t>
             </a:r>
-            <a:endParaRPr lang="en-US" sz="1250" dirty="0"/>
+            <a:endParaRPr lang="en-US" sz="1550" dirty="0"/>
           </a:p>
         </p:txBody>
       </p:sp>
@@ -12103,7 +13179,7 @@
                 <a:ea typeface="Aptos" pitchFamily="34" charset="-122"/>
                 <a:cs typeface="Aptos" pitchFamily="34" charset="-120"/>
               </a:rPr>
-              <a:t>© Paula Soper</a:t>
+              <a:t>Â© Paula Soper</a:t>
             </a:r>
             <a:endParaRPr lang="en-US" sz="800" dirty="0"/>
           </a:p>
@@ -12111,7 +13187,46 @@
       </p:sp>
       <p:sp>
         <p:nvSpPr>
-          <p:cNvPr id="7" name="Shape 5"/>
+          <p:cNvPr id="7" name="Text 5"/>
+          <p:cNvSpPr/>
+          <p:nvPr/>
+        </p:nvSpPr>
+        <p:spPr>
+          <a:xfrm>
+            <a:off x="11137392" y="6510528"/>
+            <a:ext cx="411480" cy="201168"/>
+          </a:xfrm>
+          <a:prstGeom prst="rect">
+            <a:avLst/>
+          </a:prstGeom>
+          <a:noFill/>
+          <a:ln/>
+        </p:spPr>
+        <p:txBody>
+          <a:bodyPr wrap="square" lIns="0" tIns="0" rIns="0" bIns="0" rtlCol="0" anchor="ctr"/>
+          <a:lstStyle/>
+          <a:p>
+            <a:pPr algn="r" indent="0" marL="0">
+              <a:buNone/>
+            </a:pPr>
+            <a:r>
+              <a:rPr lang="en-US" sz="900" dirty="0">
+                <a:solidFill>
+                  <a:srgbClr val="5F7181"/>
+                </a:solidFill>
+                <a:latin typeface="Aptos" pitchFamily="34" charset="0"/>
+                <a:ea typeface="Aptos" pitchFamily="34" charset="-122"/>
+                <a:cs typeface="Aptos" pitchFamily="34" charset="-120"/>
+              </a:rPr>
+              <a:t>7</a:t>
+            </a:r>
+            <a:endParaRPr lang="en-US" sz="900" dirty="0"/>
+          </a:p>
+        </p:txBody>
+      </p:sp>
+      <p:sp>
+        <p:nvSpPr>
+          <p:cNvPr id="8" name="Shape 6"/>
           <p:cNvSpPr/>
           <p:nvPr/>
         </p:nvSpPr>
@@ -12136,7 +13251,7 @@
       </p:sp>
       <p:sp>
         <p:nvSpPr>
-          <p:cNvPr id="8" name="Text 6"/>
+          <p:cNvPr id="9" name="Text 7"/>
           <p:cNvSpPr/>
           <p:nvPr/>
         </p:nvSpPr>
@@ -12175,14 +13290,14 @@
       </p:sp>
       <p:sp>
         <p:nvSpPr>
-          <p:cNvPr id="9" name="Text 7"/>
+          <p:cNvPr id="10" name="Text 8"/>
           <p:cNvSpPr/>
           <p:nvPr/>
         </p:nvSpPr>
         <p:spPr>
           <a:xfrm>
             <a:off x="640080" y="621792"/>
-            <a:ext cx="10881360" cy="566928"/>
+            <a:ext cx="10881360" cy="713232"/>
           </a:xfrm>
           <a:prstGeom prst="rect">
             <a:avLst/>
@@ -12200,7 +13315,7 @@
               <a:buNone/>
             </a:pPr>
             <a:r>
-              <a:rPr lang="en-US" sz="2700" b="1" dirty="0">
+              <a:rPr lang="en-US" sz="3400" b="1" dirty="0">
                 <a:solidFill>
                   <a:srgbClr val="003A63"/>
                 </a:solidFill>
@@ -12210,20 +13325,20 @@
               </a:rPr>
               <a:t>Why This Topic Matters for Public Health AI</a:t>
             </a:r>
-            <a:endParaRPr lang="en-US" sz="2700" dirty="0"/>
-          </a:p>
-        </p:txBody>
-      </p:sp>
-      <p:sp>
-        <p:nvSpPr>
-          <p:cNvPr id="10" name="Text 8"/>
-          <p:cNvSpPr/>
-          <p:nvPr/>
-        </p:nvSpPr>
-        <p:spPr>
-          <a:xfrm>
-            <a:off x="868680" y="1417320"/>
-            <a:ext cx="6675120" cy="4434840"/>
+            <a:endParaRPr lang="en-US" sz="3400" dirty="0"/>
+          </a:p>
+        </p:txBody>
+      </p:sp>
+      <p:sp>
+        <p:nvSpPr>
+          <p:cNvPr id="11" name="Text 9"/>
+          <p:cNvSpPr/>
+          <p:nvPr/>
+        </p:nvSpPr>
+        <p:spPr>
+          <a:xfrm>
+            <a:off x="868680" y="1508760"/>
+            <a:ext cx="6537960" cy="4160520"/>
           </a:xfrm>
           <a:prstGeom prst="rect">
             <a:avLst/>
@@ -12238,7 +13353,7 @@
           <a:lstStyle/>
           <a:p>
             <a:r>
-              <a:rPr lang="en-US" sz="1700" dirty="0">
+              <a:rPr lang="en-US" sz="2100" dirty="0">
                 <a:solidFill>
                   <a:srgbClr val="17364A"/>
                 </a:solidFill>
@@ -12248,11 +13363,11 @@
               </a:rPr>
               <a:t>Public health AI depends on people who understand both technology and context.</a:t>
             </a:r>
-            <a:endParaRPr lang="en-US" sz="1700" dirty="0"/>
-          </a:p>
-          <a:p>
-            <a:r>
-              <a:rPr lang="en-US" sz="1700" dirty="0">
+            <a:endParaRPr lang="en-US" sz="2100" dirty="0"/>
+          </a:p>
+          <a:p>
+            <a:r>
+              <a:rPr lang="en-US" sz="2100" dirty="0">
                 <a:solidFill>
                   <a:srgbClr val="17364A"/>
                 </a:solidFill>
@@ -12262,11 +13377,11 @@
               </a:rPr>
               <a:t>A model may generate a summary, but an epidemiologist must judge whether the summary is meaningful.</a:t>
             </a:r>
-            <a:endParaRPr lang="en-US" sz="1700" dirty="0"/>
-          </a:p>
-          <a:p>
-            <a:r>
-              <a:rPr lang="en-US" sz="1700" dirty="0">
+            <a:endParaRPr lang="en-US" sz="2100" dirty="0"/>
+          </a:p>
+          <a:p>
+            <a:r>
+              <a:rPr lang="en-US" sz="2100" dirty="0">
                 <a:solidFill>
                   <a:srgbClr val="17364A"/>
                 </a:solidFill>
@@ -12276,27 +13391,13 @@
               </a:rPr>
               <a:t>A vendor may describe a product, but an informatician must assess interoperability and data flow.</a:t>
             </a:r>
-            <a:endParaRPr lang="en-US" sz="1700" dirty="0"/>
-          </a:p>
-          <a:p>
-            <a:r>
-              <a:rPr lang="en-US" sz="1700" dirty="0">
-                <a:solidFill>
-                  <a:srgbClr val="17364A"/>
-                </a:solidFill>
-                <a:latin typeface="Aptos" pitchFamily="34" charset="0"/>
-                <a:ea typeface="Aptos" pitchFamily="34" charset="-122"/>
-                <a:cs typeface="Aptos" pitchFamily="34" charset="-120"/>
-              </a:rPr>
-              <a:t>A leader may approve a use case, but governance participants must ensure that privacy, equity, security, and legal concerns.</a:t>
-            </a:r>
-            <a:endParaRPr lang="en-US" sz="1700" dirty="0"/>
-          </a:p>
-        </p:txBody>
-      </p:sp>
-      <p:sp>
-        <p:nvSpPr>
-          <p:cNvPr id="11" name="Shape 9"/>
+            <a:endParaRPr lang="en-US" sz="2100" dirty="0"/>
+          </a:p>
+        </p:txBody>
+      </p:sp>
+      <p:sp>
+        <p:nvSpPr>
+          <p:cNvPr id="12" name="Shape 10"/>
           <p:cNvSpPr/>
           <p:nvPr/>
         </p:nvSpPr>
@@ -12323,14 +13424,14 @@
       </p:sp>
       <p:sp>
         <p:nvSpPr>
-          <p:cNvPr id="12" name="Text 10"/>
+          <p:cNvPr id="13" name="Text 11"/>
           <p:cNvSpPr/>
           <p:nvPr/>
         </p:nvSpPr>
         <p:spPr>
           <a:xfrm>
             <a:off x="8074152" y="1563624"/>
-            <a:ext cx="2825496" cy="201168"/>
+            <a:ext cx="2825496" cy="256032"/>
           </a:xfrm>
           <a:prstGeom prst="rect">
             <a:avLst/>
@@ -12346,7 +13447,7 @@
               <a:buNone/>
             </a:pPr>
             <a:r>
-              <a:rPr lang="en-US" sz="950" b="1" dirty="0">
+              <a:rPr lang="en-US" sz="1300" b="1" dirty="0">
                 <a:solidFill>
                   <a:srgbClr val="0068B7"/>
                 </a:solidFill>
@@ -12356,20 +13457,20 @@
               </a:rPr>
               <a:t>Key idea</a:t>
             </a:r>
-            <a:endParaRPr lang="en-US" sz="950" dirty="0"/>
-          </a:p>
-        </p:txBody>
-      </p:sp>
-      <p:sp>
-        <p:nvSpPr>
-          <p:cNvPr id="13" name="Text 11"/>
-          <p:cNvSpPr/>
-          <p:nvPr/>
-        </p:nvSpPr>
-        <p:spPr>
-          <a:xfrm>
-            <a:off x="8074152" y="1856232"/>
-            <a:ext cx="2825496" cy="1261872"/>
+            <a:endParaRPr lang="en-US" sz="1300" dirty="0"/>
+          </a:p>
+        </p:txBody>
+      </p:sp>
+      <p:sp>
+        <p:nvSpPr>
+          <p:cNvPr id="14" name="Text 12"/>
+          <p:cNvSpPr/>
+          <p:nvPr/>
+        </p:nvSpPr>
+        <p:spPr>
+          <a:xfrm>
+            <a:off x="8074152" y="1920240"/>
+            <a:ext cx="2825496" cy="1188720"/>
           </a:xfrm>
           <a:prstGeom prst="rect">
             <a:avLst/>
@@ -12387,7 +13488,7 @@
               <a:buNone/>
             </a:pPr>
             <a:r>
-              <a:rPr lang="en-US" sz="1250" dirty="0">
+              <a:rPr lang="en-US" sz="1550" dirty="0">
                 <a:solidFill>
                   <a:srgbClr val="17364A"/>
                 </a:solidFill>
@@ -12397,13 +13498,13 @@
               </a:rPr>
               <a:t>Public health AI depends on people who understand both technology and context.</a:t>
             </a:r>
-            <a:endParaRPr lang="en-US" sz="1250" dirty="0"/>
-          </a:p>
-        </p:txBody>
-      </p:sp>
-      <p:sp>
-        <p:nvSpPr>
-          <p:cNvPr id="14" name="Shape 12"/>
+            <a:endParaRPr lang="en-US" sz="1550" dirty="0"/>
+          </a:p>
+        </p:txBody>
+      </p:sp>
+      <p:sp>
+        <p:nvSpPr>
+          <p:cNvPr id="15" name="Shape 13"/>
           <p:cNvSpPr/>
           <p:nvPr/>
         </p:nvSpPr>
@@ -12430,14 +13531,14 @@
       </p:sp>
       <p:sp>
         <p:nvSpPr>
-          <p:cNvPr id="15" name="Text 13"/>
+          <p:cNvPr id="16" name="Text 14"/>
           <p:cNvSpPr/>
           <p:nvPr/>
         </p:nvSpPr>
         <p:spPr>
           <a:xfrm>
             <a:off x="8074152" y="3666744"/>
-            <a:ext cx="2825496" cy="201168"/>
+            <a:ext cx="2825496" cy="256032"/>
           </a:xfrm>
           <a:prstGeom prst="rect">
             <a:avLst/>
@@ -12453,7 +13554,7 @@
               <a:buNone/>
             </a:pPr>
             <a:r>
-              <a:rPr lang="en-US" sz="950" b="1" dirty="0">
+              <a:rPr lang="en-US" sz="1300" b="1" dirty="0">
                 <a:solidFill>
                   <a:srgbClr val="0068B7"/>
                 </a:solidFill>
@@ -12463,20 +13564,20 @@
               </a:rPr>
               <a:t>Use this for</a:t>
             </a:r>
-            <a:endParaRPr lang="en-US" sz="950" dirty="0"/>
-          </a:p>
-        </p:txBody>
-      </p:sp>
-      <p:sp>
-        <p:nvSpPr>
-          <p:cNvPr id="16" name="Text 14"/>
-          <p:cNvSpPr/>
-          <p:nvPr/>
-        </p:nvSpPr>
-        <p:spPr>
-          <a:xfrm>
-            <a:off x="8074152" y="3959352"/>
-            <a:ext cx="2825496" cy="1170432"/>
+            <a:endParaRPr lang="en-US" sz="1300" dirty="0"/>
+          </a:p>
+        </p:txBody>
+      </p:sp>
+      <p:sp>
+        <p:nvSpPr>
+          <p:cNvPr id="17" name="Text 15"/>
+          <p:cNvSpPr/>
+          <p:nvPr/>
+        </p:nvSpPr>
+        <p:spPr>
+          <a:xfrm>
+            <a:off x="8074152" y="4023360"/>
+            <a:ext cx="2825496" cy="1097280"/>
           </a:xfrm>
           <a:prstGeom prst="rect">
             <a:avLst/>
@@ -12494,7 +13595,7 @@
               <a:buNone/>
             </a:pPr>
             <a:r>
-              <a:rPr lang="en-US" sz="1250" dirty="0">
+              <a:rPr lang="en-US" sz="1550" dirty="0">
                 <a:solidFill>
                   <a:srgbClr val="17364A"/>
                 </a:solidFill>
@@ -12504,7 +13605,7 @@
               </a:rPr>
               <a:t>Connect the concept to public health decisions, safeguards, documentation, or implementation work.</a:t>
             </a:r>
-            <a:endParaRPr lang="en-US" sz="1250" dirty="0"/>
+            <a:endParaRPr lang="en-US" sz="1550" dirty="0"/>
           </a:p>
         </p:txBody>
       </p:sp>
@@ -12701,7 +13802,7 @@
                 <a:ea typeface="Aptos" pitchFamily="34" charset="-122"/>
                 <a:cs typeface="Aptos" pitchFamily="34" charset="-120"/>
               </a:rPr>
-              <a:t>© Paula Soper</a:t>
+              <a:t>Â© Paula Soper</a:t>
             </a:r>
             <a:endParaRPr lang="en-US" sz="800" dirty="0"/>
           </a:p>
@@ -12709,7 +13810,46 @@
       </p:sp>
       <p:sp>
         <p:nvSpPr>
-          <p:cNvPr id="7" name="Shape 5"/>
+          <p:cNvPr id="7" name="Text 5"/>
+          <p:cNvSpPr/>
+          <p:nvPr/>
+        </p:nvSpPr>
+        <p:spPr>
+          <a:xfrm>
+            <a:off x="11137392" y="6510528"/>
+            <a:ext cx="411480" cy="201168"/>
+          </a:xfrm>
+          <a:prstGeom prst="rect">
+            <a:avLst/>
+          </a:prstGeom>
+          <a:noFill/>
+          <a:ln/>
+        </p:spPr>
+        <p:txBody>
+          <a:bodyPr wrap="square" lIns="0" tIns="0" rIns="0" bIns="0" rtlCol="0" anchor="ctr"/>
+          <a:lstStyle/>
+          <a:p>
+            <a:pPr algn="r" indent="0" marL="0">
+              <a:buNone/>
+            </a:pPr>
+            <a:r>
+              <a:rPr lang="en-US" sz="900" dirty="0">
+                <a:solidFill>
+                  <a:srgbClr val="5F7181"/>
+                </a:solidFill>
+                <a:latin typeface="Aptos" pitchFamily="34" charset="0"/>
+                <a:ea typeface="Aptos" pitchFamily="34" charset="-122"/>
+                <a:cs typeface="Aptos" pitchFamily="34" charset="-120"/>
+              </a:rPr>
+              <a:t>8</a:t>
+            </a:r>
+            <a:endParaRPr lang="en-US" sz="900" dirty="0"/>
+          </a:p>
+        </p:txBody>
+      </p:sp>
+      <p:sp>
+        <p:nvSpPr>
+          <p:cNvPr id="8" name="Shape 6"/>
           <p:cNvSpPr/>
           <p:nvPr/>
         </p:nvSpPr>
@@ -12734,7 +13874,7 @@
       </p:sp>
       <p:sp>
         <p:nvSpPr>
-          <p:cNvPr id="8" name="Text 6"/>
+          <p:cNvPr id="9" name="Text 7"/>
           <p:cNvSpPr/>
           <p:nvPr/>
         </p:nvSpPr>
@@ -12773,14 +13913,14 @@
       </p:sp>
       <p:sp>
         <p:nvSpPr>
-          <p:cNvPr id="9" name="Text 7"/>
+          <p:cNvPr id="10" name="Text 8"/>
           <p:cNvSpPr/>
           <p:nvPr/>
         </p:nvSpPr>
         <p:spPr>
           <a:xfrm>
             <a:off x="640080" y="621792"/>
-            <a:ext cx="10881360" cy="566928"/>
+            <a:ext cx="10881360" cy="713232"/>
           </a:xfrm>
           <a:prstGeom prst="rect">
             <a:avLst/>
@@ -12798,7 +13938,7 @@
               <a:buNone/>
             </a:pPr>
             <a:r>
-              <a:rPr lang="en-US" sz="2700" b="1" dirty="0">
+              <a:rPr lang="en-US" sz="3400" b="1" dirty="0">
                 <a:solidFill>
                   <a:srgbClr val="003A63"/>
                 </a:solidFill>
@@ -12808,20 +13948,20 @@
               </a:rPr>
               <a:t>Public Health Example</a:t>
             </a:r>
-            <a:endParaRPr lang="en-US" sz="2700" dirty="0"/>
-          </a:p>
-        </p:txBody>
-      </p:sp>
-      <p:sp>
-        <p:nvSpPr>
-          <p:cNvPr id="10" name="Text 8"/>
-          <p:cNvSpPr/>
-          <p:nvPr/>
-        </p:nvSpPr>
-        <p:spPr>
-          <a:xfrm>
-            <a:off x="868680" y="1417320"/>
-            <a:ext cx="6675120" cy="4434840"/>
+            <a:endParaRPr lang="en-US" sz="3400" dirty="0"/>
+          </a:p>
+        </p:txBody>
+      </p:sp>
+      <p:sp>
+        <p:nvSpPr>
+          <p:cNvPr id="11" name="Text 9"/>
+          <p:cNvSpPr/>
+          <p:nvPr/>
+        </p:nvSpPr>
+        <p:spPr>
+          <a:xfrm>
+            <a:off x="868680" y="1508760"/>
+            <a:ext cx="6537960" cy="4160520"/>
           </a:xfrm>
           <a:prstGeom prst="rect">
             <a:avLst/>
@@ -12836,7 +13976,7 @@
           <a:lstStyle/>
           <a:p>
             <a:r>
-              <a:rPr lang="en-US" sz="1700" dirty="0">
+              <a:rPr lang="en-US" sz="2100" dirty="0">
                 <a:solidFill>
                   <a:srgbClr val="17364A"/>
                 </a:solidFill>
@@ -12844,13 +13984,13 @@
                 <a:ea typeface="Aptos" pitchFamily="34" charset="-122"/>
                 <a:cs typeface="Aptos" pitchFamily="34" charset="-120"/>
               </a:rPr>
-              <a:t>A public health agency implements several AI tools: a document assistant, a case summarization tool, a data quality.</a:t>
-            </a:r>
-            <a:endParaRPr lang="en-US" sz="1700" dirty="0"/>
-          </a:p>
-          <a:p>
-            <a:r>
-              <a:rPr lang="en-US" sz="1700" dirty="0">
+              <a:t>A public health agency implements several AI tools: a document assistant, a case summarization tool, a.</a:t>
+            </a:r>
+            <a:endParaRPr lang="en-US" sz="2100" dirty="0"/>
+          </a:p>
+          <a:p>
+            <a:r>
+              <a:rPr lang="en-US" sz="2100" dirty="0">
                 <a:solidFill>
                   <a:srgbClr val="17364A"/>
                 </a:solidFill>
@@ -12860,11 +14000,11 @@
               </a:rPr>
               <a:t>Staff quickly discover that no single role owns all the knowledge needed.</a:t>
             </a:r>
-            <a:endParaRPr lang="en-US" sz="1700" dirty="0"/>
-          </a:p>
-          <a:p>
-            <a:r>
-              <a:rPr lang="en-US" sz="1700" dirty="0">
+            <a:endParaRPr lang="en-US" sz="2100" dirty="0"/>
+          </a:p>
+          <a:p>
+            <a:r>
+              <a:rPr lang="en-US" sz="2100" dirty="0">
                 <a:solidFill>
                   <a:srgbClr val="17364A"/>
                 </a:solidFill>
@@ -12872,29 +14012,15 @@
                 <a:ea typeface="Aptos" pitchFamily="34" charset="-122"/>
                 <a:cs typeface="Aptos" pitchFamily="34" charset="-120"/>
               </a:rPr>
-              <a:t>Program staff understand workflow, IT understands integration, privacy understands data restrictions, and analysts.</a:t>
-            </a:r>
-            <a:endParaRPr lang="en-US" sz="1700" dirty="0"/>
-          </a:p>
-          <a:p>
-            <a:r>
-              <a:rPr lang="en-US" sz="1700" dirty="0">
-                <a:solidFill>
-                  <a:srgbClr val="17364A"/>
-                </a:solidFill>
-                <a:latin typeface="Aptos" pitchFamily="34" charset="0"/>
-                <a:ea typeface="Aptos" pitchFamily="34" charset="-122"/>
-                <a:cs typeface="Aptos" pitchFamily="34" charset="-120"/>
-              </a:rPr>
-              <a:t>However, there is no role that connects these perspectives consistently.</a:t>
-            </a:r>
-            <a:endParaRPr lang="en-US" sz="1700" dirty="0"/>
-          </a:p>
-        </p:txBody>
-      </p:sp>
-      <p:sp>
-        <p:nvSpPr>
-          <p:cNvPr id="11" name="Shape 9"/>
+              <a:t>Program staff understand workflow, IT understands integration, privacy understands data restrictions,.</a:t>
+            </a:r>
+            <a:endParaRPr lang="en-US" sz="2100" dirty="0"/>
+          </a:p>
+        </p:txBody>
+      </p:sp>
+      <p:sp>
+        <p:nvSpPr>
+          <p:cNvPr id="12" name="Shape 10"/>
           <p:cNvSpPr/>
           <p:nvPr/>
         </p:nvSpPr>
@@ -12921,14 +14047,14 @@
       </p:sp>
       <p:sp>
         <p:nvSpPr>
-          <p:cNvPr id="12" name="Text 10"/>
+          <p:cNvPr id="13" name="Text 11"/>
           <p:cNvSpPr/>
           <p:nvPr/>
         </p:nvSpPr>
         <p:spPr>
           <a:xfrm>
             <a:off x="8074152" y="1563624"/>
-            <a:ext cx="2825496" cy="201168"/>
+            <a:ext cx="2825496" cy="256032"/>
           </a:xfrm>
           <a:prstGeom prst="rect">
             <a:avLst/>
@@ -12944,7 +14070,7 @@
               <a:buNone/>
             </a:pPr>
             <a:r>
-              <a:rPr lang="en-US" sz="950" b="1" dirty="0">
+              <a:rPr lang="en-US" sz="1300" b="1" dirty="0">
                 <a:solidFill>
                   <a:srgbClr val="0068B7"/>
                 </a:solidFill>
@@ -12954,20 +14080,20 @@
               </a:rPr>
               <a:t>Key idea</a:t>
             </a:r>
-            <a:endParaRPr lang="en-US" sz="950" dirty="0"/>
-          </a:p>
-        </p:txBody>
-      </p:sp>
-      <p:sp>
-        <p:nvSpPr>
-          <p:cNvPr id="13" name="Text 11"/>
-          <p:cNvSpPr/>
-          <p:nvPr/>
-        </p:nvSpPr>
-        <p:spPr>
-          <a:xfrm>
-            <a:off x="8074152" y="1856232"/>
-            <a:ext cx="2825496" cy="1261872"/>
+            <a:endParaRPr lang="en-US" sz="1300" dirty="0"/>
+          </a:p>
+        </p:txBody>
+      </p:sp>
+      <p:sp>
+        <p:nvSpPr>
+          <p:cNvPr id="14" name="Text 12"/>
+          <p:cNvSpPr/>
+          <p:nvPr/>
+        </p:nvSpPr>
+        <p:spPr>
+          <a:xfrm>
+            <a:off x="8074152" y="1920240"/>
+            <a:ext cx="2825496" cy="1188720"/>
           </a:xfrm>
           <a:prstGeom prst="rect">
             <a:avLst/>
@@ -12985,7 +14111,7 @@
               <a:buNone/>
             </a:pPr>
             <a:r>
-              <a:rPr lang="en-US" sz="1250" dirty="0">
+              <a:rPr lang="en-US" sz="1550" dirty="0">
                 <a:solidFill>
                   <a:srgbClr val="17364A"/>
                 </a:solidFill>
@@ -12993,15 +14119,15 @@
                 <a:ea typeface="Aptos" pitchFamily="34" charset="-122"/>
                 <a:cs typeface="Aptos" pitchFamily="34" charset="-120"/>
               </a:rPr>
-              <a:t>A public health agency implements several AI tools: a document assistant, a case summarization tool, a data quality.</a:t>
-            </a:r>
-            <a:endParaRPr lang="en-US" sz="1250" dirty="0"/>
-          </a:p>
-        </p:txBody>
-      </p:sp>
-      <p:sp>
-        <p:nvSpPr>
-          <p:cNvPr id="14" name="Shape 12"/>
+              <a:t>A public health agency implements several AI tools: a document assistant, a case summarization tool, a.</a:t>
+            </a:r>
+            <a:endParaRPr lang="en-US" sz="1550" dirty="0"/>
+          </a:p>
+        </p:txBody>
+      </p:sp>
+      <p:sp>
+        <p:nvSpPr>
+          <p:cNvPr id="15" name="Shape 13"/>
           <p:cNvSpPr/>
           <p:nvPr/>
         </p:nvSpPr>
@@ -13028,14 +14154,14 @@
       </p:sp>
       <p:sp>
         <p:nvSpPr>
-          <p:cNvPr id="15" name="Text 13"/>
+          <p:cNvPr id="16" name="Text 14"/>
           <p:cNvSpPr/>
           <p:nvPr/>
         </p:nvSpPr>
         <p:spPr>
           <a:xfrm>
             <a:off x="8074152" y="3666744"/>
-            <a:ext cx="2825496" cy="201168"/>
+            <a:ext cx="2825496" cy="256032"/>
           </a:xfrm>
           <a:prstGeom prst="rect">
             <a:avLst/>
@@ -13051,7 +14177,7 @@
               <a:buNone/>
             </a:pPr>
             <a:r>
-              <a:rPr lang="en-US" sz="950" b="1" dirty="0">
+              <a:rPr lang="en-US" sz="1300" b="1" dirty="0">
                 <a:solidFill>
                   <a:srgbClr val="0068B7"/>
                 </a:solidFill>
@@ -13061,20 +14187,20 @@
               </a:rPr>
               <a:t>Use this for</a:t>
             </a:r>
-            <a:endParaRPr lang="en-US" sz="950" dirty="0"/>
-          </a:p>
-        </p:txBody>
-      </p:sp>
-      <p:sp>
-        <p:nvSpPr>
-          <p:cNvPr id="16" name="Text 14"/>
-          <p:cNvSpPr/>
-          <p:nvPr/>
-        </p:nvSpPr>
-        <p:spPr>
-          <a:xfrm>
-            <a:off x="8074152" y="3959352"/>
-            <a:ext cx="2825496" cy="1170432"/>
+            <a:endParaRPr lang="en-US" sz="1300" dirty="0"/>
+          </a:p>
+        </p:txBody>
+      </p:sp>
+      <p:sp>
+        <p:nvSpPr>
+          <p:cNvPr id="17" name="Text 15"/>
+          <p:cNvSpPr/>
+          <p:nvPr/>
+        </p:nvSpPr>
+        <p:spPr>
+          <a:xfrm>
+            <a:off x="8074152" y="4023360"/>
+            <a:ext cx="2825496" cy="1097280"/>
           </a:xfrm>
           <a:prstGeom prst="rect">
             <a:avLst/>
@@ -13092,7 +14218,7 @@
               <a:buNone/>
             </a:pPr>
             <a:r>
-              <a:rPr lang="en-US" sz="1250" dirty="0">
+              <a:rPr lang="en-US" sz="1550" dirty="0">
                 <a:solidFill>
                   <a:srgbClr val="17364A"/>
                 </a:solidFill>
@@ -13102,7 +14228,7 @@
               </a:rPr>
               <a:t>Connect the concept to public health decisions, safeguards, documentation, or implementation work.</a:t>
             </a:r>
-            <a:endParaRPr lang="en-US" sz="1250" dirty="0"/>
+            <a:endParaRPr lang="en-US" sz="1550" dirty="0"/>
           </a:p>
         </p:txBody>
       </p:sp>
@@ -13299,7 +14425,7 @@
                 <a:ea typeface="Aptos" pitchFamily="34" charset="-122"/>
                 <a:cs typeface="Aptos" pitchFamily="34" charset="-120"/>
               </a:rPr>
-              <a:t>© Paula Soper</a:t>
+              <a:t>Â© Paula Soper</a:t>
             </a:r>
             <a:endParaRPr lang="en-US" sz="800" dirty="0"/>
           </a:p>
@@ -13307,7 +14433,46 @@
       </p:sp>
       <p:sp>
         <p:nvSpPr>
-          <p:cNvPr id="7" name="Shape 5"/>
+          <p:cNvPr id="7" name="Text 5"/>
+          <p:cNvSpPr/>
+          <p:nvPr/>
+        </p:nvSpPr>
+        <p:spPr>
+          <a:xfrm>
+            <a:off x="11137392" y="6510528"/>
+            <a:ext cx="411480" cy="201168"/>
+          </a:xfrm>
+          <a:prstGeom prst="rect">
+            <a:avLst/>
+          </a:prstGeom>
+          <a:noFill/>
+          <a:ln/>
+        </p:spPr>
+        <p:txBody>
+          <a:bodyPr wrap="square" lIns="0" tIns="0" rIns="0" bIns="0" rtlCol="0" anchor="ctr"/>
+          <a:lstStyle/>
+          <a:p>
+            <a:pPr algn="r" indent="0" marL="0">
+              <a:buNone/>
+            </a:pPr>
+            <a:r>
+              <a:rPr lang="en-US" sz="900" dirty="0">
+                <a:solidFill>
+                  <a:srgbClr val="5F7181"/>
+                </a:solidFill>
+                <a:latin typeface="Aptos" pitchFamily="34" charset="0"/>
+                <a:ea typeface="Aptos" pitchFamily="34" charset="-122"/>
+                <a:cs typeface="Aptos" pitchFamily="34" charset="-120"/>
+              </a:rPr>
+              <a:t>9</a:t>
+            </a:r>
+            <a:endParaRPr lang="en-US" sz="900" dirty="0"/>
+          </a:p>
+        </p:txBody>
+      </p:sp>
+      <p:sp>
+        <p:nvSpPr>
+          <p:cNvPr id="8" name="Shape 6"/>
           <p:cNvSpPr/>
           <p:nvPr/>
         </p:nvSpPr>
@@ -13332,7 +14497,7 @@
       </p:sp>
       <p:sp>
         <p:nvSpPr>
-          <p:cNvPr id="8" name="Text 6"/>
+          <p:cNvPr id="9" name="Text 7"/>
           <p:cNvSpPr/>
           <p:nvPr/>
         </p:nvSpPr>
@@ -13371,14 +14536,14 @@
       </p:sp>
       <p:sp>
         <p:nvSpPr>
-          <p:cNvPr id="9" name="Text 7"/>
+          <p:cNvPr id="10" name="Text 8"/>
           <p:cNvSpPr/>
           <p:nvPr/>
         </p:nvSpPr>
         <p:spPr>
           <a:xfrm>
             <a:off x="640080" y="621792"/>
-            <a:ext cx="10881360" cy="566928"/>
+            <a:ext cx="10881360" cy="713232"/>
           </a:xfrm>
           <a:prstGeom prst="rect">
             <a:avLst/>
@@ -13396,7 +14561,7 @@
               <a:buNone/>
             </a:pPr>
             <a:r>
-              <a:rPr lang="en-US" sz="2700" b="1" dirty="0">
+              <a:rPr lang="en-US" sz="3400" b="1" dirty="0">
                 <a:solidFill>
                   <a:srgbClr val="003A63"/>
                 </a:solidFill>
@@ -13406,20 +14571,20 @@
               </a:rPr>
               <a:t>Technical and Governance Deep Dive</a:t>
             </a:r>
-            <a:endParaRPr lang="en-US" sz="2700" dirty="0"/>
-          </a:p>
-        </p:txBody>
-      </p:sp>
-      <p:sp>
-        <p:nvSpPr>
-          <p:cNvPr id="10" name="Text 8"/>
-          <p:cNvSpPr/>
-          <p:nvPr/>
-        </p:nvSpPr>
-        <p:spPr>
-          <a:xfrm>
-            <a:off x="868680" y="1417320"/>
-            <a:ext cx="6675120" cy="4434840"/>
+            <a:endParaRPr lang="en-US" sz="3400" dirty="0"/>
+          </a:p>
+        </p:txBody>
+      </p:sp>
+      <p:sp>
+        <p:nvSpPr>
+          <p:cNvPr id="11" name="Text 9"/>
+          <p:cNvSpPr/>
+          <p:nvPr/>
+        </p:nvSpPr>
+        <p:spPr>
+          <a:xfrm>
+            <a:off x="868680" y="1508760"/>
+            <a:ext cx="6537960" cy="4160520"/>
           </a:xfrm>
           <a:prstGeom prst="rect">
             <a:avLst/>
@@ -13434,7 +14599,7 @@
           <a:lstStyle/>
           <a:p>
             <a:r>
-              <a:rPr lang="en-US" sz="1700" dirty="0">
+              <a:rPr lang="en-US" sz="2100" dirty="0">
                 <a:solidFill>
                   <a:srgbClr val="17364A"/>
                 </a:solidFill>
@@ -13444,11 +14609,11 @@
               </a:rPr>
               <a:t>An AI workforce strategy should define role groups.</a:t>
             </a:r>
-            <a:endParaRPr lang="en-US" sz="1700" dirty="0"/>
-          </a:p>
-          <a:p>
-            <a:r>
-              <a:rPr lang="en-US" sz="1700" dirty="0">
+            <a:endParaRPr lang="en-US" sz="2100" dirty="0"/>
+          </a:p>
+          <a:p>
+            <a:r>
+              <a:rPr lang="en-US" sz="2100" dirty="0">
                 <a:solidFill>
                   <a:srgbClr val="17364A"/>
                 </a:solidFill>
@@ -13458,11 +14623,11 @@
               </a:rPr>
               <a:t>General staff may need baseline AI literacy, approved-use guidance, and prompt safety.</a:t>
             </a:r>
-            <a:endParaRPr lang="en-US" sz="1700" dirty="0"/>
-          </a:p>
-          <a:p>
-            <a:r>
-              <a:rPr lang="en-US" sz="1700" dirty="0">
+            <a:endParaRPr lang="en-US" sz="2100" dirty="0"/>
+          </a:p>
+          <a:p>
+            <a:r>
+              <a:rPr lang="en-US" sz="2100" dirty="0">
                 <a:solidFill>
                   <a:srgbClr val="17364A"/>
                 </a:solidFill>
@@ -13472,27 +14637,13 @@
               </a:rPr>
               <a:t>Frontline users need workflow-specific training and escalation expectations.</a:t>
             </a:r>
-            <a:endParaRPr lang="en-US" sz="1700" dirty="0"/>
-          </a:p>
-          <a:p>
-            <a:r>
-              <a:rPr lang="en-US" sz="1700" dirty="0">
-                <a:solidFill>
-                  <a:srgbClr val="17364A"/>
-                </a:solidFill>
-                <a:latin typeface="Aptos" pitchFamily="34" charset="0"/>
-                <a:ea typeface="Aptos" pitchFamily="34" charset="-122"/>
-                <a:cs typeface="Aptos" pitchFamily="34" charset="-120"/>
-              </a:rPr>
-              <a:t>Supervisors need to support review, feedback, and documentation.</a:t>
-            </a:r>
-            <a:endParaRPr lang="en-US" sz="1700" dirty="0"/>
-          </a:p>
-        </p:txBody>
-      </p:sp>
-      <p:sp>
-        <p:nvSpPr>
-          <p:cNvPr id="11" name="Shape 9"/>
+            <a:endParaRPr lang="en-US" sz="2100" dirty="0"/>
+          </a:p>
+        </p:txBody>
+      </p:sp>
+      <p:sp>
+        <p:nvSpPr>
+          <p:cNvPr id="12" name="Shape 10"/>
           <p:cNvSpPr/>
           <p:nvPr/>
         </p:nvSpPr>
@@ -13519,14 +14670,14 @@
       </p:sp>
       <p:sp>
         <p:nvSpPr>
-          <p:cNvPr id="12" name="Text 10"/>
+          <p:cNvPr id="13" name="Text 11"/>
           <p:cNvSpPr/>
           <p:nvPr/>
         </p:nvSpPr>
         <p:spPr>
           <a:xfrm>
             <a:off x="8074152" y="1563624"/>
-            <a:ext cx="2825496" cy="201168"/>
+            <a:ext cx="2825496" cy="256032"/>
           </a:xfrm>
           <a:prstGeom prst="rect">
             <a:avLst/>
@@ -13542,7 +14693,7 @@
               <a:buNone/>
             </a:pPr>
             <a:r>
-              <a:rPr lang="en-US" sz="950" b="1" dirty="0">
+              <a:rPr lang="en-US" sz="1300" b="1" dirty="0">
                 <a:solidFill>
                   <a:srgbClr val="0068B7"/>
                 </a:solidFill>
@@ -13552,20 +14703,20 @@
               </a:rPr>
               <a:t>Key idea</a:t>
             </a:r>
-            <a:endParaRPr lang="en-US" sz="950" dirty="0"/>
-          </a:p>
-        </p:txBody>
-      </p:sp>
-      <p:sp>
-        <p:nvSpPr>
-          <p:cNvPr id="13" name="Text 11"/>
-          <p:cNvSpPr/>
-          <p:nvPr/>
-        </p:nvSpPr>
-        <p:spPr>
-          <a:xfrm>
-            <a:off x="8074152" y="1856232"/>
-            <a:ext cx="2825496" cy="1261872"/>
+            <a:endParaRPr lang="en-US" sz="1300" dirty="0"/>
+          </a:p>
+        </p:txBody>
+      </p:sp>
+      <p:sp>
+        <p:nvSpPr>
+          <p:cNvPr id="14" name="Text 12"/>
+          <p:cNvSpPr/>
+          <p:nvPr/>
+        </p:nvSpPr>
+        <p:spPr>
+          <a:xfrm>
+            <a:off x="8074152" y="1920240"/>
+            <a:ext cx="2825496" cy="1188720"/>
           </a:xfrm>
           <a:prstGeom prst="rect">
             <a:avLst/>
@@ -13583,7 +14734,7 @@
               <a:buNone/>
             </a:pPr>
             <a:r>
-              <a:rPr lang="en-US" sz="1250" dirty="0">
+              <a:rPr lang="en-US" sz="1550" dirty="0">
                 <a:solidFill>
                   <a:srgbClr val="17364A"/>
                 </a:solidFill>
@@ -13593,13 +14744,13 @@
               </a:rPr>
               <a:t>An AI workforce strategy should define role groups.</a:t>
             </a:r>
-            <a:endParaRPr lang="en-US" sz="1250" dirty="0"/>
-          </a:p>
-        </p:txBody>
-      </p:sp>
-      <p:sp>
-        <p:nvSpPr>
-          <p:cNvPr id="14" name="Shape 12"/>
+            <a:endParaRPr lang="en-US" sz="1550" dirty="0"/>
+          </a:p>
+        </p:txBody>
+      </p:sp>
+      <p:sp>
+        <p:nvSpPr>
+          <p:cNvPr id="15" name="Shape 13"/>
           <p:cNvSpPr/>
           <p:nvPr/>
         </p:nvSpPr>
@@ -13626,14 +14777,14 @@
       </p:sp>
       <p:sp>
         <p:nvSpPr>
-          <p:cNvPr id="15" name="Text 13"/>
+          <p:cNvPr id="16" name="Text 14"/>
           <p:cNvSpPr/>
           <p:nvPr/>
         </p:nvSpPr>
         <p:spPr>
           <a:xfrm>
             <a:off x="8074152" y="3666744"/>
-            <a:ext cx="2825496" cy="201168"/>
+            <a:ext cx="2825496" cy="256032"/>
           </a:xfrm>
           <a:prstGeom prst="rect">
             <a:avLst/>
@@ -13649,7 +14800,7 @@
               <a:buNone/>
             </a:pPr>
             <a:r>
-              <a:rPr lang="en-US" sz="950" b="1" dirty="0">
+              <a:rPr lang="en-US" sz="1300" b="1" dirty="0">
                 <a:solidFill>
                   <a:srgbClr val="0068B7"/>
                 </a:solidFill>
@@ -13659,20 +14810,20 @@
               </a:rPr>
               <a:t>Use this for</a:t>
             </a:r>
-            <a:endParaRPr lang="en-US" sz="950" dirty="0"/>
-          </a:p>
-        </p:txBody>
-      </p:sp>
-      <p:sp>
-        <p:nvSpPr>
-          <p:cNvPr id="16" name="Text 14"/>
-          <p:cNvSpPr/>
-          <p:nvPr/>
-        </p:nvSpPr>
-        <p:spPr>
-          <a:xfrm>
-            <a:off x="8074152" y="3959352"/>
-            <a:ext cx="2825496" cy="1170432"/>
+            <a:endParaRPr lang="en-US" sz="1300" dirty="0"/>
+          </a:p>
+        </p:txBody>
+      </p:sp>
+      <p:sp>
+        <p:nvSpPr>
+          <p:cNvPr id="17" name="Text 15"/>
+          <p:cNvSpPr/>
+          <p:nvPr/>
+        </p:nvSpPr>
+        <p:spPr>
+          <a:xfrm>
+            <a:off x="8074152" y="4023360"/>
+            <a:ext cx="2825496" cy="1097280"/>
           </a:xfrm>
           <a:prstGeom prst="rect">
             <a:avLst/>
@@ -13690,7 +14841,7 @@
               <a:buNone/>
             </a:pPr>
             <a:r>
-              <a:rPr lang="en-US" sz="1250" dirty="0">
+              <a:rPr lang="en-US" sz="1550" dirty="0">
                 <a:solidFill>
                   <a:srgbClr val="17364A"/>
                 </a:solidFill>
@@ -13700,7 +14851,7 @@
               </a:rPr>
               <a:t>Connect the concept to public health decisions, safeguards, documentation, or implementation work.</a:t>
             </a:r>
-            <a:endParaRPr lang="en-US" sz="1250" dirty="0"/>
+            <a:endParaRPr lang="en-US" sz="1550" dirty="0"/>
           </a:p>
         </p:txBody>
       </p:sp>
